--- a/static/lulu/ppt/career-guide.pptx
+++ b/static/lulu/ppt/career-guide.pptx
@@ -423,7 +423,7 @@
                 <a:latin typeface="Noto Sans CJK SC"/>
                 <a:ea typeface="Noto Sans CJK SC"/>
               </a:rPr>
-              <a:t>女生转行七大岗位全攻略</a:t>
+              <a:t>女生找工作七大岗位全攻略</a:t>
             </a:r>
           </a:p>
         </p:txBody>
@@ -686,7 +686,7 @@
               <a:spcAft>
                 <a:spcPts val="600"/>
               </a:spcAft>
-              <a:buFont typeface="Noto Sans CJK SC"/>
+              <a:buFont typeface="Arial" panose="020B0604020202020204"/>
               <a:buChar char="•"/>
             </a:pPr>
             <a:r>
@@ -705,7 +705,7 @@
               <a:spcAft>
                 <a:spcPts val="600"/>
               </a:spcAft>
-              <a:buFont typeface="Noto Sans CJK SC"/>
+              <a:buFont typeface="Arial" panose="020B0604020202020204"/>
               <a:buChar char="•"/>
             </a:pPr>
             <a:r>
@@ -724,7 +724,7 @@
               <a:spcAft>
                 <a:spcPts val="600"/>
               </a:spcAft>
-              <a:buFont typeface="Noto Sans CJK SC"/>
+              <a:buFont typeface="Arial" panose="020B0604020202020204"/>
               <a:buChar char="•"/>
             </a:pPr>
             <a:r>
@@ -743,7 +743,7 @@
               <a:spcAft>
                 <a:spcPts val="600"/>
               </a:spcAft>
-              <a:buFont typeface="Noto Sans CJK SC"/>
+              <a:buFont typeface="Arial" panose="020B0604020202020204"/>
               <a:buChar char="•"/>
             </a:pPr>
             <a:r>
@@ -762,7 +762,7 @@
               <a:spcAft>
                 <a:spcPts val="600"/>
               </a:spcAft>
-              <a:buFont typeface="Noto Sans CJK SC"/>
+              <a:buFont typeface="Arial" panose="020B0604020202020204"/>
               <a:buChar char="•"/>
             </a:pPr>
             <a:r>
@@ -781,7 +781,7 @@
               <a:spcAft>
                 <a:spcPts val="600"/>
               </a:spcAft>
-              <a:buFont typeface="Noto Sans CJK SC"/>
+              <a:buFont typeface="Arial" panose="020B0604020202020204"/>
               <a:buChar char="•"/>
             </a:pPr>
             <a:r>
@@ -1226,7 +1226,7 @@
               <a:spcAft>
                 <a:spcPts val="600"/>
               </a:spcAft>
-              <a:buFont typeface="Noto Sans CJK SC"/>
+              <a:buFont typeface="Arial" panose="020B0604020202020204"/>
               <a:buChar char="•"/>
             </a:pPr>
             <a:r>
@@ -1245,7 +1245,7 @@
               <a:spcAft>
                 <a:spcPts val="600"/>
               </a:spcAft>
-              <a:buFont typeface="Noto Sans CJK SC"/>
+              <a:buFont typeface="Arial" panose="020B0604020202020204"/>
               <a:buChar char="•"/>
             </a:pPr>
             <a:r>
@@ -1264,7 +1264,7 @@
               <a:spcAft>
                 <a:spcPts val="600"/>
               </a:spcAft>
-              <a:buFont typeface="Noto Sans CJK SC"/>
+              <a:buFont typeface="Arial" panose="020B0604020202020204"/>
               <a:buChar char="•"/>
             </a:pPr>
             <a:r>
@@ -1283,7 +1283,7 @@
               <a:spcAft>
                 <a:spcPts val="600"/>
               </a:spcAft>
-              <a:buFont typeface="Noto Sans CJK SC"/>
+              <a:buFont typeface="Arial" panose="020B0604020202020204"/>
               <a:buChar char="•"/>
             </a:pPr>
             <a:r>
@@ -1302,7 +1302,7 @@
               <a:spcAft>
                 <a:spcPts val="600"/>
               </a:spcAft>
-              <a:buFont typeface="Noto Sans CJK SC"/>
+              <a:buFont typeface="Arial" panose="020B0604020202020204"/>
               <a:buChar char="•"/>
             </a:pPr>
             <a:r>
@@ -1321,7 +1321,7 @@
               <a:spcAft>
                 <a:spcPts val="600"/>
               </a:spcAft>
-              <a:buFont typeface="Noto Sans CJK SC"/>
+              <a:buFont typeface="Arial" panose="020B0604020202020204"/>
               <a:buChar char="•"/>
             </a:pPr>
             <a:r>
@@ -1766,7 +1766,7 @@
               <a:spcAft>
                 <a:spcPts val="600"/>
               </a:spcAft>
-              <a:buFont typeface="Noto Sans CJK SC"/>
+              <a:buFont typeface="Arial" panose="020B0604020202020204"/>
               <a:buChar char="•"/>
             </a:pPr>
             <a:r>
@@ -1785,7 +1785,7 @@
               <a:spcAft>
                 <a:spcPts val="600"/>
               </a:spcAft>
-              <a:buFont typeface="Noto Sans CJK SC"/>
+              <a:buFont typeface="Arial" panose="020B0604020202020204"/>
               <a:buChar char="•"/>
             </a:pPr>
             <a:r>
@@ -1804,7 +1804,7 @@
               <a:spcAft>
                 <a:spcPts val="600"/>
               </a:spcAft>
-              <a:buFont typeface="Noto Sans CJK SC"/>
+              <a:buFont typeface="Arial" panose="020B0604020202020204"/>
               <a:buChar char="•"/>
             </a:pPr>
             <a:r>
@@ -1823,7 +1823,7 @@
               <a:spcAft>
                 <a:spcPts val="600"/>
               </a:spcAft>
-              <a:buFont typeface="Noto Sans CJK SC"/>
+              <a:buFont typeface="Arial" panose="020B0604020202020204"/>
               <a:buChar char="•"/>
             </a:pPr>
             <a:r>
@@ -1842,7 +1842,7 @@
               <a:spcAft>
                 <a:spcPts val="600"/>
               </a:spcAft>
-              <a:buFont typeface="Noto Sans CJK SC"/>
+              <a:buFont typeface="Arial" panose="020B0604020202020204"/>
               <a:buChar char="•"/>
             </a:pPr>
             <a:r>
@@ -1853,7 +1853,7 @@
                 <a:latin typeface="Noto Sans CJK SC"/>
                 <a:ea typeface="Noto Sans CJK SC"/>
               </a:rPr>
-              <a:t>薪资：初级7-10k，外包6-8k</a:t>
+              <a:t>投递：先投中小厂攒项目经验</a:t>
             </a:r>
           </a:p>
           <a:p>
@@ -1861,7 +1861,7 @@
               <a:spcAft>
                 <a:spcPts val="600"/>
               </a:spcAft>
-              <a:buFont typeface="Noto Sans CJK SC"/>
+              <a:buFont typeface="Arial" panose="020B0604020202020204"/>
               <a:buChar char="•"/>
             </a:pPr>
             <a:r>
@@ -2306,7 +2306,7 @@
               <a:spcAft>
                 <a:spcPts val="600"/>
               </a:spcAft>
-              <a:buFont typeface="Noto Sans CJK SC"/>
+              <a:buFont typeface="Arial" panose="020B0604020202020204"/>
               <a:buChar char="•"/>
             </a:pPr>
             <a:r>
@@ -2325,7 +2325,7 @@
               <a:spcAft>
                 <a:spcPts val="600"/>
               </a:spcAft>
-              <a:buFont typeface="Noto Sans CJK SC"/>
+              <a:buFont typeface="Arial" panose="020B0604020202020204"/>
               <a:buChar char="•"/>
             </a:pPr>
             <a:r>
@@ -2344,7 +2344,7 @@
               <a:spcAft>
                 <a:spcPts val="600"/>
               </a:spcAft>
-              <a:buFont typeface="Noto Sans CJK SC"/>
+              <a:buFont typeface="Arial" panose="020B0604020202020204"/>
               <a:buChar char="•"/>
             </a:pPr>
             <a:r>
@@ -2363,7 +2363,7 @@
               <a:spcAft>
                 <a:spcPts val="600"/>
               </a:spcAft>
-              <a:buFont typeface="Noto Sans CJK SC"/>
+              <a:buFont typeface="Arial" panose="020B0604020202020204"/>
               <a:buChar char="•"/>
             </a:pPr>
             <a:r>
@@ -2382,7 +2382,7 @@
               <a:spcAft>
                 <a:spcPts val="600"/>
               </a:spcAft>
-              <a:buFont typeface="Noto Sans CJK SC"/>
+              <a:buFont typeface="Arial" panose="020B0604020202020204"/>
               <a:buChar char="•"/>
             </a:pPr>
             <a:r>
@@ -2401,7 +2401,7 @@
               <a:spcAft>
                 <a:spcPts val="600"/>
               </a:spcAft>
-              <a:buFont typeface="Noto Sans CJK SC"/>
+              <a:buFont typeface="Arial" panose="020B0604020202020204"/>
               <a:buChar char="•"/>
             </a:pPr>
             <a:r>
@@ -2412,7 +2412,7 @@
                 <a:latin typeface="Noto Sans CJK SC"/>
                 <a:ea typeface="Noto Sans CJK SC"/>
               </a:rPr>
-              <a:t>涨薪：运营序列里最快的一个</a:t>
+              <a:t>适合：逻辑好、对数字敏感的人</a:t>
             </a:r>
           </a:p>
         </p:txBody>
@@ -2846,7 +2846,7 @@
               <a:spcAft>
                 <a:spcPts val="600"/>
               </a:spcAft>
-              <a:buFont typeface="Noto Sans CJK SC"/>
+              <a:buFont typeface="Arial" panose="020B0604020202020204"/>
               <a:buChar char="•"/>
             </a:pPr>
             <a:r>
@@ -2865,7 +2865,7 @@
               <a:spcAft>
                 <a:spcPts val="600"/>
               </a:spcAft>
-              <a:buFont typeface="Noto Sans CJK SC"/>
+              <a:buFont typeface="Arial" panose="020B0604020202020204"/>
               <a:buChar char="•"/>
             </a:pPr>
             <a:r>
@@ -2884,7 +2884,7 @@
               <a:spcAft>
                 <a:spcPts val="600"/>
               </a:spcAft>
-              <a:buFont typeface="Noto Sans CJK SC"/>
+              <a:buFont typeface="Arial" panose="020B0604020202020204"/>
               <a:buChar char="•"/>
             </a:pPr>
             <a:r>
@@ -2903,7 +2903,7 @@
               <a:spcAft>
                 <a:spcPts val="600"/>
               </a:spcAft>
-              <a:buFont typeface="Noto Sans CJK SC"/>
+              <a:buFont typeface="Arial" panose="020B0604020202020204"/>
               <a:buChar char="•"/>
             </a:pPr>
             <a:r>
@@ -2922,7 +2922,7 @@
               <a:spcAft>
                 <a:spcPts val="600"/>
               </a:spcAft>
-              <a:buFont typeface="Noto Sans CJK SC"/>
+              <a:buFont typeface="Arial" panose="020B0604020202020204"/>
               <a:buChar char="•"/>
             </a:pPr>
             <a:r>
@@ -2933,7 +2933,7 @@
                 <a:latin typeface="Noto Sans CJK SC"/>
                 <a:ea typeface="Noto Sans CJK SC"/>
               </a:rPr>
-              <a:t>薪资：起步7-12k，3年20k+</a:t>
+              <a:t>面试：SQL手写题必考提前练</a:t>
             </a:r>
           </a:p>
           <a:p>
@@ -2941,7 +2941,7 @@
               <a:spcAft>
                 <a:spcPts val="600"/>
               </a:spcAft>
-              <a:buFont typeface="Noto Sans CJK SC"/>
+              <a:buFont typeface="Arial" panose="020B0604020202020204"/>
               <a:buChar char="•"/>
             </a:pPr>
             <a:r>
@@ -3386,7 +3386,7 @@
               <a:spcAft>
                 <a:spcPts val="600"/>
               </a:spcAft>
-              <a:buFont typeface="Noto Sans CJK SC"/>
+              <a:buFont typeface="Arial" panose="020B0604020202020204"/>
               <a:buChar char="•"/>
             </a:pPr>
             <a:r>
@@ -3405,7 +3405,7 @@
               <a:spcAft>
                 <a:spcPts val="600"/>
               </a:spcAft>
-              <a:buFont typeface="Noto Sans CJK SC"/>
+              <a:buFont typeface="Arial" panose="020B0604020202020204"/>
               <a:buChar char="•"/>
             </a:pPr>
             <a:r>
@@ -3424,7 +3424,7 @@
               <a:spcAft>
                 <a:spcPts val="600"/>
               </a:spcAft>
-              <a:buFont typeface="Noto Sans CJK SC"/>
+              <a:buFont typeface="Arial" panose="020B0604020202020204"/>
               <a:buChar char="•"/>
             </a:pPr>
             <a:r>
@@ -3443,7 +3443,7 @@
               <a:spcAft>
                 <a:spcPts val="600"/>
               </a:spcAft>
-              <a:buFont typeface="Noto Sans CJK SC"/>
+              <a:buFont typeface="Arial" panose="020B0604020202020204"/>
               <a:buChar char="•"/>
             </a:pPr>
             <a:r>
@@ -3454,7 +3454,7 @@
                 <a:latin typeface="Noto Sans CJK SC"/>
                 <a:ea typeface="Noto Sans CJK SC"/>
               </a:rPr>
-              <a:t>性质：合同制为主，转编难</a:t>
+              <a:t>性质：合同制为主，求稳定合适</a:t>
             </a:r>
           </a:p>
           <a:p>
@@ -3462,7 +3462,7 @@
               <a:spcAft>
                 <a:spcPts val="600"/>
               </a:spcAft>
-              <a:buFont typeface="Noto Sans CJK SC"/>
+              <a:buFont typeface="Arial" panose="020B0604020202020204"/>
               <a:buChar char="•"/>
             </a:pPr>
             <a:r>
@@ -3473,7 +3473,7 @@
                 <a:latin typeface="Noto Sans CJK SC"/>
                 <a:ea typeface="Noto Sans CJK SC"/>
               </a:rPr>
-              <a:t>福利：公积金高、餐补、寒暑假</a:t>
+              <a:t>福利：寒暑假是最大亮点</a:t>
             </a:r>
           </a:p>
           <a:p>
@@ -3481,7 +3481,7 @@
               <a:spcAft>
                 <a:spcPts val="600"/>
               </a:spcAft>
-              <a:buFont typeface="Noto Sans CJK SC"/>
+              <a:buFont typeface="Arial" panose="020B0604020202020204"/>
               <a:buChar char="•"/>
             </a:pPr>
             <a:r>
@@ -3926,7 +3926,7 @@
               <a:spcAft>
                 <a:spcPts val="600"/>
               </a:spcAft>
-              <a:buFont typeface="Noto Sans CJK SC"/>
+              <a:buFont typeface="Arial" panose="020B0604020202020204"/>
               <a:buChar char="•"/>
             </a:pPr>
             <a:r>
@@ -3945,7 +3945,7 @@
               <a:spcAft>
                 <a:spcPts val="600"/>
               </a:spcAft>
-              <a:buFont typeface="Noto Sans CJK SC"/>
+              <a:buFont typeface="Arial" panose="020B0604020202020204"/>
               <a:buChar char="•"/>
             </a:pPr>
             <a:r>
@@ -3964,7 +3964,7 @@
               <a:spcAft>
                 <a:spcPts val="600"/>
               </a:spcAft>
-              <a:buFont typeface="Noto Sans CJK SC"/>
+              <a:buFont typeface="Arial" panose="020B0604020202020204"/>
               <a:buChar char="•"/>
             </a:pPr>
             <a:r>
@@ -3983,7 +3983,7 @@
               <a:spcAft>
                 <a:spcPts val="600"/>
               </a:spcAft>
-              <a:buFont typeface="Noto Sans CJK SC"/>
+              <a:buFont typeface="Arial" panose="020B0604020202020204"/>
               <a:buChar char="•"/>
             </a:pPr>
             <a:r>
@@ -4002,7 +4002,7 @@
               <a:spcAft>
                 <a:spcPts val="600"/>
               </a:spcAft>
-              <a:buFont typeface="Noto Sans CJK SC"/>
+              <a:buFont typeface="Arial" panose="020B0604020202020204"/>
               <a:buChar char="•"/>
             </a:pPr>
             <a:r>
@@ -4021,7 +4021,7 @@
               <a:spcAft>
                 <a:spcPts val="600"/>
               </a:spcAft>
-              <a:buFont typeface="Noto Sans CJK SC"/>
+              <a:buFont typeface="Arial" panose="020B0604020202020204"/>
               <a:buChar char="•"/>
             </a:pPr>
             <a:r>
@@ -4466,7 +4466,7 @@
               <a:spcAft>
                 <a:spcPts val="600"/>
               </a:spcAft>
-              <a:buFont typeface="Noto Sans CJK SC"/>
+              <a:buFont typeface="Arial" panose="020B0604020202020204"/>
               <a:buChar char="•"/>
             </a:pPr>
             <a:r>
@@ -4485,7 +4485,7 @@
               <a:spcAft>
                 <a:spcPts val="600"/>
               </a:spcAft>
-              <a:buFont typeface="Noto Sans CJK SC"/>
+              <a:buFont typeface="Arial" panose="020B0604020202020204"/>
               <a:buChar char="•"/>
             </a:pPr>
             <a:r>
@@ -4504,7 +4504,7 @@
               <a:spcAft>
                 <a:spcPts val="600"/>
               </a:spcAft>
-              <a:buFont typeface="Noto Sans CJK SC"/>
+              <a:buFont typeface="Arial" panose="020B0604020202020204"/>
               <a:buChar char="•"/>
             </a:pPr>
             <a:r>
@@ -4523,7 +4523,7 @@
               <a:spcAft>
                 <a:spcPts val="600"/>
               </a:spcAft>
-              <a:buFont typeface="Noto Sans CJK SC"/>
+              <a:buFont typeface="Arial" panose="020B0604020202020204"/>
               <a:buChar char="•"/>
             </a:pPr>
             <a:r>
@@ -4542,7 +4542,7 @@
               <a:spcAft>
                 <a:spcPts val="600"/>
               </a:spcAft>
-              <a:buFont typeface="Noto Sans CJK SC"/>
+              <a:buFont typeface="Arial" panose="020B0604020202020204"/>
               <a:buChar char="•"/>
             </a:pPr>
             <a:r>
@@ -4561,7 +4561,7 @@
               <a:spcAft>
                 <a:spcPts val="600"/>
               </a:spcAft>
-              <a:buFont typeface="Noto Sans CJK SC"/>
+              <a:buFont typeface="Arial" panose="020B0604020202020204"/>
               <a:buChar char="•"/>
             </a:pPr>
             <a:r>
@@ -4572,7 +4572,7 @@
                 <a:latin typeface="Noto Sans CJK SC"/>
                 <a:ea typeface="Noto Sans CJK SC"/>
               </a:rPr>
-              <a:t>路径：一年后内部转HR或运营</a:t>
+              <a:t>适合：细心靠谱、想先上岸的人</a:t>
             </a:r>
           </a:p>
         </p:txBody>
@@ -5006,7 +5006,7 @@
               <a:spcAft>
                 <a:spcPts val="600"/>
               </a:spcAft>
-              <a:buFont typeface="Noto Sans CJK SC"/>
+              <a:buFont typeface="Arial" panose="020B0604020202020204"/>
               <a:buChar char="•"/>
             </a:pPr>
             <a:r>
@@ -5025,7 +5025,7 @@
               <a:spcAft>
                 <a:spcPts val="600"/>
               </a:spcAft>
-              <a:buFont typeface="Noto Sans CJK SC"/>
+              <a:buFont typeface="Arial" panose="020B0604020202020204"/>
               <a:buChar char="•"/>
             </a:pPr>
             <a:r>
@@ -5044,7 +5044,7 @@
               <a:spcAft>
                 <a:spcPts val="600"/>
               </a:spcAft>
-              <a:buFont typeface="Noto Sans CJK SC"/>
+              <a:buFont typeface="Arial" panose="020B0604020202020204"/>
               <a:buChar char="•"/>
             </a:pPr>
             <a:r>
@@ -5063,7 +5063,7 @@
               <a:spcAft>
                 <a:spcPts val="600"/>
               </a:spcAft>
-              <a:buFont typeface="Noto Sans CJK SC"/>
+              <a:buFont typeface="Arial" panose="020B0604020202020204"/>
               <a:buChar char="•"/>
             </a:pPr>
             <a:r>
@@ -5082,7 +5082,7 @@
               <a:spcAft>
                 <a:spcPts val="600"/>
               </a:spcAft>
-              <a:buFont typeface="Noto Sans CJK SC"/>
+              <a:buFont typeface="Arial" panose="020B0604020202020204"/>
               <a:buChar char="•"/>
             </a:pPr>
             <a:r>
@@ -5101,7 +5101,7 @@
               <a:spcAft>
                 <a:spcPts val="600"/>
               </a:spcAft>
-              <a:buFont typeface="Noto Sans CJK SC"/>
+              <a:buFont typeface="Arial" panose="020B0604020202020204"/>
               <a:buChar char="•"/>
             </a:pPr>
             <a:r>
@@ -5546,7 +5546,7 @@
               <a:spcAft>
                 <a:spcPts val="600"/>
               </a:spcAft>
-              <a:buFont typeface="Noto Sans CJK SC"/>
+              <a:buFont typeface="Arial" panose="020B0604020202020204"/>
               <a:buChar char="•"/>
             </a:pPr>
             <a:r>
@@ -5565,7 +5565,7 @@
               <a:spcAft>
                 <a:spcPts val="600"/>
               </a:spcAft>
-              <a:buFont typeface="Noto Sans CJK SC"/>
+              <a:buFont typeface="Arial" panose="020B0604020202020204"/>
               <a:buChar char="•"/>
             </a:pPr>
             <a:r>
@@ -5584,7 +5584,7 @@
               <a:spcAft>
                 <a:spcPts val="600"/>
               </a:spcAft>
-              <a:buFont typeface="Noto Sans CJK SC"/>
+              <a:buFont typeface="Arial" panose="020B0604020202020204"/>
               <a:buChar char="•"/>
             </a:pPr>
             <a:r>
@@ -5603,7 +5603,7 @@
               <a:spcAft>
                 <a:spcPts val="600"/>
               </a:spcAft>
-              <a:buFont typeface="Noto Sans CJK SC"/>
+              <a:buFont typeface="Arial" panose="020B0604020202020204"/>
               <a:buChar char="•"/>
             </a:pPr>
             <a:r>
@@ -5622,7 +5622,7 @@
               <a:spcAft>
                 <a:spcPts val="600"/>
               </a:spcAft>
-              <a:buFont typeface="Noto Sans CJK SC"/>
+              <a:buFont typeface="Arial" panose="020B0604020202020204"/>
               <a:buChar char="•"/>
             </a:pPr>
             <a:r>
@@ -5641,7 +5641,7 @@
               <a:spcAft>
                 <a:spcPts val="600"/>
               </a:spcAft>
-              <a:buFont typeface="Noto Sans CJK SC"/>
+              <a:buFont typeface="Arial" panose="020B0604020202020204"/>
               <a:buChar char="•"/>
             </a:pPr>
             <a:r>
@@ -6086,7 +6086,7 @@
               <a:spcAft>
                 <a:spcPts val="600"/>
               </a:spcAft>
-              <a:buFont typeface="Noto Sans CJK SC"/>
+              <a:buFont typeface="Arial" panose="020B0604020202020204"/>
               <a:buChar char="•"/>
             </a:pPr>
             <a:r>
@@ -6105,7 +6105,7 @@
               <a:spcAft>
                 <a:spcPts val="600"/>
               </a:spcAft>
-              <a:buFont typeface="Noto Sans CJK SC"/>
+              <a:buFont typeface="Arial" panose="020B0604020202020204"/>
               <a:buChar char="•"/>
             </a:pPr>
             <a:r>
@@ -6116,7 +6116,7 @@
                 <a:latin typeface="Noto Sans CJK SC"/>
                 <a:ea typeface="Noto Sans CJK SC"/>
               </a:rPr>
-              <a:t>一线城市：岗位最多、薪资最高</a:t>
+              <a:t>一线城市：岗位数量全国最多</a:t>
             </a:r>
           </a:p>
           <a:p>
@@ -6124,7 +6124,7 @@
               <a:spcAft>
                 <a:spcPts val="600"/>
               </a:spcAft>
-              <a:buFont typeface="Noto Sans CJK SC"/>
+              <a:buFont typeface="Arial" panose="020B0604020202020204"/>
               <a:buChar char="•"/>
             </a:pPr>
             <a:r>
@@ -6143,7 +6143,7 @@
               <a:spcAft>
                 <a:spcPts val="600"/>
               </a:spcAft>
-              <a:buFont typeface="Noto Sans CJK SC"/>
+              <a:buFont typeface="Arial" panose="020B0604020202020204"/>
               <a:buChar char="•"/>
             </a:pPr>
             <a:r>
@@ -6162,7 +6162,7 @@
               <a:spcAft>
                 <a:spcPts val="600"/>
               </a:spcAft>
-              <a:buFont typeface="Noto Sans CJK SC"/>
+              <a:buFont typeface="Arial" panose="020B0604020202020204"/>
               <a:buChar char="•"/>
             </a:pPr>
             <a:r>
@@ -6571,7 +6571,7 @@
               <a:spcAft>
                 <a:spcPts val="600"/>
               </a:spcAft>
-              <a:buFont typeface="Noto Sans CJK SC"/>
+              <a:buFont typeface="Arial" panose="020B0604020202020204"/>
               <a:buChar char="•"/>
             </a:pPr>
             <a:r>
@@ -6590,7 +6590,7 @@
               <a:spcAft>
                 <a:spcPts val="600"/>
               </a:spcAft>
-              <a:buFont typeface="Noto Sans CJK SC"/>
+              <a:buFont typeface="Arial" panose="020B0604020202020204"/>
               <a:buChar char="•"/>
             </a:pPr>
             <a:r>
@@ -6609,7 +6609,7 @@
               <a:spcAft>
                 <a:spcPts val="600"/>
               </a:spcAft>
-              <a:buFont typeface="Noto Sans CJK SC"/>
+              <a:buFont typeface="Arial" panose="020B0604020202020204"/>
               <a:buChar char="•"/>
             </a:pPr>
             <a:r>
@@ -6628,7 +6628,7 @@
               <a:spcAft>
                 <a:spcPts val="600"/>
               </a:spcAft>
-              <a:buFont typeface="Noto Sans CJK SC"/>
+              <a:buFont typeface="Arial" panose="020B0604020202020204"/>
               <a:buChar char="•"/>
             </a:pPr>
             <a:r>
@@ -6647,7 +6647,7 @@
               <a:spcAft>
                 <a:spcPts val="600"/>
               </a:spcAft>
-              <a:buFont typeface="Noto Sans CJK SC"/>
+              <a:buFont typeface="Arial" panose="020B0604020202020204"/>
               <a:buChar char="•"/>
             </a:pPr>
             <a:r>
@@ -6666,7 +6666,7 @@
               <a:spcAft>
                 <a:spcPts val="600"/>
               </a:spcAft>
-              <a:buFont typeface="Noto Sans CJK SC"/>
+              <a:buFont typeface="Arial" panose="020B0604020202020204"/>
               <a:buChar char="•"/>
             </a:pPr>
             <a:r>
@@ -7111,7 +7111,7 @@
               <a:spcAft>
                 <a:spcPts val="600"/>
               </a:spcAft>
-              <a:buFont typeface="Noto Sans CJK SC"/>
+              <a:buFont typeface="Arial" panose="020B0604020202020204"/>
               <a:buChar char="•"/>
             </a:pPr>
             <a:r>
@@ -7130,7 +7130,7 @@
               <a:spcAft>
                 <a:spcPts val="600"/>
               </a:spcAft>
-              <a:buFont typeface="Noto Sans CJK SC"/>
+              <a:buFont typeface="Arial" panose="020B0604020202020204"/>
               <a:buChar char="•"/>
             </a:pPr>
             <a:r>
@@ -7149,7 +7149,7 @@
               <a:spcAft>
                 <a:spcPts val="600"/>
               </a:spcAft>
-              <a:buFont typeface="Noto Sans CJK SC"/>
+              <a:buFont typeface="Arial" panose="020B0604020202020204"/>
               <a:buChar char="•"/>
             </a:pPr>
             <a:r>
@@ -7168,7 +7168,7 @@
               <a:spcAft>
                 <a:spcPts val="600"/>
               </a:spcAft>
-              <a:buFont typeface="Noto Sans CJK SC"/>
+              <a:buFont typeface="Arial" panose="020B0604020202020204"/>
               <a:buChar char="•"/>
             </a:pPr>
             <a:r>
@@ -7187,7 +7187,7 @@
               <a:spcAft>
                 <a:spcPts val="600"/>
               </a:spcAft>
-              <a:buFont typeface="Noto Sans CJK SC"/>
+              <a:buFont typeface="Arial" panose="020B0604020202020204"/>
               <a:buChar char="•"/>
             </a:pPr>
             <a:r>
@@ -7206,7 +7206,7 @@
               <a:spcAft>
                 <a:spcPts val="600"/>
               </a:spcAft>
-              <a:buFont typeface="Noto Sans CJK SC"/>
+              <a:buFont typeface="Arial" panose="020B0604020202020204"/>
               <a:buChar char="•"/>
             </a:pPr>
             <a:r>
@@ -7651,7 +7651,7 @@
               <a:spcAft>
                 <a:spcPts val="600"/>
               </a:spcAft>
-              <a:buFont typeface="Noto Sans CJK SC"/>
+              <a:buFont typeface="Arial" panose="020B0604020202020204"/>
               <a:buChar char="•"/>
             </a:pPr>
             <a:r>
@@ -7670,7 +7670,7 @@
               <a:spcAft>
                 <a:spcPts val="600"/>
               </a:spcAft>
-              <a:buFont typeface="Noto Sans CJK SC"/>
+              <a:buFont typeface="Arial" panose="020B0604020202020204"/>
               <a:buChar char="•"/>
             </a:pPr>
             <a:r>
@@ -7689,7 +7689,7 @@
               <a:spcAft>
                 <a:spcPts val="600"/>
               </a:spcAft>
-              <a:buFont typeface="Noto Sans CJK SC"/>
+              <a:buFont typeface="Arial" panose="020B0604020202020204"/>
               <a:buChar char="•"/>
             </a:pPr>
             <a:r>
@@ -7708,7 +7708,7 @@
               <a:spcAft>
                 <a:spcPts val="600"/>
               </a:spcAft>
-              <a:buFont typeface="Noto Sans CJK SC"/>
+              <a:buFont typeface="Arial" panose="020B0604020202020204"/>
               <a:buChar char="•"/>
             </a:pPr>
             <a:r>
@@ -7727,7 +7727,7 @@
               <a:spcAft>
                 <a:spcPts val="600"/>
               </a:spcAft>
-              <a:buFont typeface="Noto Sans CJK SC"/>
+              <a:buFont typeface="Arial" panose="020B0604020202020204"/>
               <a:buChar char="•"/>
             </a:pPr>
             <a:r>
@@ -7746,7 +7746,7 @@
               <a:spcAft>
                 <a:spcPts val="600"/>
               </a:spcAft>
-              <a:buFont typeface="Noto Sans CJK SC"/>
+              <a:buFont typeface="Arial" panose="020B0604020202020204"/>
               <a:buChar char="•"/>
             </a:pPr>
             <a:r>
@@ -8191,7 +8191,7 @@
               <a:spcAft>
                 <a:spcPts val="600"/>
               </a:spcAft>
-              <a:buFont typeface="Noto Sans CJK SC"/>
+              <a:buFont typeface="Arial" panose="020B0604020202020204"/>
               <a:buChar char="•"/>
             </a:pPr>
             <a:r>
@@ -8210,7 +8210,7 @@
               <a:spcAft>
                 <a:spcPts val="600"/>
               </a:spcAft>
-              <a:buFont typeface="Noto Sans CJK SC"/>
+              <a:buFont typeface="Arial" panose="020B0604020202020204"/>
               <a:buChar char="•"/>
             </a:pPr>
             <a:r>
@@ -8229,7 +8229,7 @@
               <a:spcAft>
                 <a:spcPts val="600"/>
               </a:spcAft>
-              <a:buFont typeface="Noto Sans CJK SC"/>
+              <a:buFont typeface="Arial" panose="020B0604020202020204"/>
               <a:buChar char="•"/>
             </a:pPr>
             <a:r>
@@ -8248,7 +8248,7 @@
               <a:spcAft>
                 <a:spcPts val="600"/>
               </a:spcAft>
-              <a:buFont typeface="Noto Sans CJK SC"/>
+              <a:buFont typeface="Arial" panose="020B0604020202020204"/>
               <a:buChar char="•"/>
             </a:pPr>
             <a:r>
@@ -8267,7 +8267,7 @@
               <a:spcAft>
                 <a:spcPts val="600"/>
               </a:spcAft>
-              <a:buFont typeface="Noto Sans CJK SC"/>
+              <a:buFont typeface="Arial" panose="020B0604020202020204"/>
               <a:buChar char="•"/>
             </a:pPr>
             <a:r>
@@ -8286,7 +8286,7 @@
               <a:spcAft>
                 <a:spcPts val="600"/>
               </a:spcAft>
-              <a:buFont typeface="Noto Sans CJK SC"/>
+              <a:buFont typeface="Arial" panose="020B0604020202020204"/>
               <a:buChar char="•"/>
             </a:pPr>
             <a:r>
@@ -8731,7 +8731,7 @@
               <a:spcAft>
                 <a:spcPts val="600"/>
               </a:spcAft>
-              <a:buFont typeface="Noto Sans CJK SC"/>
+              <a:buFont typeface="Arial" panose="020B0604020202020204"/>
               <a:buChar char="•"/>
             </a:pPr>
             <a:r>
@@ -8750,7 +8750,7 @@
               <a:spcAft>
                 <a:spcPts val="600"/>
               </a:spcAft>
-              <a:buFont typeface="Noto Sans CJK SC"/>
+              <a:buFont typeface="Arial" panose="020B0604020202020204"/>
               <a:buChar char="•"/>
             </a:pPr>
             <a:r>
@@ -8769,7 +8769,7 @@
               <a:spcAft>
                 <a:spcPts val="600"/>
               </a:spcAft>
-              <a:buFont typeface="Noto Sans CJK SC"/>
+              <a:buFont typeface="Arial" panose="020B0604020202020204"/>
               <a:buChar char="•"/>
             </a:pPr>
             <a:r>
@@ -8788,7 +8788,7 @@
               <a:spcAft>
                 <a:spcPts val="600"/>
               </a:spcAft>
-              <a:buFont typeface="Noto Sans CJK SC"/>
+              <a:buFont typeface="Arial" panose="020B0604020202020204"/>
               <a:buChar char="•"/>
             </a:pPr>
             <a:r>
@@ -8807,7 +8807,7 @@
               <a:spcAft>
                 <a:spcPts val="600"/>
               </a:spcAft>
-              <a:buFont typeface="Noto Sans CJK SC"/>
+              <a:buFont typeface="Arial" panose="020B0604020202020204"/>
               <a:buChar char="•"/>
             </a:pPr>
             <a:r>
@@ -8826,7 +8826,7 @@
               <a:spcAft>
                 <a:spcPts val="600"/>
               </a:spcAft>
-              <a:buFont typeface="Noto Sans CJK SC"/>
+              <a:buFont typeface="Arial" panose="020B0604020202020204"/>
               <a:buChar char="•"/>
             </a:pPr>
             <a:r>
@@ -8845,7 +8845,7 @@
               <a:spcAft>
                 <a:spcPts val="600"/>
               </a:spcAft>
-              <a:buFont typeface="Noto Sans CJK SC"/>
+              <a:buFont typeface="Arial" panose="020B0604020202020204"/>
               <a:buChar char="•"/>
             </a:pPr>
             <a:r>
@@ -9326,7 +9326,7 @@
               <a:spcAft>
                 <a:spcPts val="600"/>
               </a:spcAft>
-              <a:buFont typeface="Noto Sans CJK SC"/>
+              <a:buFont typeface="Arial" panose="020B0604020202020204"/>
               <a:buChar char="•"/>
             </a:pPr>
             <a:r>
@@ -9345,7 +9345,7 @@
               <a:spcAft>
                 <a:spcPts val="600"/>
               </a:spcAft>
-              <a:buFont typeface="Noto Sans CJK SC"/>
+              <a:buFont typeface="Arial" panose="020B0604020202020204"/>
               <a:buChar char="•"/>
             </a:pPr>
             <a:r>
@@ -9364,7 +9364,7 @@
               <a:spcAft>
                 <a:spcPts val="600"/>
               </a:spcAft>
-              <a:buFont typeface="Noto Sans CJK SC"/>
+              <a:buFont typeface="Arial" panose="020B0604020202020204"/>
               <a:buChar char="•"/>
             </a:pPr>
             <a:r>
@@ -9383,7 +9383,7 @@
               <a:spcAft>
                 <a:spcPts val="600"/>
               </a:spcAft>
-              <a:buFont typeface="Noto Sans CJK SC"/>
+              <a:buFont typeface="Arial" panose="020B0604020202020204"/>
               <a:buChar char="•"/>
             </a:pPr>
             <a:r>
@@ -9724,7 +9724,7 @@
                 <a:latin typeface="Noto Sans CJK SC"/>
                 <a:ea typeface="Noto Sans CJK SC"/>
               </a:rPr>
-              <a:t>女生转行七大岗位全攻略</a:t>
+              <a:t>女生找工作七大岗位全攻略</a:t>
             </a:r>
           </a:p>
         </p:txBody>
@@ -9909,7 +9909,7 @@
               <a:spcAft>
                 <a:spcPts val="600"/>
               </a:spcAft>
-              <a:buFont typeface="Noto Sans CJK SC"/>
+              <a:buFont typeface="Arial" panose="020B0604020202020204"/>
               <a:buChar char="•"/>
             </a:pPr>
             <a:r>
@@ -9928,7 +9928,7 @@
               <a:spcAft>
                 <a:spcPts val="600"/>
               </a:spcAft>
-              <a:buFont typeface="Noto Sans CJK SC"/>
+              <a:buFont typeface="Arial" panose="020B0604020202020204"/>
               <a:buChar char="•"/>
             </a:pPr>
             <a:r>
@@ -9947,7 +9947,7 @@
               <a:spcAft>
                 <a:spcPts val="600"/>
               </a:spcAft>
-              <a:buFont typeface="Noto Sans CJK SC"/>
+              <a:buFont typeface="Arial" panose="020B0604020202020204"/>
               <a:buChar char="•"/>
             </a:pPr>
             <a:r>
@@ -9966,7 +9966,7 @@
               <a:spcAft>
                 <a:spcPts val="600"/>
               </a:spcAft>
-              <a:buFont typeface="Noto Sans CJK SC"/>
+              <a:buFont typeface="Arial" panose="020B0604020202020204"/>
               <a:buChar char="•"/>
             </a:pPr>
             <a:r>
@@ -9985,7 +9985,7 @@
               <a:spcAft>
                 <a:spcPts val="600"/>
               </a:spcAft>
-              <a:buFont typeface="Noto Sans CJK SC"/>
+              <a:buFont typeface="Arial" panose="020B0604020202020204"/>
               <a:buChar char="•"/>
             </a:pPr>
             <a:r>
@@ -10004,7 +10004,7 @@
               <a:spcAft>
                 <a:spcPts val="600"/>
               </a:spcAft>
-              <a:buFont typeface="Noto Sans CJK SC"/>
+              <a:buFont typeface="Arial" panose="020B0604020202020204"/>
               <a:buChar char="•"/>
             </a:pPr>
             <a:r>
@@ -10378,7 +10378,7 @@
                 <a:latin typeface="Noto Sans CJK SC"/>
                 <a:ea typeface="Noto Sans CJK SC"/>
               </a:rPr>
-              <a:t>七岗总览：先看数字再谈感觉</a:t>
+              <a:t>七岗总览：先定位再选择</a:t>
             </a:r>
           </a:p>
         </p:txBody>
@@ -10400,11 +10400,10 @@
             <a:tbl>
               <a:tblPr firstRow="1" bandRow="1"/>
               <a:tblGrid>
-                <a:gridCol w="2060000"/>
-                <a:gridCol w="2060000"/>
-                <a:gridCol w="2060000"/>
-                <a:gridCol w="2060000"/>
-                <a:gridCol w="2060000"/>
+                <a:gridCol w="2575000"/>
+                <a:gridCol w="2575000"/>
+                <a:gridCol w="2575000"/>
+                <a:gridCol w="2575000"/>
               </a:tblGrid>
               <a:tr h="420000">
                 <a:tc>
@@ -10475,7 +10474,7 @@
                           <a:latin typeface="Noto Sans CJK SC"/>
                           <a:ea typeface="Noto Sans CJK SC"/>
                         </a:rPr>
-                        <a:t>一线起薪</a:t>
+                        <a:t>一句话定位</a:t>
                       </a:r>
                     </a:p>
                   </a:txBody>
@@ -10501,33 +10500,7 @@
                           <a:latin typeface="Noto Sans CJK SC"/>
                           <a:ea typeface="Noto Sans CJK SC"/>
                         </a:rPr>
-                        <a:t>3年后</a:t>
-                      </a:r>
-                    </a:p>
-                  </a:txBody>
-                  <a:tcPr marL="91440" marR="91440" anchor="ctr">
-                    <a:solidFill>
-                      <a:srgbClr val="E58A2F"/>
-                    </a:solidFill>
-                  </a:tcPr>
-                </a:tc>
-                <a:tc>
-                  <a:txBody>
-                    <a:bodyPr anchor="ctr"/>
-                    <a:lstStyle/>
-                    <a:p>
-                      <a:pPr algn="l">
-                        <a:buNone/>
-                      </a:pPr>
-                      <a:r>
-                        <a:rPr lang="zh-CN" sz="1700" b="1" dirty="0">
-                          <a:solidFill>
-                            <a:srgbClr val="FFF8EC"/>
-                          </a:solidFill>
-                          <a:latin typeface="Noto Sans CJK SC"/>
-                          <a:ea typeface="Noto Sans CJK SC"/>
-                        </a:rPr>
-                        <a:t>天花板</a:t>
+                        <a:t>特点</a:t>
                       </a:r>
                     </a:p>
                   </a:txBody>
@@ -10607,7 +10580,7 @@
                           <a:latin typeface="Noto Sans CJK SC"/>
                           <a:ea typeface="Noto Sans CJK SC"/>
                         </a:rPr>
-                        <a:t>5-7k</a:t>
+                        <a:t>用内容换流量</a:t>
                       </a:r>
                     </a:p>
                   </a:txBody>
@@ -10633,33 +10606,7 @@
                           <a:latin typeface="Noto Sans CJK SC"/>
                           <a:ea typeface="Noto Sans CJK SC"/>
                         </a:rPr>
-                        <a:t>12-18k</a:t>
-                      </a:r>
-                    </a:p>
-                  </a:txBody>
-                  <a:tcPr marL="91440" marR="91440" anchor="ctr">
-                    <a:solidFill>
-                      <a:srgbClr val="FFF2DE"/>
-                    </a:solidFill>
-                  </a:tcPr>
-                </a:tc>
-                <a:tc>
-                  <a:txBody>
-                    <a:bodyPr anchor="ctr"/>
-                    <a:lstStyle/>
-                    <a:p>
-                      <a:pPr algn="l">
-                        <a:buNone/>
-                      </a:pPr>
-                      <a:r>
-                        <a:rPr lang="zh-CN" sz="1700" b="0" dirty="0">
-                          <a:solidFill>
-                            <a:srgbClr val="3B2F2A"/>
-                          </a:solidFill>
-                          <a:latin typeface="Noto Sans CJK SC"/>
-                          <a:ea typeface="Noto Sans CJK SC"/>
-                        </a:rPr>
-                        <a:t>高</a:t>
+                        <a:t>爱表达的人适合</a:t>
                       </a:r>
                     </a:p>
                   </a:txBody>
@@ -10735,7 +10682,7 @@
                           <a:latin typeface="Noto Sans CJK SC"/>
                           <a:ea typeface="Noto Sans CJK SC"/>
                         </a:rPr>
-                        <a:t>6-8k+提成</a:t>
+                        <a:t>让店铺多卖货</a:t>
                       </a:r>
                     </a:p>
                   </a:txBody>
@@ -10759,31 +10706,7 @@
                           <a:latin typeface="Noto Sans CJK SC"/>
                           <a:ea typeface="Noto Sans CJK SC"/>
                         </a:rPr>
-                        <a:t>12-20k</a:t>
-                      </a:r>
-                    </a:p>
-                  </a:txBody>
-                  <a:tcPr marL="91440" marR="91440" anchor="ctr">
-                    <a:noFill/>
-                  </a:tcPr>
-                </a:tc>
-                <a:tc>
-                  <a:txBody>
-                    <a:bodyPr anchor="ctr"/>
-                    <a:lstStyle/>
-                    <a:p>
-                      <a:pPr algn="l">
-                        <a:buNone/>
-                      </a:pPr>
-                      <a:r>
-                        <a:rPr lang="zh-CN" sz="1700" b="0" dirty="0">
-                          <a:solidFill>
-                            <a:srgbClr val="3B2F2A"/>
-                          </a:solidFill>
-                          <a:latin typeface="Noto Sans CJK SC"/>
-                          <a:ea typeface="Noto Sans CJK SC"/>
-                        </a:rPr>
-                        <a:t>高</a:t>
+                        <a:t>结果导向</a:t>
                       </a:r>
                     </a:p>
                   </a:txBody>
@@ -10861,7 +10784,7 @@
                           <a:latin typeface="Noto Sans CJK SC"/>
                           <a:ea typeface="Noto Sans CJK SC"/>
                         </a:rPr>
-                        <a:t>5-7k</a:t>
+                        <a:t>维护用户促复购</a:t>
                       </a:r>
                     </a:p>
                   </a:txBody>
@@ -10887,33 +10810,7 @@
                           <a:latin typeface="Noto Sans CJK SC"/>
                           <a:ea typeface="Noto Sans CJK SC"/>
                         </a:rPr>
-                        <a:t>9-12k</a:t>
-                      </a:r>
-                    </a:p>
-                  </a:txBody>
-                  <a:tcPr marL="91440" marR="91440" anchor="ctr">
-                    <a:solidFill>
-                      <a:srgbClr val="FFF2DE"/>
-                    </a:solidFill>
-                  </a:tcPr>
-                </a:tc>
-                <a:tc>
-                  <a:txBody>
-                    <a:bodyPr anchor="ctr"/>
-                    <a:lstStyle/>
-                    <a:p>
-                      <a:pPr algn="l">
-                        <a:buNone/>
-                      </a:pPr>
-                      <a:r>
-                        <a:rPr lang="zh-CN" sz="1700" b="0" dirty="0">
-                          <a:solidFill>
-                            <a:srgbClr val="3B2F2A"/>
-                          </a:solidFill>
-                          <a:latin typeface="Noto Sans CJK SC"/>
-                          <a:ea typeface="Noto Sans CJK SC"/>
-                        </a:rPr>
-                        <a:t>中</a:t>
+                        <a:t>上手最快</a:t>
                       </a:r>
                     </a:p>
                   </a:txBody>
@@ -10989,7 +10886,7 @@
                           <a:latin typeface="Noto Sans CJK SC"/>
                           <a:ea typeface="Noto Sans CJK SC"/>
                         </a:rPr>
-                        <a:t>7-10k</a:t>
+                        <a:t>上线前的质量关卡</a:t>
                       </a:r>
                     </a:p>
                   </a:txBody>
@@ -11013,31 +10910,7 @@
                           <a:latin typeface="Noto Sans CJK SC"/>
                           <a:ea typeface="Noto Sans CJK SC"/>
                         </a:rPr>
-                        <a:t>13-18k</a:t>
-                      </a:r>
-                    </a:p>
-                  </a:txBody>
-                  <a:tcPr marL="91440" marR="91440" anchor="ctr">
-                    <a:noFill/>
-                  </a:tcPr>
-                </a:tc>
-                <a:tc>
-                  <a:txBody>
-                    <a:bodyPr anchor="ctr"/>
-                    <a:lstStyle/>
-                    <a:p>
-                      <a:pPr algn="l">
-                        <a:buNone/>
-                      </a:pPr>
-                      <a:r>
-                        <a:rPr lang="zh-CN" sz="1700" b="0" dirty="0">
-                          <a:solidFill>
-                            <a:srgbClr val="3B2F2A"/>
-                          </a:solidFill>
-                          <a:latin typeface="Noto Sans CJK SC"/>
-                          <a:ea typeface="Noto Sans CJK SC"/>
-                        </a:rPr>
-                        <a:t>中高</a:t>
+                        <a:t>要会SQL接口</a:t>
                       </a:r>
                     </a:p>
                   </a:txBody>
@@ -11115,7 +10988,7 @@
                           <a:latin typeface="Noto Sans CJK SC"/>
                           <a:ea typeface="Noto Sans CJK SC"/>
                         </a:rPr>
-                        <a:t>7-12k</a:t>
+                        <a:t>用数据做决策</a:t>
                       </a:r>
                     </a:p>
                   </a:txBody>
@@ -11141,33 +11014,7 @@
                           <a:latin typeface="Noto Sans CJK SC"/>
                           <a:ea typeface="Noto Sans CJK SC"/>
                         </a:rPr>
-                        <a:t>15-20k</a:t>
-                      </a:r>
-                    </a:p>
-                  </a:txBody>
-                  <a:tcPr marL="91440" marR="91440" anchor="ctr">
-                    <a:solidFill>
-                      <a:srgbClr val="FFF2DE"/>
-                    </a:solidFill>
-                  </a:tcPr>
-                </a:tc>
-                <a:tc>
-                  <a:txBody>
-                    <a:bodyPr anchor="ctr"/>
-                    <a:lstStyle/>
-                    <a:p>
-                      <a:pPr algn="l">
-                        <a:buNone/>
-                      </a:pPr>
-                      <a:r>
-                        <a:rPr lang="zh-CN" sz="1700" b="0" dirty="0">
-                          <a:solidFill>
-                            <a:srgbClr val="3B2F2A"/>
-                          </a:solidFill>
-                          <a:latin typeface="Noto Sans CJK SC"/>
-                          <a:ea typeface="Noto Sans CJK SC"/>
-                        </a:rPr>
-                        <a:t>高</a:t>
+                        <a:t>最抗AI</a:t>
                       </a:r>
                     </a:p>
                   </a:txBody>
@@ -11219,7 +11066,7 @@
                           <a:latin typeface="Noto Sans CJK SC"/>
                           <a:ea typeface="Noto Sans CJK SC"/>
                         </a:rPr>
-                        <a:t>0</a:t>
+                        <a:t>随时</a:t>
                       </a:r>
                     </a:p>
                   </a:txBody>
@@ -11243,7 +11090,7 @@
                           <a:latin typeface="Noto Sans CJK SC"/>
                           <a:ea typeface="Noto Sans CJK SC"/>
                         </a:rPr>
-                        <a:t>6-9k</a:t>
+                        <a:t>高校行政教辅</a:t>
                       </a:r>
                     </a:p>
                   </a:txBody>
@@ -11267,31 +11114,7 @@
                           <a:latin typeface="Noto Sans CJK SC"/>
                           <a:ea typeface="Noto Sans CJK SC"/>
                         </a:rPr>
-                        <a:t>8-10k</a:t>
-                      </a:r>
-                    </a:p>
-                  </a:txBody>
-                  <a:tcPr marL="91440" marR="91440" anchor="ctr">
-                    <a:noFill/>
-                  </a:tcPr>
-                </a:tc>
-                <a:tc>
-                  <a:txBody>
-                    <a:bodyPr anchor="ctr"/>
-                    <a:lstStyle/>
-                    <a:p>
-                      <a:pPr algn="l">
-                        <a:buNone/>
-                      </a:pPr>
-                      <a:r>
-                        <a:rPr lang="zh-CN" sz="1700" b="0" dirty="0">
-                          <a:solidFill>
-                            <a:srgbClr val="3B2F2A"/>
-                          </a:solidFill>
-                          <a:latin typeface="Noto Sans CJK SC"/>
-                          <a:ea typeface="Noto Sans CJK SC"/>
-                        </a:rPr>
-                        <a:t>低</a:t>
+                        <a:t>稳定有寒暑假</a:t>
                       </a:r>
                     </a:p>
                   </a:txBody>
@@ -11343,7 +11166,7 @@
                           <a:latin typeface="Noto Sans CJK SC"/>
                           <a:ea typeface="Noto Sans CJK SC"/>
                         </a:rPr>
-                        <a:t>0</a:t>
+                        <a:t>随时</a:t>
                       </a:r>
                     </a:p>
                   </a:txBody>
@@ -11369,7 +11192,7 @@
                           <a:latin typeface="Noto Sans CJK SC"/>
                           <a:ea typeface="Noto Sans CJK SC"/>
                         </a:rPr>
-                        <a:t>5.5-8k</a:t>
+                        <a:t>让办公室运转</a:t>
                       </a:r>
                     </a:p>
                   </a:txBody>
@@ -11395,33 +11218,7 @@
                           <a:latin typeface="Noto Sans CJK SC"/>
                           <a:ea typeface="Noto Sans CJK SC"/>
                         </a:rPr>
-                        <a:t>9-13k</a:t>
-                      </a:r>
-                    </a:p>
-                  </a:txBody>
-                  <a:tcPr marL="91440" marR="91440" anchor="ctr">
-                    <a:solidFill>
-                      <a:srgbClr val="FFF2DE"/>
-                    </a:solidFill>
-                  </a:tcPr>
-                </a:tc>
-                <a:tc>
-                  <a:txBody>
-                    <a:bodyPr anchor="ctr"/>
-                    <a:lstStyle/>
-                    <a:p>
-                      <a:pPr algn="l">
-                        <a:buNone/>
-                      </a:pPr>
-                      <a:r>
-                        <a:rPr lang="zh-CN" sz="1700" b="0" dirty="0">
-                          <a:solidFill>
-                            <a:srgbClr val="3B2F2A"/>
-                          </a:solidFill>
-                          <a:latin typeface="Noto Sans CJK SC"/>
-                          <a:ea typeface="Noto Sans CJK SC"/>
-                        </a:rPr>
-                        <a:t>低</a:t>
+                        <a:t>门槛最低</a:t>
                       </a:r>
                     </a:p>
                   </a:txBody>
@@ -11616,7 +11413,7 @@
               <a:spcAft>
                 <a:spcPts val="600"/>
               </a:spcAft>
-              <a:buFont typeface="Noto Sans CJK SC"/>
+              <a:buFont typeface="Arial" panose="020B0604020202020204"/>
               <a:buChar char="•"/>
             </a:pPr>
             <a:r>
@@ -11635,7 +11432,7 @@
               <a:spcAft>
                 <a:spcPts val="600"/>
               </a:spcAft>
-              <a:buFont typeface="Noto Sans CJK SC"/>
+              <a:buFont typeface="Arial" panose="020B0604020202020204"/>
               <a:buChar char="•"/>
             </a:pPr>
             <a:r>
@@ -11654,7 +11451,7 @@
               <a:spcAft>
                 <a:spcPts val="600"/>
               </a:spcAft>
-              <a:buFont typeface="Noto Sans CJK SC"/>
+              <a:buFont typeface="Arial" panose="020B0604020202020204"/>
               <a:buChar char="•"/>
             </a:pPr>
             <a:r>
@@ -11673,7 +11470,7 @@
               <a:spcAft>
                 <a:spcPts val="600"/>
               </a:spcAft>
-              <a:buFont typeface="Noto Sans CJK SC"/>
+              <a:buFont typeface="Arial" panose="020B0604020202020204"/>
               <a:buChar char="•"/>
             </a:pPr>
             <a:r>
@@ -11692,7 +11489,7 @@
               <a:spcAft>
                 <a:spcPts val="600"/>
               </a:spcAft>
-              <a:buFont typeface="Noto Sans CJK SC"/>
+              <a:buFont typeface="Arial" panose="020B0604020202020204"/>
               <a:buChar char="•"/>
             </a:pPr>
             <a:r>
@@ -11711,7 +11508,7 @@
               <a:spcAft>
                 <a:spcPts val="600"/>
               </a:spcAft>
-              <a:buFont typeface="Noto Sans CJK SC"/>
+              <a:buFont typeface="Arial" panose="020B0604020202020204"/>
               <a:buChar char="•"/>
             </a:pPr>
             <a:r>
@@ -11722,7 +11519,7 @@
                 <a:latin typeface="Noto Sans CJK SC"/>
                 <a:ea typeface="Noto Sans CJK SC"/>
               </a:rPr>
-              <a:t>晋升：专员到主管再到品牌负责人</a:t>
+              <a:t>适合：有表达欲、爱研究爆款的人</a:t>
             </a:r>
           </a:p>
         </p:txBody>
@@ -12156,7 +11953,7 @@
               <a:spcAft>
                 <a:spcPts val="600"/>
               </a:spcAft>
-              <a:buFont typeface="Noto Sans CJK SC"/>
+              <a:buFont typeface="Arial" panose="020B0604020202020204"/>
               <a:buChar char="•"/>
             </a:pPr>
             <a:r>
@@ -12175,7 +11972,7 @@
               <a:spcAft>
                 <a:spcPts val="600"/>
               </a:spcAft>
-              <a:buFont typeface="Noto Sans CJK SC"/>
+              <a:buFont typeface="Arial" panose="020B0604020202020204"/>
               <a:buChar char="•"/>
             </a:pPr>
             <a:r>
@@ -12194,7 +11991,7 @@
               <a:spcAft>
                 <a:spcPts val="600"/>
               </a:spcAft>
-              <a:buFont typeface="Noto Sans CJK SC"/>
+              <a:buFont typeface="Arial" panose="020B0604020202020204"/>
               <a:buChar char="•"/>
             </a:pPr>
             <a:r>
@@ -12213,7 +12010,7 @@
               <a:spcAft>
                 <a:spcPts val="600"/>
               </a:spcAft>
-              <a:buFont typeface="Noto Sans CJK SC"/>
+              <a:buFont typeface="Arial" panose="020B0604020202020204"/>
               <a:buChar char="•"/>
             </a:pPr>
             <a:r>
@@ -12232,7 +12029,7 @@
               <a:spcAft>
                 <a:spcPts val="600"/>
               </a:spcAft>
-              <a:buFont typeface="Noto Sans CJK SC"/>
+              <a:buFont typeface="Arial" panose="020B0604020202020204"/>
               <a:buChar char="•"/>
             </a:pPr>
             <a:r>
@@ -12251,7 +12048,7 @@
               <a:spcAft>
                 <a:spcPts val="600"/>
               </a:spcAft>
-              <a:buFont typeface="Noto Sans CJK SC"/>
+              <a:buFont typeface="Arial" panose="020B0604020202020204"/>
               <a:buChar char="•"/>
             </a:pPr>
             <a:r>
@@ -12696,7 +12493,7 @@
               <a:spcAft>
                 <a:spcPts val="600"/>
               </a:spcAft>
-              <a:buFont typeface="Noto Sans CJK SC"/>
+              <a:buFont typeface="Arial" panose="020B0604020202020204"/>
               <a:buChar char="•"/>
             </a:pPr>
             <a:r>
@@ -12715,7 +12512,7 @@
               <a:spcAft>
                 <a:spcPts val="600"/>
               </a:spcAft>
-              <a:buFont typeface="Noto Sans CJK SC"/>
+              <a:buFont typeface="Arial" panose="020B0604020202020204"/>
               <a:buChar char="•"/>
             </a:pPr>
             <a:r>
@@ -12734,7 +12531,7 @@
               <a:spcAft>
                 <a:spcPts val="600"/>
               </a:spcAft>
-              <a:buFont typeface="Noto Sans CJK SC"/>
+              <a:buFont typeface="Arial" panose="020B0604020202020204"/>
               <a:buChar char="•"/>
             </a:pPr>
             <a:r>
@@ -12753,7 +12550,7 @@
               <a:spcAft>
                 <a:spcPts val="600"/>
               </a:spcAft>
-              <a:buFont typeface="Noto Sans CJK SC"/>
+              <a:buFont typeface="Arial" panose="020B0604020202020204"/>
               <a:buChar char="•"/>
             </a:pPr>
             <a:r>
@@ -12772,7 +12569,7 @@
               <a:spcAft>
                 <a:spcPts val="600"/>
               </a:spcAft>
-              <a:buFont typeface="Noto Sans CJK SC"/>
+              <a:buFont typeface="Arial" panose="020B0604020202020204"/>
               <a:buChar char="•"/>
             </a:pPr>
             <a:r>
@@ -12791,7 +12588,7 @@
               <a:spcAft>
                 <a:spcPts val="600"/>
               </a:spcAft>
-              <a:buFont typeface="Noto Sans CJK SC"/>
+              <a:buFont typeface="Arial" panose="020B0604020202020204"/>
               <a:buChar char="•"/>
             </a:pPr>
             <a:r>
@@ -12802,7 +12599,7 @@
                 <a:latin typeface="Noto Sans CJK SC"/>
                 <a:ea typeface="Noto Sans CJK SC"/>
               </a:rPr>
-              <a:t>提成制：做得好收入超底薪</a:t>
+              <a:t>竞品：每周拆解3个对标店铺</a:t>
             </a:r>
           </a:p>
         </p:txBody>
@@ -13236,7 +13033,7 @@
               <a:spcAft>
                 <a:spcPts val="600"/>
               </a:spcAft>
-              <a:buFont typeface="Noto Sans CJK SC"/>
+              <a:buFont typeface="Arial" panose="020B0604020202020204"/>
               <a:buChar char="•"/>
             </a:pPr>
             <a:r>
@@ -13255,7 +13052,7 @@
               <a:spcAft>
                 <a:spcPts val="600"/>
               </a:spcAft>
-              <a:buFont typeface="Noto Sans CJK SC"/>
+              <a:buFont typeface="Arial" panose="020B0604020202020204"/>
               <a:buChar char="•"/>
             </a:pPr>
             <a:r>
@@ -13274,7 +13071,7 @@
               <a:spcAft>
                 <a:spcPts val="600"/>
               </a:spcAft>
-              <a:buFont typeface="Noto Sans CJK SC"/>
+              <a:buFont typeface="Arial" panose="020B0604020202020204"/>
               <a:buChar char="•"/>
             </a:pPr>
             <a:r>
@@ -13293,7 +13090,7 @@
               <a:spcAft>
                 <a:spcPts val="600"/>
               </a:spcAft>
-              <a:buFont typeface="Noto Sans CJK SC"/>
+              <a:buFont typeface="Arial" panose="020B0604020202020204"/>
               <a:buChar char="•"/>
             </a:pPr>
             <a:r>
@@ -13312,7 +13109,7 @@
               <a:spcAft>
                 <a:spcPts val="600"/>
               </a:spcAft>
-              <a:buFont typeface="Noto Sans CJK SC"/>
+              <a:buFont typeface="Arial" panose="020B0604020202020204"/>
               <a:buChar char="•"/>
             </a:pPr>
             <a:r>
@@ -13331,7 +13128,7 @@
               <a:spcAft>
                 <a:spcPts val="600"/>
               </a:spcAft>
-              <a:buFont typeface="Noto Sans CJK SC"/>
+              <a:buFont typeface="Arial" panose="020B0604020202020204"/>
               <a:buChar char="•"/>
             </a:pPr>
             <a:r>
@@ -13776,7 +13573,7 @@
               <a:spcAft>
                 <a:spcPts val="600"/>
               </a:spcAft>
-              <a:buFont typeface="Noto Sans CJK SC"/>
+              <a:buFont typeface="Arial" panose="020B0604020202020204"/>
               <a:buChar char="•"/>
             </a:pPr>
             <a:r>
@@ -13795,7 +13592,7 @@
               <a:spcAft>
                 <a:spcPts val="600"/>
               </a:spcAft>
-              <a:buFont typeface="Noto Sans CJK SC"/>
+              <a:buFont typeface="Arial" panose="020B0604020202020204"/>
               <a:buChar char="•"/>
             </a:pPr>
             <a:r>
@@ -13814,7 +13611,7 @@
               <a:spcAft>
                 <a:spcPts val="600"/>
               </a:spcAft>
-              <a:buFont typeface="Noto Sans CJK SC"/>
+              <a:buFont typeface="Arial" panose="020B0604020202020204"/>
               <a:buChar char="•"/>
             </a:pPr>
             <a:r>
@@ -13833,7 +13630,7 @@
               <a:spcAft>
                 <a:spcPts val="600"/>
               </a:spcAft>
-              <a:buFont typeface="Noto Sans CJK SC"/>
+              <a:buFont typeface="Arial" panose="020B0604020202020204"/>
               <a:buChar char="•"/>
             </a:pPr>
             <a:r>
@@ -13852,7 +13649,7 @@
               <a:spcAft>
                 <a:spcPts val="600"/>
               </a:spcAft>
-              <a:buFont typeface="Noto Sans CJK SC"/>
+              <a:buFont typeface="Arial" panose="020B0604020202020204"/>
               <a:buChar char="•"/>
             </a:pPr>
             <a:r>
@@ -13863,7 +13660,7 @@
                 <a:latin typeface="Noto Sans CJK SC"/>
                 <a:ea typeface="Noto Sans CJK SC"/>
               </a:rPr>
-              <a:t>晋升：私域增长负责人缺人</a:t>
+              <a:t>适合：外向耐心、爱帮人解决问题</a:t>
             </a:r>
           </a:p>
           <a:p>
@@ -13871,7 +13668,7 @@
               <a:spcAft>
                 <a:spcPts val="600"/>
               </a:spcAft>
-              <a:buFont typeface="Noto Sans CJK SC"/>
+              <a:buFont typeface="Arial" panose="020B0604020202020204"/>
               <a:buChar char="•"/>
             </a:pPr>
             <a:r>

--- a/static/lulu/ppt/career-guide.pptx
+++ b/static/lulu/ppt/career-guide.pptx
@@ -31,6 +31,13 @@
     <p:sldId id="279" r:id="rId25"/>
     <p:sldId id="280" r:id="rId26"/>
     <p:sldId id="281" r:id="rId27"/>
+    <p:sldId id="282" r:id="rId28"/>
+    <p:sldId id="283" r:id="rId29"/>
+    <p:sldId id="284" r:id="rId30"/>
+    <p:sldId id="285" r:id="rId31"/>
+    <p:sldId id="286" r:id="rId32"/>
+    <p:sldId id="287" r:id="rId33"/>
+    <p:sldId id="288" r:id="rId34"/>
   </p:sldIdLst>
   <p:sldSz cx="12192000" cy="6858000" type="screen16x9"/>
   <p:notesSz cx="6858000" cy="9144000"/>
@@ -423,7 +430,7 @@
                 <a:latin typeface="Noto Sans CJK SC"/>
                 <a:ea typeface="Noto Sans CJK SC"/>
               </a:rPr>
-              <a:t>女生找工作七大岗位全攻略</a:t>
+              <a:t>女生找工作十大岗位全攻略</a:t>
             </a:r>
           </a:p>
         </p:txBody>
@@ -540,7 +547,7 @@
                 <a:latin typeface="Noto Sans CJK SC"/>
                 <a:ea typeface="Noto Sans CJK SC"/>
               </a:rPr>
-              <a:t>01 / 26</a:t>
+              <a:t>01 / 33</a:t>
             </a:r>
           </a:p>
         </p:txBody>
@@ -615,7 +622,7 @@
                 <a:latin typeface="Noto Sans CJK SC"/>
                 <a:ea typeface="Noto Sans CJK SC"/>
               </a:rPr>
-              <a:t>社群运营：三周就能上岗</a:t>
+              <a:t>社群运营：最快的入行跳板</a:t>
             </a:r>
           </a:p>
         </p:txBody>
@@ -654,7 +661,7 @@
                 <a:latin typeface="Noto Sans CJK SC"/>
                 <a:ea typeface="Noto Sans CJK SC"/>
               </a:rPr>
-              <a:t>社群运营：三周就能上岗</a:t>
+              <a:t>社群运营：最快的入行跳板</a:t>
             </a:r>
           </a:p>
         </p:txBody>
@@ -697,7 +704,7 @@
                 <a:latin typeface="Noto Sans CJK SC"/>
                 <a:ea typeface="Noto Sans CJK SC"/>
               </a:rPr>
-              <a:t>学：B站入门课+拆解3个好社群</a:t>
+              <a:t>定位：维护用户关系促复购</a:t>
             </a:r>
           </a:p>
           <a:p>
@@ -716,7 +723,7 @@
                 <a:latin typeface="Noto Sans CJK SC"/>
                 <a:ea typeface="Noto Sans CJK SC"/>
               </a:rPr>
-              <a:t>练：自建30人兴趣群实操一周</a:t>
+              <a:t>每天：群内答疑、发内容、办活动</a:t>
             </a:r>
           </a:p>
           <a:p>
@@ -735,7 +742,7 @@
                 <a:latin typeface="Noto Sans CJK SC"/>
                 <a:ea typeface="Noto Sans CJK SC"/>
               </a:rPr>
-              <a:t>简历写：活跃、转化、裂变数据</a:t>
+              <a:t>核心：持续输出价值不是打杂</a:t>
             </a:r>
           </a:p>
           <a:p>
@@ -754,7 +761,7 @@
                 <a:latin typeface="Noto Sans CJK SC"/>
                 <a:ea typeface="Noto Sans CJK SC"/>
               </a:rPr>
-              <a:t>例：社群活跃度提升35%</a:t>
+              <a:t>技能：话术SOP、用户分层</a:t>
             </a:r>
           </a:p>
           <a:p>
@@ -773,7 +780,7 @@
                 <a:latin typeface="Noto Sans CJK SC"/>
                 <a:ea typeface="Noto Sans CJK SC"/>
               </a:rPr>
-              <a:t>例：裂变活动新增用户500+</a:t>
+              <a:t>适合：外向耐心、爱帮人解决问题</a:t>
             </a:r>
           </a:p>
           <a:p>
@@ -792,7 +799,7 @@
                 <a:latin typeface="Noto Sans CJK SC"/>
                 <a:ea typeface="Noto Sans CJK SC"/>
               </a:rPr>
-              <a:t>面试就讲你建群的真实打法</a:t>
+              <a:t>策略：干1年转新媒体或电商</a:t>
             </a:r>
           </a:p>
         </p:txBody>
@@ -831,7 +838,7 @@
                 <a:latin typeface="Noto Sans CJK SC"/>
                 <a:ea typeface="Noto Sans CJK SC"/>
               </a:rPr>
-              <a:t>10 / 26</a:t>
+              <a:t>10 / 33</a:t>
             </a:r>
           </a:p>
         </p:txBody>
@@ -1155,7 +1162,7 @@
                 <a:latin typeface="Noto Sans CJK SC"/>
                 <a:ea typeface="Noto Sans CJK SC"/>
               </a:rPr>
-              <a:t>软件测试：AI时代的守门员</a:t>
+              <a:t>社群运营：三周就能上岗</a:t>
             </a:r>
           </a:p>
         </p:txBody>
@@ -1194,7 +1201,7 @@
                 <a:latin typeface="Noto Sans CJK SC"/>
                 <a:ea typeface="Noto Sans CJK SC"/>
               </a:rPr>
-              <a:t>软件测试：AI时代的守门员</a:t>
+              <a:t>社群运营：三周就能上岗</a:t>
             </a:r>
           </a:p>
         </p:txBody>
@@ -1237,7 +1244,7 @@
                 <a:latin typeface="Noto Sans CJK SC"/>
                 <a:ea typeface="Noto Sans CJK SC"/>
               </a:rPr>
-              <a:t>定位：上线前最后的质量关卡</a:t>
+              <a:t>学：B站入门课+拆解3个好社群</a:t>
             </a:r>
           </a:p>
           <a:p>
@@ -1256,7 +1263,7 @@
                 <a:latin typeface="Noto Sans CJK SC"/>
                 <a:ea typeface="Noto Sans CJK SC"/>
               </a:rPr>
-              <a:t>每天：写用例、执行测试、提bug</a:t>
+              <a:t>练：自建30人兴趣群实操一周</a:t>
             </a:r>
           </a:p>
           <a:p>
@@ -1275,7 +1282,7 @@
                 <a:latin typeface="Noto Sans CJK SC"/>
                 <a:ea typeface="Noto Sans CJK SC"/>
               </a:rPr>
-              <a:t>工具：禅道、JIRA、Postman</a:t>
+              <a:t>简历写：活跃、转化、裂变数据</a:t>
             </a:r>
           </a:p>
           <a:p>
@@ -1294,7 +1301,7 @@
                 <a:latin typeface="Noto Sans CJK SC"/>
                 <a:ea typeface="Noto Sans CJK SC"/>
               </a:rPr>
-              <a:t>2025真相：纯手工岗竞争激烈</a:t>
+              <a:t>例：社群活跃度提升35%</a:t>
             </a:r>
           </a:p>
           <a:p>
@@ -1313,7 +1320,7 @@
                 <a:latin typeface="Noto Sans CJK SC"/>
                 <a:ea typeface="Noto Sans CJK SC"/>
               </a:rPr>
-              <a:t>门槛上移：SQL加接口成标配</a:t>
+              <a:t>例：裂变活动新增用户500+</a:t>
             </a:r>
           </a:p>
           <a:p>
@@ -1332,7 +1339,7 @@
                 <a:latin typeface="Noto Sans CJK SC"/>
                 <a:ea typeface="Noto Sans CJK SC"/>
               </a:rPr>
-              <a:t>亮点方向：AI产品测试缺人</a:t>
+              <a:t>面试就讲你建群的真实打法</a:t>
             </a:r>
           </a:p>
         </p:txBody>
@@ -1371,7 +1378,7 @@
                 <a:latin typeface="Noto Sans CJK SC"/>
                 <a:ea typeface="Noto Sans CJK SC"/>
               </a:rPr>
-              <a:t>11 / 26</a:t>
+              <a:t>11 / 33</a:t>
             </a:r>
           </a:p>
         </p:txBody>
@@ -1695,7 +1702,7 @@
                 <a:latin typeface="Noto Sans CJK SC"/>
                 <a:ea typeface="Noto Sans CJK SC"/>
               </a:rPr>
-              <a:t>软件测试：三个月学习路线</a:t>
+              <a:t>软件测试：AI时代的守门员</a:t>
             </a:r>
           </a:p>
         </p:txBody>
@@ -1734,7 +1741,7 @@
                 <a:latin typeface="Noto Sans CJK SC"/>
                 <a:ea typeface="Noto Sans CJK SC"/>
               </a:rPr>
-              <a:t>软件测试：三个月学习路线</a:t>
+              <a:t>软件测试：AI时代的守门员</a:t>
             </a:r>
           </a:p>
         </p:txBody>
@@ -1777,7 +1784,7 @@
                 <a:latin typeface="Noto Sans CJK SC"/>
                 <a:ea typeface="Noto Sans CJK SC"/>
               </a:rPr>
-              <a:t>第1月：测试理论+用例编写</a:t>
+              <a:t>定位：上线前最后的质量关卡</a:t>
             </a:r>
           </a:p>
           <a:p>
@@ -1796,7 +1803,7 @@
                 <a:latin typeface="Noto Sans CJK SC"/>
                 <a:ea typeface="Noto Sans CJK SC"/>
               </a:rPr>
-              <a:t>第2月：SQL基础+Postman接口</a:t>
+              <a:t>每天：写用例、执行测试、提bug</a:t>
             </a:r>
           </a:p>
           <a:p>
@@ -1815,7 +1822,7 @@
                 <a:latin typeface="Noto Sans CJK SC"/>
                 <a:ea typeface="Noto Sans CJK SC"/>
               </a:rPr>
-              <a:t>第3月：Linux+Python自动化入门</a:t>
+              <a:t>工具：禅道、JIRA、Postman</a:t>
             </a:r>
           </a:p>
           <a:p>
@@ -1834,7 +1841,7 @@
                 <a:latin typeface="Noto Sans CJK SC"/>
                 <a:ea typeface="Noto Sans CJK SC"/>
               </a:rPr>
-              <a:t>作品：常用App测试用例10份</a:t>
+              <a:t>2025真相：纯手工岗竞争激烈</a:t>
             </a:r>
           </a:p>
           <a:p>
@@ -1853,7 +1860,7 @@
                 <a:latin typeface="Noto Sans CJK SC"/>
                 <a:ea typeface="Noto Sans CJK SC"/>
               </a:rPr>
-              <a:t>投递：先投中小厂攒项目经验</a:t>
+              <a:t>门槛上移：SQL加接口成标配</a:t>
             </a:r>
           </a:p>
           <a:p>
@@ -1872,7 +1879,7 @@
                 <a:latin typeface="Noto Sans CJK SC"/>
                 <a:ea typeface="Noto Sans CJK SC"/>
               </a:rPr>
-              <a:t>警告：没学完别裸投手工岗</a:t>
+              <a:t>亮点方向：AI产品测试缺人</a:t>
             </a:r>
           </a:p>
         </p:txBody>
@@ -1911,7 +1918,7 @@
                 <a:latin typeface="Noto Sans CJK SC"/>
                 <a:ea typeface="Noto Sans CJK SC"/>
               </a:rPr>
-              <a:t>12 / 26</a:t>
+              <a:t>12 / 33</a:t>
             </a:r>
           </a:p>
         </p:txBody>
@@ -2235,7 +2242,7 @@
                 <a:latin typeface="Noto Sans CJK SC"/>
                 <a:ea typeface="Noto Sans CJK SC"/>
               </a:rPr>
-              <a:t>数据运营：最抗AI的运营岗</a:t>
+              <a:t>软件测试：三个月学习路线</a:t>
             </a:r>
           </a:p>
         </p:txBody>
@@ -2274,7 +2281,7 @@
                 <a:latin typeface="Noto Sans CJK SC"/>
                 <a:ea typeface="Noto Sans CJK SC"/>
               </a:rPr>
-              <a:t>数据运营：最抗AI的运营岗</a:t>
+              <a:t>软件测试：三个月学习路线</a:t>
             </a:r>
           </a:p>
         </p:txBody>
@@ -2317,7 +2324,7 @@
                 <a:latin typeface="Noto Sans CJK SC"/>
                 <a:ea typeface="Noto Sans CJK SC"/>
               </a:rPr>
-              <a:t>定位：用数据驱动业务决策</a:t>
+              <a:t>第1月：测试理论+用例编写</a:t>
             </a:r>
           </a:p>
           <a:p>
@@ -2336,7 +2343,7 @@
                 <a:latin typeface="Noto Sans CJK SC"/>
                 <a:ea typeface="Noto Sans CJK SC"/>
               </a:rPr>
-              <a:t>每天：SQL取数、做报表、找原因</a:t>
+              <a:t>第2月：SQL基础+Postman接口</a:t>
             </a:r>
           </a:p>
           <a:p>
@@ -2355,7 +2362,7 @@
                 <a:latin typeface="Noto Sans CJK SC"/>
                 <a:ea typeface="Noto Sans CJK SC"/>
               </a:rPr>
-              <a:t>技能：SQL必备、Excel透视表</a:t>
+              <a:t>第3月：Linux+Python自动化入门</a:t>
             </a:r>
           </a:p>
           <a:p>
@@ -2374,7 +2381,7 @@
                 <a:latin typeface="Noto Sans CJK SC"/>
                 <a:ea typeface="Noto Sans CJK SC"/>
               </a:rPr>
-              <a:t>加分：Python、BI、指标体系</a:t>
+              <a:t>作品：常用App测试用例10份</a:t>
             </a:r>
           </a:p>
           <a:p>
@@ -2393,7 +2400,7 @@
                 <a:latin typeface="Noto Sans CJK SC"/>
                 <a:ea typeface="Noto Sans CJK SC"/>
               </a:rPr>
-              <a:t>趋势：业务+数据复合岗最抢手</a:t>
+              <a:t>投递：先投中小厂攒项目经验</a:t>
             </a:r>
           </a:p>
           <a:p>
@@ -2412,7 +2419,7 @@
                 <a:latin typeface="Noto Sans CJK SC"/>
                 <a:ea typeface="Noto Sans CJK SC"/>
               </a:rPr>
-              <a:t>适合：逻辑好、对数字敏感的人</a:t>
+              <a:t>警告：没学完别裸投手工岗</a:t>
             </a:r>
           </a:p>
         </p:txBody>
@@ -2451,7 +2458,7 @@
                 <a:latin typeface="Noto Sans CJK SC"/>
                 <a:ea typeface="Noto Sans CJK SC"/>
               </a:rPr>
-              <a:t>13 / 26</a:t>
+              <a:t>13 / 33</a:t>
             </a:r>
           </a:p>
         </p:txBody>
@@ -2775,7 +2782,7 @@
                 <a:latin typeface="Noto Sans CJK SC"/>
                 <a:ea typeface="Noto Sans CJK SC"/>
               </a:rPr>
-              <a:t>数据运营：三个月刷题路线</a:t>
+              <a:t>数据运营：最抗AI的运营岗</a:t>
             </a:r>
           </a:p>
         </p:txBody>
@@ -2814,7 +2821,7 @@
                 <a:latin typeface="Noto Sans CJK SC"/>
                 <a:ea typeface="Noto Sans CJK SC"/>
               </a:rPr>
-              <a:t>数据运营：三个月刷题路线</a:t>
+              <a:t>数据运营：最抗AI的运营岗</a:t>
             </a:r>
           </a:p>
         </p:txBody>
@@ -2857,7 +2864,7 @@
                 <a:latin typeface="Noto Sans CJK SC"/>
                 <a:ea typeface="Noto Sans CJK SC"/>
               </a:rPr>
-              <a:t>第1月：Excel透视表+SQL入门</a:t>
+              <a:t>定位：用数据驱动业务决策</a:t>
             </a:r>
           </a:p>
           <a:p>
@@ -2876,7 +2883,7 @@
                 <a:latin typeface="Noto Sans CJK SC"/>
                 <a:ea typeface="Noto Sans CJK SC"/>
               </a:rPr>
-              <a:t>第2月：牛客SQL题库刷50题</a:t>
+              <a:t>每天：SQL取数、做报表、找原因</a:t>
             </a:r>
           </a:p>
           <a:p>
@@ -2895,7 +2902,7 @@
                 <a:latin typeface="Noto Sans CJK SC"/>
                 <a:ea typeface="Noto Sans CJK SC"/>
               </a:rPr>
-              <a:t>第3月：公开数据做3个分析</a:t>
+              <a:t>技能：SQL必备、Excel透视表</a:t>
             </a:r>
           </a:p>
           <a:p>
@@ -2914,7 +2921,7 @@
                 <a:latin typeface="Noto Sans CJK SC"/>
                 <a:ea typeface="Noto Sans CJK SC"/>
               </a:rPr>
-              <a:t>作品：问题、数据、结论三段式</a:t>
+              <a:t>加分：Python、BI、指标体系</a:t>
             </a:r>
           </a:p>
           <a:p>
@@ -2933,7 +2940,7 @@
                 <a:latin typeface="Noto Sans CJK SC"/>
                 <a:ea typeface="Noto Sans CJK SC"/>
               </a:rPr>
-              <a:t>面试：SQL手写题必考提前练</a:t>
+              <a:t>趋势：业务+数据复合岗最抢手</a:t>
             </a:r>
           </a:p>
           <a:p>
@@ -2952,7 +2959,7 @@
                 <a:latin typeface="Noto Sans CJK SC"/>
                 <a:ea typeface="Noto Sans CJK SC"/>
               </a:rPr>
-              <a:t>投递：数据运营和商业分析都投</a:t>
+              <a:t>适合：逻辑好、对数字敏感的人</a:t>
             </a:r>
           </a:p>
         </p:txBody>
@@ -2991,7 +2998,7 @@
                 <a:latin typeface="Noto Sans CJK SC"/>
                 <a:ea typeface="Noto Sans CJK SC"/>
               </a:rPr>
-              <a:t>14 / 26</a:t>
+              <a:t>14 / 33</a:t>
             </a:r>
           </a:p>
         </p:txBody>
@@ -3315,7 +3322,7 @@
                 <a:latin typeface="Noto Sans CJK SC"/>
                 <a:ea typeface="Noto Sans CJK SC"/>
               </a:rPr>
-              <a:t>高校助理：有寒暑假的稳定牌</a:t>
+              <a:t>数据运营：三个月刷题路线</a:t>
             </a:r>
           </a:p>
         </p:txBody>
@@ -3354,7 +3361,7 @@
                 <a:latin typeface="Noto Sans CJK SC"/>
                 <a:ea typeface="Noto Sans CJK SC"/>
               </a:rPr>
-              <a:t>高校助理：有寒暑假的稳定牌</a:t>
+              <a:t>数据运营：三个月刷题路线</a:t>
             </a:r>
           </a:p>
         </p:txBody>
@@ -3397,7 +3404,7 @@
                 <a:latin typeface="Noto Sans CJK SC"/>
                 <a:ea typeface="Noto Sans CJK SC"/>
               </a:rPr>
-              <a:t>岗位：行政、教务、学生工作</a:t>
+              <a:t>第1月：Excel透视表+SQL入门</a:t>
             </a:r>
           </a:p>
           <a:p>
@@ -3416,7 +3423,7 @@
                 <a:latin typeface="Noto Sans CJK SC"/>
                 <a:ea typeface="Noto Sans CJK SC"/>
               </a:rPr>
-              <a:t>学历：本科可投行政教辅岗</a:t>
+              <a:t>第2月：牛客SQL题库刷50题</a:t>
             </a:r>
           </a:p>
           <a:p>
@@ -3435,7 +3442,7 @@
                 <a:latin typeface="Noto Sans CJK SC"/>
                 <a:ea typeface="Noto Sans CJK SC"/>
               </a:rPr>
-              <a:t>注意：辅导员岗多要硕士党员</a:t>
+              <a:t>第3月：公开数据做3个分析</a:t>
             </a:r>
           </a:p>
           <a:p>
@@ -3454,7 +3461,7 @@
                 <a:latin typeface="Noto Sans CJK SC"/>
                 <a:ea typeface="Noto Sans CJK SC"/>
               </a:rPr>
-              <a:t>性质：合同制为主，求稳定合适</a:t>
+              <a:t>作品：问题、数据、结论三段式</a:t>
             </a:r>
           </a:p>
           <a:p>
@@ -3473,7 +3480,7 @@
                 <a:latin typeface="Noto Sans CJK SC"/>
                 <a:ea typeface="Noto Sans CJK SC"/>
               </a:rPr>
-              <a:t>福利：寒暑假是最大亮点</a:t>
+              <a:t>面试：SQL手写题必考提前练</a:t>
             </a:r>
           </a:p>
           <a:p>
@@ -3492,7 +3499,7 @@
                 <a:latin typeface="Noto Sans CJK SC"/>
                 <a:ea typeface="Noto Sans CJK SC"/>
               </a:rPr>
-              <a:t>渠道：高校人才网+学校官网</a:t>
+              <a:t>投递：数据运营和商业分析都投</a:t>
             </a:r>
           </a:p>
         </p:txBody>
@@ -3531,7 +3538,7 @@
                 <a:latin typeface="Noto Sans CJK SC"/>
                 <a:ea typeface="Noto Sans CJK SC"/>
               </a:rPr>
-              <a:t>15 / 26</a:t>
+              <a:t>15 / 33</a:t>
             </a:r>
           </a:p>
         </p:txBody>
@@ -3855,7 +3862,7 @@
                 <a:latin typeface="Noto Sans CJK SC"/>
                 <a:ea typeface="Noto Sans CJK SC"/>
               </a:rPr>
-              <a:t>高校助理：怎么投不踩坑</a:t>
+              <a:t>高校助理：有寒暑假的稳定牌</a:t>
             </a:r>
           </a:p>
         </p:txBody>
@@ -3894,7 +3901,7 @@
                 <a:latin typeface="Noto Sans CJK SC"/>
                 <a:ea typeface="Noto Sans CJK SC"/>
               </a:rPr>
-              <a:t>高校助理：怎么投不踩坑</a:t>
+              <a:t>高校助理：有寒暑假的稳定牌</a:t>
             </a:r>
           </a:p>
         </p:txBody>
@@ -3937,7 +3944,7 @@
                 <a:latin typeface="Noto Sans CJK SC"/>
                 <a:ea typeface="Noto Sans CJK SC"/>
               </a:rPr>
-              <a:t>区分：事业编考试与合同制直投</a:t>
+              <a:t>岗位：行政、教务、学生工作</a:t>
             </a:r>
           </a:p>
           <a:p>
@@ -3956,7 +3963,7 @@
                 <a:latin typeface="Noto Sans CJK SC"/>
                 <a:ea typeface="Noto Sans CJK SC"/>
               </a:rPr>
-              <a:t>简历：突出组织协调和公文能力</a:t>
+              <a:t>学历：本科可投行政教辅岗</a:t>
             </a:r>
           </a:p>
           <a:p>
@@ -3975,7 +3982,7 @@
                 <a:latin typeface="Noto Sans CJK SC"/>
                 <a:ea typeface="Noto Sans CJK SC"/>
               </a:rPr>
-              <a:t>例：处理文件300份零差错</a:t>
+              <a:t>注意：辅导员岗多要硕士党员</a:t>
             </a:r>
           </a:p>
           <a:p>
@@ -3994,7 +4001,7 @@
                 <a:latin typeface="Noto Sans CJK SC"/>
                 <a:ea typeface="Noto Sans CJK SC"/>
               </a:rPr>
-              <a:t>例：活动满意度调查95%</a:t>
+              <a:t>性质：合同制为主，求稳定合适</a:t>
             </a:r>
           </a:p>
           <a:p>
@@ -4013,7 +4020,7 @@
                 <a:latin typeface="Noto Sans CJK SC"/>
                 <a:ea typeface="Noto Sans CJK SC"/>
               </a:rPr>
-              <a:t>面试：稳定性和服务意识是核心</a:t>
+              <a:t>福利：寒暑假是最大亮点</a:t>
             </a:r>
           </a:p>
           <a:p>
@@ -4032,7 +4039,7 @@
                 <a:latin typeface="Noto Sans CJK SC"/>
                 <a:ea typeface="Noto Sans CJK SC"/>
               </a:rPr>
-              <a:t>当备胎投：撞上就是赚到</a:t>
+              <a:t>渠道：高校人才网+学校官网</a:t>
             </a:r>
           </a:p>
         </p:txBody>
@@ -4071,7 +4078,7 @@
                 <a:latin typeface="Noto Sans CJK SC"/>
                 <a:ea typeface="Noto Sans CJK SC"/>
               </a:rPr>
-              <a:t>16 / 26</a:t>
+              <a:t>16 / 33</a:t>
             </a:r>
           </a:p>
         </p:txBody>
@@ -4395,7 +4402,7 @@
                 <a:latin typeface="Noto Sans CJK SC"/>
                 <a:ea typeface="Noto Sans CJK SC"/>
               </a:rPr>
-              <a:t>行政专员：保底上岸牌</a:t>
+              <a:t>高校助理：怎么投不踩坑</a:t>
             </a:r>
           </a:p>
         </p:txBody>
@@ -4434,7 +4441,7 @@
                 <a:latin typeface="Noto Sans CJK SC"/>
                 <a:ea typeface="Noto Sans CJK SC"/>
               </a:rPr>
-              <a:t>行政专员：保底上岸牌</a:t>
+              <a:t>高校助理：怎么投不踩坑</a:t>
             </a:r>
           </a:p>
         </p:txBody>
@@ -4477,7 +4484,7 @@
                 <a:latin typeface="Noto Sans CJK SC"/>
                 <a:ea typeface="Noto Sans CJK SC"/>
               </a:rPr>
-              <a:t>定位：让办公室正常运转的人</a:t>
+              <a:t>区分：事业编考试与合同制直投</a:t>
             </a:r>
           </a:p>
           <a:p>
@@ -4496,7 +4503,7 @@
                 <a:latin typeface="Noto Sans CJK SC"/>
                 <a:ea typeface="Noto Sans CJK SC"/>
               </a:rPr>
-              <a:t>每天：会议、采购、报销、活动</a:t>
+              <a:t>简历：突出组织协调和公文能力</a:t>
             </a:r>
           </a:p>
           <a:p>
@@ -4515,7 +4522,7 @@
                 <a:latin typeface="Noto Sans CJK SC"/>
                 <a:ea typeface="Noto Sans CJK SC"/>
               </a:rPr>
-              <a:t>门槛最低：两周熟悉即可上手</a:t>
+              <a:t>例：处理文件300份零差错</a:t>
             </a:r>
           </a:p>
           <a:p>
@@ -4534,7 +4541,7 @@
                 <a:latin typeface="Noto Sans CJK SC"/>
                 <a:ea typeface="Noto Sans CJK SC"/>
               </a:rPr>
-              <a:t>简历量化：省钱、零风险、提效</a:t>
+              <a:t>例：活动满意度调查95%</a:t>
             </a:r>
           </a:p>
           <a:p>
@@ -4553,7 +4560,7 @@
                 <a:latin typeface="Noto Sans CJK SC"/>
                 <a:ea typeface="Noto Sans CJK SC"/>
               </a:rPr>
-              <a:t>例：电子台账检索提速90%</a:t>
+              <a:t>面试：稳定性和服务意识是核心</a:t>
             </a:r>
           </a:p>
           <a:p>
@@ -4572,7 +4579,7 @@
                 <a:latin typeface="Noto Sans CJK SC"/>
                 <a:ea typeface="Noto Sans CJK SC"/>
               </a:rPr>
-              <a:t>适合：细心靠谱、想先上岸的人</a:t>
+              <a:t>当备胎投：撞上就是赚到</a:t>
             </a:r>
           </a:p>
         </p:txBody>
@@ -4611,7 +4618,7 @@
                 <a:latin typeface="Noto Sans CJK SC"/>
                 <a:ea typeface="Noto Sans CJK SC"/>
               </a:rPr>
-              <a:t>17 / 26</a:t>
+              <a:t>17 / 33</a:t>
             </a:r>
           </a:p>
         </p:txBody>
@@ -4935,7 +4942,7 @@
                 <a:latin typeface="Noto Sans CJK SC"/>
                 <a:ea typeface="Noto Sans CJK SC"/>
               </a:rPr>
-              <a:t>简历通用公式：STAR加量化</a:t>
+              <a:t>行政专员：保底上岸牌</a:t>
             </a:r>
           </a:p>
         </p:txBody>
@@ -4974,7 +4981,7 @@
                 <a:latin typeface="Noto Sans CJK SC"/>
                 <a:ea typeface="Noto Sans CJK SC"/>
               </a:rPr>
-              <a:t>简历通用公式：STAR加量化</a:t>
+              <a:t>行政专员：保底上岸牌</a:t>
             </a:r>
           </a:p>
         </p:txBody>
@@ -5017,7 +5024,7 @@
                 <a:latin typeface="Noto Sans CJK SC"/>
                 <a:ea typeface="Noto Sans CJK SC"/>
               </a:rPr>
-              <a:t>S情境：什么背景下什么问题</a:t>
+              <a:t>定位：让办公室正常运转的人</a:t>
             </a:r>
           </a:p>
           <a:p>
@@ -5036,7 +5043,7 @@
                 <a:latin typeface="Noto Sans CJK SC"/>
                 <a:ea typeface="Noto Sans CJK SC"/>
               </a:rPr>
-              <a:t>T任务：你负责的具体目标</a:t>
+              <a:t>每天：会议、采购、报销、活动</a:t>
             </a:r>
           </a:p>
           <a:p>
@@ -5055,7 +5062,7 @@
                 <a:latin typeface="Noto Sans CJK SC"/>
                 <a:ea typeface="Noto Sans CJK SC"/>
               </a:rPr>
-              <a:t>A行动：用了什么方法和工具</a:t>
+              <a:t>门槛最低：两周熟悉即可上手</a:t>
             </a:r>
           </a:p>
           <a:p>
@@ -5074,7 +5081,7 @@
                 <a:latin typeface="Noto Sans CJK SC"/>
                 <a:ea typeface="Noto Sans CJK SC"/>
               </a:rPr>
-              <a:t>R结果：数字说话拒绝形容词</a:t>
+              <a:t>简历量化：省钱、零风险、提效</a:t>
             </a:r>
           </a:p>
           <a:p>
@@ -5093,7 +5100,7 @@
                 <a:latin typeface="Noto Sans CJK SC"/>
                 <a:ea typeface="Noto Sans CJK SC"/>
               </a:rPr>
-              <a:t>反例：负责公众号日常运营</a:t>
+              <a:t>例：电子台账检索提速90%</a:t>
             </a:r>
           </a:p>
           <a:p>
@@ -5112,7 +5119,7 @@
                 <a:latin typeface="Noto Sans CJK SC"/>
                 <a:ea typeface="Noto Sans CJK SC"/>
               </a:rPr>
-              <a:t>正例：3个月打开率2%提到5%</a:t>
+              <a:t>适合：细心靠谱、想先上岸的人</a:t>
             </a:r>
           </a:p>
         </p:txBody>
@@ -5151,7 +5158,7 @@
                 <a:latin typeface="Noto Sans CJK SC"/>
                 <a:ea typeface="Noto Sans CJK SC"/>
               </a:rPr>
-              <a:t>18 / 26</a:t>
+              <a:t>18 / 33</a:t>
             </a:r>
           </a:p>
         </p:txBody>
@@ -5475,7 +5482,7 @@
                 <a:latin typeface="Noto Sans CJK SC"/>
                 <a:ea typeface="Noto Sans CJK SC"/>
               </a:rPr>
-              <a:t>Gap半年话术：30秒带过</a:t>
+              <a:t>AI 训练师：最好上手的AI岗</a:t>
             </a:r>
           </a:p>
         </p:txBody>
@@ -5514,7 +5521,7 @@
                 <a:latin typeface="Noto Sans CJK SC"/>
                 <a:ea typeface="Noto Sans CJK SC"/>
               </a:rPr>
-              <a:t>Gap半年话术：30秒带过</a:t>
+              <a:t>AI 训练师：最好上手的AI岗</a:t>
             </a:r>
           </a:p>
         </p:txBody>
@@ -5557,7 +5564,7 @@
                 <a:latin typeface="Noto Sans CJK SC"/>
                 <a:ea typeface="Noto Sans CJK SC"/>
               </a:rPr>
-              <a:t>考证版：系统学习已产出成果</a:t>
+              <a:t>定位：教AI的人（标注质检评测）</a:t>
             </a:r>
           </a:p>
           <a:p>
@@ -5576,7 +5583,7 @@
                 <a:latin typeface="Noto Sans CJK SC"/>
                 <a:ea typeface="Noto Sans CJK SC"/>
               </a:rPr>
-              <a:t>家庭版：事务办妥可随时到岗</a:t>
+              <a:t>入门：学历门槛低本科绰绰有余</a:t>
             </a:r>
           </a:p>
           <a:p>
@@ -5595,7 +5602,7 @@
                 <a:latin typeface="Noto Sans CJK SC"/>
                 <a:ea typeface="Noto Sans CJK SC"/>
               </a:rPr>
-              <a:t>休整版：状态恢复并补了技能</a:t>
+              <a:t>每天：按规范标注质检打分</a:t>
             </a:r>
           </a:p>
           <a:p>
@@ -5614,7 +5621,7 @@
                 <a:latin typeface="Noto Sans CJK SC"/>
                 <a:ea typeface="Noto Sans CJK SC"/>
               </a:rPr>
-              <a:t>原则：不撒谎、不道歉、不恋战</a:t>
+              <a:t>特点：不看代码看细心和规范</a:t>
             </a:r>
           </a:p>
           <a:p>
@@ -5633,7 +5640,7 @@
                 <a:latin typeface="Noto Sans CJK SC"/>
                 <a:ea typeface="Noto Sans CJK SC"/>
               </a:rPr>
-              <a:t>落点：马上引到岗位匹配度</a:t>
+              <a:t>市场：一线岗位多，AI行业门票</a:t>
             </a:r>
           </a:p>
           <a:p>
@@ -5652,7 +5659,7 @@
                 <a:latin typeface="Noto Sans CJK SC"/>
                 <a:ea typeface="Noto Sans CJK SC"/>
               </a:rPr>
-              <a:t>证据：gap期做的每件事都算数</a:t>
+              <a:t>跳板：1年内转质检评测运营</a:t>
             </a:r>
           </a:p>
         </p:txBody>
@@ -5691,7 +5698,7 @@
                 <a:latin typeface="Noto Sans CJK SC"/>
                 <a:ea typeface="Noto Sans CJK SC"/>
               </a:rPr>
-              <a:t>19 / 26</a:t>
+              <a:t>19 / 33</a:t>
             </a:r>
           </a:p>
         </p:txBody>
@@ -6097,7 +6104,7 @@
                 <a:latin typeface="Noto Sans CJK SC"/>
                 <a:ea typeface="Noto Sans CJK SC"/>
               </a:rPr>
-              <a:t>本科学历：七个岗位全部够格</a:t>
+              <a:t>本科学历：十个岗位全部够格</a:t>
             </a:r>
           </a:p>
           <a:p>
@@ -6212,7 +6219,7 @@
                 <a:latin typeface="Noto Sans CJK SC"/>
                 <a:ea typeface="Noto Sans CJK SC"/>
               </a:rPr>
-              <a:t>02 / 26</a:t>
+              <a:t>02 / 33</a:t>
             </a:r>
           </a:p>
         </p:txBody>
@@ -6500,7 +6507,7 @@
                 <a:latin typeface="Noto Sans CJK SC"/>
                 <a:ea typeface="Noto Sans CJK SC"/>
               </a:rPr>
-              <a:t>过来人共识：一年内gap市场能接受</a:t>
+              <a:t>AI 训练师：怎么入行</a:t>
             </a:r>
           </a:p>
         </p:txBody>
@@ -6539,7 +6546,7 @@
                 <a:latin typeface="Noto Sans CJK SC"/>
                 <a:ea typeface="Noto Sans CJK SC"/>
               </a:rPr>
-              <a:t>过来人共识：一年内gap市场能接受</a:t>
+              <a:t>AI 训练师：怎么入行</a:t>
             </a:r>
           </a:p>
         </p:txBody>
@@ -6582,7 +6589,7 @@
                 <a:latin typeface="Noto Sans CJK SC"/>
                 <a:ea typeface="Noto Sans CJK SC"/>
               </a:rPr>
-              <a:t>求职市场认可一年左右的gap</a:t>
+              <a:t>学：大模型基础+重度用AI工具</a:t>
             </a:r>
           </a:p>
           <a:p>
@@ -6601,7 +6608,7 @@
                 <a:latin typeface="Noto Sans CJK SC"/>
                 <a:ea typeface="Noto Sans CJK SC"/>
               </a:rPr>
-              <a:t>招聘总监：离职状态到岗更快</a:t>
+              <a:t>练：众包平台接小任务攒手感</a:t>
             </a:r>
           </a:p>
           <a:p>
@@ -6620,7 +6627,7 @@
                 <a:latin typeface="Noto Sans CJK SC"/>
                 <a:ea typeface="Noto Sans CJK SC"/>
               </a:rPr>
-              <a:t>HR担心的是稳定性不是空窗</a:t>
+              <a:t>作品：50条评分+20个badcase</a:t>
             </a:r>
           </a:p>
           <a:p>
@@ -6639,7 +6646,7 @@
                 <a:latin typeface="Noto Sans CJK SC"/>
                 <a:ea typeface="Noto Sans CJK SC"/>
               </a:rPr>
-              <a:t>易接受的回答：学习调整突破</a:t>
+              <a:t>投递：数据服务商+大模型公司</a:t>
             </a:r>
           </a:p>
           <a:p>
@@ -6658,7 +6665,7 @@
                 <a:latin typeface="Noto Sans CJK SC"/>
                 <a:ea typeface="Noto Sans CJK SC"/>
               </a:rPr>
-              <a:t>你的gap半年在安全区内</a:t>
+              <a:t>简历：突出细心规范零差错</a:t>
             </a:r>
           </a:p>
           <a:p>
@@ -6677,7 +6684,7 @@
                 <a:latin typeface="Noto Sans CJK SC"/>
                 <a:ea typeface="Noto Sans CJK SC"/>
               </a:rPr>
-              <a:t>来源：牛客网+知乎过来人帖</a:t>
+              <a:t>警告：纯标注天花板低早谋转型</a:t>
             </a:r>
           </a:p>
         </p:txBody>
@@ -6716,7 +6723,7 @@
                 <a:latin typeface="Noto Sans CJK SC"/>
                 <a:ea typeface="Noto Sans CJK SC"/>
               </a:rPr>
-              <a:t>20 / 26</a:t>
+              <a:t>20 / 33</a:t>
             </a:r>
           </a:p>
         </p:txBody>
@@ -7040,7 +7047,7 @@
                 <a:latin typeface="Noto Sans CJK SC"/>
                 <a:ea typeface="Noto Sans CJK SC"/>
               </a:rPr>
-              <a:t>面试三坑：过度解释最败好感</a:t>
+              <a:t>AIGC 内容运营：会AI的内容人</a:t>
             </a:r>
           </a:p>
         </p:txBody>
@@ -7079,7 +7086,7 @@
                 <a:latin typeface="Noto Sans CJK SC"/>
                 <a:ea typeface="Noto Sans CJK SC"/>
               </a:rPr>
-              <a:t>面试三坑：过度解释最败好感</a:t>
+              <a:t>AIGC 内容运营：会AI的内容人</a:t>
             </a:r>
           </a:p>
         </p:txBody>
@@ -7122,7 +7129,7 @@
                 <a:latin typeface="Noto Sans CJK SC"/>
                 <a:ea typeface="Noto Sans CJK SC"/>
               </a:rPr>
-              <a:t>坑一：过度解释越说越像心虚</a:t>
+              <a:t>定位：用AI批量做内容的新媒体</a:t>
             </a:r>
           </a:p>
           <a:p>
@@ -7141,7 +7148,7 @@
                 <a:latin typeface="Noto Sans CJK SC"/>
                 <a:ea typeface="Noto Sans CJK SC"/>
               </a:rPr>
-              <a:t>坑二：贬低前司显得难相处</a:t>
+              <a:t>工作流：人选题，AI初稿，人精修</a:t>
             </a:r>
           </a:p>
           <a:p>
@@ -7160,7 +7167,7 @@
                 <a:latin typeface="Noto Sans CJK SC"/>
                 <a:ea typeface="Noto Sans CJK SC"/>
               </a:rPr>
-              <a:t>坑三：消极表达等于自曝状态差</a:t>
+              <a:t>工具：豆包Kimi即梦剪映AI</a:t>
             </a:r>
           </a:p>
           <a:p>
@@ -7179,7 +7186,7 @@
                 <a:latin typeface="Noto Sans CJK SC"/>
                 <a:ea typeface="Noto Sans CJK SC"/>
               </a:rPr>
-              <a:t>正确第一句：原因一句带过</a:t>
+              <a:t>优势：产能是普通运营3-5倍</a:t>
             </a:r>
           </a:p>
           <a:p>
@@ -7198,7 +7205,7 @@
                 <a:latin typeface="Noto Sans CJK SC"/>
                 <a:ea typeface="Noto Sans CJK SC"/>
               </a:rPr>
-              <a:t>第二句：讲空窗期学了做了什么</a:t>
+              <a:t>关键：内容判断力+提示词能力</a:t>
             </a:r>
           </a:p>
           <a:p>
@@ -7217,7 +7224,7 @@
                 <a:latin typeface="Noto Sans CJK SC"/>
                 <a:ea typeface="Noto Sans CJK SC"/>
               </a:rPr>
-              <a:t>第三句：拉回当下状态好能到岗</a:t>
+              <a:t>投递：以新媒体+AI技能入行</a:t>
             </a:r>
           </a:p>
         </p:txBody>
@@ -7256,7 +7263,7 @@
                 <a:latin typeface="Noto Sans CJK SC"/>
                 <a:ea typeface="Noto Sans CJK SC"/>
               </a:rPr>
-              <a:t>21 / 26</a:t>
+              <a:t>21 / 33</a:t>
             </a:r>
           </a:p>
         </p:txBody>
@@ -7580,7 +7587,7 @@
                 <a:latin typeface="Noto Sans CJK SC"/>
                 <a:ea typeface="Noto Sans CJK SC"/>
               </a:rPr>
-              <a:t>真实时间线：熬过崩溃期就上岸</a:t>
+              <a:t>AIGC 内容运营：学法路线</a:t>
             </a:r>
           </a:p>
         </p:txBody>
@@ -7619,7 +7626,7 @@
                 <a:latin typeface="Noto Sans CJK SC"/>
                 <a:ea typeface="Noto Sans CJK SC"/>
               </a:rPr>
-              <a:t>真实时间线：熬过崩溃期就上岸</a:t>
+              <a:t>AIGC 内容运营：学法路线</a:t>
             </a:r>
           </a:p>
         </p:txBody>
@@ -7662,7 +7669,7 @@
                 <a:latin typeface="Noto Sans CJK SC"/>
                 <a:ea typeface="Noto Sans CJK SC"/>
               </a:rPr>
-              <a:t>真实案例：gap一年五个月上岸</a:t>
+              <a:t>第1-2周：深度使用3个写作AI</a:t>
             </a:r>
           </a:p>
           <a:p>
@@ -7681,7 +7688,7 @@
                 <a:latin typeface="Noto Sans CJK SC"/>
                 <a:ea typeface="Noto Sans CJK SC"/>
               </a:rPr>
-              <a:t>节奏：心理建设到offer五个月</a:t>
+              <a:t>第3周：绘图AI出图30张</a:t>
             </a:r>
           </a:p>
           <a:p>
@@ -7700,7 +7707,7 @@
                 <a:latin typeface="Noto Sans CJK SC"/>
                 <a:ea typeface="Noto Sans CJK SC"/>
               </a:rPr>
-              <a:t>每天专注3-4小时投20+岗位</a:t>
+              <a:t>第4-6周：AI辅助跑账号30天</a:t>
             </a:r>
           </a:p>
           <a:p>
@@ -7719,7 +7726,7 @@
                 <a:latin typeface="Noto Sans CJK SC"/>
                 <a:ea typeface="Noto Sans CJK SC"/>
               </a:rPr>
-              <a:t>转折：offer来自朋友内推</a:t>
+              <a:t>作品：AI内容工作流SOP</a:t>
             </a:r>
           </a:p>
           <a:p>
@@ -7738,7 +7745,7 @@
                 <a:latin typeface="Noto Sans CJK SC"/>
                 <a:ea typeface="Noto Sans CJK SC"/>
               </a:rPr>
-              <a:t>心态：第三个月最容易崩溃</a:t>
+              <a:t>简历：AI提效要量化写出来</a:t>
             </a:r>
           </a:p>
           <a:p>
@@ -7757,7 +7764,7 @@
                 <a:latin typeface="Noto Sans CJK SC"/>
                 <a:ea typeface="Noto Sans CJK SC"/>
               </a:rPr>
-              <a:t>解药：看到更长gap的成功者</a:t>
+              <a:t>面试：带提示词库和作品</a:t>
             </a:r>
           </a:p>
         </p:txBody>
@@ -7796,7 +7803,7 @@
                 <a:latin typeface="Noto Sans CJK SC"/>
                 <a:ea typeface="Noto Sans CJK SC"/>
               </a:rPr>
-              <a:t>22 / 26</a:t>
+              <a:t>22 / 33</a:t>
             </a:r>
           </a:p>
         </p:txBody>
@@ -8120,7 +8127,7 @@
                 <a:latin typeface="Noto Sans CJK SC"/>
                 <a:ea typeface="Noto Sans CJK SC"/>
               </a:rPr>
-              <a:t>12周行动计划</a:t>
+              <a:t>智能客服运营：AI客服训练师</a:t>
             </a:r>
           </a:p>
         </p:txBody>
@@ -8159,7 +8166,7 @@
                 <a:latin typeface="Noto Sans CJK SC"/>
                 <a:ea typeface="Noto Sans CJK SC"/>
               </a:rPr>
-              <a:t>12周行动计划</a:t>
+              <a:t>智能客服运营：AI客服训练师</a:t>
             </a:r>
           </a:p>
         </p:txBody>
@@ -8202,7 +8209,7 @@
                 <a:latin typeface="Noto Sans CJK SC"/>
                 <a:ea typeface="Noto Sans CJK SC"/>
               </a:rPr>
-              <a:t>第1周：定方向+看100条JD</a:t>
+              <a:t>定位：教AI客服干活的人</a:t>
             </a:r>
           </a:p>
           <a:p>
@@ -8221,7 +8228,7 @@
                 <a:latin typeface="Noto Sans CJK SC"/>
                 <a:ea typeface="Noto Sans CJK SC"/>
               </a:rPr>
-              <a:t>第2到6周：每天学3-4小时</a:t>
+              <a:t>每天：知识库维护+badcase分析</a:t>
             </a:r>
           </a:p>
           <a:p>
@@ -8240,7 +8247,7 @@
                 <a:latin typeface="Noto Sans CJK SC"/>
                 <a:ea typeface="Noto Sans CJK SC"/>
               </a:rPr>
-              <a:t>第5周起：改简历+小量试投</a:t>
+              <a:t>核心：业务话术拆成问答对</a:t>
             </a:r>
           </a:p>
           <a:p>
@@ -8259,7 +8266,7 @@
                 <a:latin typeface="Noto Sans CJK SC"/>
                 <a:ea typeface="Noto Sans CJK SC"/>
               </a:rPr>
-              <a:t>第6到12周：每周投10-20个</a:t>
+              <a:t>指标：解决率转人工率满意度</a:t>
             </a:r>
           </a:p>
           <a:p>
@@ -8278,7 +8285,7 @@
                 <a:latin typeface="Noto Sans CJK SC"/>
                 <a:ea typeface="Noto Sans CJK SC"/>
               </a:rPr>
-              <a:t>每场面试后：写三行复盘</a:t>
+              <a:t>行业：电商金融教育标配岗</a:t>
             </a:r>
           </a:p>
           <a:p>
@@ -8297,7 +8304,7 @@
                 <a:latin typeface="Noto Sans CJK SC"/>
                 <a:ea typeface="Noto Sans CJK SC"/>
               </a:rPr>
-              <a:t>心法：先拿2-3个offer再挑</a:t>
+              <a:t>适合：做过客服电商社群的人</a:t>
             </a:r>
           </a:p>
         </p:txBody>
@@ -8336,7 +8343,7 @@
                 <a:latin typeface="Noto Sans CJK SC"/>
                 <a:ea typeface="Noto Sans CJK SC"/>
               </a:rPr>
-              <a:t>23 / 26</a:t>
+              <a:t>23 / 33</a:t>
             </a:r>
           </a:p>
         </p:txBody>
@@ -8660,7 +8667,7 @@
                 <a:latin typeface="Noto Sans CJK SC"/>
                 <a:ea typeface="Noto Sans CJK SC"/>
               </a:rPr>
-              <a:t>避坑清单</a:t>
+              <a:t>智能客服运营：学法路线</a:t>
             </a:r>
           </a:p>
         </p:txBody>
@@ -8699,7 +8706,7 @@
                 <a:latin typeface="Noto Sans CJK SC"/>
                 <a:ea typeface="Noto Sans CJK SC"/>
               </a:rPr>
-              <a:t>避坑清单</a:t>
+              <a:t>智能客服运营：学法路线</a:t>
             </a:r>
           </a:p>
         </p:txBody>
@@ -8742,7 +8749,7 @@
                 <a:latin typeface="Noto Sans CJK SC"/>
                 <a:ea typeface="Noto Sans CJK SC"/>
               </a:rPr>
-              <a:t>培训贷：包就业等于贷2-3万</a:t>
+              <a:t>第1周：拆解5个大厂智能客服</a:t>
             </a:r>
           </a:p>
           <a:p>
@@ -8761,7 +8768,7 @@
                 <a:latin typeface="Noto Sans CJK SC"/>
                 <a:ea typeface="Noto Sans CJK SC"/>
               </a:rPr>
-              <a:t>入职先交钱的岗位都是违法</a:t>
+              <a:t>第2周：学知识库结构设计</a:t>
             </a:r>
           </a:p>
           <a:p>
@@ -8780,7 +8787,7 @@
                 <a:latin typeface="Noto Sans CJK SC"/>
                 <a:ea typeface="Noto Sans CJK SC"/>
               </a:rPr>
-              <a:t>刷单、点赞员兼职全是诈骗</a:t>
+              <a:t>第3-4周：自建50条FAQ机器人</a:t>
             </a:r>
           </a:p>
           <a:p>
@@ -8799,7 +8806,7 @@
                 <a:latin typeface="Noto Sans CJK SC"/>
                 <a:ea typeface="Noto Sans CJK SC"/>
               </a:rPr>
-              <a:t>便宜求职课发网盘链接是套路</a:t>
+              <a:t>作品：拆解报告+机器人demo</a:t>
             </a:r>
           </a:p>
           <a:p>
@@ -8818,7 +8825,7 @@
                 <a:latin typeface="Noto Sans CJK SC"/>
                 <a:ea typeface="Noto Sans CJK SC"/>
               </a:rPr>
-              <a:t>无经验月入两万要高度警惕</a:t>
+              <a:t>简历：客服经历直接强相关</a:t>
             </a:r>
           </a:p>
           <a:p>
@@ -8837,26 +8844,7 @@
                 <a:latin typeface="Noto Sans CJK SC"/>
                 <a:ea typeface="Noto Sans CJK SC"/>
               </a:rPr>
-              <a:t>试用期不缴社保可依法维权</a:t>
-            </a:r>
-          </a:p>
-          <a:p>
-            <a:pPr marL="285750" indent="-285750">
-              <a:spcAft>
-                <a:spcPts val="600"/>
-              </a:spcAft>
-              <a:buFont typeface="Arial" panose="020B0604020202020204"/>
-              <a:buChar char="•"/>
-            </a:pPr>
-            <a:r>
-              <a:rPr lang="zh-CN" sz="2000" b="0" dirty="0">
-                <a:solidFill>
-                  <a:srgbClr val="3B2F2A"/>
-                </a:solidFill>
-                <a:latin typeface="Noto Sans CJK SC"/>
-                <a:ea typeface="Noto Sans CJK SC"/>
-              </a:rPr>
-              <a:t>境外高薪邀约绝对不出境</a:t>
+              <a:t>面试：讲清一个badcase怎么修</a:t>
             </a:r>
           </a:p>
         </p:txBody>
@@ -8895,7 +8883,7 @@
                 <a:latin typeface="Noto Sans CJK SC"/>
                 <a:ea typeface="Noto Sans CJK SC"/>
               </a:rPr>
-              <a:t>24 / 26</a:t>
+              <a:t>24 / 33</a:t>
             </a:r>
           </a:p>
         </p:txBody>
@@ -9132,42 +9120,6 @@
                       </p:childTnLst>
                     </p:cTn>
                   </p:par>
-                  <p:par>
-                    <p:cTn id="21" fill="hold">
-                      <p:stCondLst>
-                        <p:cond delay="indefinite"/>
-                      </p:stCondLst>
-                      <p:childTnLst>
-                        <p:par>
-                          <p:cTn id="22" presetID="1" presetClass="entr" presetSubtype="0" fill="hold" grpId="0" nodeType="clickEffect">
-                            <p:stCondLst>
-                              <p:cond delay="0"/>
-                            </p:stCondLst>
-                            <p:childTnLst>
-                              <p:set>
-                                <p:cBhvr>
-                                  <p:cTn id="23" dur="1" fill="hold">
-                                    <p:stCondLst>
-                                      <p:cond delay="0"/>
-                                    </p:stCondLst>
-                                  </p:cTn>
-                                  <p:tgtEl>
-                                    <p:spTgt spid="243"/>
-                                  </p:tgtEl>
-                                  <p:attrNameLst>
-                                    <p:attrName>style.visibility</p:attrName>
-                                  </p:attrNameLst>
-                                </p:cBhvr>
-                                <p:to>
-                                  <p:strVal val="visible"/>
-                                </p:to>
-                              </p:set>
-                            </p:childTnLst>
-                          </p:cTn>
-                        </p:par>
-                      </p:childTnLst>
-                    </p:cTn>
-                  </p:par>
                 </p:childTnLst>
               </p:cTn>
               <p:prevCondLst>
@@ -9255,7 +9207,7 @@
                 <a:latin typeface="Noto Sans CJK SC"/>
                 <a:ea typeface="Noto Sans CJK SC"/>
               </a:rPr>
-              <a:t>今天就开始的三件事</a:t>
+              <a:t>简历通用公式：STAR加量化</a:t>
             </a:r>
           </a:p>
         </p:txBody>
@@ -9294,7 +9246,7 @@
                 <a:latin typeface="Noto Sans CJK SC"/>
                 <a:ea typeface="Noto Sans CJK SC"/>
               </a:rPr>
-              <a:t>今天就开始的三件事</a:t>
+              <a:t>简历通用公式：STAR加量化</a:t>
             </a:r>
           </a:p>
         </p:txBody>
@@ -9337,7 +9289,7 @@
                 <a:latin typeface="Noto Sans CJK SC"/>
                 <a:ea typeface="Noto Sans CJK SC"/>
               </a:rPr>
-              <a:t>今晚：下载BOSS直聘看100条JD</a:t>
+              <a:t>S情境：什么背景下什么问题</a:t>
             </a:r>
           </a:p>
           <a:p>
@@ -9356,7 +9308,7 @@
                 <a:latin typeface="Noto Sans CJK SC"/>
                 <a:ea typeface="Noto Sans CJK SC"/>
               </a:rPr>
-              <a:t>周末：选出1个主攻+1个备胎</a:t>
+              <a:t>T任务：你负责的具体目标</a:t>
             </a:r>
           </a:p>
           <a:p>
@@ -9375,7 +9327,7 @@
                 <a:latin typeface="Noto Sans CJK SC"/>
                 <a:ea typeface="Noto Sans CJK SC"/>
               </a:rPr>
-              <a:t>下周一：开始每天3小时学习</a:t>
+              <a:t>A行动：用了什么方法和工具</a:t>
             </a:r>
           </a:p>
           <a:p>
@@ -9394,7 +9346,45 @@
                 <a:latin typeface="Noto Sans CJK SC"/>
                 <a:ea typeface="Noto Sans CJK SC"/>
               </a:rPr>
-              <a:t>记住：行动是迷茫唯一的解药</a:t>
+              <a:t>R结果：数字说话拒绝形容词</a:t>
+            </a:r>
+          </a:p>
+          <a:p>
+            <a:pPr marL="285750" indent="-285750">
+              <a:spcAft>
+                <a:spcPts val="600"/>
+              </a:spcAft>
+              <a:buFont typeface="Arial" panose="020B0604020202020204"/>
+              <a:buChar char="•"/>
+            </a:pPr>
+            <a:r>
+              <a:rPr lang="zh-CN" sz="2000" b="0" dirty="0">
+                <a:solidFill>
+                  <a:srgbClr val="3B2F2A"/>
+                </a:solidFill>
+                <a:latin typeface="Noto Sans CJK SC"/>
+                <a:ea typeface="Noto Sans CJK SC"/>
+              </a:rPr>
+              <a:t>反例：负责公众号日常运营</a:t>
+            </a:r>
+          </a:p>
+          <a:p>
+            <a:pPr marL="285750" indent="-285750">
+              <a:spcAft>
+                <a:spcPts val="600"/>
+              </a:spcAft>
+              <a:buFont typeface="Arial" panose="020B0604020202020204"/>
+              <a:buChar char="•"/>
+            </a:pPr>
+            <a:r>
+              <a:rPr lang="zh-CN" sz="2000" b="0" dirty="0">
+                <a:solidFill>
+                  <a:srgbClr val="3B2F2A"/>
+                </a:solidFill>
+                <a:latin typeface="Noto Sans CJK SC"/>
+                <a:ea typeface="Noto Sans CJK SC"/>
+              </a:rPr>
+              <a:t>正例：3个月打开率2%提到5%</a:t>
             </a:r>
           </a:p>
         </p:txBody>
@@ -9433,7 +9423,7 @@
                 <a:latin typeface="Noto Sans CJK SC"/>
                 <a:ea typeface="Noto Sans CJK SC"/>
               </a:rPr>
-              <a:t>25 / 26</a:t>
+              <a:t>25 / 33</a:t>
             </a:r>
           </a:p>
         </p:txBody>
@@ -9598,6 +9588,78 @@
                       </p:childTnLst>
                     </p:cTn>
                   </p:par>
+                  <p:par>
+                    <p:cTn id="15" fill="hold">
+                      <p:stCondLst>
+                        <p:cond delay="indefinite"/>
+                      </p:stCondLst>
+                      <p:childTnLst>
+                        <p:par>
+                          <p:cTn id="16" presetID="1" presetClass="entr" presetSubtype="0" fill="hold" grpId="0" nodeType="clickEffect">
+                            <p:stCondLst>
+                              <p:cond delay="0"/>
+                            </p:stCondLst>
+                            <p:childTnLst>
+                              <p:set>
+                                <p:cBhvr>
+                                  <p:cTn id="17" dur="1" fill="hold">
+                                    <p:stCondLst>
+                                      <p:cond delay="0"/>
+                                    </p:stCondLst>
+                                  </p:cTn>
+                                  <p:tgtEl>
+                                    <p:spTgt spid="253"/>
+                                  </p:tgtEl>
+                                  <p:attrNameLst>
+                                    <p:attrName>style.visibility</p:attrName>
+                                  </p:attrNameLst>
+                                </p:cBhvr>
+                                <p:to>
+                                  <p:strVal val="visible"/>
+                                </p:to>
+                              </p:set>
+                            </p:childTnLst>
+                          </p:cTn>
+                        </p:par>
+                      </p:childTnLst>
+                    </p:cTn>
+                  </p:par>
+                  <p:par>
+                    <p:cTn id="18" fill="hold">
+                      <p:stCondLst>
+                        <p:cond delay="indefinite"/>
+                      </p:stCondLst>
+                      <p:childTnLst>
+                        <p:par>
+                          <p:cTn id="19" presetID="1" presetClass="entr" presetSubtype="0" fill="hold" grpId="0" nodeType="clickEffect">
+                            <p:stCondLst>
+                              <p:cond delay="0"/>
+                            </p:stCondLst>
+                            <p:childTnLst>
+                              <p:set>
+                                <p:cBhvr>
+                                  <p:cTn id="20" dur="1" fill="hold">
+                                    <p:stCondLst>
+                                      <p:cond delay="0"/>
+                                    </p:stCondLst>
+                                  </p:cTn>
+                                  <p:tgtEl>
+                                    <p:spTgt spid="253"/>
+                                  </p:tgtEl>
+                                  <p:attrNameLst>
+                                    <p:attrName>style.visibility</p:attrName>
+                                  </p:attrNameLst>
+                                </p:cBhvr>
+                                <p:to>
+                                  <p:strVal val="visible"/>
+                                </p:to>
+                              </p:set>
+                            </p:childTnLst>
+                          </p:cTn>
+                        </p:par>
+                      </p:childTnLst>
+                    </p:cTn>
+                  </p:par>
                 </p:childTnLst>
               </p:cTn>
               <p:prevCondLst>
@@ -9653,14 +9715,14 @@
       </p:grpSpPr>
       <p:sp>
         <p:nvSpPr>
-          <p:cNvPr id="261" name="Title"/>
+          <p:cNvPr id="261" name="Kicker"/>
           <p:cNvSpPr txBox="1"/>
           <p:nvPr/>
         </p:nvSpPr>
         <p:spPr>
           <a:xfrm>
-            <a:off x="1050000" y="2300000"/>
-            <a:ext cx="10200000" cy="1700000"/>
+            <a:off x="900000" y="420000"/>
+            <a:ext cx="10000000" cy="420000"/>
           </a:xfrm>
           <a:prstGeom prst="rect">
             <a:avLst/>
@@ -9674,32 +9736,32 @@
           </a:bodyPr>
           <a:lstStyle/>
           <a:p>
-            <a:pPr algn="ctr">
+            <a:pPr>
               <a:buNone/>
             </a:pPr>
             <a:r>
-              <a:rPr lang="zh-CN" sz="5200" b="1" dirty="0">
-                <a:solidFill>
-                  <a:srgbClr val="3B2F2A"/>
-                </a:solidFill>
-                <a:latin typeface="Noto Sans CJK SC"/>
-                <a:ea typeface="Noto Sans CJK SC"/>
-              </a:rPr>
-              <a:t>谢谢</a:t>
+              <a:rPr lang="zh-CN" sz="1400" b="1" dirty="0">
+                <a:solidFill>
+                  <a:srgbClr val="E58A2F"/>
+                </a:solidFill>
+                <a:latin typeface="Noto Sans CJK SC"/>
+                <a:ea typeface="Noto Sans CJK SC"/>
+              </a:rPr>
+              <a:t>Gap半年话术：30秒带过</a:t>
             </a:r>
           </a:p>
         </p:txBody>
       </p:sp>
       <p:sp>
         <p:nvSpPr>
-          <p:cNvPr id="262" name="Subtitle"/>
+          <p:cNvPr id="262" name="Title"/>
           <p:cNvSpPr txBox="1"/>
           <p:nvPr/>
         </p:nvSpPr>
         <p:spPr>
           <a:xfrm>
-            <a:off x="1050000" y="4200000"/>
-            <a:ext cx="10200000" cy="900000"/>
+            <a:off x="900000" y="920000"/>
+            <a:ext cx="10300000" cy="800000"/>
           </a:xfrm>
           <a:prstGeom prst="rect">
             <a:avLst/>
@@ -9713,18 +9775,156 @@
           </a:bodyPr>
           <a:lstStyle/>
           <a:p>
-            <a:pPr algn="ctr">
+            <a:pPr>
               <a:buNone/>
             </a:pPr>
             <a:r>
-              <a:rPr lang="zh-CN" sz="2000" b="1" dirty="0">
-                <a:solidFill>
-                  <a:srgbClr val="E58A2F"/>
-                </a:solidFill>
-                <a:latin typeface="Noto Sans CJK SC"/>
-                <a:ea typeface="Noto Sans CJK SC"/>
-              </a:rPr>
-              <a:t>女生找工作七大岗位全攻略</a:t>
+              <a:rPr lang="zh-CN" sz="3400" b="1" dirty="0">
+                <a:solidFill>
+                  <a:srgbClr val="3B2F2A"/>
+                </a:solidFill>
+                <a:latin typeface="Noto Sans CJK SC"/>
+                <a:ea typeface="Noto Sans CJK SC"/>
+              </a:rPr>
+              <a:t>Gap半年话术：30秒带过</a:t>
+            </a:r>
+          </a:p>
+        </p:txBody>
+      </p:sp>
+      <p:sp>
+        <p:nvSpPr>
+          <p:cNvPr id="263" name="Body"/>
+          <p:cNvSpPr txBox="1"/>
+          <p:nvPr/>
+        </p:nvSpPr>
+        <p:spPr>
+          <a:xfrm>
+            <a:off x="1050000" y="1850000"/>
+            <a:ext cx="10100000" cy="4500000"/>
+          </a:xfrm>
+          <a:prstGeom prst="rect">
+            <a:avLst/>
+          </a:prstGeom>
+          <a:noFill/>
+          <a:ln/>
+        </p:spPr>
+        <p:txBody>
+          <a:bodyPr wrap="square" rtlCol="0">
+            <a:normAutofit/>
+          </a:bodyPr>
+          <a:lstStyle/>
+          <a:p>
+            <a:pPr marL="285750" indent="-285750">
+              <a:spcAft>
+                <a:spcPts val="600"/>
+              </a:spcAft>
+              <a:buFont typeface="Arial" panose="020B0604020202020204"/>
+              <a:buChar char="•"/>
+            </a:pPr>
+            <a:r>
+              <a:rPr lang="zh-CN" sz="2000" b="0" dirty="0">
+                <a:solidFill>
+                  <a:srgbClr val="3B2F2A"/>
+                </a:solidFill>
+                <a:latin typeface="Noto Sans CJK SC"/>
+                <a:ea typeface="Noto Sans CJK SC"/>
+              </a:rPr>
+              <a:t>考证版：系统学习已产出成果</a:t>
+            </a:r>
+          </a:p>
+          <a:p>
+            <a:pPr marL="285750" indent="-285750">
+              <a:spcAft>
+                <a:spcPts val="600"/>
+              </a:spcAft>
+              <a:buFont typeface="Arial" panose="020B0604020202020204"/>
+              <a:buChar char="•"/>
+            </a:pPr>
+            <a:r>
+              <a:rPr lang="zh-CN" sz="2000" b="0" dirty="0">
+                <a:solidFill>
+                  <a:srgbClr val="3B2F2A"/>
+                </a:solidFill>
+                <a:latin typeface="Noto Sans CJK SC"/>
+                <a:ea typeface="Noto Sans CJK SC"/>
+              </a:rPr>
+              <a:t>家庭版：事务办妥可随时到岗</a:t>
+            </a:r>
+          </a:p>
+          <a:p>
+            <a:pPr marL="285750" indent="-285750">
+              <a:spcAft>
+                <a:spcPts val="600"/>
+              </a:spcAft>
+              <a:buFont typeface="Arial" panose="020B0604020202020204"/>
+              <a:buChar char="•"/>
+            </a:pPr>
+            <a:r>
+              <a:rPr lang="zh-CN" sz="2000" b="0" dirty="0">
+                <a:solidFill>
+                  <a:srgbClr val="3B2F2A"/>
+                </a:solidFill>
+                <a:latin typeface="Noto Sans CJK SC"/>
+                <a:ea typeface="Noto Sans CJK SC"/>
+              </a:rPr>
+              <a:t>休整版：状态恢复并补了技能</a:t>
+            </a:r>
+          </a:p>
+          <a:p>
+            <a:pPr marL="285750" indent="-285750">
+              <a:spcAft>
+                <a:spcPts val="600"/>
+              </a:spcAft>
+              <a:buFont typeface="Arial" panose="020B0604020202020204"/>
+              <a:buChar char="•"/>
+            </a:pPr>
+            <a:r>
+              <a:rPr lang="zh-CN" sz="2000" b="0" dirty="0">
+                <a:solidFill>
+                  <a:srgbClr val="3B2F2A"/>
+                </a:solidFill>
+                <a:latin typeface="Noto Sans CJK SC"/>
+                <a:ea typeface="Noto Sans CJK SC"/>
+              </a:rPr>
+              <a:t>原则：不撒谎、不道歉、不恋战</a:t>
+            </a:r>
+          </a:p>
+          <a:p>
+            <a:pPr marL="285750" indent="-285750">
+              <a:spcAft>
+                <a:spcPts val="600"/>
+              </a:spcAft>
+              <a:buFont typeface="Arial" panose="020B0604020202020204"/>
+              <a:buChar char="•"/>
+            </a:pPr>
+            <a:r>
+              <a:rPr lang="zh-CN" sz="2000" b="0" dirty="0">
+                <a:solidFill>
+                  <a:srgbClr val="3B2F2A"/>
+                </a:solidFill>
+                <a:latin typeface="Noto Sans CJK SC"/>
+                <a:ea typeface="Noto Sans CJK SC"/>
+              </a:rPr>
+              <a:t>落点：马上引到岗位匹配度</a:t>
+            </a:r>
+          </a:p>
+          <a:p>
+            <a:pPr marL="285750" indent="-285750">
+              <a:spcAft>
+                <a:spcPts val="600"/>
+              </a:spcAft>
+              <a:buFont typeface="Arial" panose="020B0604020202020204"/>
+              <a:buChar char="•"/>
+            </a:pPr>
+            <a:r>
+              <a:rPr lang="zh-CN" sz="2000" b="0" dirty="0">
+                <a:solidFill>
+                  <a:srgbClr val="3B2F2A"/>
+                </a:solidFill>
+                <a:latin typeface="Noto Sans CJK SC"/>
+                <a:ea typeface="Noto Sans CJK SC"/>
+              </a:rPr>
+              <a:t>证据：gap期做的每件事都算数</a:t>
             </a:r>
           </a:p>
         </p:txBody>
@@ -9763,7 +9963,7 @@
                 <a:latin typeface="Noto Sans CJK SC"/>
                 <a:ea typeface="Noto Sans CJK SC"/>
               </a:rPr>
-              <a:t>26 / 26</a:t>
+              <a:t>26 / 33</a:t>
             </a:r>
           </a:p>
         </p:txBody>
@@ -9776,6 +9976,1875 @@
   <p:transition spd="med">
     <p:fade/>
   </p:transition>
+  <p:timing>
+    <p:tnLst>
+      <p:par>
+        <p:cTn id="1" dur="indefinite" restart="never" nodeType="tmRoot">
+          <p:childTnLst>
+            <p:seq concurrent="1" nextAc="seek">
+              <p:cTn id="2" dur="indefinite" nodeType="mainSeq">
+                <p:childTnLst>
+                  <p:par>
+                    <p:cTn id="3" fill="hold">
+                      <p:stCondLst>
+                        <p:cond delay="indefinite"/>
+                      </p:stCondLst>
+                      <p:childTnLst>
+                        <p:par>
+                          <p:cTn id="4" presetID="1" presetClass="entr" presetSubtype="0" fill="hold" grpId="0" nodeType="clickEffect">
+                            <p:stCondLst>
+                              <p:cond delay="0"/>
+                            </p:stCondLst>
+                            <p:childTnLst>
+                              <p:set>
+                                <p:cBhvr>
+                                  <p:cTn id="5" dur="1" fill="hold">
+                                    <p:stCondLst>
+                                      <p:cond delay="0"/>
+                                    </p:stCondLst>
+                                  </p:cTn>
+                                  <p:tgtEl>
+                                    <p:spTgt spid="263"/>
+                                  </p:tgtEl>
+                                  <p:attrNameLst>
+                                    <p:attrName>style.visibility</p:attrName>
+                                  </p:attrNameLst>
+                                </p:cBhvr>
+                                <p:to>
+                                  <p:strVal val="visible"/>
+                                </p:to>
+                              </p:set>
+                            </p:childTnLst>
+                          </p:cTn>
+                        </p:par>
+                      </p:childTnLst>
+                    </p:cTn>
+                  </p:par>
+                  <p:par>
+                    <p:cTn id="6" fill="hold">
+                      <p:stCondLst>
+                        <p:cond delay="indefinite"/>
+                      </p:stCondLst>
+                      <p:childTnLst>
+                        <p:par>
+                          <p:cTn id="7" presetID="1" presetClass="entr" presetSubtype="0" fill="hold" grpId="0" nodeType="clickEffect">
+                            <p:stCondLst>
+                              <p:cond delay="0"/>
+                            </p:stCondLst>
+                            <p:childTnLst>
+                              <p:set>
+                                <p:cBhvr>
+                                  <p:cTn id="8" dur="1" fill="hold">
+                                    <p:stCondLst>
+                                      <p:cond delay="0"/>
+                                    </p:stCondLst>
+                                  </p:cTn>
+                                  <p:tgtEl>
+                                    <p:spTgt spid="263"/>
+                                  </p:tgtEl>
+                                  <p:attrNameLst>
+                                    <p:attrName>style.visibility</p:attrName>
+                                  </p:attrNameLst>
+                                </p:cBhvr>
+                                <p:to>
+                                  <p:strVal val="visible"/>
+                                </p:to>
+                              </p:set>
+                            </p:childTnLst>
+                          </p:cTn>
+                        </p:par>
+                      </p:childTnLst>
+                    </p:cTn>
+                  </p:par>
+                  <p:par>
+                    <p:cTn id="9" fill="hold">
+                      <p:stCondLst>
+                        <p:cond delay="indefinite"/>
+                      </p:stCondLst>
+                      <p:childTnLst>
+                        <p:par>
+                          <p:cTn id="10" presetID="1" presetClass="entr" presetSubtype="0" fill="hold" grpId="0" nodeType="clickEffect">
+                            <p:stCondLst>
+                              <p:cond delay="0"/>
+                            </p:stCondLst>
+                            <p:childTnLst>
+                              <p:set>
+                                <p:cBhvr>
+                                  <p:cTn id="11" dur="1" fill="hold">
+                                    <p:stCondLst>
+                                      <p:cond delay="0"/>
+                                    </p:stCondLst>
+                                  </p:cTn>
+                                  <p:tgtEl>
+                                    <p:spTgt spid="263"/>
+                                  </p:tgtEl>
+                                  <p:attrNameLst>
+                                    <p:attrName>style.visibility</p:attrName>
+                                  </p:attrNameLst>
+                                </p:cBhvr>
+                                <p:to>
+                                  <p:strVal val="visible"/>
+                                </p:to>
+                              </p:set>
+                            </p:childTnLst>
+                          </p:cTn>
+                        </p:par>
+                      </p:childTnLst>
+                    </p:cTn>
+                  </p:par>
+                  <p:par>
+                    <p:cTn id="12" fill="hold">
+                      <p:stCondLst>
+                        <p:cond delay="indefinite"/>
+                      </p:stCondLst>
+                      <p:childTnLst>
+                        <p:par>
+                          <p:cTn id="13" presetID="1" presetClass="entr" presetSubtype="0" fill="hold" grpId="0" nodeType="clickEffect">
+                            <p:stCondLst>
+                              <p:cond delay="0"/>
+                            </p:stCondLst>
+                            <p:childTnLst>
+                              <p:set>
+                                <p:cBhvr>
+                                  <p:cTn id="14" dur="1" fill="hold">
+                                    <p:stCondLst>
+                                      <p:cond delay="0"/>
+                                    </p:stCondLst>
+                                  </p:cTn>
+                                  <p:tgtEl>
+                                    <p:spTgt spid="263"/>
+                                  </p:tgtEl>
+                                  <p:attrNameLst>
+                                    <p:attrName>style.visibility</p:attrName>
+                                  </p:attrNameLst>
+                                </p:cBhvr>
+                                <p:to>
+                                  <p:strVal val="visible"/>
+                                </p:to>
+                              </p:set>
+                            </p:childTnLst>
+                          </p:cTn>
+                        </p:par>
+                      </p:childTnLst>
+                    </p:cTn>
+                  </p:par>
+                  <p:par>
+                    <p:cTn id="15" fill="hold">
+                      <p:stCondLst>
+                        <p:cond delay="indefinite"/>
+                      </p:stCondLst>
+                      <p:childTnLst>
+                        <p:par>
+                          <p:cTn id="16" presetID="1" presetClass="entr" presetSubtype="0" fill="hold" grpId="0" nodeType="clickEffect">
+                            <p:stCondLst>
+                              <p:cond delay="0"/>
+                            </p:stCondLst>
+                            <p:childTnLst>
+                              <p:set>
+                                <p:cBhvr>
+                                  <p:cTn id="17" dur="1" fill="hold">
+                                    <p:stCondLst>
+                                      <p:cond delay="0"/>
+                                    </p:stCondLst>
+                                  </p:cTn>
+                                  <p:tgtEl>
+                                    <p:spTgt spid="263"/>
+                                  </p:tgtEl>
+                                  <p:attrNameLst>
+                                    <p:attrName>style.visibility</p:attrName>
+                                  </p:attrNameLst>
+                                </p:cBhvr>
+                                <p:to>
+                                  <p:strVal val="visible"/>
+                                </p:to>
+                              </p:set>
+                            </p:childTnLst>
+                          </p:cTn>
+                        </p:par>
+                      </p:childTnLst>
+                    </p:cTn>
+                  </p:par>
+                  <p:par>
+                    <p:cTn id="18" fill="hold">
+                      <p:stCondLst>
+                        <p:cond delay="indefinite"/>
+                      </p:stCondLst>
+                      <p:childTnLst>
+                        <p:par>
+                          <p:cTn id="19" presetID="1" presetClass="entr" presetSubtype="0" fill="hold" grpId="0" nodeType="clickEffect">
+                            <p:stCondLst>
+                              <p:cond delay="0"/>
+                            </p:stCondLst>
+                            <p:childTnLst>
+                              <p:set>
+                                <p:cBhvr>
+                                  <p:cTn id="20" dur="1" fill="hold">
+                                    <p:stCondLst>
+                                      <p:cond delay="0"/>
+                                    </p:stCondLst>
+                                  </p:cTn>
+                                  <p:tgtEl>
+                                    <p:spTgt spid="263"/>
+                                  </p:tgtEl>
+                                  <p:attrNameLst>
+                                    <p:attrName>style.visibility</p:attrName>
+                                  </p:attrNameLst>
+                                </p:cBhvr>
+                                <p:to>
+                                  <p:strVal val="visible"/>
+                                </p:to>
+                              </p:set>
+                            </p:childTnLst>
+                          </p:cTn>
+                        </p:par>
+                      </p:childTnLst>
+                    </p:cTn>
+                  </p:par>
+                </p:childTnLst>
+              </p:cTn>
+              <p:prevCondLst>
+                <p:cond evt="onPrev" delay="0">
+                  <p:tgtEl>
+                    <p:sldTgt/>
+                  </p:tgtEl>
+                </p:cond>
+              </p:prevCondLst>
+              <p:nextCondLst>
+                <p:cond evt="onNext" delay="0">
+                  <p:tgtEl>
+                    <p:sldTgt/>
+                  </p:tgtEl>
+                </p:cond>
+              </p:nextCondLst>
+            </p:seq>
+          </p:childTnLst>
+        </p:cTn>
+      </p:par>
+    </p:tnLst>
+    <p:bldLst>
+      <p:bldP spid="263" grpId="0"/>
+    </p:bldLst>
+  </p:timing>
+</p:sld>
+</file>
+
+<file path=ppt/slides/slide27.xml><?xml version="1.0" encoding="utf-8"?>
+<p:sld xmlns:a="http://schemas.openxmlformats.org/drawingml/2006/main" xmlns:r="http://schemas.openxmlformats.org/officeDocument/2006/relationships" xmlns:p="http://schemas.openxmlformats.org/presentationml/2006/main">
+  <p:cSld>
+    <p:bg>
+      <p:bgPr>
+        <a:solidFill>
+          <a:srgbClr val="FFF8EC"/>
+        </a:solidFill>
+        <a:effectLst/>
+      </p:bgPr>
+    </p:bg>
+    <p:spTree>
+      <p:nvGrpSpPr>
+        <p:cNvPr id="1" name=""/>
+        <p:cNvGrpSpPr/>
+        <p:nvPr/>
+      </p:nvGrpSpPr>
+      <p:grpSpPr>
+        <a:xfrm>
+          <a:off x="0" y="0"/>
+          <a:ext cx="0" cy="0"/>
+          <a:chOff x="0" y="0"/>
+          <a:chExt cx="0" cy="0"/>
+        </a:xfrm>
+      </p:grpSpPr>
+      <p:sp>
+        <p:nvSpPr>
+          <p:cNvPr id="271" name="Kicker"/>
+          <p:cNvSpPr txBox="1"/>
+          <p:nvPr/>
+        </p:nvSpPr>
+        <p:spPr>
+          <a:xfrm>
+            <a:off x="900000" y="420000"/>
+            <a:ext cx="10000000" cy="420000"/>
+          </a:xfrm>
+          <a:prstGeom prst="rect">
+            <a:avLst/>
+          </a:prstGeom>
+          <a:noFill/>
+          <a:ln/>
+        </p:spPr>
+        <p:txBody>
+          <a:bodyPr wrap="square" rtlCol="0">
+            <a:normAutofit/>
+          </a:bodyPr>
+          <a:lstStyle/>
+          <a:p>
+            <a:pPr>
+              <a:buNone/>
+            </a:pPr>
+            <a:r>
+              <a:rPr lang="zh-CN" sz="1400" b="1" dirty="0">
+                <a:solidFill>
+                  <a:srgbClr val="E58A2F"/>
+                </a:solidFill>
+                <a:latin typeface="Noto Sans CJK SC"/>
+                <a:ea typeface="Noto Sans CJK SC"/>
+              </a:rPr>
+              <a:t>过来人共识：一年内gap市场能接受</a:t>
+            </a:r>
+          </a:p>
+        </p:txBody>
+      </p:sp>
+      <p:sp>
+        <p:nvSpPr>
+          <p:cNvPr id="272" name="Title"/>
+          <p:cNvSpPr txBox="1"/>
+          <p:nvPr/>
+        </p:nvSpPr>
+        <p:spPr>
+          <a:xfrm>
+            <a:off x="900000" y="920000"/>
+            <a:ext cx="10300000" cy="800000"/>
+          </a:xfrm>
+          <a:prstGeom prst="rect">
+            <a:avLst/>
+          </a:prstGeom>
+          <a:noFill/>
+          <a:ln/>
+        </p:spPr>
+        <p:txBody>
+          <a:bodyPr wrap="square" rtlCol="0">
+            <a:normAutofit/>
+          </a:bodyPr>
+          <a:lstStyle/>
+          <a:p>
+            <a:pPr>
+              <a:buNone/>
+            </a:pPr>
+            <a:r>
+              <a:rPr lang="zh-CN" sz="3400" b="1" dirty="0">
+                <a:solidFill>
+                  <a:srgbClr val="3B2F2A"/>
+                </a:solidFill>
+                <a:latin typeface="Noto Sans CJK SC"/>
+                <a:ea typeface="Noto Sans CJK SC"/>
+              </a:rPr>
+              <a:t>过来人共识：一年内gap市场能接受</a:t>
+            </a:r>
+          </a:p>
+        </p:txBody>
+      </p:sp>
+      <p:sp>
+        <p:nvSpPr>
+          <p:cNvPr id="273" name="Body"/>
+          <p:cNvSpPr txBox="1"/>
+          <p:nvPr/>
+        </p:nvSpPr>
+        <p:spPr>
+          <a:xfrm>
+            <a:off x="1050000" y="1850000"/>
+            <a:ext cx="10100000" cy="4500000"/>
+          </a:xfrm>
+          <a:prstGeom prst="rect">
+            <a:avLst/>
+          </a:prstGeom>
+          <a:noFill/>
+          <a:ln/>
+        </p:spPr>
+        <p:txBody>
+          <a:bodyPr wrap="square" rtlCol="0">
+            <a:normAutofit/>
+          </a:bodyPr>
+          <a:lstStyle/>
+          <a:p>
+            <a:pPr marL="285750" indent="-285750">
+              <a:spcAft>
+                <a:spcPts val="600"/>
+              </a:spcAft>
+              <a:buFont typeface="Arial" panose="020B0604020202020204"/>
+              <a:buChar char="•"/>
+            </a:pPr>
+            <a:r>
+              <a:rPr lang="zh-CN" sz="2000" b="0" dirty="0">
+                <a:solidFill>
+                  <a:srgbClr val="3B2F2A"/>
+                </a:solidFill>
+                <a:latin typeface="Noto Sans CJK SC"/>
+                <a:ea typeface="Noto Sans CJK SC"/>
+              </a:rPr>
+              <a:t>求职市场认可一年左右的gap</a:t>
+            </a:r>
+          </a:p>
+          <a:p>
+            <a:pPr marL="285750" indent="-285750">
+              <a:spcAft>
+                <a:spcPts val="600"/>
+              </a:spcAft>
+              <a:buFont typeface="Arial" panose="020B0604020202020204"/>
+              <a:buChar char="•"/>
+            </a:pPr>
+            <a:r>
+              <a:rPr lang="zh-CN" sz="2000" b="0" dirty="0">
+                <a:solidFill>
+                  <a:srgbClr val="3B2F2A"/>
+                </a:solidFill>
+                <a:latin typeface="Noto Sans CJK SC"/>
+                <a:ea typeface="Noto Sans CJK SC"/>
+              </a:rPr>
+              <a:t>招聘总监：离职状态到岗更快</a:t>
+            </a:r>
+          </a:p>
+          <a:p>
+            <a:pPr marL="285750" indent="-285750">
+              <a:spcAft>
+                <a:spcPts val="600"/>
+              </a:spcAft>
+              <a:buFont typeface="Arial" panose="020B0604020202020204"/>
+              <a:buChar char="•"/>
+            </a:pPr>
+            <a:r>
+              <a:rPr lang="zh-CN" sz="2000" b="0" dirty="0">
+                <a:solidFill>
+                  <a:srgbClr val="3B2F2A"/>
+                </a:solidFill>
+                <a:latin typeface="Noto Sans CJK SC"/>
+                <a:ea typeface="Noto Sans CJK SC"/>
+              </a:rPr>
+              <a:t>HR担心的是稳定性不是空窗</a:t>
+            </a:r>
+          </a:p>
+          <a:p>
+            <a:pPr marL="285750" indent="-285750">
+              <a:spcAft>
+                <a:spcPts val="600"/>
+              </a:spcAft>
+              <a:buFont typeface="Arial" panose="020B0604020202020204"/>
+              <a:buChar char="•"/>
+            </a:pPr>
+            <a:r>
+              <a:rPr lang="zh-CN" sz="2000" b="0" dirty="0">
+                <a:solidFill>
+                  <a:srgbClr val="3B2F2A"/>
+                </a:solidFill>
+                <a:latin typeface="Noto Sans CJK SC"/>
+                <a:ea typeface="Noto Sans CJK SC"/>
+              </a:rPr>
+              <a:t>易接受的回答：学习调整突破</a:t>
+            </a:r>
+          </a:p>
+          <a:p>
+            <a:pPr marL="285750" indent="-285750">
+              <a:spcAft>
+                <a:spcPts val="600"/>
+              </a:spcAft>
+              <a:buFont typeface="Arial" panose="020B0604020202020204"/>
+              <a:buChar char="•"/>
+            </a:pPr>
+            <a:r>
+              <a:rPr lang="zh-CN" sz="2000" b="0" dirty="0">
+                <a:solidFill>
+                  <a:srgbClr val="3B2F2A"/>
+                </a:solidFill>
+                <a:latin typeface="Noto Sans CJK SC"/>
+                <a:ea typeface="Noto Sans CJK SC"/>
+              </a:rPr>
+              <a:t>你的gap半年在安全区内</a:t>
+            </a:r>
+          </a:p>
+          <a:p>
+            <a:pPr marL="285750" indent="-285750">
+              <a:spcAft>
+                <a:spcPts val="600"/>
+              </a:spcAft>
+              <a:buFont typeface="Arial" panose="020B0604020202020204"/>
+              <a:buChar char="•"/>
+            </a:pPr>
+            <a:r>
+              <a:rPr lang="zh-CN" sz="2000" b="0" dirty="0">
+                <a:solidFill>
+                  <a:srgbClr val="3B2F2A"/>
+                </a:solidFill>
+                <a:latin typeface="Noto Sans CJK SC"/>
+                <a:ea typeface="Noto Sans CJK SC"/>
+              </a:rPr>
+              <a:t>来源：牛客网+知乎过来人帖</a:t>
+            </a:r>
+          </a:p>
+        </p:txBody>
+      </p:sp>
+      <p:sp>
+        <p:nvSpPr>
+          <p:cNvPr id="279" name="Page number"/>
+          <p:cNvSpPr txBox="1"/>
+          <p:nvPr/>
+        </p:nvSpPr>
+        <p:spPr>
+          <a:xfrm>
+            <a:off x="10600000" y="6250000"/>
+            <a:ext cx="1200000" cy="400000"/>
+          </a:xfrm>
+          <a:prstGeom prst="rect">
+            <a:avLst/>
+          </a:prstGeom>
+          <a:noFill/>
+          <a:ln/>
+        </p:spPr>
+        <p:txBody>
+          <a:bodyPr wrap="square" rtlCol="0">
+            <a:normAutofit/>
+          </a:bodyPr>
+          <a:lstStyle/>
+          <a:p>
+            <a:pPr algn="r">
+              <a:buNone/>
+            </a:pPr>
+            <a:r>
+              <a:rPr lang="zh-CN" sz="1000" b="0" dirty="0">
+                <a:solidFill>
+                  <a:srgbClr val="7E6F68"/>
+                </a:solidFill>
+                <a:latin typeface="Noto Sans CJK SC"/>
+                <a:ea typeface="Noto Sans CJK SC"/>
+              </a:rPr>
+              <a:t>27 / 33</a:t>
+            </a:r>
+          </a:p>
+        </p:txBody>
+      </p:sp>
+    </p:spTree>
+  </p:cSld>
+  <p:clrMapOvr>
+    <a:overrideClrMapping bg1="lt1" tx1="dk1" bg2="lt2" tx2="dk2" accent1="accent1" accent2="accent2" accent3="accent3" accent4="accent4" accent5="accent5" accent6="accent6" hlink="hlink" folHlink="folHlink"/>
+  </p:clrMapOvr>
+  <p:transition spd="med">
+    <p:fade/>
+  </p:transition>
+  <p:timing>
+    <p:tnLst>
+      <p:par>
+        <p:cTn id="1" dur="indefinite" restart="never" nodeType="tmRoot">
+          <p:childTnLst>
+            <p:seq concurrent="1" nextAc="seek">
+              <p:cTn id="2" dur="indefinite" nodeType="mainSeq">
+                <p:childTnLst>
+                  <p:par>
+                    <p:cTn id="3" fill="hold">
+                      <p:stCondLst>
+                        <p:cond delay="indefinite"/>
+                      </p:stCondLst>
+                      <p:childTnLst>
+                        <p:par>
+                          <p:cTn id="4" presetID="1" presetClass="entr" presetSubtype="0" fill="hold" grpId="0" nodeType="clickEffect">
+                            <p:stCondLst>
+                              <p:cond delay="0"/>
+                            </p:stCondLst>
+                            <p:childTnLst>
+                              <p:set>
+                                <p:cBhvr>
+                                  <p:cTn id="5" dur="1" fill="hold">
+                                    <p:stCondLst>
+                                      <p:cond delay="0"/>
+                                    </p:stCondLst>
+                                  </p:cTn>
+                                  <p:tgtEl>
+                                    <p:spTgt spid="273"/>
+                                  </p:tgtEl>
+                                  <p:attrNameLst>
+                                    <p:attrName>style.visibility</p:attrName>
+                                  </p:attrNameLst>
+                                </p:cBhvr>
+                                <p:to>
+                                  <p:strVal val="visible"/>
+                                </p:to>
+                              </p:set>
+                            </p:childTnLst>
+                          </p:cTn>
+                        </p:par>
+                      </p:childTnLst>
+                    </p:cTn>
+                  </p:par>
+                  <p:par>
+                    <p:cTn id="6" fill="hold">
+                      <p:stCondLst>
+                        <p:cond delay="indefinite"/>
+                      </p:stCondLst>
+                      <p:childTnLst>
+                        <p:par>
+                          <p:cTn id="7" presetID="1" presetClass="entr" presetSubtype="0" fill="hold" grpId="0" nodeType="clickEffect">
+                            <p:stCondLst>
+                              <p:cond delay="0"/>
+                            </p:stCondLst>
+                            <p:childTnLst>
+                              <p:set>
+                                <p:cBhvr>
+                                  <p:cTn id="8" dur="1" fill="hold">
+                                    <p:stCondLst>
+                                      <p:cond delay="0"/>
+                                    </p:stCondLst>
+                                  </p:cTn>
+                                  <p:tgtEl>
+                                    <p:spTgt spid="273"/>
+                                  </p:tgtEl>
+                                  <p:attrNameLst>
+                                    <p:attrName>style.visibility</p:attrName>
+                                  </p:attrNameLst>
+                                </p:cBhvr>
+                                <p:to>
+                                  <p:strVal val="visible"/>
+                                </p:to>
+                              </p:set>
+                            </p:childTnLst>
+                          </p:cTn>
+                        </p:par>
+                      </p:childTnLst>
+                    </p:cTn>
+                  </p:par>
+                  <p:par>
+                    <p:cTn id="9" fill="hold">
+                      <p:stCondLst>
+                        <p:cond delay="indefinite"/>
+                      </p:stCondLst>
+                      <p:childTnLst>
+                        <p:par>
+                          <p:cTn id="10" presetID="1" presetClass="entr" presetSubtype="0" fill="hold" grpId="0" nodeType="clickEffect">
+                            <p:stCondLst>
+                              <p:cond delay="0"/>
+                            </p:stCondLst>
+                            <p:childTnLst>
+                              <p:set>
+                                <p:cBhvr>
+                                  <p:cTn id="11" dur="1" fill="hold">
+                                    <p:stCondLst>
+                                      <p:cond delay="0"/>
+                                    </p:stCondLst>
+                                  </p:cTn>
+                                  <p:tgtEl>
+                                    <p:spTgt spid="273"/>
+                                  </p:tgtEl>
+                                  <p:attrNameLst>
+                                    <p:attrName>style.visibility</p:attrName>
+                                  </p:attrNameLst>
+                                </p:cBhvr>
+                                <p:to>
+                                  <p:strVal val="visible"/>
+                                </p:to>
+                              </p:set>
+                            </p:childTnLst>
+                          </p:cTn>
+                        </p:par>
+                      </p:childTnLst>
+                    </p:cTn>
+                  </p:par>
+                  <p:par>
+                    <p:cTn id="12" fill="hold">
+                      <p:stCondLst>
+                        <p:cond delay="indefinite"/>
+                      </p:stCondLst>
+                      <p:childTnLst>
+                        <p:par>
+                          <p:cTn id="13" presetID="1" presetClass="entr" presetSubtype="0" fill="hold" grpId="0" nodeType="clickEffect">
+                            <p:stCondLst>
+                              <p:cond delay="0"/>
+                            </p:stCondLst>
+                            <p:childTnLst>
+                              <p:set>
+                                <p:cBhvr>
+                                  <p:cTn id="14" dur="1" fill="hold">
+                                    <p:stCondLst>
+                                      <p:cond delay="0"/>
+                                    </p:stCondLst>
+                                  </p:cTn>
+                                  <p:tgtEl>
+                                    <p:spTgt spid="273"/>
+                                  </p:tgtEl>
+                                  <p:attrNameLst>
+                                    <p:attrName>style.visibility</p:attrName>
+                                  </p:attrNameLst>
+                                </p:cBhvr>
+                                <p:to>
+                                  <p:strVal val="visible"/>
+                                </p:to>
+                              </p:set>
+                            </p:childTnLst>
+                          </p:cTn>
+                        </p:par>
+                      </p:childTnLst>
+                    </p:cTn>
+                  </p:par>
+                  <p:par>
+                    <p:cTn id="15" fill="hold">
+                      <p:stCondLst>
+                        <p:cond delay="indefinite"/>
+                      </p:stCondLst>
+                      <p:childTnLst>
+                        <p:par>
+                          <p:cTn id="16" presetID="1" presetClass="entr" presetSubtype="0" fill="hold" grpId="0" nodeType="clickEffect">
+                            <p:stCondLst>
+                              <p:cond delay="0"/>
+                            </p:stCondLst>
+                            <p:childTnLst>
+                              <p:set>
+                                <p:cBhvr>
+                                  <p:cTn id="17" dur="1" fill="hold">
+                                    <p:stCondLst>
+                                      <p:cond delay="0"/>
+                                    </p:stCondLst>
+                                  </p:cTn>
+                                  <p:tgtEl>
+                                    <p:spTgt spid="273"/>
+                                  </p:tgtEl>
+                                  <p:attrNameLst>
+                                    <p:attrName>style.visibility</p:attrName>
+                                  </p:attrNameLst>
+                                </p:cBhvr>
+                                <p:to>
+                                  <p:strVal val="visible"/>
+                                </p:to>
+                              </p:set>
+                            </p:childTnLst>
+                          </p:cTn>
+                        </p:par>
+                      </p:childTnLst>
+                    </p:cTn>
+                  </p:par>
+                  <p:par>
+                    <p:cTn id="18" fill="hold">
+                      <p:stCondLst>
+                        <p:cond delay="indefinite"/>
+                      </p:stCondLst>
+                      <p:childTnLst>
+                        <p:par>
+                          <p:cTn id="19" presetID="1" presetClass="entr" presetSubtype="0" fill="hold" grpId="0" nodeType="clickEffect">
+                            <p:stCondLst>
+                              <p:cond delay="0"/>
+                            </p:stCondLst>
+                            <p:childTnLst>
+                              <p:set>
+                                <p:cBhvr>
+                                  <p:cTn id="20" dur="1" fill="hold">
+                                    <p:stCondLst>
+                                      <p:cond delay="0"/>
+                                    </p:stCondLst>
+                                  </p:cTn>
+                                  <p:tgtEl>
+                                    <p:spTgt spid="273"/>
+                                  </p:tgtEl>
+                                  <p:attrNameLst>
+                                    <p:attrName>style.visibility</p:attrName>
+                                  </p:attrNameLst>
+                                </p:cBhvr>
+                                <p:to>
+                                  <p:strVal val="visible"/>
+                                </p:to>
+                              </p:set>
+                            </p:childTnLst>
+                          </p:cTn>
+                        </p:par>
+                      </p:childTnLst>
+                    </p:cTn>
+                  </p:par>
+                </p:childTnLst>
+              </p:cTn>
+              <p:prevCondLst>
+                <p:cond evt="onPrev" delay="0">
+                  <p:tgtEl>
+                    <p:sldTgt/>
+                  </p:tgtEl>
+                </p:cond>
+              </p:prevCondLst>
+              <p:nextCondLst>
+                <p:cond evt="onNext" delay="0">
+                  <p:tgtEl>
+                    <p:sldTgt/>
+                  </p:tgtEl>
+                </p:cond>
+              </p:nextCondLst>
+            </p:seq>
+          </p:childTnLst>
+        </p:cTn>
+      </p:par>
+    </p:tnLst>
+    <p:bldLst>
+      <p:bldP spid="273" grpId="0"/>
+    </p:bldLst>
+  </p:timing>
+</p:sld>
+</file>
+
+<file path=ppt/slides/slide28.xml><?xml version="1.0" encoding="utf-8"?>
+<p:sld xmlns:a="http://schemas.openxmlformats.org/drawingml/2006/main" xmlns:r="http://schemas.openxmlformats.org/officeDocument/2006/relationships" xmlns:p="http://schemas.openxmlformats.org/presentationml/2006/main">
+  <p:cSld>
+    <p:bg>
+      <p:bgPr>
+        <a:solidFill>
+          <a:srgbClr val="FFF8EC"/>
+        </a:solidFill>
+        <a:effectLst/>
+      </p:bgPr>
+    </p:bg>
+    <p:spTree>
+      <p:nvGrpSpPr>
+        <p:cNvPr id="1" name=""/>
+        <p:cNvGrpSpPr/>
+        <p:nvPr/>
+      </p:nvGrpSpPr>
+      <p:grpSpPr>
+        <a:xfrm>
+          <a:off x="0" y="0"/>
+          <a:ext cx="0" cy="0"/>
+          <a:chOff x="0" y="0"/>
+          <a:chExt cx="0" cy="0"/>
+        </a:xfrm>
+      </p:grpSpPr>
+      <p:sp>
+        <p:nvSpPr>
+          <p:cNvPr id="281" name="Kicker"/>
+          <p:cNvSpPr txBox="1"/>
+          <p:nvPr/>
+        </p:nvSpPr>
+        <p:spPr>
+          <a:xfrm>
+            <a:off x="900000" y="420000"/>
+            <a:ext cx="10000000" cy="420000"/>
+          </a:xfrm>
+          <a:prstGeom prst="rect">
+            <a:avLst/>
+          </a:prstGeom>
+          <a:noFill/>
+          <a:ln/>
+        </p:spPr>
+        <p:txBody>
+          <a:bodyPr wrap="square" rtlCol="0">
+            <a:normAutofit/>
+          </a:bodyPr>
+          <a:lstStyle/>
+          <a:p>
+            <a:pPr>
+              <a:buNone/>
+            </a:pPr>
+            <a:r>
+              <a:rPr lang="zh-CN" sz="1400" b="1" dirty="0">
+                <a:solidFill>
+                  <a:srgbClr val="E58A2F"/>
+                </a:solidFill>
+                <a:latin typeface="Noto Sans CJK SC"/>
+                <a:ea typeface="Noto Sans CJK SC"/>
+              </a:rPr>
+              <a:t>面试三坑：过度解释最败好感</a:t>
+            </a:r>
+          </a:p>
+        </p:txBody>
+      </p:sp>
+      <p:sp>
+        <p:nvSpPr>
+          <p:cNvPr id="282" name="Title"/>
+          <p:cNvSpPr txBox="1"/>
+          <p:nvPr/>
+        </p:nvSpPr>
+        <p:spPr>
+          <a:xfrm>
+            <a:off x="900000" y="920000"/>
+            <a:ext cx="10300000" cy="800000"/>
+          </a:xfrm>
+          <a:prstGeom prst="rect">
+            <a:avLst/>
+          </a:prstGeom>
+          <a:noFill/>
+          <a:ln/>
+        </p:spPr>
+        <p:txBody>
+          <a:bodyPr wrap="square" rtlCol="0">
+            <a:normAutofit/>
+          </a:bodyPr>
+          <a:lstStyle/>
+          <a:p>
+            <a:pPr>
+              <a:buNone/>
+            </a:pPr>
+            <a:r>
+              <a:rPr lang="zh-CN" sz="3400" b="1" dirty="0">
+                <a:solidFill>
+                  <a:srgbClr val="3B2F2A"/>
+                </a:solidFill>
+                <a:latin typeface="Noto Sans CJK SC"/>
+                <a:ea typeface="Noto Sans CJK SC"/>
+              </a:rPr>
+              <a:t>面试三坑：过度解释最败好感</a:t>
+            </a:r>
+          </a:p>
+        </p:txBody>
+      </p:sp>
+      <p:sp>
+        <p:nvSpPr>
+          <p:cNvPr id="283" name="Body"/>
+          <p:cNvSpPr txBox="1"/>
+          <p:nvPr/>
+        </p:nvSpPr>
+        <p:spPr>
+          <a:xfrm>
+            <a:off x="1050000" y="1850000"/>
+            <a:ext cx="10100000" cy="4500000"/>
+          </a:xfrm>
+          <a:prstGeom prst="rect">
+            <a:avLst/>
+          </a:prstGeom>
+          <a:noFill/>
+          <a:ln/>
+        </p:spPr>
+        <p:txBody>
+          <a:bodyPr wrap="square" rtlCol="0">
+            <a:normAutofit/>
+          </a:bodyPr>
+          <a:lstStyle/>
+          <a:p>
+            <a:pPr marL="285750" indent="-285750">
+              <a:spcAft>
+                <a:spcPts val="600"/>
+              </a:spcAft>
+              <a:buFont typeface="Arial" panose="020B0604020202020204"/>
+              <a:buChar char="•"/>
+            </a:pPr>
+            <a:r>
+              <a:rPr lang="zh-CN" sz="2000" b="0" dirty="0">
+                <a:solidFill>
+                  <a:srgbClr val="3B2F2A"/>
+                </a:solidFill>
+                <a:latin typeface="Noto Sans CJK SC"/>
+                <a:ea typeface="Noto Sans CJK SC"/>
+              </a:rPr>
+              <a:t>坑一：过度解释越说越像心虚</a:t>
+            </a:r>
+          </a:p>
+          <a:p>
+            <a:pPr marL="285750" indent="-285750">
+              <a:spcAft>
+                <a:spcPts val="600"/>
+              </a:spcAft>
+              <a:buFont typeface="Arial" panose="020B0604020202020204"/>
+              <a:buChar char="•"/>
+            </a:pPr>
+            <a:r>
+              <a:rPr lang="zh-CN" sz="2000" b="0" dirty="0">
+                <a:solidFill>
+                  <a:srgbClr val="3B2F2A"/>
+                </a:solidFill>
+                <a:latin typeface="Noto Sans CJK SC"/>
+                <a:ea typeface="Noto Sans CJK SC"/>
+              </a:rPr>
+              <a:t>坑二：贬低前司显得难相处</a:t>
+            </a:r>
+          </a:p>
+          <a:p>
+            <a:pPr marL="285750" indent="-285750">
+              <a:spcAft>
+                <a:spcPts val="600"/>
+              </a:spcAft>
+              <a:buFont typeface="Arial" panose="020B0604020202020204"/>
+              <a:buChar char="•"/>
+            </a:pPr>
+            <a:r>
+              <a:rPr lang="zh-CN" sz="2000" b="0" dirty="0">
+                <a:solidFill>
+                  <a:srgbClr val="3B2F2A"/>
+                </a:solidFill>
+                <a:latin typeface="Noto Sans CJK SC"/>
+                <a:ea typeface="Noto Sans CJK SC"/>
+              </a:rPr>
+              <a:t>坑三：消极表达等于自曝状态差</a:t>
+            </a:r>
+          </a:p>
+          <a:p>
+            <a:pPr marL="285750" indent="-285750">
+              <a:spcAft>
+                <a:spcPts val="600"/>
+              </a:spcAft>
+              <a:buFont typeface="Arial" panose="020B0604020202020204"/>
+              <a:buChar char="•"/>
+            </a:pPr>
+            <a:r>
+              <a:rPr lang="zh-CN" sz="2000" b="0" dirty="0">
+                <a:solidFill>
+                  <a:srgbClr val="3B2F2A"/>
+                </a:solidFill>
+                <a:latin typeface="Noto Sans CJK SC"/>
+                <a:ea typeface="Noto Sans CJK SC"/>
+              </a:rPr>
+              <a:t>正确第一句：原因一句带过</a:t>
+            </a:r>
+          </a:p>
+          <a:p>
+            <a:pPr marL="285750" indent="-285750">
+              <a:spcAft>
+                <a:spcPts val="600"/>
+              </a:spcAft>
+              <a:buFont typeface="Arial" panose="020B0604020202020204"/>
+              <a:buChar char="•"/>
+            </a:pPr>
+            <a:r>
+              <a:rPr lang="zh-CN" sz="2000" b="0" dirty="0">
+                <a:solidFill>
+                  <a:srgbClr val="3B2F2A"/>
+                </a:solidFill>
+                <a:latin typeface="Noto Sans CJK SC"/>
+                <a:ea typeface="Noto Sans CJK SC"/>
+              </a:rPr>
+              <a:t>第二句：讲空窗期学了做了什么</a:t>
+            </a:r>
+          </a:p>
+          <a:p>
+            <a:pPr marL="285750" indent="-285750">
+              <a:spcAft>
+                <a:spcPts val="600"/>
+              </a:spcAft>
+              <a:buFont typeface="Arial" panose="020B0604020202020204"/>
+              <a:buChar char="•"/>
+            </a:pPr>
+            <a:r>
+              <a:rPr lang="zh-CN" sz="2000" b="0" dirty="0">
+                <a:solidFill>
+                  <a:srgbClr val="3B2F2A"/>
+                </a:solidFill>
+                <a:latin typeface="Noto Sans CJK SC"/>
+                <a:ea typeface="Noto Sans CJK SC"/>
+              </a:rPr>
+              <a:t>第三句：拉回当下状态好能到岗</a:t>
+            </a:r>
+          </a:p>
+        </p:txBody>
+      </p:sp>
+      <p:sp>
+        <p:nvSpPr>
+          <p:cNvPr id="289" name="Page number"/>
+          <p:cNvSpPr txBox="1"/>
+          <p:nvPr/>
+        </p:nvSpPr>
+        <p:spPr>
+          <a:xfrm>
+            <a:off x="10600000" y="6250000"/>
+            <a:ext cx="1200000" cy="400000"/>
+          </a:xfrm>
+          <a:prstGeom prst="rect">
+            <a:avLst/>
+          </a:prstGeom>
+          <a:noFill/>
+          <a:ln/>
+        </p:spPr>
+        <p:txBody>
+          <a:bodyPr wrap="square" rtlCol="0">
+            <a:normAutofit/>
+          </a:bodyPr>
+          <a:lstStyle/>
+          <a:p>
+            <a:pPr algn="r">
+              <a:buNone/>
+            </a:pPr>
+            <a:r>
+              <a:rPr lang="zh-CN" sz="1000" b="0" dirty="0">
+                <a:solidFill>
+                  <a:srgbClr val="7E6F68"/>
+                </a:solidFill>
+                <a:latin typeface="Noto Sans CJK SC"/>
+                <a:ea typeface="Noto Sans CJK SC"/>
+              </a:rPr>
+              <a:t>28 / 33</a:t>
+            </a:r>
+          </a:p>
+        </p:txBody>
+      </p:sp>
+    </p:spTree>
+  </p:cSld>
+  <p:clrMapOvr>
+    <a:overrideClrMapping bg1="lt1" tx1="dk1" bg2="lt2" tx2="dk2" accent1="accent1" accent2="accent2" accent3="accent3" accent4="accent4" accent5="accent5" accent6="accent6" hlink="hlink" folHlink="folHlink"/>
+  </p:clrMapOvr>
+  <p:transition spd="med">
+    <p:fade/>
+  </p:transition>
+  <p:timing>
+    <p:tnLst>
+      <p:par>
+        <p:cTn id="1" dur="indefinite" restart="never" nodeType="tmRoot">
+          <p:childTnLst>
+            <p:seq concurrent="1" nextAc="seek">
+              <p:cTn id="2" dur="indefinite" nodeType="mainSeq">
+                <p:childTnLst>
+                  <p:par>
+                    <p:cTn id="3" fill="hold">
+                      <p:stCondLst>
+                        <p:cond delay="indefinite"/>
+                      </p:stCondLst>
+                      <p:childTnLst>
+                        <p:par>
+                          <p:cTn id="4" presetID="1" presetClass="entr" presetSubtype="0" fill="hold" grpId="0" nodeType="clickEffect">
+                            <p:stCondLst>
+                              <p:cond delay="0"/>
+                            </p:stCondLst>
+                            <p:childTnLst>
+                              <p:set>
+                                <p:cBhvr>
+                                  <p:cTn id="5" dur="1" fill="hold">
+                                    <p:stCondLst>
+                                      <p:cond delay="0"/>
+                                    </p:stCondLst>
+                                  </p:cTn>
+                                  <p:tgtEl>
+                                    <p:spTgt spid="283"/>
+                                  </p:tgtEl>
+                                  <p:attrNameLst>
+                                    <p:attrName>style.visibility</p:attrName>
+                                  </p:attrNameLst>
+                                </p:cBhvr>
+                                <p:to>
+                                  <p:strVal val="visible"/>
+                                </p:to>
+                              </p:set>
+                            </p:childTnLst>
+                          </p:cTn>
+                        </p:par>
+                      </p:childTnLst>
+                    </p:cTn>
+                  </p:par>
+                  <p:par>
+                    <p:cTn id="6" fill="hold">
+                      <p:stCondLst>
+                        <p:cond delay="indefinite"/>
+                      </p:stCondLst>
+                      <p:childTnLst>
+                        <p:par>
+                          <p:cTn id="7" presetID="1" presetClass="entr" presetSubtype="0" fill="hold" grpId="0" nodeType="clickEffect">
+                            <p:stCondLst>
+                              <p:cond delay="0"/>
+                            </p:stCondLst>
+                            <p:childTnLst>
+                              <p:set>
+                                <p:cBhvr>
+                                  <p:cTn id="8" dur="1" fill="hold">
+                                    <p:stCondLst>
+                                      <p:cond delay="0"/>
+                                    </p:stCondLst>
+                                  </p:cTn>
+                                  <p:tgtEl>
+                                    <p:spTgt spid="283"/>
+                                  </p:tgtEl>
+                                  <p:attrNameLst>
+                                    <p:attrName>style.visibility</p:attrName>
+                                  </p:attrNameLst>
+                                </p:cBhvr>
+                                <p:to>
+                                  <p:strVal val="visible"/>
+                                </p:to>
+                              </p:set>
+                            </p:childTnLst>
+                          </p:cTn>
+                        </p:par>
+                      </p:childTnLst>
+                    </p:cTn>
+                  </p:par>
+                  <p:par>
+                    <p:cTn id="9" fill="hold">
+                      <p:stCondLst>
+                        <p:cond delay="indefinite"/>
+                      </p:stCondLst>
+                      <p:childTnLst>
+                        <p:par>
+                          <p:cTn id="10" presetID="1" presetClass="entr" presetSubtype="0" fill="hold" grpId="0" nodeType="clickEffect">
+                            <p:stCondLst>
+                              <p:cond delay="0"/>
+                            </p:stCondLst>
+                            <p:childTnLst>
+                              <p:set>
+                                <p:cBhvr>
+                                  <p:cTn id="11" dur="1" fill="hold">
+                                    <p:stCondLst>
+                                      <p:cond delay="0"/>
+                                    </p:stCondLst>
+                                  </p:cTn>
+                                  <p:tgtEl>
+                                    <p:spTgt spid="283"/>
+                                  </p:tgtEl>
+                                  <p:attrNameLst>
+                                    <p:attrName>style.visibility</p:attrName>
+                                  </p:attrNameLst>
+                                </p:cBhvr>
+                                <p:to>
+                                  <p:strVal val="visible"/>
+                                </p:to>
+                              </p:set>
+                            </p:childTnLst>
+                          </p:cTn>
+                        </p:par>
+                      </p:childTnLst>
+                    </p:cTn>
+                  </p:par>
+                  <p:par>
+                    <p:cTn id="12" fill="hold">
+                      <p:stCondLst>
+                        <p:cond delay="indefinite"/>
+                      </p:stCondLst>
+                      <p:childTnLst>
+                        <p:par>
+                          <p:cTn id="13" presetID="1" presetClass="entr" presetSubtype="0" fill="hold" grpId="0" nodeType="clickEffect">
+                            <p:stCondLst>
+                              <p:cond delay="0"/>
+                            </p:stCondLst>
+                            <p:childTnLst>
+                              <p:set>
+                                <p:cBhvr>
+                                  <p:cTn id="14" dur="1" fill="hold">
+                                    <p:stCondLst>
+                                      <p:cond delay="0"/>
+                                    </p:stCondLst>
+                                  </p:cTn>
+                                  <p:tgtEl>
+                                    <p:spTgt spid="283"/>
+                                  </p:tgtEl>
+                                  <p:attrNameLst>
+                                    <p:attrName>style.visibility</p:attrName>
+                                  </p:attrNameLst>
+                                </p:cBhvr>
+                                <p:to>
+                                  <p:strVal val="visible"/>
+                                </p:to>
+                              </p:set>
+                            </p:childTnLst>
+                          </p:cTn>
+                        </p:par>
+                      </p:childTnLst>
+                    </p:cTn>
+                  </p:par>
+                  <p:par>
+                    <p:cTn id="15" fill="hold">
+                      <p:stCondLst>
+                        <p:cond delay="indefinite"/>
+                      </p:stCondLst>
+                      <p:childTnLst>
+                        <p:par>
+                          <p:cTn id="16" presetID="1" presetClass="entr" presetSubtype="0" fill="hold" grpId="0" nodeType="clickEffect">
+                            <p:stCondLst>
+                              <p:cond delay="0"/>
+                            </p:stCondLst>
+                            <p:childTnLst>
+                              <p:set>
+                                <p:cBhvr>
+                                  <p:cTn id="17" dur="1" fill="hold">
+                                    <p:stCondLst>
+                                      <p:cond delay="0"/>
+                                    </p:stCondLst>
+                                  </p:cTn>
+                                  <p:tgtEl>
+                                    <p:spTgt spid="283"/>
+                                  </p:tgtEl>
+                                  <p:attrNameLst>
+                                    <p:attrName>style.visibility</p:attrName>
+                                  </p:attrNameLst>
+                                </p:cBhvr>
+                                <p:to>
+                                  <p:strVal val="visible"/>
+                                </p:to>
+                              </p:set>
+                            </p:childTnLst>
+                          </p:cTn>
+                        </p:par>
+                      </p:childTnLst>
+                    </p:cTn>
+                  </p:par>
+                  <p:par>
+                    <p:cTn id="18" fill="hold">
+                      <p:stCondLst>
+                        <p:cond delay="indefinite"/>
+                      </p:stCondLst>
+                      <p:childTnLst>
+                        <p:par>
+                          <p:cTn id="19" presetID="1" presetClass="entr" presetSubtype="0" fill="hold" grpId="0" nodeType="clickEffect">
+                            <p:stCondLst>
+                              <p:cond delay="0"/>
+                            </p:stCondLst>
+                            <p:childTnLst>
+                              <p:set>
+                                <p:cBhvr>
+                                  <p:cTn id="20" dur="1" fill="hold">
+                                    <p:stCondLst>
+                                      <p:cond delay="0"/>
+                                    </p:stCondLst>
+                                  </p:cTn>
+                                  <p:tgtEl>
+                                    <p:spTgt spid="283"/>
+                                  </p:tgtEl>
+                                  <p:attrNameLst>
+                                    <p:attrName>style.visibility</p:attrName>
+                                  </p:attrNameLst>
+                                </p:cBhvr>
+                                <p:to>
+                                  <p:strVal val="visible"/>
+                                </p:to>
+                              </p:set>
+                            </p:childTnLst>
+                          </p:cTn>
+                        </p:par>
+                      </p:childTnLst>
+                    </p:cTn>
+                  </p:par>
+                </p:childTnLst>
+              </p:cTn>
+              <p:prevCondLst>
+                <p:cond evt="onPrev" delay="0">
+                  <p:tgtEl>
+                    <p:sldTgt/>
+                  </p:tgtEl>
+                </p:cond>
+              </p:prevCondLst>
+              <p:nextCondLst>
+                <p:cond evt="onNext" delay="0">
+                  <p:tgtEl>
+                    <p:sldTgt/>
+                  </p:tgtEl>
+                </p:cond>
+              </p:nextCondLst>
+            </p:seq>
+          </p:childTnLst>
+        </p:cTn>
+      </p:par>
+    </p:tnLst>
+    <p:bldLst>
+      <p:bldP spid="283" grpId="0"/>
+    </p:bldLst>
+  </p:timing>
+</p:sld>
+</file>
+
+<file path=ppt/slides/slide29.xml><?xml version="1.0" encoding="utf-8"?>
+<p:sld xmlns:a="http://schemas.openxmlformats.org/drawingml/2006/main" xmlns:r="http://schemas.openxmlformats.org/officeDocument/2006/relationships" xmlns:p="http://schemas.openxmlformats.org/presentationml/2006/main">
+  <p:cSld>
+    <p:bg>
+      <p:bgPr>
+        <a:solidFill>
+          <a:srgbClr val="FFF8EC"/>
+        </a:solidFill>
+        <a:effectLst/>
+      </p:bgPr>
+    </p:bg>
+    <p:spTree>
+      <p:nvGrpSpPr>
+        <p:cNvPr id="1" name=""/>
+        <p:cNvGrpSpPr/>
+        <p:nvPr/>
+      </p:nvGrpSpPr>
+      <p:grpSpPr>
+        <a:xfrm>
+          <a:off x="0" y="0"/>
+          <a:ext cx="0" cy="0"/>
+          <a:chOff x="0" y="0"/>
+          <a:chExt cx="0" cy="0"/>
+        </a:xfrm>
+      </p:grpSpPr>
+      <p:sp>
+        <p:nvSpPr>
+          <p:cNvPr id="291" name="Kicker"/>
+          <p:cNvSpPr txBox="1"/>
+          <p:nvPr/>
+        </p:nvSpPr>
+        <p:spPr>
+          <a:xfrm>
+            <a:off x="900000" y="420000"/>
+            <a:ext cx="10000000" cy="420000"/>
+          </a:xfrm>
+          <a:prstGeom prst="rect">
+            <a:avLst/>
+          </a:prstGeom>
+          <a:noFill/>
+          <a:ln/>
+        </p:spPr>
+        <p:txBody>
+          <a:bodyPr wrap="square" rtlCol="0">
+            <a:normAutofit/>
+          </a:bodyPr>
+          <a:lstStyle/>
+          <a:p>
+            <a:pPr>
+              <a:buNone/>
+            </a:pPr>
+            <a:r>
+              <a:rPr lang="zh-CN" sz="1400" b="1" dirty="0">
+                <a:solidFill>
+                  <a:srgbClr val="E58A2F"/>
+                </a:solidFill>
+                <a:latin typeface="Noto Sans CJK SC"/>
+                <a:ea typeface="Noto Sans CJK SC"/>
+              </a:rPr>
+              <a:t>真实时间线：熬过崩溃期就上岸</a:t>
+            </a:r>
+          </a:p>
+        </p:txBody>
+      </p:sp>
+      <p:sp>
+        <p:nvSpPr>
+          <p:cNvPr id="292" name="Title"/>
+          <p:cNvSpPr txBox="1"/>
+          <p:nvPr/>
+        </p:nvSpPr>
+        <p:spPr>
+          <a:xfrm>
+            <a:off x="900000" y="920000"/>
+            <a:ext cx="10300000" cy="800000"/>
+          </a:xfrm>
+          <a:prstGeom prst="rect">
+            <a:avLst/>
+          </a:prstGeom>
+          <a:noFill/>
+          <a:ln/>
+        </p:spPr>
+        <p:txBody>
+          <a:bodyPr wrap="square" rtlCol="0">
+            <a:normAutofit/>
+          </a:bodyPr>
+          <a:lstStyle/>
+          <a:p>
+            <a:pPr>
+              <a:buNone/>
+            </a:pPr>
+            <a:r>
+              <a:rPr lang="zh-CN" sz="3400" b="1" dirty="0">
+                <a:solidFill>
+                  <a:srgbClr val="3B2F2A"/>
+                </a:solidFill>
+                <a:latin typeface="Noto Sans CJK SC"/>
+                <a:ea typeface="Noto Sans CJK SC"/>
+              </a:rPr>
+              <a:t>真实时间线：熬过崩溃期就上岸</a:t>
+            </a:r>
+          </a:p>
+        </p:txBody>
+      </p:sp>
+      <p:sp>
+        <p:nvSpPr>
+          <p:cNvPr id="293" name="Body"/>
+          <p:cNvSpPr txBox="1"/>
+          <p:nvPr/>
+        </p:nvSpPr>
+        <p:spPr>
+          <a:xfrm>
+            <a:off x="1050000" y="1850000"/>
+            <a:ext cx="10100000" cy="4500000"/>
+          </a:xfrm>
+          <a:prstGeom prst="rect">
+            <a:avLst/>
+          </a:prstGeom>
+          <a:noFill/>
+          <a:ln/>
+        </p:spPr>
+        <p:txBody>
+          <a:bodyPr wrap="square" rtlCol="0">
+            <a:normAutofit/>
+          </a:bodyPr>
+          <a:lstStyle/>
+          <a:p>
+            <a:pPr marL="285750" indent="-285750">
+              <a:spcAft>
+                <a:spcPts val="600"/>
+              </a:spcAft>
+              <a:buFont typeface="Arial" panose="020B0604020202020204"/>
+              <a:buChar char="•"/>
+            </a:pPr>
+            <a:r>
+              <a:rPr lang="zh-CN" sz="2000" b="0" dirty="0">
+                <a:solidFill>
+                  <a:srgbClr val="3B2F2A"/>
+                </a:solidFill>
+                <a:latin typeface="Noto Sans CJK SC"/>
+                <a:ea typeface="Noto Sans CJK SC"/>
+              </a:rPr>
+              <a:t>真实案例：gap一年五个月上岸</a:t>
+            </a:r>
+          </a:p>
+          <a:p>
+            <a:pPr marL="285750" indent="-285750">
+              <a:spcAft>
+                <a:spcPts val="600"/>
+              </a:spcAft>
+              <a:buFont typeface="Arial" panose="020B0604020202020204"/>
+              <a:buChar char="•"/>
+            </a:pPr>
+            <a:r>
+              <a:rPr lang="zh-CN" sz="2000" b="0" dirty="0">
+                <a:solidFill>
+                  <a:srgbClr val="3B2F2A"/>
+                </a:solidFill>
+                <a:latin typeface="Noto Sans CJK SC"/>
+                <a:ea typeface="Noto Sans CJK SC"/>
+              </a:rPr>
+              <a:t>节奏：心理建设到offer五个月</a:t>
+            </a:r>
+          </a:p>
+          <a:p>
+            <a:pPr marL="285750" indent="-285750">
+              <a:spcAft>
+                <a:spcPts val="600"/>
+              </a:spcAft>
+              <a:buFont typeface="Arial" panose="020B0604020202020204"/>
+              <a:buChar char="•"/>
+            </a:pPr>
+            <a:r>
+              <a:rPr lang="zh-CN" sz="2000" b="0" dirty="0">
+                <a:solidFill>
+                  <a:srgbClr val="3B2F2A"/>
+                </a:solidFill>
+                <a:latin typeface="Noto Sans CJK SC"/>
+                <a:ea typeface="Noto Sans CJK SC"/>
+              </a:rPr>
+              <a:t>每天专注3-4小时投20+岗位</a:t>
+            </a:r>
+          </a:p>
+          <a:p>
+            <a:pPr marL="285750" indent="-285750">
+              <a:spcAft>
+                <a:spcPts val="600"/>
+              </a:spcAft>
+              <a:buFont typeface="Arial" panose="020B0604020202020204"/>
+              <a:buChar char="•"/>
+            </a:pPr>
+            <a:r>
+              <a:rPr lang="zh-CN" sz="2000" b="0" dirty="0">
+                <a:solidFill>
+                  <a:srgbClr val="3B2F2A"/>
+                </a:solidFill>
+                <a:latin typeface="Noto Sans CJK SC"/>
+                <a:ea typeface="Noto Sans CJK SC"/>
+              </a:rPr>
+              <a:t>转折：offer来自朋友内推</a:t>
+            </a:r>
+          </a:p>
+          <a:p>
+            <a:pPr marL="285750" indent="-285750">
+              <a:spcAft>
+                <a:spcPts val="600"/>
+              </a:spcAft>
+              <a:buFont typeface="Arial" panose="020B0604020202020204"/>
+              <a:buChar char="•"/>
+            </a:pPr>
+            <a:r>
+              <a:rPr lang="zh-CN" sz="2000" b="0" dirty="0">
+                <a:solidFill>
+                  <a:srgbClr val="3B2F2A"/>
+                </a:solidFill>
+                <a:latin typeface="Noto Sans CJK SC"/>
+                <a:ea typeface="Noto Sans CJK SC"/>
+              </a:rPr>
+              <a:t>心态：第三个月最容易崩溃</a:t>
+            </a:r>
+          </a:p>
+          <a:p>
+            <a:pPr marL="285750" indent="-285750">
+              <a:spcAft>
+                <a:spcPts val="600"/>
+              </a:spcAft>
+              <a:buFont typeface="Arial" panose="020B0604020202020204"/>
+              <a:buChar char="•"/>
+            </a:pPr>
+            <a:r>
+              <a:rPr lang="zh-CN" sz="2000" b="0" dirty="0">
+                <a:solidFill>
+                  <a:srgbClr val="3B2F2A"/>
+                </a:solidFill>
+                <a:latin typeface="Noto Sans CJK SC"/>
+                <a:ea typeface="Noto Sans CJK SC"/>
+              </a:rPr>
+              <a:t>解药：看到更长gap的成功者</a:t>
+            </a:r>
+          </a:p>
+        </p:txBody>
+      </p:sp>
+      <p:sp>
+        <p:nvSpPr>
+          <p:cNvPr id="299" name="Page number"/>
+          <p:cNvSpPr txBox="1"/>
+          <p:nvPr/>
+        </p:nvSpPr>
+        <p:spPr>
+          <a:xfrm>
+            <a:off x="10600000" y="6250000"/>
+            <a:ext cx="1200000" cy="400000"/>
+          </a:xfrm>
+          <a:prstGeom prst="rect">
+            <a:avLst/>
+          </a:prstGeom>
+          <a:noFill/>
+          <a:ln/>
+        </p:spPr>
+        <p:txBody>
+          <a:bodyPr wrap="square" rtlCol="0">
+            <a:normAutofit/>
+          </a:bodyPr>
+          <a:lstStyle/>
+          <a:p>
+            <a:pPr algn="r">
+              <a:buNone/>
+            </a:pPr>
+            <a:r>
+              <a:rPr lang="zh-CN" sz="1000" b="0" dirty="0">
+                <a:solidFill>
+                  <a:srgbClr val="7E6F68"/>
+                </a:solidFill>
+                <a:latin typeface="Noto Sans CJK SC"/>
+                <a:ea typeface="Noto Sans CJK SC"/>
+              </a:rPr>
+              <a:t>29 / 33</a:t>
+            </a:r>
+          </a:p>
+        </p:txBody>
+      </p:sp>
+    </p:spTree>
+  </p:cSld>
+  <p:clrMapOvr>
+    <a:overrideClrMapping bg1="lt1" tx1="dk1" bg2="lt2" tx2="dk2" accent1="accent1" accent2="accent2" accent3="accent3" accent4="accent4" accent5="accent5" accent6="accent6" hlink="hlink" folHlink="folHlink"/>
+  </p:clrMapOvr>
+  <p:transition spd="med">
+    <p:fade/>
+  </p:transition>
+  <p:timing>
+    <p:tnLst>
+      <p:par>
+        <p:cTn id="1" dur="indefinite" restart="never" nodeType="tmRoot">
+          <p:childTnLst>
+            <p:seq concurrent="1" nextAc="seek">
+              <p:cTn id="2" dur="indefinite" nodeType="mainSeq">
+                <p:childTnLst>
+                  <p:par>
+                    <p:cTn id="3" fill="hold">
+                      <p:stCondLst>
+                        <p:cond delay="indefinite"/>
+                      </p:stCondLst>
+                      <p:childTnLst>
+                        <p:par>
+                          <p:cTn id="4" presetID="1" presetClass="entr" presetSubtype="0" fill="hold" grpId="0" nodeType="clickEffect">
+                            <p:stCondLst>
+                              <p:cond delay="0"/>
+                            </p:stCondLst>
+                            <p:childTnLst>
+                              <p:set>
+                                <p:cBhvr>
+                                  <p:cTn id="5" dur="1" fill="hold">
+                                    <p:stCondLst>
+                                      <p:cond delay="0"/>
+                                    </p:stCondLst>
+                                  </p:cTn>
+                                  <p:tgtEl>
+                                    <p:spTgt spid="293"/>
+                                  </p:tgtEl>
+                                  <p:attrNameLst>
+                                    <p:attrName>style.visibility</p:attrName>
+                                  </p:attrNameLst>
+                                </p:cBhvr>
+                                <p:to>
+                                  <p:strVal val="visible"/>
+                                </p:to>
+                              </p:set>
+                            </p:childTnLst>
+                          </p:cTn>
+                        </p:par>
+                      </p:childTnLst>
+                    </p:cTn>
+                  </p:par>
+                  <p:par>
+                    <p:cTn id="6" fill="hold">
+                      <p:stCondLst>
+                        <p:cond delay="indefinite"/>
+                      </p:stCondLst>
+                      <p:childTnLst>
+                        <p:par>
+                          <p:cTn id="7" presetID="1" presetClass="entr" presetSubtype="0" fill="hold" grpId="0" nodeType="clickEffect">
+                            <p:stCondLst>
+                              <p:cond delay="0"/>
+                            </p:stCondLst>
+                            <p:childTnLst>
+                              <p:set>
+                                <p:cBhvr>
+                                  <p:cTn id="8" dur="1" fill="hold">
+                                    <p:stCondLst>
+                                      <p:cond delay="0"/>
+                                    </p:stCondLst>
+                                  </p:cTn>
+                                  <p:tgtEl>
+                                    <p:spTgt spid="293"/>
+                                  </p:tgtEl>
+                                  <p:attrNameLst>
+                                    <p:attrName>style.visibility</p:attrName>
+                                  </p:attrNameLst>
+                                </p:cBhvr>
+                                <p:to>
+                                  <p:strVal val="visible"/>
+                                </p:to>
+                              </p:set>
+                            </p:childTnLst>
+                          </p:cTn>
+                        </p:par>
+                      </p:childTnLst>
+                    </p:cTn>
+                  </p:par>
+                  <p:par>
+                    <p:cTn id="9" fill="hold">
+                      <p:stCondLst>
+                        <p:cond delay="indefinite"/>
+                      </p:stCondLst>
+                      <p:childTnLst>
+                        <p:par>
+                          <p:cTn id="10" presetID="1" presetClass="entr" presetSubtype="0" fill="hold" grpId="0" nodeType="clickEffect">
+                            <p:stCondLst>
+                              <p:cond delay="0"/>
+                            </p:stCondLst>
+                            <p:childTnLst>
+                              <p:set>
+                                <p:cBhvr>
+                                  <p:cTn id="11" dur="1" fill="hold">
+                                    <p:stCondLst>
+                                      <p:cond delay="0"/>
+                                    </p:stCondLst>
+                                  </p:cTn>
+                                  <p:tgtEl>
+                                    <p:spTgt spid="293"/>
+                                  </p:tgtEl>
+                                  <p:attrNameLst>
+                                    <p:attrName>style.visibility</p:attrName>
+                                  </p:attrNameLst>
+                                </p:cBhvr>
+                                <p:to>
+                                  <p:strVal val="visible"/>
+                                </p:to>
+                              </p:set>
+                            </p:childTnLst>
+                          </p:cTn>
+                        </p:par>
+                      </p:childTnLst>
+                    </p:cTn>
+                  </p:par>
+                  <p:par>
+                    <p:cTn id="12" fill="hold">
+                      <p:stCondLst>
+                        <p:cond delay="indefinite"/>
+                      </p:stCondLst>
+                      <p:childTnLst>
+                        <p:par>
+                          <p:cTn id="13" presetID="1" presetClass="entr" presetSubtype="0" fill="hold" grpId="0" nodeType="clickEffect">
+                            <p:stCondLst>
+                              <p:cond delay="0"/>
+                            </p:stCondLst>
+                            <p:childTnLst>
+                              <p:set>
+                                <p:cBhvr>
+                                  <p:cTn id="14" dur="1" fill="hold">
+                                    <p:stCondLst>
+                                      <p:cond delay="0"/>
+                                    </p:stCondLst>
+                                  </p:cTn>
+                                  <p:tgtEl>
+                                    <p:spTgt spid="293"/>
+                                  </p:tgtEl>
+                                  <p:attrNameLst>
+                                    <p:attrName>style.visibility</p:attrName>
+                                  </p:attrNameLst>
+                                </p:cBhvr>
+                                <p:to>
+                                  <p:strVal val="visible"/>
+                                </p:to>
+                              </p:set>
+                            </p:childTnLst>
+                          </p:cTn>
+                        </p:par>
+                      </p:childTnLst>
+                    </p:cTn>
+                  </p:par>
+                  <p:par>
+                    <p:cTn id="15" fill="hold">
+                      <p:stCondLst>
+                        <p:cond delay="indefinite"/>
+                      </p:stCondLst>
+                      <p:childTnLst>
+                        <p:par>
+                          <p:cTn id="16" presetID="1" presetClass="entr" presetSubtype="0" fill="hold" grpId="0" nodeType="clickEffect">
+                            <p:stCondLst>
+                              <p:cond delay="0"/>
+                            </p:stCondLst>
+                            <p:childTnLst>
+                              <p:set>
+                                <p:cBhvr>
+                                  <p:cTn id="17" dur="1" fill="hold">
+                                    <p:stCondLst>
+                                      <p:cond delay="0"/>
+                                    </p:stCondLst>
+                                  </p:cTn>
+                                  <p:tgtEl>
+                                    <p:spTgt spid="293"/>
+                                  </p:tgtEl>
+                                  <p:attrNameLst>
+                                    <p:attrName>style.visibility</p:attrName>
+                                  </p:attrNameLst>
+                                </p:cBhvr>
+                                <p:to>
+                                  <p:strVal val="visible"/>
+                                </p:to>
+                              </p:set>
+                            </p:childTnLst>
+                          </p:cTn>
+                        </p:par>
+                      </p:childTnLst>
+                    </p:cTn>
+                  </p:par>
+                  <p:par>
+                    <p:cTn id="18" fill="hold">
+                      <p:stCondLst>
+                        <p:cond delay="indefinite"/>
+                      </p:stCondLst>
+                      <p:childTnLst>
+                        <p:par>
+                          <p:cTn id="19" presetID="1" presetClass="entr" presetSubtype="0" fill="hold" grpId="0" nodeType="clickEffect">
+                            <p:stCondLst>
+                              <p:cond delay="0"/>
+                            </p:stCondLst>
+                            <p:childTnLst>
+                              <p:set>
+                                <p:cBhvr>
+                                  <p:cTn id="20" dur="1" fill="hold">
+                                    <p:stCondLst>
+                                      <p:cond delay="0"/>
+                                    </p:stCondLst>
+                                  </p:cTn>
+                                  <p:tgtEl>
+                                    <p:spTgt spid="293"/>
+                                  </p:tgtEl>
+                                  <p:attrNameLst>
+                                    <p:attrName>style.visibility</p:attrName>
+                                  </p:attrNameLst>
+                                </p:cBhvr>
+                                <p:to>
+                                  <p:strVal val="visible"/>
+                                </p:to>
+                              </p:set>
+                            </p:childTnLst>
+                          </p:cTn>
+                        </p:par>
+                      </p:childTnLst>
+                    </p:cTn>
+                  </p:par>
+                </p:childTnLst>
+              </p:cTn>
+              <p:prevCondLst>
+                <p:cond evt="onPrev" delay="0">
+                  <p:tgtEl>
+                    <p:sldTgt/>
+                  </p:tgtEl>
+                </p:cond>
+              </p:prevCondLst>
+              <p:nextCondLst>
+                <p:cond evt="onNext" delay="0">
+                  <p:tgtEl>
+                    <p:sldTgt/>
+                  </p:tgtEl>
+                </p:cond>
+              </p:nextCondLst>
+            </p:seq>
+          </p:childTnLst>
+        </p:cTn>
+      </p:par>
+    </p:tnLst>
+    <p:bldLst>
+      <p:bldP spid="293" grpId="0"/>
+    </p:bldLst>
+  </p:timing>
 </p:sld>
 </file>
 
@@ -9939,7 +12008,7 @@
                 <a:latin typeface="Noto Sans CJK SC"/>
                 <a:ea typeface="Noto Sans CJK SC"/>
               </a:rPr>
-              <a:t>候选：数据运营 或 新媒体运营</a:t>
+              <a:t>候选：数据/新媒体/AIGC内容运营</a:t>
             </a:r>
           </a:p>
           <a:p>
@@ -9977,7 +12046,7 @@
                 <a:latin typeface="Noto Sans CJK SC"/>
                 <a:ea typeface="Noto Sans CJK SC"/>
               </a:rPr>
-              <a:t>候选：社群运营 或 行政专员</a:t>
+              <a:t>候选：社群/行政/AI训练师</a:t>
             </a:r>
           </a:p>
           <a:p>
@@ -10054,7 +12123,7 @@
                 <a:latin typeface="Noto Sans CJK SC"/>
                 <a:ea typeface="Noto Sans CJK SC"/>
               </a:rPr>
-              <a:t>03 / 26</a:t>
+              <a:t>03 / 33</a:t>
             </a:r>
           </a:p>
         </p:txBody>
@@ -10316,6 +12385,1724 @@
       <p:bldP spid="33" grpId="0"/>
     </p:bldLst>
   </p:timing>
+</p:sld>
+</file>
+
+<file path=ppt/slides/slide30.xml><?xml version="1.0" encoding="utf-8"?>
+<p:sld xmlns:a="http://schemas.openxmlformats.org/drawingml/2006/main" xmlns:r="http://schemas.openxmlformats.org/officeDocument/2006/relationships" xmlns:p="http://schemas.openxmlformats.org/presentationml/2006/main">
+  <p:cSld>
+    <p:bg>
+      <p:bgPr>
+        <a:solidFill>
+          <a:srgbClr val="FFF8EC"/>
+        </a:solidFill>
+        <a:effectLst/>
+      </p:bgPr>
+    </p:bg>
+    <p:spTree>
+      <p:nvGrpSpPr>
+        <p:cNvPr id="1" name=""/>
+        <p:cNvGrpSpPr/>
+        <p:nvPr/>
+      </p:nvGrpSpPr>
+      <p:grpSpPr>
+        <a:xfrm>
+          <a:off x="0" y="0"/>
+          <a:ext cx="0" cy="0"/>
+          <a:chOff x="0" y="0"/>
+          <a:chExt cx="0" cy="0"/>
+        </a:xfrm>
+      </p:grpSpPr>
+      <p:sp>
+        <p:nvSpPr>
+          <p:cNvPr id="301" name="Kicker"/>
+          <p:cNvSpPr txBox="1"/>
+          <p:nvPr/>
+        </p:nvSpPr>
+        <p:spPr>
+          <a:xfrm>
+            <a:off x="900000" y="420000"/>
+            <a:ext cx="10000000" cy="420000"/>
+          </a:xfrm>
+          <a:prstGeom prst="rect">
+            <a:avLst/>
+          </a:prstGeom>
+          <a:noFill/>
+          <a:ln/>
+        </p:spPr>
+        <p:txBody>
+          <a:bodyPr wrap="square" rtlCol="0">
+            <a:normAutofit/>
+          </a:bodyPr>
+          <a:lstStyle/>
+          <a:p>
+            <a:pPr>
+              <a:buNone/>
+            </a:pPr>
+            <a:r>
+              <a:rPr lang="zh-CN" sz="1400" b="1" dirty="0">
+                <a:solidFill>
+                  <a:srgbClr val="E58A2F"/>
+                </a:solidFill>
+                <a:latin typeface="Noto Sans CJK SC"/>
+                <a:ea typeface="Noto Sans CJK SC"/>
+              </a:rPr>
+              <a:t>12周行动计划</a:t>
+            </a:r>
+          </a:p>
+        </p:txBody>
+      </p:sp>
+      <p:sp>
+        <p:nvSpPr>
+          <p:cNvPr id="302" name="Title"/>
+          <p:cNvSpPr txBox="1"/>
+          <p:nvPr/>
+        </p:nvSpPr>
+        <p:spPr>
+          <a:xfrm>
+            <a:off x="900000" y="920000"/>
+            <a:ext cx="10300000" cy="800000"/>
+          </a:xfrm>
+          <a:prstGeom prst="rect">
+            <a:avLst/>
+          </a:prstGeom>
+          <a:noFill/>
+          <a:ln/>
+        </p:spPr>
+        <p:txBody>
+          <a:bodyPr wrap="square" rtlCol="0">
+            <a:normAutofit/>
+          </a:bodyPr>
+          <a:lstStyle/>
+          <a:p>
+            <a:pPr>
+              <a:buNone/>
+            </a:pPr>
+            <a:r>
+              <a:rPr lang="zh-CN" sz="3400" b="1" dirty="0">
+                <a:solidFill>
+                  <a:srgbClr val="3B2F2A"/>
+                </a:solidFill>
+                <a:latin typeface="Noto Sans CJK SC"/>
+                <a:ea typeface="Noto Sans CJK SC"/>
+              </a:rPr>
+              <a:t>12周行动计划</a:t>
+            </a:r>
+          </a:p>
+        </p:txBody>
+      </p:sp>
+      <p:sp>
+        <p:nvSpPr>
+          <p:cNvPr id="303" name="Body"/>
+          <p:cNvSpPr txBox="1"/>
+          <p:nvPr/>
+        </p:nvSpPr>
+        <p:spPr>
+          <a:xfrm>
+            <a:off x="1050000" y="1850000"/>
+            <a:ext cx="10100000" cy="4500000"/>
+          </a:xfrm>
+          <a:prstGeom prst="rect">
+            <a:avLst/>
+          </a:prstGeom>
+          <a:noFill/>
+          <a:ln/>
+        </p:spPr>
+        <p:txBody>
+          <a:bodyPr wrap="square" rtlCol="0">
+            <a:normAutofit/>
+          </a:bodyPr>
+          <a:lstStyle/>
+          <a:p>
+            <a:pPr marL="285750" indent="-285750">
+              <a:spcAft>
+                <a:spcPts val="600"/>
+              </a:spcAft>
+              <a:buFont typeface="Arial" panose="020B0604020202020204"/>
+              <a:buChar char="•"/>
+            </a:pPr>
+            <a:r>
+              <a:rPr lang="zh-CN" sz="2000" b="0" dirty="0">
+                <a:solidFill>
+                  <a:srgbClr val="3B2F2A"/>
+                </a:solidFill>
+                <a:latin typeface="Noto Sans CJK SC"/>
+                <a:ea typeface="Noto Sans CJK SC"/>
+              </a:rPr>
+              <a:t>第1周：定方向+看100条JD</a:t>
+            </a:r>
+          </a:p>
+          <a:p>
+            <a:pPr marL="285750" indent="-285750">
+              <a:spcAft>
+                <a:spcPts val="600"/>
+              </a:spcAft>
+              <a:buFont typeface="Arial" panose="020B0604020202020204"/>
+              <a:buChar char="•"/>
+            </a:pPr>
+            <a:r>
+              <a:rPr lang="zh-CN" sz="2000" b="0" dirty="0">
+                <a:solidFill>
+                  <a:srgbClr val="3B2F2A"/>
+                </a:solidFill>
+                <a:latin typeface="Noto Sans CJK SC"/>
+                <a:ea typeface="Noto Sans CJK SC"/>
+              </a:rPr>
+              <a:t>第2到6周：每天学3-4小时</a:t>
+            </a:r>
+          </a:p>
+          <a:p>
+            <a:pPr marL="285750" indent="-285750">
+              <a:spcAft>
+                <a:spcPts val="600"/>
+              </a:spcAft>
+              <a:buFont typeface="Arial" panose="020B0604020202020204"/>
+              <a:buChar char="•"/>
+            </a:pPr>
+            <a:r>
+              <a:rPr lang="zh-CN" sz="2000" b="0" dirty="0">
+                <a:solidFill>
+                  <a:srgbClr val="3B2F2A"/>
+                </a:solidFill>
+                <a:latin typeface="Noto Sans CJK SC"/>
+                <a:ea typeface="Noto Sans CJK SC"/>
+              </a:rPr>
+              <a:t>第5周起：改简历+小量试投</a:t>
+            </a:r>
+          </a:p>
+          <a:p>
+            <a:pPr marL="285750" indent="-285750">
+              <a:spcAft>
+                <a:spcPts val="600"/>
+              </a:spcAft>
+              <a:buFont typeface="Arial" panose="020B0604020202020204"/>
+              <a:buChar char="•"/>
+            </a:pPr>
+            <a:r>
+              <a:rPr lang="zh-CN" sz="2000" b="0" dirty="0">
+                <a:solidFill>
+                  <a:srgbClr val="3B2F2A"/>
+                </a:solidFill>
+                <a:latin typeface="Noto Sans CJK SC"/>
+                <a:ea typeface="Noto Sans CJK SC"/>
+              </a:rPr>
+              <a:t>第6到12周：每周投10-20个</a:t>
+            </a:r>
+          </a:p>
+          <a:p>
+            <a:pPr marL="285750" indent="-285750">
+              <a:spcAft>
+                <a:spcPts val="600"/>
+              </a:spcAft>
+              <a:buFont typeface="Arial" panose="020B0604020202020204"/>
+              <a:buChar char="•"/>
+            </a:pPr>
+            <a:r>
+              <a:rPr lang="zh-CN" sz="2000" b="0" dirty="0">
+                <a:solidFill>
+                  <a:srgbClr val="3B2F2A"/>
+                </a:solidFill>
+                <a:latin typeface="Noto Sans CJK SC"/>
+                <a:ea typeface="Noto Sans CJK SC"/>
+              </a:rPr>
+              <a:t>每场面试后：写三行复盘</a:t>
+            </a:r>
+          </a:p>
+          <a:p>
+            <a:pPr marL="285750" indent="-285750">
+              <a:spcAft>
+                <a:spcPts val="600"/>
+              </a:spcAft>
+              <a:buFont typeface="Arial" panose="020B0604020202020204"/>
+              <a:buChar char="•"/>
+            </a:pPr>
+            <a:r>
+              <a:rPr lang="zh-CN" sz="2000" b="0" dirty="0">
+                <a:solidFill>
+                  <a:srgbClr val="3B2F2A"/>
+                </a:solidFill>
+                <a:latin typeface="Noto Sans CJK SC"/>
+                <a:ea typeface="Noto Sans CJK SC"/>
+              </a:rPr>
+              <a:t>心法：先拿2-3个offer再挑</a:t>
+            </a:r>
+          </a:p>
+        </p:txBody>
+      </p:sp>
+      <p:sp>
+        <p:nvSpPr>
+          <p:cNvPr id="309" name="Page number"/>
+          <p:cNvSpPr txBox="1"/>
+          <p:nvPr/>
+        </p:nvSpPr>
+        <p:spPr>
+          <a:xfrm>
+            <a:off x="10600000" y="6250000"/>
+            <a:ext cx="1200000" cy="400000"/>
+          </a:xfrm>
+          <a:prstGeom prst="rect">
+            <a:avLst/>
+          </a:prstGeom>
+          <a:noFill/>
+          <a:ln/>
+        </p:spPr>
+        <p:txBody>
+          <a:bodyPr wrap="square" rtlCol="0">
+            <a:normAutofit/>
+          </a:bodyPr>
+          <a:lstStyle/>
+          <a:p>
+            <a:pPr algn="r">
+              <a:buNone/>
+            </a:pPr>
+            <a:r>
+              <a:rPr lang="zh-CN" sz="1000" b="0" dirty="0">
+                <a:solidFill>
+                  <a:srgbClr val="7E6F68"/>
+                </a:solidFill>
+                <a:latin typeface="Noto Sans CJK SC"/>
+                <a:ea typeface="Noto Sans CJK SC"/>
+              </a:rPr>
+              <a:t>30 / 33</a:t>
+            </a:r>
+          </a:p>
+        </p:txBody>
+      </p:sp>
+    </p:spTree>
+  </p:cSld>
+  <p:clrMapOvr>
+    <a:overrideClrMapping bg1="lt1" tx1="dk1" bg2="lt2" tx2="dk2" accent1="accent1" accent2="accent2" accent3="accent3" accent4="accent4" accent5="accent5" accent6="accent6" hlink="hlink" folHlink="folHlink"/>
+  </p:clrMapOvr>
+  <p:transition spd="med">
+    <p:fade/>
+  </p:transition>
+  <p:timing>
+    <p:tnLst>
+      <p:par>
+        <p:cTn id="1" dur="indefinite" restart="never" nodeType="tmRoot">
+          <p:childTnLst>
+            <p:seq concurrent="1" nextAc="seek">
+              <p:cTn id="2" dur="indefinite" nodeType="mainSeq">
+                <p:childTnLst>
+                  <p:par>
+                    <p:cTn id="3" fill="hold">
+                      <p:stCondLst>
+                        <p:cond delay="indefinite"/>
+                      </p:stCondLst>
+                      <p:childTnLst>
+                        <p:par>
+                          <p:cTn id="4" presetID="1" presetClass="entr" presetSubtype="0" fill="hold" grpId="0" nodeType="clickEffect">
+                            <p:stCondLst>
+                              <p:cond delay="0"/>
+                            </p:stCondLst>
+                            <p:childTnLst>
+                              <p:set>
+                                <p:cBhvr>
+                                  <p:cTn id="5" dur="1" fill="hold">
+                                    <p:stCondLst>
+                                      <p:cond delay="0"/>
+                                    </p:stCondLst>
+                                  </p:cTn>
+                                  <p:tgtEl>
+                                    <p:spTgt spid="303"/>
+                                  </p:tgtEl>
+                                  <p:attrNameLst>
+                                    <p:attrName>style.visibility</p:attrName>
+                                  </p:attrNameLst>
+                                </p:cBhvr>
+                                <p:to>
+                                  <p:strVal val="visible"/>
+                                </p:to>
+                              </p:set>
+                            </p:childTnLst>
+                          </p:cTn>
+                        </p:par>
+                      </p:childTnLst>
+                    </p:cTn>
+                  </p:par>
+                  <p:par>
+                    <p:cTn id="6" fill="hold">
+                      <p:stCondLst>
+                        <p:cond delay="indefinite"/>
+                      </p:stCondLst>
+                      <p:childTnLst>
+                        <p:par>
+                          <p:cTn id="7" presetID="1" presetClass="entr" presetSubtype="0" fill="hold" grpId="0" nodeType="clickEffect">
+                            <p:stCondLst>
+                              <p:cond delay="0"/>
+                            </p:stCondLst>
+                            <p:childTnLst>
+                              <p:set>
+                                <p:cBhvr>
+                                  <p:cTn id="8" dur="1" fill="hold">
+                                    <p:stCondLst>
+                                      <p:cond delay="0"/>
+                                    </p:stCondLst>
+                                  </p:cTn>
+                                  <p:tgtEl>
+                                    <p:spTgt spid="303"/>
+                                  </p:tgtEl>
+                                  <p:attrNameLst>
+                                    <p:attrName>style.visibility</p:attrName>
+                                  </p:attrNameLst>
+                                </p:cBhvr>
+                                <p:to>
+                                  <p:strVal val="visible"/>
+                                </p:to>
+                              </p:set>
+                            </p:childTnLst>
+                          </p:cTn>
+                        </p:par>
+                      </p:childTnLst>
+                    </p:cTn>
+                  </p:par>
+                  <p:par>
+                    <p:cTn id="9" fill="hold">
+                      <p:stCondLst>
+                        <p:cond delay="indefinite"/>
+                      </p:stCondLst>
+                      <p:childTnLst>
+                        <p:par>
+                          <p:cTn id="10" presetID="1" presetClass="entr" presetSubtype="0" fill="hold" grpId="0" nodeType="clickEffect">
+                            <p:stCondLst>
+                              <p:cond delay="0"/>
+                            </p:stCondLst>
+                            <p:childTnLst>
+                              <p:set>
+                                <p:cBhvr>
+                                  <p:cTn id="11" dur="1" fill="hold">
+                                    <p:stCondLst>
+                                      <p:cond delay="0"/>
+                                    </p:stCondLst>
+                                  </p:cTn>
+                                  <p:tgtEl>
+                                    <p:spTgt spid="303"/>
+                                  </p:tgtEl>
+                                  <p:attrNameLst>
+                                    <p:attrName>style.visibility</p:attrName>
+                                  </p:attrNameLst>
+                                </p:cBhvr>
+                                <p:to>
+                                  <p:strVal val="visible"/>
+                                </p:to>
+                              </p:set>
+                            </p:childTnLst>
+                          </p:cTn>
+                        </p:par>
+                      </p:childTnLst>
+                    </p:cTn>
+                  </p:par>
+                  <p:par>
+                    <p:cTn id="12" fill="hold">
+                      <p:stCondLst>
+                        <p:cond delay="indefinite"/>
+                      </p:stCondLst>
+                      <p:childTnLst>
+                        <p:par>
+                          <p:cTn id="13" presetID="1" presetClass="entr" presetSubtype="0" fill="hold" grpId="0" nodeType="clickEffect">
+                            <p:stCondLst>
+                              <p:cond delay="0"/>
+                            </p:stCondLst>
+                            <p:childTnLst>
+                              <p:set>
+                                <p:cBhvr>
+                                  <p:cTn id="14" dur="1" fill="hold">
+                                    <p:stCondLst>
+                                      <p:cond delay="0"/>
+                                    </p:stCondLst>
+                                  </p:cTn>
+                                  <p:tgtEl>
+                                    <p:spTgt spid="303"/>
+                                  </p:tgtEl>
+                                  <p:attrNameLst>
+                                    <p:attrName>style.visibility</p:attrName>
+                                  </p:attrNameLst>
+                                </p:cBhvr>
+                                <p:to>
+                                  <p:strVal val="visible"/>
+                                </p:to>
+                              </p:set>
+                            </p:childTnLst>
+                          </p:cTn>
+                        </p:par>
+                      </p:childTnLst>
+                    </p:cTn>
+                  </p:par>
+                  <p:par>
+                    <p:cTn id="15" fill="hold">
+                      <p:stCondLst>
+                        <p:cond delay="indefinite"/>
+                      </p:stCondLst>
+                      <p:childTnLst>
+                        <p:par>
+                          <p:cTn id="16" presetID="1" presetClass="entr" presetSubtype="0" fill="hold" grpId="0" nodeType="clickEffect">
+                            <p:stCondLst>
+                              <p:cond delay="0"/>
+                            </p:stCondLst>
+                            <p:childTnLst>
+                              <p:set>
+                                <p:cBhvr>
+                                  <p:cTn id="17" dur="1" fill="hold">
+                                    <p:stCondLst>
+                                      <p:cond delay="0"/>
+                                    </p:stCondLst>
+                                  </p:cTn>
+                                  <p:tgtEl>
+                                    <p:spTgt spid="303"/>
+                                  </p:tgtEl>
+                                  <p:attrNameLst>
+                                    <p:attrName>style.visibility</p:attrName>
+                                  </p:attrNameLst>
+                                </p:cBhvr>
+                                <p:to>
+                                  <p:strVal val="visible"/>
+                                </p:to>
+                              </p:set>
+                            </p:childTnLst>
+                          </p:cTn>
+                        </p:par>
+                      </p:childTnLst>
+                    </p:cTn>
+                  </p:par>
+                  <p:par>
+                    <p:cTn id="18" fill="hold">
+                      <p:stCondLst>
+                        <p:cond delay="indefinite"/>
+                      </p:stCondLst>
+                      <p:childTnLst>
+                        <p:par>
+                          <p:cTn id="19" presetID="1" presetClass="entr" presetSubtype="0" fill="hold" grpId="0" nodeType="clickEffect">
+                            <p:stCondLst>
+                              <p:cond delay="0"/>
+                            </p:stCondLst>
+                            <p:childTnLst>
+                              <p:set>
+                                <p:cBhvr>
+                                  <p:cTn id="20" dur="1" fill="hold">
+                                    <p:stCondLst>
+                                      <p:cond delay="0"/>
+                                    </p:stCondLst>
+                                  </p:cTn>
+                                  <p:tgtEl>
+                                    <p:spTgt spid="303"/>
+                                  </p:tgtEl>
+                                  <p:attrNameLst>
+                                    <p:attrName>style.visibility</p:attrName>
+                                  </p:attrNameLst>
+                                </p:cBhvr>
+                                <p:to>
+                                  <p:strVal val="visible"/>
+                                </p:to>
+                              </p:set>
+                            </p:childTnLst>
+                          </p:cTn>
+                        </p:par>
+                      </p:childTnLst>
+                    </p:cTn>
+                  </p:par>
+                </p:childTnLst>
+              </p:cTn>
+              <p:prevCondLst>
+                <p:cond evt="onPrev" delay="0">
+                  <p:tgtEl>
+                    <p:sldTgt/>
+                  </p:tgtEl>
+                </p:cond>
+              </p:prevCondLst>
+              <p:nextCondLst>
+                <p:cond evt="onNext" delay="0">
+                  <p:tgtEl>
+                    <p:sldTgt/>
+                  </p:tgtEl>
+                </p:cond>
+              </p:nextCondLst>
+            </p:seq>
+          </p:childTnLst>
+        </p:cTn>
+      </p:par>
+    </p:tnLst>
+    <p:bldLst>
+      <p:bldP spid="303" grpId="0"/>
+    </p:bldLst>
+  </p:timing>
+</p:sld>
+</file>
+
+<file path=ppt/slides/slide31.xml><?xml version="1.0" encoding="utf-8"?>
+<p:sld xmlns:a="http://schemas.openxmlformats.org/drawingml/2006/main" xmlns:r="http://schemas.openxmlformats.org/officeDocument/2006/relationships" xmlns:p="http://schemas.openxmlformats.org/presentationml/2006/main">
+  <p:cSld>
+    <p:bg>
+      <p:bgPr>
+        <a:solidFill>
+          <a:srgbClr val="FFF8EC"/>
+        </a:solidFill>
+        <a:effectLst/>
+      </p:bgPr>
+    </p:bg>
+    <p:spTree>
+      <p:nvGrpSpPr>
+        <p:cNvPr id="1" name=""/>
+        <p:cNvGrpSpPr/>
+        <p:nvPr/>
+      </p:nvGrpSpPr>
+      <p:grpSpPr>
+        <a:xfrm>
+          <a:off x="0" y="0"/>
+          <a:ext cx="0" cy="0"/>
+          <a:chOff x="0" y="0"/>
+          <a:chExt cx="0" cy="0"/>
+        </a:xfrm>
+      </p:grpSpPr>
+      <p:sp>
+        <p:nvSpPr>
+          <p:cNvPr id="311" name="Kicker"/>
+          <p:cNvSpPr txBox="1"/>
+          <p:nvPr/>
+        </p:nvSpPr>
+        <p:spPr>
+          <a:xfrm>
+            <a:off x="900000" y="420000"/>
+            <a:ext cx="10000000" cy="420000"/>
+          </a:xfrm>
+          <a:prstGeom prst="rect">
+            <a:avLst/>
+          </a:prstGeom>
+          <a:noFill/>
+          <a:ln/>
+        </p:spPr>
+        <p:txBody>
+          <a:bodyPr wrap="square" rtlCol="0">
+            <a:normAutofit/>
+          </a:bodyPr>
+          <a:lstStyle/>
+          <a:p>
+            <a:pPr>
+              <a:buNone/>
+            </a:pPr>
+            <a:r>
+              <a:rPr lang="zh-CN" sz="1400" b="1" dirty="0">
+                <a:solidFill>
+                  <a:srgbClr val="E58A2F"/>
+                </a:solidFill>
+                <a:latin typeface="Noto Sans CJK SC"/>
+                <a:ea typeface="Noto Sans CJK SC"/>
+              </a:rPr>
+              <a:t>避坑清单</a:t>
+            </a:r>
+          </a:p>
+        </p:txBody>
+      </p:sp>
+      <p:sp>
+        <p:nvSpPr>
+          <p:cNvPr id="312" name="Title"/>
+          <p:cNvSpPr txBox="1"/>
+          <p:nvPr/>
+        </p:nvSpPr>
+        <p:spPr>
+          <a:xfrm>
+            <a:off x="900000" y="920000"/>
+            <a:ext cx="10300000" cy="800000"/>
+          </a:xfrm>
+          <a:prstGeom prst="rect">
+            <a:avLst/>
+          </a:prstGeom>
+          <a:noFill/>
+          <a:ln/>
+        </p:spPr>
+        <p:txBody>
+          <a:bodyPr wrap="square" rtlCol="0">
+            <a:normAutofit/>
+          </a:bodyPr>
+          <a:lstStyle/>
+          <a:p>
+            <a:pPr>
+              <a:buNone/>
+            </a:pPr>
+            <a:r>
+              <a:rPr lang="zh-CN" sz="3400" b="1" dirty="0">
+                <a:solidFill>
+                  <a:srgbClr val="3B2F2A"/>
+                </a:solidFill>
+                <a:latin typeface="Noto Sans CJK SC"/>
+                <a:ea typeface="Noto Sans CJK SC"/>
+              </a:rPr>
+              <a:t>避坑清单</a:t>
+            </a:r>
+          </a:p>
+        </p:txBody>
+      </p:sp>
+      <p:sp>
+        <p:nvSpPr>
+          <p:cNvPr id="313" name="Body"/>
+          <p:cNvSpPr txBox="1"/>
+          <p:nvPr/>
+        </p:nvSpPr>
+        <p:spPr>
+          <a:xfrm>
+            <a:off x="1050000" y="1850000"/>
+            <a:ext cx="10100000" cy="4500000"/>
+          </a:xfrm>
+          <a:prstGeom prst="rect">
+            <a:avLst/>
+          </a:prstGeom>
+          <a:noFill/>
+          <a:ln/>
+        </p:spPr>
+        <p:txBody>
+          <a:bodyPr wrap="square" rtlCol="0">
+            <a:normAutofit/>
+          </a:bodyPr>
+          <a:lstStyle/>
+          <a:p>
+            <a:pPr marL="285750" indent="-285750">
+              <a:spcAft>
+                <a:spcPts val="600"/>
+              </a:spcAft>
+              <a:buFont typeface="Arial" panose="020B0604020202020204"/>
+              <a:buChar char="•"/>
+            </a:pPr>
+            <a:r>
+              <a:rPr lang="zh-CN" sz="2000" b="0" dirty="0">
+                <a:solidFill>
+                  <a:srgbClr val="3B2F2A"/>
+                </a:solidFill>
+                <a:latin typeface="Noto Sans CJK SC"/>
+                <a:ea typeface="Noto Sans CJK SC"/>
+              </a:rPr>
+              <a:t>培训贷：包就业等于贷2-3万</a:t>
+            </a:r>
+          </a:p>
+          <a:p>
+            <a:pPr marL="285750" indent="-285750">
+              <a:spcAft>
+                <a:spcPts val="600"/>
+              </a:spcAft>
+              <a:buFont typeface="Arial" panose="020B0604020202020204"/>
+              <a:buChar char="•"/>
+            </a:pPr>
+            <a:r>
+              <a:rPr lang="zh-CN" sz="2000" b="0" dirty="0">
+                <a:solidFill>
+                  <a:srgbClr val="3B2F2A"/>
+                </a:solidFill>
+                <a:latin typeface="Noto Sans CJK SC"/>
+                <a:ea typeface="Noto Sans CJK SC"/>
+              </a:rPr>
+              <a:t>入职先交钱的岗位都是违法</a:t>
+            </a:r>
+          </a:p>
+          <a:p>
+            <a:pPr marL="285750" indent="-285750">
+              <a:spcAft>
+                <a:spcPts val="600"/>
+              </a:spcAft>
+              <a:buFont typeface="Arial" panose="020B0604020202020204"/>
+              <a:buChar char="•"/>
+            </a:pPr>
+            <a:r>
+              <a:rPr lang="zh-CN" sz="2000" b="0" dirty="0">
+                <a:solidFill>
+                  <a:srgbClr val="3B2F2A"/>
+                </a:solidFill>
+                <a:latin typeface="Noto Sans CJK SC"/>
+                <a:ea typeface="Noto Sans CJK SC"/>
+              </a:rPr>
+              <a:t>刷单、点赞员兼职全是诈骗</a:t>
+            </a:r>
+          </a:p>
+          <a:p>
+            <a:pPr marL="285750" indent="-285750">
+              <a:spcAft>
+                <a:spcPts val="600"/>
+              </a:spcAft>
+              <a:buFont typeface="Arial" panose="020B0604020202020204"/>
+              <a:buChar char="•"/>
+            </a:pPr>
+            <a:r>
+              <a:rPr lang="zh-CN" sz="2000" b="0" dirty="0">
+                <a:solidFill>
+                  <a:srgbClr val="3B2F2A"/>
+                </a:solidFill>
+                <a:latin typeface="Noto Sans CJK SC"/>
+                <a:ea typeface="Noto Sans CJK SC"/>
+              </a:rPr>
+              <a:t>便宜求职课发网盘链接是套路</a:t>
+            </a:r>
+          </a:p>
+          <a:p>
+            <a:pPr marL="285750" indent="-285750">
+              <a:spcAft>
+                <a:spcPts val="600"/>
+              </a:spcAft>
+              <a:buFont typeface="Arial" panose="020B0604020202020204"/>
+              <a:buChar char="•"/>
+            </a:pPr>
+            <a:r>
+              <a:rPr lang="zh-CN" sz="2000" b="0" dirty="0">
+                <a:solidFill>
+                  <a:srgbClr val="3B2F2A"/>
+                </a:solidFill>
+                <a:latin typeface="Noto Sans CJK SC"/>
+                <a:ea typeface="Noto Sans CJK SC"/>
+              </a:rPr>
+              <a:t>无经验月入两万要高度警惕</a:t>
+            </a:r>
+          </a:p>
+          <a:p>
+            <a:pPr marL="285750" indent="-285750">
+              <a:spcAft>
+                <a:spcPts val="600"/>
+              </a:spcAft>
+              <a:buFont typeface="Arial" panose="020B0604020202020204"/>
+              <a:buChar char="•"/>
+            </a:pPr>
+            <a:r>
+              <a:rPr lang="zh-CN" sz="2000" b="0" dirty="0">
+                <a:solidFill>
+                  <a:srgbClr val="3B2F2A"/>
+                </a:solidFill>
+                <a:latin typeface="Noto Sans CJK SC"/>
+                <a:ea typeface="Noto Sans CJK SC"/>
+              </a:rPr>
+              <a:t>试用期不缴社保可依法维权</a:t>
+            </a:r>
+          </a:p>
+          <a:p>
+            <a:pPr marL="285750" indent="-285750">
+              <a:spcAft>
+                <a:spcPts val="600"/>
+              </a:spcAft>
+              <a:buFont typeface="Arial" panose="020B0604020202020204"/>
+              <a:buChar char="•"/>
+            </a:pPr>
+            <a:r>
+              <a:rPr lang="zh-CN" sz="2000" b="0" dirty="0">
+                <a:solidFill>
+                  <a:srgbClr val="3B2F2A"/>
+                </a:solidFill>
+                <a:latin typeface="Noto Sans CJK SC"/>
+                <a:ea typeface="Noto Sans CJK SC"/>
+              </a:rPr>
+              <a:t>境外高薪邀约绝对不出境</a:t>
+            </a:r>
+          </a:p>
+        </p:txBody>
+      </p:sp>
+      <p:sp>
+        <p:nvSpPr>
+          <p:cNvPr id="319" name="Page number"/>
+          <p:cNvSpPr txBox="1"/>
+          <p:nvPr/>
+        </p:nvSpPr>
+        <p:spPr>
+          <a:xfrm>
+            <a:off x="10600000" y="6250000"/>
+            <a:ext cx="1200000" cy="400000"/>
+          </a:xfrm>
+          <a:prstGeom prst="rect">
+            <a:avLst/>
+          </a:prstGeom>
+          <a:noFill/>
+          <a:ln/>
+        </p:spPr>
+        <p:txBody>
+          <a:bodyPr wrap="square" rtlCol="0">
+            <a:normAutofit/>
+          </a:bodyPr>
+          <a:lstStyle/>
+          <a:p>
+            <a:pPr algn="r">
+              <a:buNone/>
+            </a:pPr>
+            <a:r>
+              <a:rPr lang="zh-CN" sz="1000" b="0" dirty="0">
+                <a:solidFill>
+                  <a:srgbClr val="7E6F68"/>
+                </a:solidFill>
+                <a:latin typeface="Noto Sans CJK SC"/>
+                <a:ea typeface="Noto Sans CJK SC"/>
+              </a:rPr>
+              <a:t>31 / 33</a:t>
+            </a:r>
+          </a:p>
+        </p:txBody>
+      </p:sp>
+    </p:spTree>
+  </p:cSld>
+  <p:clrMapOvr>
+    <a:overrideClrMapping bg1="lt1" tx1="dk1" bg2="lt2" tx2="dk2" accent1="accent1" accent2="accent2" accent3="accent3" accent4="accent4" accent5="accent5" accent6="accent6" hlink="hlink" folHlink="folHlink"/>
+  </p:clrMapOvr>
+  <p:transition spd="med">
+    <p:fade/>
+  </p:transition>
+  <p:timing>
+    <p:tnLst>
+      <p:par>
+        <p:cTn id="1" dur="indefinite" restart="never" nodeType="tmRoot">
+          <p:childTnLst>
+            <p:seq concurrent="1" nextAc="seek">
+              <p:cTn id="2" dur="indefinite" nodeType="mainSeq">
+                <p:childTnLst>
+                  <p:par>
+                    <p:cTn id="3" fill="hold">
+                      <p:stCondLst>
+                        <p:cond delay="indefinite"/>
+                      </p:stCondLst>
+                      <p:childTnLst>
+                        <p:par>
+                          <p:cTn id="4" presetID="1" presetClass="entr" presetSubtype="0" fill="hold" grpId="0" nodeType="clickEffect">
+                            <p:stCondLst>
+                              <p:cond delay="0"/>
+                            </p:stCondLst>
+                            <p:childTnLst>
+                              <p:set>
+                                <p:cBhvr>
+                                  <p:cTn id="5" dur="1" fill="hold">
+                                    <p:stCondLst>
+                                      <p:cond delay="0"/>
+                                    </p:stCondLst>
+                                  </p:cTn>
+                                  <p:tgtEl>
+                                    <p:spTgt spid="313"/>
+                                  </p:tgtEl>
+                                  <p:attrNameLst>
+                                    <p:attrName>style.visibility</p:attrName>
+                                  </p:attrNameLst>
+                                </p:cBhvr>
+                                <p:to>
+                                  <p:strVal val="visible"/>
+                                </p:to>
+                              </p:set>
+                            </p:childTnLst>
+                          </p:cTn>
+                        </p:par>
+                      </p:childTnLst>
+                    </p:cTn>
+                  </p:par>
+                  <p:par>
+                    <p:cTn id="6" fill="hold">
+                      <p:stCondLst>
+                        <p:cond delay="indefinite"/>
+                      </p:stCondLst>
+                      <p:childTnLst>
+                        <p:par>
+                          <p:cTn id="7" presetID="1" presetClass="entr" presetSubtype="0" fill="hold" grpId="0" nodeType="clickEffect">
+                            <p:stCondLst>
+                              <p:cond delay="0"/>
+                            </p:stCondLst>
+                            <p:childTnLst>
+                              <p:set>
+                                <p:cBhvr>
+                                  <p:cTn id="8" dur="1" fill="hold">
+                                    <p:stCondLst>
+                                      <p:cond delay="0"/>
+                                    </p:stCondLst>
+                                  </p:cTn>
+                                  <p:tgtEl>
+                                    <p:spTgt spid="313"/>
+                                  </p:tgtEl>
+                                  <p:attrNameLst>
+                                    <p:attrName>style.visibility</p:attrName>
+                                  </p:attrNameLst>
+                                </p:cBhvr>
+                                <p:to>
+                                  <p:strVal val="visible"/>
+                                </p:to>
+                              </p:set>
+                            </p:childTnLst>
+                          </p:cTn>
+                        </p:par>
+                      </p:childTnLst>
+                    </p:cTn>
+                  </p:par>
+                  <p:par>
+                    <p:cTn id="9" fill="hold">
+                      <p:stCondLst>
+                        <p:cond delay="indefinite"/>
+                      </p:stCondLst>
+                      <p:childTnLst>
+                        <p:par>
+                          <p:cTn id="10" presetID="1" presetClass="entr" presetSubtype="0" fill="hold" grpId="0" nodeType="clickEffect">
+                            <p:stCondLst>
+                              <p:cond delay="0"/>
+                            </p:stCondLst>
+                            <p:childTnLst>
+                              <p:set>
+                                <p:cBhvr>
+                                  <p:cTn id="11" dur="1" fill="hold">
+                                    <p:stCondLst>
+                                      <p:cond delay="0"/>
+                                    </p:stCondLst>
+                                  </p:cTn>
+                                  <p:tgtEl>
+                                    <p:spTgt spid="313"/>
+                                  </p:tgtEl>
+                                  <p:attrNameLst>
+                                    <p:attrName>style.visibility</p:attrName>
+                                  </p:attrNameLst>
+                                </p:cBhvr>
+                                <p:to>
+                                  <p:strVal val="visible"/>
+                                </p:to>
+                              </p:set>
+                            </p:childTnLst>
+                          </p:cTn>
+                        </p:par>
+                      </p:childTnLst>
+                    </p:cTn>
+                  </p:par>
+                  <p:par>
+                    <p:cTn id="12" fill="hold">
+                      <p:stCondLst>
+                        <p:cond delay="indefinite"/>
+                      </p:stCondLst>
+                      <p:childTnLst>
+                        <p:par>
+                          <p:cTn id="13" presetID="1" presetClass="entr" presetSubtype="0" fill="hold" grpId="0" nodeType="clickEffect">
+                            <p:stCondLst>
+                              <p:cond delay="0"/>
+                            </p:stCondLst>
+                            <p:childTnLst>
+                              <p:set>
+                                <p:cBhvr>
+                                  <p:cTn id="14" dur="1" fill="hold">
+                                    <p:stCondLst>
+                                      <p:cond delay="0"/>
+                                    </p:stCondLst>
+                                  </p:cTn>
+                                  <p:tgtEl>
+                                    <p:spTgt spid="313"/>
+                                  </p:tgtEl>
+                                  <p:attrNameLst>
+                                    <p:attrName>style.visibility</p:attrName>
+                                  </p:attrNameLst>
+                                </p:cBhvr>
+                                <p:to>
+                                  <p:strVal val="visible"/>
+                                </p:to>
+                              </p:set>
+                            </p:childTnLst>
+                          </p:cTn>
+                        </p:par>
+                      </p:childTnLst>
+                    </p:cTn>
+                  </p:par>
+                  <p:par>
+                    <p:cTn id="15" fill="hold">
+                      <p:stCondLst>
+                        <p:cond delay="indefinite"/>
+                      </p:stCondLst>
+                      <p:childTnLst>
+                        <p:par>
+                          <p:cTn id="16" presetID="1" presetClass="entr" presetSubtype="0" fill="hold" grpId="0" nodeType="clickEffect">
+                            <p:stCondLst>
+                              <p:cond delay="0"/>
+                            </p:stCondLst>
+                            <p:childTnLst>
+                              <p:set>
+                                <p:cBhvr>
+                                  <p:cTn id="17" dur="1" fill="hold">
+                                    <p:stCondLst>
+                                      <p:cond delay="0"/>
+                                    </p:stCondLst>
+                                  </p:cTn>
+                                  <p:tgtEl>
+                                    <p:spTgt spid="313"/>
+                                  </p:tgtEl>
+                                  <p:attrNameLst>
+                                    <p:attrName>style.visibility</p:attrName>
+                                  </p:attrNameLst>
+                                </p:cBhvr>
+                                <p:to>
+                                  <p:strVal val="visible"/>
+                                </p:to>
+                              </p:set>
+                            </p:childTnLst>
+                          </p:cTn>
+                        </p:par>
+                      </p:childTnLst>
+                    </p:cTn>
+                  </p:par>
+                  <p:par>
+                    <p:cTn id="18" fill="hold">
+                      <p:stCondLst>
+                        <p:cond delay="indefinite"/>
+                      </p:stCondLst>
+                      <p:childTnLst>
+                        <p:par>
+                          <p:cTn id="19" presetID="1" presetClass="entr" presetSubtype="0" fill="hold" grpId="0" nodeType="clickEffect">
+                            <p:stCondLst>
+                              <p:cond delay="0"/>
+                            </p:stCondLst>
+                            <p:childTnLst>
+                              <p:set>
+                                <p:cBhvr>
+                                  <p:cTn id="20" dur="1" fill="hold">
+                                    <p:stCondLst>
+                                      <p:cond delay="0"/>
+                                    </p:stCondLst>
+                                  </p:cTn>
+                                  <p:tgtEl>
+                                    <p:spTgt spid="313"/>
+                                  </p:tgtEl>
+                                  <p:attrNameLst>
+                                    <p:attrName>style.visibility</p:attrName>
+                                  </p:attrNameLst>
+                                </p:cBhvr>
+                                <p:to>
+                                  <p:strVal val="visible"/>
+                                </p:to>
+                              </p:set>
+                            </p:childTnLst>
+                          </p:cTn>
+                        </p:par>
+                      </p:childTnLst>
+                    </p:cTn>
+                  </p:par>
+                  <p:par>
+                    <p:cTn id="21" fill="hold">
+                      <p:stCondLst>
+                        <p:cond delay="indefinite"/>
+                      </p:stCondLst>
+                      <p:childTnLst>
+                        <p:par>
+                          <p:cTn id="22" presetID="1" presetClass="entr" presetSubtype="0" fill="hold" grpId="0" nodeType="clickEffect">
+                            <p:stCondLst>
+                              <p:cond delay="0"/>
+                            </p:stCondLst>
+                            <p:childTnLst>
+                              <p:set>
+                                <p:cBhvr>
+                                  <p:cTn id="23" dur="1" fill="hold">
+                                    <p:stCondLst>
+                                      <p:cond delay="0"/>
+                                    </p:stCondLst>
+                                  </p:cTn>
+                                  <p:tgtEl>
+                                    <p:spTgt spid="313"/>
+                                  </p:tgtEl>
+                                  <p:attrNameLst>
+                                    <p:attrName>style.visibility</p:attrName>
+                                  </p:attrNameLst>
+                                </p:cBhvr>
+                                <p:to>
+                                  <p:strVal val="visible"/>
+                                </p:to>
+                              </p:set>
+                            </p:childTnLst>
+                          </p:cTn>
+                        </p:par>
+                      </p:childTnLst>
+                    </p:cTn>
+                  </p:par>
+                </p:childTnLst>
+              </p:cTn>
+              <p:prevCondLst>
+                <p:cond evt="onPrev" delay="0">
+                  <p:tgtEl>
+                    <p:sldTgt/>
+                  </p:tgtEl>
+                </p:cond>
+              </p:prevCondLst>
+              <p:nextCondLst>
+                <p:cond evt="onNext" delay="0">
+                  <p:tgtEl>
+                    <p:sldTgt/>
+                  </p:tgtEl>
+                </p:cond>
+              </p:nextCondLst>
+            </p:seq>
+          </p:childTnLst>
+        </p:cTn>
+      </p:par>
+    </p:tnLst>
+    <p:bldLst>
+      <p:bldP spid="313" grpId="0"/>
+    </p:bldLst>
+  </p:timing>
+</p:sld>
+</file>
+
+<file path=ppt/slides/slide32.xml><?xml version="1.0" encoding="utf-8"?>
+<p:sld xmlns:a="http://schemas.openxmlformats.org/drawingml/2006/main" xmlns:r="http://schemas.openxmlformats.org/officeDocument/2006/relationships" xmlns:p="http://schemas.openxmlformats.org/presentationml/2006/main">
+  <p:cSld>
+    <p:bg>
+      <p:bgPr>
+        <a:solidFill>
+          <a:srgbClr val="FFF8EC"/>
+        </a:solidFill>
+        <a:effectLst/>
+      </p:bgPr>
+    </p:bg>
+    <p:spTree>
+      <p:nvGrpSpPr>
+        <p:cNvPr id="1" name=""/>
+        <p:cNvGrpSpPr/>
+        <p:nvPr/>
+      </p:nvGrpSpPr>
+      <p:grpSpPr>
+        <a:xfrm>
+          <a:off x="0" y="0"/>
+          <a:ext cx="0" cy="0"/>
+          <a:chOff x="0" y="0"/>
+          <a:chExt cx="0" cy="0"/>
+        </a:xfrm>
+      </p:grpSpPr>
+      <p:sp>
+        <p:nvSpPr>
+          <p:cNvPr id="321" name="Kicker"/>
+          <p:cNvSpPr txBox="1"/>
+          <p:nvPr/>
+        </p:nvSpPr>
+        <p:spPr>
+          <a:xfrm>
+            <a:off x="900000" y="420000"/>
+            <a:ext cx="10000000" cy="420000"/>
+          </a:xfrm>
+          <a:prstGeom prst="rect">
+            <a:avLst/>
+          </a:prstGeom>
+          <a:noFill/>
+          <a:ln/>
+        </p:spPr>
+        <p:txBody>
+          <a:bodyPr wrap="square" rtlCol="0">
+            <a:normAutofit/>
+          </a:bodyPr>
+          <a:lstStyle/>
+          <a:p>
+            <a:pPr>
+              <a:buNone/>
+            </a:pPr>
+            <a:r>
+              <a:rPr lang="zh-CN" sz="1400" b="1" dirty="0">
+                <a:solidFill>
+                  <a:srgbClr val="E58A2F"/>
+                </a:solidFill>
+                <a:latin typeface="Noto Sans CJK SC"/>
+                <a:ea typeface="Noto Sans CJK SC"/>
+              </a:rPr>
+              <a:t>今天就开始的三件事</a:t>
+            </a:r>
+          </a:p>
+        </p:txBody>
+      </p:sp>
+      <p:sp>
+        <p:nvSpPr>
+          <p:cNvPr id="322" name="Title"/>
+          <p:cNvSpPr txBox="1"/>
+          <p:nvPr/>
+        </p:nvSpPr>
+        <p:spPr>
+          <a:xfrm>
+            <a:off x="900000" y="920000"/>
+            <a:ext cx="10300000" cy="800000"/>
+          </a:xfrm>
+          <a:prstGeom prst="rect">
+            <a:avLst/>
+          </a:prstGeom>
+          <a:noFill/>
+          <a:ln/>
+        </p:spPr>
+        <p:txBody>
+          <a:bodyPr wrap="square" rtlCol="0">
+            <a:normAutofit/>
+          </a:bodyPr>
+          <a:lstStyle/>
+          <a:p>
+            <a:pPr>
+              <a:buNone/>
+            </a:pPr>
+            <a:r>
+              <a:rPr lang="zh-CN" sz="3400" b="1" dirty="0">
+                <a:solidFill>
+                  <a:srgbClr val="3B2F2A"/>
+                </a:solidFill>
+                <a:latin typeface="Noto Sans CJK SC"/>
+                <a:ea typeface="Noto Sans CJK SC"/>
+              </a:rPr>
+              <a:t>今天就开始的三件事</a:t>
+            </a:r>
+          </a:p>
+        </p:txBody>
+      </p:sp>
+      <p:sp>
+        <p:nvSpPr>
+          <p:cNvPr id="323" name="Body"/>
+          <p:cNvSpPr txBox="1"/>
+          <p:nvPr/>
+        </p:nvSpPr>
+        <p:spPr>
+          <a:xfrm>
+            <a:off x="1050000" y="1850000"/>
+            <a:ext cx="10100000" cy="4500000"/>
+          </a:xfrm>
+          <a:prstGeom prst="rect">
+            <a:avLst/>
+          </a:prstGeom>
+          <a:noFill/>
+          <a:ln/>
+        </p:spPr>
+        <p:txBody>
+          <a:bodyPr wrap="square" rtlCol="0">
+            <a:normAutofit/>
+          </a:bodyPr>
+          <a:lstStyle/>
+          <a:p>
+            <a:pPr marL="285750" indent="-285750">
+              <a:spcAft>
+                <a:spcPts val="600"/>
+              </a:spcAft>
+              <a:buFont typeface="Arial" panose="020B0604020202020204"/>
+              <a:buChar char="•"/>
+            </a:pPr>
+            <a:r>
+              <a:rPr lang="zh-CN" sz="2000" b="0" dirty="0">
+                <a:solidFill>
+                  <a:srgbClr val="3B2F2A"/>
+                </a:solidFill>
+                <a:latin typeface="Noto Sans CJK SC"/>
+                <a:ea typeface="Noto Sans CJK SC"/>
+              </a:rPr>
+              <a:t>今晚：下载BOSS直聘看100条JD</a:t>
+            </a:r>
+          </a:p>
+          <a:p>
+            <a:pPr marL="285750" indent="-285750">
+              <a:spcAft>
+                <a:spcPts val="600"/>
+              </a:spcAft>
+              <a:buFont typeface="Arial" panose="020B0604020202020204"/>
+              <a:buChar char="•"/>
+            </a:pPr>
+            <a:r>
+              <a:rPr lang="zh-CN" sz="2000" b="0" dirty="0">
+                <a:solidFill>
+                  <a:srgbClr val="3B2F2A"/>
+                </a:solidFill>
+                <a:latin typeface="Noto Sans CJK SC"/>
+                <a:ea typeface="Noto Sans CJK SC"/>
+              </a:rPr>
+              <a:t>周末：选出1个主攻+1个备胎</a:t>
+            </a:r>
+          </a:p>
+          <a:p>
+            <a:pPr marL="285750" indent="-285750">
+              <a:spcAft>
+                <a:spcPts val="600"/>
+              </a:spcAft>
+              <a:buFont typeface="Arial" panose="020B0604020202020204"/>
+              <a:buChar char="•"/>
+            </a:pPr>
+            <a:r>
+              <a:rPr lang="zh-CN" sz="2000" b="0" dirty="0">
+                <a:solidFill>
+                  <a:srgbClr val="3B2F2A"/>
+                </a:solidFill>
+                <a:latin typeface="Noto Sans CJK SC"/>
+                <a:ea typeface="Noto Sans CJK SC"/>
+              </a:rPr>
+              <a:t>下周一：开始每天3小时学习</a:t>
+            </a:r>
+          </a:p>
+          <a:p>
+            <a:pPr marL="285750" indent="-285750">
+              <a:spcAft>
+                <a:spcPts val="600"/>
+              </a:spcAft>
+              <a:buFont typeface="Arial" panose="020B0604020202020204"/>
+              <a:buChar char="•"/>
+            </a:pPr>
+            <a:r>
+              <a:rPr lang="zh-CN" sz="2000" b="0" dirty="0">
+                <a:solidFill>
+                  <a:srgbClr val="3B2F2A"/>
+                </a:solidFill>
+                <a:latin typeface="Noto Sans CJK SC"/>
+                <a:ea typeface="Noto Sans CJK SC"/>
+              </a:rPr>
+              <a:t>记住：行动是迷茫唯一的解药</a:t>
+            </a:r>
+          </a:p>
+        </p:txBody>
+      </p:sp>
+      <p:sp>
+        <p:nvSpPr>
+          <p:cNvPr id="329" name="Page number"/>
+          <p:cNvSpPr txBox="1"/>
+          <p:nvPr/>
+        </p:nvSpPr>
+        <p:spPr>
+          <a:xfrm>
+            <a:off x="10600000" y="6250000"/>
+            <a:ext cx="1200000" cy="400000"/>
+          </a:xfrm>
+          <a:prstGeom prst="rect">
+            <a:avLst/>
+          </a:prstGeom>
+          <a:noFill/>
+          <a:ln/>
+        </p:spPr>
+        <p:txBody>
+          <a:bodyPr wrap="square" rtlCol="0">
+            <a:normAutofit/>
+          </a:bodyPr>
+          <a:lstStyle/>
+          <a:p>
+            <a:pPr algn="r">
+              <a:buNone/>
+            </a:pPr>
+            <a:r>
+              <a:rPr lang="zh-CN" sz="1000" b="0" dirty="0">
+                <a:solidFill>
+                  <a:srgbClr val="7E6F68"/>
+                </a:solidFill>
+                <a:latin typeface="Noto Sans CJK SC"/>
+                <a:ea typeface="Noto Sans CJK SC"/>
+              </a:rPr>
+              <a:t>32 / 33</a:t>
+            </a:r>
+          </a:p>
+        </p:txBody>
+      </p:sp>
+    </p:spTree>
+  </p:cSld>
+  <p:clrMapOvr>
+    <a:overrideClrMapping bg1="lt1" tx1="dk1" bg2="lt2" tx2="dk2" accent1="accent1" accent2="accent2" accent3="accent3" accent4="accent4" accent5="accent5" accent6="accent6" hlink="hlink" folHlink="folHlink"/>
+  </p:clrMapOvr>
+  <p:transition spd="med">
+    <p:fade/>
+  </p:transition>
+  <p:timing>
+    <p:tnLst>
+      <p:par>
+        <p:cTn id="1" dur="indefinite" restart="never" nodeType="tmRoot">
+          <p:childTnLst>
+            <p:seq concurrent="1" nextAc="seek">
+              <p:cTn id="2" dur="indefinite" nodeType="mainSeq">
+                <p:childTnLst>
+                  <p:par>
+                    <p:cTn id="3" fill="hold">
+                      <p:stCondLst>
+                        <p:cond delay="indefinite"/>
+                      </p:stCondLst>
+                      <p:childTnLst>
+                        <p:par>
+                          <p:cTn id="4" presetID="1" presetClass="entr" presetSubtype="0" fill="hold" grpId="0" nodeType="clickEffect">
+                            <p:stCondLst>
+                              <p:cond delay="0"/>
+                            </p:stCondLst>
+                            <p:childTnLst>
+                              <p:set>
+                                <p:cBhvr>
+                                  <p:cTn id="5" dur="1" fill="hold">
+                                    <p:stCondLst>
+                                      <p:cond delay="0"/>
+                                    </p:stCondLst>
+                                  </p:cTn>
+                                  <p:tgtEl>
+                                    <p:spTgt spid="323"/>
+                                  </p:tgtEl>
+                                  <p:attrNameLst>
+                                    <p:attrName>style.visibility</p:attrName>
+                                  </p:attrNameLst>
+                                </p:cBhvr>
+                                <p:to>
+                                  <p:strVal val="visible"/>
+                                </p:to>
+                              </p:set>
+                            </p:childTnLst>
+                          </p:cTn>
+                        </p:par>
+                      </p:childTnLst>
+                    </p:cTn>
+                  </p:par>
+                  <p:par>
+                    <p:cTn id="6" fill="hold">
+                      <p:stCondLst>
+                        <p:cond delay="indefinite"/>
+                      </p:stCondLst>
+                      <p:childTnLst>
+                        <p:par>
+                          <p:cTn id="7" presetID="1" presetClass="entr" presetSubtype="0" fill="hold" grpId="0" nodeType="clickEffect">
+                            <p:stCondLst>
+                              <p:cond delay="0"/>
+                            </p:stCondLst>
+                            <p:childTnLst>
+                              <p:set>
+                                <p:cBhvr>
+                                  <p:cTn id="8" dur="1" fill="hold">
+                                    <p:stCondLst>
+                                      <p:cond delay="0"/>
+                                    </p:stCondLst>
+                                  </p:cTn>
+                                  <p:tgtEl>
+                                    <p:spTgt spid="323"/>
+                                  </p:tgtEl>
+                                  <p:attrNameLst>
+                                    <p:attrName>style.visibility</p:attrName>
+                                  </p:attrNameLst>
+                                </p:cBhvr>
+                                <p:to>
+                                  <p:strVal val="visible"/>
+                                </p:to>
+                              </p:set>
+                            </p:childTnLst>
+                          </p:cTn>
+                        </p:par>
+                      </p:childTnLst>
+                    </p:cTn>
+                  </p:par>
+                  <p:par>
+                    <p:cTn id="9" fill="hold">
+                      <p:stCondLst>
+                        <p:cond delay="indefinite"/>
+                      </p:stCondLst>
+                      <p:childTnLst>
+                        <p:par>
+                          <p:cTn id="10" presetID="1" presetClass="entr" presetSubtype="0" fill="hold" grpId="0" nodeType="clickEffect">
+                            <p:stCondLst>
+                              <p:cond delay="0"/>
+                            </p:stCondLst>
+                            <p:childTnLst>
+                              <p:set>
+                                <p:cBhvr>
+                                  <p:cTn id="11" dur="1" fill="hold">
+                                    <p:stCondLst>
+                                      <p:cond delay="0"/>
+                                    </p:stCondLst>
+                                  </p:cTn>
+                                  <p:tgtEl>
+                                    <p:spTgt spid="323"/>
+                                  </p:tgtEl>
+                                  <p:attrNameLst>
+                                    <p:attrName>style.visibility</p:attrName>
+                                  </p:attrNameLst>
+                                </p:cBhvr>
+                                <p:to>
+                                  <p:strVal val="visible"/>
+                                </p:to>
+                              </p:set>
+                            </p:childTnLst>
+                          </p:cTn>
+                        </p:par>
+                      </p:childTnLst>
+                    </p:cTn>
+                  </p:par>
+                  <p:par>
+                    <p:cTn id="12" fill="hold">
+                      <p:stCondLst>
+                        <p:cond delay="indefinite"/>
+                      </p:stCondLst>
+                      <p:childTnLst>
+                        <p:par>
+                          <p:cTn id="13" presetID="1" presetClass="entr" presetSubtype="0" fill="hold" grpId="0" nodeType="clickEffect">
+                            <p:stCondLst>
+                              <p:cond delay="0"/>
+                            </p:stCondLst>
+                            <p:childTnLst>
+                              <p:set>
+                                <p:cBhvr>
+                                  <p:cTn id="14" dur="1" fill="hold">
+                                    <p:stCondLst>
+                                      <p:cond delay="0"/>
+                                    </p:stCondLst>
+                                  </p:cTn>
+                                  <p:tgtEl>
+                                    <p:spTgt spid="323"/>
+                                  </p:tgtEl>
+                                  <p:attrNameLst>
+                                    <p:attrName>style.visibility</p:attrName>
+                                  </p:attrNameLst>
+                                </p:cBhvr>
+                                <p:to>
+                                  <p:strVal val="visible"/>
+                                </p:to>
+                              </p:set>
+                            </p:childTnLst>
+                          </p:cTn>
+                        </p:par>
+                      </p:childTnLst>
+                    </p:cTn>
+                  </p:par>
+                </p:childTnLst>
+              </p:cTn>
+              <p:prevCondLst>
+                <p:cond evt="onPrev" delay="0">
+                  <p:tgtEl>
+                    <p:sldTgt/>
+                  </p:tgtEl>
+                </p:cond>
+              </p:prevCondLst>
+              <p:nextCondLst>
+                <p:cond evt="onNext" delay="0">
+                  <p:tgtEl>
+                    <p:sldTgt/>
+                  </p:tgtEl>
+                </p:cond>
+              </p:nextCondLst>
+            </p:seq>
+          </p:childTnLst>
+        </p:cTn>
+      </p:par>
+    </p:tnLst>
+    <p:bldLst>
+      <p:bldP spid="323" grpId="0"/>
+    </p:bldLst>
+  </p:timing>
+</p:sld>
+</file>
+
+<file path=ppt/slides/slide33.xml><?xml version="1.0" encoding="utf-8"?>
+<p:sld xmlns:a="http://schemas.openxmlformats.org/drawingml/2006/main" xmlns:r="http://schemas.openxmlformats.org/officeDocument/2006/relationships" xmlns:p="http://schemas.openxmlformats.org/presentationml/2006/main">
+  <p:cSld>
+    <p:bg>
+      <p:bgPr>
+        <a:solidFill>
+          <a:srgbClr val="FFF8EC"/>
+        </a:solidFill>
+        <a:effectLst/>
+      </p:bgPr>
+    </p:bg>
+    <p:spTree>
+      <p:nvGrpSpPr>
+        <p:cNvPr id="1" name=""/>
+        <p:cNvGrpSpPr/>
+        <p:nvPr/>
+      </p:nvGrpSpPr>
+      <p:grpSpPr>
+        <a:xfrm>
+          <a:off x="0" y="0"/>
+          <a:ext cx="0" cy="0"/>
+          <a:chOff x="0" y="0"/>
+          <a:chExt cx="0" cy="0"/>
+        </a:xfrm>
+      </p:grpSpPr>
+      <p:sp>
+        <p:nvSpPr>
+          <p:cNvPr id="331" name="Title"/>
+          <p:cNvSpPr txBox="1"/>
+          <p:nvPr/>
+        </p:nvSpPr>
+        <p:spPr>
+          <a:xfrm>
+            <a:off x="1050000" y="2300000"/>
+            <a:ext cx="10200000" cy="1700000"/>
+          </a:xfrm>
+          <a:prstGeom prst="rect">
+            <a:avLst/>
+          </a:prstGeom>
+          <a:noFill/>
+          <a:ln/>
+        </p:spPr>
+        <p:txBody>
+          <a:bodyPr wrap="square" rtlCol="0">
+            <a:normAutofit/>
+          </a:bodyPr>
+          <a:lstStyle/>
+          <a:p>
+            <a:pPr algn="ctr">
+              <a:buNone/>
+            </a:pPr>
+            <a:r>
+              <a:rPr lang="zh-CN" sz="5200" b="1" dirty="0">
+                <a:solidFill>
+                  <a:srgbClr val="3B2F2A"/>
+                </a:solidFill>
+                <a:latin typeface="Noto Sans CJK SC"/>
+                <a:ea typeface="Noto Sans CJK SC"/>
+              </a:rPr>
+              <a:t>谢谢</a:t>
+            </a:r>
+          </a:p>
+        </p:txBody>
+      </p:sp>
+      <p:sp>
+        <p:nvSpPr>
+          <p:cNvPr id="332" name="Subtitle"/>
+          <p:cNvSpPr txBox="1"/>
+          <p:nvPr/>
+        </p:nvSpPr>
+        <p:spPr>
+          <a:xfrm>
+            <a:off x="1050000" y="4200000"/>
+            <a:ext cx="10200000" cy="900000"/>
+          </a:xfrm>
+          <a:prstGeom prst="rect">
+            <a:avLst/>
+          </a:prstGeom>
+          <a:noFill/>
+          <a:ln/>
+        </p:spPr>
+        <p:txBody>
+          <a:bodyPr wrap="square" rtlCol="0">
+            <a:normAutofit/>
+          </a:bodyPr>
+          <a:lstStyle/>
+          <a:p>
+            <a:pPr algn="ctr">
+              <a:buNone/>
+            </a:pPr>
+            <a:r>
+              <a:rPr lang="zh-CN" sz="2000" b="1" dirty="0">
+                <a:solidFill>
+                  <a:srgbClr val="E58A2F"/>
+                </a:solidFill>
+                <a:latin typeface="Noto Sans CJK SC"/>
+                <a:ea typeface="Noto Sans CJK SC"/>
+              </a:rPr>
+              <a:t>女生找工作十大岗位全攻略</a:t>
+            </a:r>
+          </a:p>
+        </p:txBody>
+      </p:sp>
+      <p:sp>
+        <p:nvSpPr>
+          <p:cNvPr id="339" name="Page number"/>
+          <p:cNvSpPr txBox="1"/>
+          <p:nvPr/>
+        </p:nvSpPr>
+        <p:spPr>
+          <a:xfrm>
+            <a:off x="10600000" y="6250000"/>
+            <a:ext cx="1200000" cy="400000"/>
+          </a:xfrm>
+          <a:prstGeom prst="rect">
+            <a:avLst/>
+          </a:prstGeom>
+          <a:noFill/>
+          <a:ln/>
+        </p:spPr>
+        <p:txBody>
+          <a:bodyPr wrap="square" rtlCol="0">
+            <a:normAutofit/>
+          </a:bodyPr>
+          <a:lstStyle/>
+          <a:p>
+            <a:pPr algn="r">
+              <a:buNone/>
+            </a:pPr>
+            <a:r>
+              <a:rPr lang="zh-CN" sz="1000" b="0" dirty="0">
+                <a:solidFill>
+                  <a:srgbClr val="7E6F68"/>
+                </a:solidFill>
+                <a:latin typeface="Noto Sans CJK SC"/>
+                <a:ea typeface="Noto Sans CJK SC"/>
+              </a:rPr>
+              <a:t>33 / 33</a:t>
+            </a:r>
+          </a:p>
+        </p:txBody>
+      </p:sp>
+    </p:spTree>
+  </p:cSld>
+  <p:clrMapOvr>
+    <a:overrideClrMapping bg1="lt1" tx1="dk1" bg2="lt2" tx2="dk2" accent1="accent1" accent2="accent2" accent3="accent3" accent4="accent4" accent5="accent5" accent6="accent6" hlink="hlink" folHlink="folHlink"/>
+  </p:clrMapOvr>
+  <p:transition spd="med">
+    <p:fade/>
+  </p:transition>
 </p:sld>
 </file>
 
@@ -11267,7 +15054,7 @@
                 <a:latin typeface="Noto Sans CJK SC"/>
                 <a:ea typeface="Noto Sans CJK SC"/>
               </a:rPr>
-              <a:t>04 / 26</a:t>
+              <a:t>04 / 33</a:t>
             </a:r>
           </a:p>
         </p:txBody>
@@ -11310,45 +15097,6 @@
       </p:grpSpPr>
       <p:sp>
         <p:nvSpPr>
-          <p:cNvPr id="51" name="Kicker"/>
-          <p:cNvSpPr txBox="1"/>
-          <p:nvPr/>
-        </p:nvSpPr>
-        <p:spPr>
-          <a:xfrm>
-            <a:off x="900000" y="420000"/>
-            <a:ext cx="10000000" cy="420000"/>
-          </a:xfrm>
-          <a:prstGeom prst="rect">
-            <a:avLst/>
-          </a:prstGeom>
-          <a:noFill/>
-          <a:ln/>
-        </p:spPr>
-        <p:txBody>
-          <a:bodyPr wrap="square" rtlCol="0">
-            <a:normAutofit/>
-          </a:bodyPr>
-          <a:lstStyle/>
-          <a:p>
-            <a:pPr>
-              <a:buNone/>
-            </a:pPr>
-            <a:r>
-              <a:rPr lang="zh-CN" sz="1400" b="1" dirty="0">
-                <a:solidFill>
-                  <a:srgbClr val="E58A2F"/>
-                </a:solidFill>
-                <a:latin typeface="Noto Sans CJK SC"/>
-                <a:ea typeface="Noto Sans CJK SC"/>
-              </a:rPr>
-              <a:t>新媒体运营：用内容换流量</a:t>
-            </a:r>
-          </a:p>
-        </p:txBody>
-      </p:sp>
-      <p:sp>
-        <p:nvSpPr>
           <p:cNvPr id="52" name="Title"/>
           <p:cNvSpPr txBox="1"/>
           <p:nvPr/>
@@ -11381,149 +15129,453 @@
                 <a:latin typeface="Noto Sans CJK SC"/>
                 <a:ea typeface="Noto Sans CJK SC"/>
               </a:rPr>
-              <a:t>新媒体运营：用内容换流量</a:t>
+              <a:t>AI 三岗总览：好上手的增量机会</a:t>
             </a:r>
           </a:p>
         </p:txBody>
       </p:sp>
-      <p:sp>
-        <p:nvSpPr>
-          <p:cNvPr id="53" name="Body"/>
-          <p:cNvSpPr txBox="1"/>
+      <p:graphicFrame>
+        <p:nvGraphicFramePr>
+          <p:cNvPr id="53" name="Table"/>
+          <p:cNvGraphicFramePr>
+            <a:graphicFrameLocks noGrp="1"/>
+          </p:cNvGraphicFramePr>
           <p:nvPr/>
-        </p:nvSpPr>
-        <p:spPr>
-          <a:xfrm>
-            <a:off x="1050000" y="1850000"/>
-            <a:ext cx="10100000" cy="4500000"/>
-          </a:xfrm>
-          <a:prstGeom prst="rect">
-            <a:avLst/>
-          </a:prstGeom>
-          <a:noFill/>
-          <a:ln/>
-        </p:spPr>
-        <p:txBody>
-          <a:bodyPr wrap="square" rtlCol="0">
-            <a:normAutofit/>
-          </a:bodyPr>
-          <a:lstStyle/>
-          <a:p>
-            <a:pPr marL="285750" indent="-285750">
-              <a:spcAft>
-                <a:spcPts val="600"/>
-              </a:spcAft>
-              <a:buFont typeface="Arial" panose="020B0604020202020204"/>
-              <a:buChar char="•"/>
-            </a:pPr>
-            <a:r>
-              <a:rPr lang="zh-CN" sz="2000" b="0" dirty="0">
-                <a:solidFill>
-                  <a:srgbClr val="3B2F2A"/>
-                </a:solidFill>
-                <a:latin typeface="Noto Sans CJK SC"/>
-                <a:ea typeface="Noto Sans CJK SC"/>
-              </a:rPr>
-              <a:t>定位：经营品牌的内容资产</a:t>
-            </a:r>
-          </a:p>
-          <a:p>
-            <a:pPr marL="285750" indent="-285750">
-              <a:spcAft>
-                <a:spcPts val="600"/>
-              </a:spcAft>
-              <a:buFont typeface="Arial" panose="020B0604020202020204"/>
-              <a:buChar char="•"/>
-            </a:pPr>
-            <a:r>
-              <a:rPr lang="zh-CN" sz="2000" b="0" dirty="0">
-                <a:solidFill>
-                  <a:srgbClr val="3B2F2A"/>
-                </a:solidFill>
-                <a:latin typeface="Noto Sans CJK SC"/>
-                <a:ea typeface="Noto Sans CJK SC"/>
-              </a:rPr>
-              <a:t>主战场：小红书、抖音、视频号</a:t>
-            </a:r>
-          </a:p>
-          <a:p>
-            <a:pPr marL="285750" indent="-285750">
-              <a:spcAft>
-                <a:spcPts val="600"/>
-              </a:spcAft>
-              <a:buFont typeface="Arial" panose="020B0604020202020204"/>
-              <a:buChar char="•"/>
-            </a:pPr>
-            <a:r>
-              <a:rPr lang="zh-CN" sz="2000" b="0" dirty="0">
-                <a:solidFill>
-                  <a:srgbClr val="3B2F2A"/>
-                </a:solidFill>
-                <a:latin typeface="Noto Sans CJK SC"/>
-                <a:ea typeface="Noto Sans CJK SC"/>
-              </a:rPr>
-              <a:t>每天：看数据、追热点、写文案</a:t>
-            </a:r>
-          </a:p>
-          <a:p>
-            <a:pPr marL="285750" indent="-285750">
-              <a:spcAft>
-                <a:spcPts val="600"/>
-              </a:spcAft>
-              <a:buFont typeface="Arial" panose="020B0604020202020204"/>
-              <a:buChar char="•"/>
-            </a:pPr>
-            <a:r>
-              <a:rPr lang="zh-CN" sz="2000" b="0" dirty="0">
-                <a:solidFill>
-                  <a:srgbClr val="3B2F2A"/>
-                </a:solidFill>
-                <a:latin typeface="Noto Sans CJK SC"/>
-                <a:ea typeface="Noto Sans CJK SC"/>
-              </a:rPr>
-              <a:t>每周：排期表、数据复盘、活动</a:t>
-            </a:r>
-          </a:p>
-          <a:p>
-            <a:pPr marL="285750" indent="-285750">
-              <a:spcAft>
-                <a:spcPts val="600"/>
-              </a:spcAft>
-              <a:buFont typeface="Arial" panose="020B0604020202020204"/>
-              <a:buChar char="•"/>
-            </a:pPr>
-            <a:r>
-              <a:rPr lang="zh-CN" sz="2000" b="0" dirty="0">
-                <a:solidFill>
-                  <a:srgbClr val="3B2F2A"/>
-                </a:solidFill>
-                <a:latin typeface="Noto Sans CJK SC"/>
-                <a:ea typeface="Noto Sans CJK SC"/>
-              </a:rPr>
-              <a:t>KPI：阅读、涨粉、互动、转化</a:t>
-            </a:r>
-          </a:p>
-          <a:p>
-            <a:pPr marL="285750" indent="-285750">
-              <a:spcAft>
-                <a:spcPts val="600"/>
-              </a:spcAft>
-              <a:buFont typeface="Arial" panose="020B0604020202020204"/>
-              <a:buChar char="•"/>
-            </a:pPr>
-            <a:r>
-              <a:rPr lang="zh-CN" sz="2000" b="0" dirty="0">
-                <a:solidFill>
-                  <a:srgbClr val="3B2F2A"/>
-                </a:solidFill>
-                <a:latin typeface="Noto Sans CJK SC"/>
-                <a:ea typeface="Noto Sans CJK SC"/>
-              </a:rPr>
-              <a:t>适合：有表达欲、爱研究爆款的人</a:t>
-            </a:r>
-          </a:p>
-        </p:txBody>
-      </p:sp>
+        </p:nvGraphicFramePr>
+        <p:xfrm>
+          <a:off x="900000" y="1950000"/>
+          <a:ext cx="10300000" cy="1680000"/>
+        </p:xfrm>
+        <a:graphic>
+          <a:graphicData uri="http://schemas.openxmlformats.org/drawingml/2006/table">
+            <a:tbl>
+              <a:tblPr firstRow="1" bandRow="1"/>
+              <a:tblGrid>
+                <a:gridCol w="2575000"/>
+                <a:gridCol w="2575000"/>
+                <a:gridCol w="2575000"/>
+                <a:gridCol w="2575000"/>
+              </a:tblGrid>
+              <a:tr h="420000">
+                <a:tc>
+                  <a:txBody>
+                    <a:bodyPr anchor="ctr"/>
+                    <a:lstStyle/>
+                    <a:p>
+                      <a:pPr algn="l">
+                        <a:buNone/>
+                      </a:pPr>
+                      <a:r>
+                        <a:rPr lang="zh-CN" sz="1700" b="1" dirty="0">
+                          <a:solidFill>
+                            <a:srgbClr val="FFF8EC"/>
+                          </a:solidFill>
+                          <a:latin typeface="Noto Sans CJK SC"/>
+                          <a:ea typeface="Noto Sans CJK SC"/>
+                        </a:rPr>
+                        <a:t>岗位</a:t>
+                      </a:r>
+                    </a:p>
+                  </a:txBody>
+                  <a:tcPr marL="91440" marR="91440" anchor="ctr">
+                    <a:solidFill>
+                      <a:srgbClr val="E58A2F"/>
+                    </a:solidFill>
+                  </a:tcPr>
+                </a:tc>
+                <a:tc>
+                  <a:txBody>
+                    <a:bodyPr anchor="ctr"/>
+                    <a:lstStyle/>
+                    <a:p>
+                      <a:pPr algn="l">
+                        <a:buNone/>
+                      </a:pPr>
+                      <a:r>
+                        <a:rPr lang="zh-CN" sz="1700" b="1" dirty="0">
+                          <a:solidFill>
+                            <a:srgbClr val="FFF8EC"/>
+                          </a:solidFill>
+                          <a:latin typeface="Noto Sans CJK SC"/>
+                          <a:ea typeface="Noto Sans CJK SC"/>
+                        </a:rPr>
+                        <a:t>上手周期</a:t>
+                      </a:r>
+                    </a:p>
+                  </a:txBody>
+                  <a:tcPr marL="91440" marR="91440" anchor="ctr">
+                    <a:solidFill>
+                      <a:srgbClr val="E58A2F"/>
+                    </a:solidFill>
+                  </a:tcPr>
+                </a:tc>
+                <a:tc>
+                  <a:txBody>
+                    <a:bodyPr anchor="ctr"/>
+                    <a:lstStyle/>
+                    <a:p>
+                      <a:pPr algn="l">
+                        <a:buNone/>
+                      </a:pPr>
+                      <a:r>
+                        <a:rPr lang="zh-CN" sz="1700" b="1" dirty="0">
+                          <a:solidFill>
+                            <a:srgbClr val="FFF8EC"/>
+                          </a:solidFill>
+                          <a:latin typeface="Noto Sans CJK SC"/>
+                          <a:ea typeface="Noto Sans CJK SC"/>
+                        </a:rPr>
+                        <a:t>一句话定位</a:t>
+                      </a:r>
+                    </a:p>
+                  </a:txBody>
+                  <a:tcPr marL="91440" marR="91440" anchor="ctr">
+                    <a:solidFill>
+                      <a:srgbClr val="E58A2F"/>
+                    </a:solidFill>
+                  </a:tcPr>
+                </a:tc>
+                <a:tc>
+                  <a:txBody>
+                    <a:bodyPr anchor="ctr"/>
+                    <a:lstStyle/>
+                    <a:p>
+                      <a:pPr algn="l">
+                        <a:buNone/>
+                      </a:pPr>
+                      <a:r>
+                        <a:rPr lang="zh-CN" sz="1700" b="1" dirty="0">
+                          <a:solidFill>
+                            <a:srgbClr val="FFF8EC"/>
+                          </a:solidFill>
+                          <a:latin typeface="Noto Sans CJK SC"/>
+                          <a:ea typeface="Noto Sans CJK SC"/>
+                        </a:rPr>
+                        <a:t>特点</a:t>
+                      </a:r>
+                    </a:p>
+                  </a:txBody>
+                  <a:tcPr marL="91440" marR="91440" anchor="ctr">
+                    <a:solidFill>
+                      <a:srgbClr val="E58A2F"/>
+                    </a:solidFill>
+                  </a:tcPr>
+                </a:tc>
+              </a:tr>
+              <a:tr h="420000">
+                <a:tc>
+                  <a:txBody>
+                    <a:bodyPr anchor="ctr"/>
+                    <a:lstStyle/>
+                    <a:p>
+                      <a:pPr algn="l">
+                        <a:buNone/>
+                      </a:pPr>
+                      <a:r>
+                        <a:rPr lang="zh-CN" sz="1700" b="0" dirty="0">
+                          <a:solidFill>
+                            <a:srgbClr val="3B2F2A"/>
+                          </a:solidFill>
+                          <a:latin typeface="Noto Sans CJK SC"/>
+                          <a:ea typeface="Noto Sans CJK SC"/>
+                        </a:rPr>
+                        <a:t>AI 训练师</a:t>
+                      </a:r>
+                    </a:p>
+                  </a:txBody>
+                  <a:tcPr marL="91440" marR="91440" anchor="ctr">
+                    <a:solidFill>
+                      <a:srgbClr val="FFF2DE"/>
+                    </a:solidFill>
+                  </a:tcPr>
+                </a:tc>
+                <a:tc>
+                  <a:txBody>
+                    <a:bodyPr anchor="ctr"/>
+                    <a:lstStyle/>
+                    <a:p>
+                      <a:pPr algn="l">
+                        <a:buNone/>
+                      </a:pPr>
+                      <a:r>
+                        <a:rPr lang="zh-CN" sz="1700" b="0" dirty="0">
+                          <a:solidFill>
+                            <a:srgbClr val="3B2F2A"/>
+                          </a:solidFill>
+                          <a:latin typeface="Noto Sans CJK SC"/>
+                          <a:ea typeface="Noto Sans CJK SC"/>
+                        </a:rPr>
+                        <a:t>3-4周</a:t>
+                      </a:r>
+                    </a:p>
+                  </a:txBody>
+                  <a:tcPr marL="91440" marR="91440" anchor="ctr">
+                    <a:solidFill>
+                      <a:srgbClr val="FFF2DE"/>
+                    </a:solidFill>
+                  </a:tcPr>
+                </a:tc>
+                <a:tc>
+                  <a:txBody>
+                    <a:bodyPr anchor="ctr"/>
+                    <a:lstStyle/>
+                    <a:p>
+                      <a:pPr algn="l">
+                        <a:buNone/>
+                      </a:pPr>
+                      <a:r>
+                        <a:rPr lang="zh-CN" sz="1700" b="0" dirty="0">
+                          <a:solidFill>
+                            <a:srgbClr val="3B2F2A"/>
+                          </a:solidFill>
+                          <a:latin typeface="Noto Sans CJK SC"/>
+                          <a:ea typeface="Noto Sans CJK SC"/>
+                        </a:rPr>
+                        <a:t>给 AI 标注评测语料</a:t>
+                      </a:r>
+                    </a:p>
+                  </a:txBody>
+                  <a:tcPr marL="91440" marR="91440" anchor="ctr">
+                    <a:solidFill>
+                      <a:srgbClr val="FFF2DE"/>
+                    </a:solidFill>
+                  </a:tcPr>
+                </a:tc>
+                <a:tc>
+                  <a:txBody>
+                    <a:bodyPr anchor="ctr"/>
+                    <a:lstStyle/>
+                    <a:p>
+                      <a:pPr algn="l">
+                        <a:buNone/>
+                      </a:pPr>
+                      <a:r>
+                        <a:rPr lang="zh-CN" sz="1700" b="0" dirty="0">
+                          <a:solidFill>
+                            <a:srgbClr val="3B2F2A"/>
+                          </a:solidFill>
+                          <a:latin typeface="Noto Sans CJK SC"/>
+                          <a:ea typeface="Noto Sans CJK SC"/>
+                        </a:rPr>
+                        <a:t>AI 行业门票</a:t>
+                      </a:r>
+                    </a:p>
+                  </a:txBody>
+                  <a:tcPr marL="91440" marR="91440" anchor="ctr">
+                    <a:solidFill>
+                      <a:srgbClr val="FFF2DE"/>
+                    </a:solidFill>
+                  </a:tcPr>
+                </a:tc>
+              </a:tr>
+              <a:tr h="420000">
+                <a:tc>
+                  <a:txBody>
+                    <a:bodyPr anchor="ctr"/>
+                    <a:lstStyle/>
+                    <a:p>
+                      <a:pPr algn="l">
+                        <a:buNone/>
+                      </a:pPr>
+                      <a:r>
+                        <a:rPr lang="zh-CN" sz="1700" b="0" dirty="0">
+                          <a:solidFill>
+                            <a:srgbClr val="3B2F2A"/>
+                          </a:solidFill>
+                          <a:latin typeface="Noto Sans CJK SC"/>
+                          <a:ea typeface="Noto Sans CJK SC"/>
+                        </a:rPr>
+                        <a:t>AIGC 内容运营</a:t>
+                      </a:r>
+                    </a:p>
+                  </a:txBody>
+                  <a:tcPr marL="91440" marR="91440" anchor="ctr">
+                    <a:noFill/>
+                  </a:tcPr>
+                </a:tc>
+                <a:tc>
+                  <a:txBody>
+                    <a:bodyPr anchor="ctr"/>
+                    <a:lstStyle/>
+                    <a:p>
+                      <a:pPr algn="l">
+                        <a:buNone/>
+                      </a:pPr>
+                      <a:r>
+                        <a:rPr lang="zh-CN" sz="1700" b="0" dirty="0">
+                          <a:solidFill>
+                            <a:srgbClr val="3B2F2A"/>
+                          </a:solidFill>
+                          <a:latin typeface="Noto Sans CJK SC"/>
+                          <a:ea typeface="Noto Sans CJK SC"/>
+                        </a:rPr>
+                        <a:t>4-6周</a:t>
+                      </a:r>
+                    </a:p>
+                  </a:txBody>
+                  <a:tcPr marL="91440" marR="91440" anchor="ctr">
+                    <a:noFill/>
+                  </a:tcPr>
+                </a:tc>
+                <a:tc>
+                  <a:txBody>
+                    <a:bodyPr anchor="ctr"/>
+                    <a:lstStyle/>
+                    <a:p>
+                      <a:pPr algn="l">
+                        <a:buNone/>
+                      </a:pPr>
+                      <a:r>
+                        <a:rPr lang="zh-CN" sz="1700" b="0" dirty="0">
+                          <a:solidFill>
+                            <a:srgbClr val="3B2F2A"/>
+                          </a:solidFill>
+                          <a:latin typeface="Noto Sans CJK SC"/>
+                          <a:ea typeface="Noto Sans CJK SC"/>
+                        </a:rPr>
+                        <a:t>用 AI 批量做内容</a:t>
+                      </a:r>
+                    </a:p>
+                  </a:txBody>
+                  <a:tcPr marL="91440" marR="91440" anchor="ctr">
+                    <a:noFill/>
+                  </a:tcPr>
+                </a:tc>
+                <a:tc>
+                  <a:txBody>
+                    <a:bodyPr anchor="ctr"/>
+                    <a:lstStyle/>
+                    <a:p>
+                      <a:pPr algn="l">
+                        <a:buNone/>
+                      </a:pPr>
+                      <a:r>
+                        <a:rPr lang="zh-CN" sz="1700" b="0" dirty="0">
+                          <a:solidFill>
+                            <a:srgbClr val="3B2F2A"/>
+                          </a:solidFill>
+                          <a:latin typeface="Noto Sans CJK SC"/>
+                          <a:ea typeface="Noto Sans CJK SC"/>
+                        </a:rPr>
+                        <a:t>主攻牌方向</a:t>
+                      </a:r>
+                    </a:p>
+                  </a:txBody>
+                  <a:tcPr marL="91440" marR="91440" anchor="ctr">
+                    <a:noFill/>
+                  </a:tcPr>
+                </a:tc>
+              </a:tr>
+              <a:tr h="420000">
+                <a:tc>
+                  <a:txBody>
+                    <a:bodyPr anchor="ctr"/>
+                    <a:lstStyle/>
+                    <a:p>
+                      <a:pPr algn="l">
+                        <a:buNone/>
+                      </a:pPr>
+                      <a:r>
+                        <a:rPr lang="zh-CN" sz="1700" b="0" dirty="0">
+                          <a:solidFill>
+                            <a:srgbClr val="3B2F2A"/>
+                          </a:solidFill>
+                          <a:latin typeface="Noto Sans CJK SC"/>
+                          <a:ea typeface="Noto Sans CJK SC"/>
+                        </a:rPr>
+                        <a:t>智能客服运营</a:t>
+                      </a:r>
+                    </a:p>
+                  </a:txBody>
+                  <a:tcPr marL="91440" marR="91440" anchor="ctr">
+                    <a:solidFill>
+                      <a:srgbClr val="FFF2DE"/>
+                    </a:solidFill>
+                  </a:tcPr>
+                </a:tc>
+                <a:tc>
+                  <a:txBody>
+                    <a:bodyPr anchor="ctr"/>
+                    <a:lstStyle/>
+                    <a:p>
+                      <a:pPr algn="l">
+                        <a:buNone/>
+                      </a:pPr>
+                      <a:r>
+                        <a:rPr lang="zh-CN" sz="1700" b="0" dirty="0">
+                          <a:solidFill>
+                            <a:srgbClr val="3B2F2A"/>
+                          </a:solidFill>
+                          <a:latin typeface="Noto Sans CJK SC"/>
+                          <a:ea typeface="Noto Sans CJK SC"/>
+                        </a:rPr>
+                        <a:t>4-5周</a:t>
+                      </a:r>
+                    </a:p>
+                  </a:txBody>
+                  <a:tcPr marL="91440" marR="91440" anchor="ctr">
+                    <a:solidFill>
+                      <a:srgbClr val="FFF2DE"/>
+                    </a:solidFill>
+                  </a:tcPr>
+                </a:tc>
+                <a:tc>
+                  <a:txBody>
+                    <a:bodyPr anchor="ctr"/>
+                    <a:lstStyle/>
+                    <a:p>
+                      <a:pPr algn="l">
+                        <a:buNone/>
+                      </a:pPr>
+                      <a:r>
+                        <a:rPr lang="zh-CN" sz="1700" b="0" dirty="0">
+                          <a:solidFill>
+                            <a:srgbClr val="3B2F2A"/>
+                          </a:solidFill>
+                          <a:latin typeface="Noto Sans CJK SC"/>
+                          <a:ea typeface="Noto Sans CJK SC"/>
+                        </a:rPr>
+                        <a:t>训练 AI 客服机器人</a:t>
+                      </a:r>
+                    </a:p>
+                  </a:txBody>
+                  <a:tcPr marL="91440" marR="91440" anchor="ctr">
+                    <a:solidFill>
+                      <a:srgbClr val="FFF2DE"/>
+                    </a:solidFill>
+                  </a:tcPr>
+                </a:tc>
+                <a:tc>
+                  <a:txBody>
+                    <a:bodyPr anchor="ctr"/>
+                    <a:lstStyle/>
+                    <a:p>
+                      <a:pPr algn="l">
+                        <a:buNone/>
+                      </a:pPr>
+                      <a:r>
+                        <a:rPr lang="zh-CN" sz="1700" b="0" dirty="0">
+                          <a:solidFill>
+                            <a:srgbClr val="3B2F2A"/>
+                          </a:solidFill>
+                          <a:latin typeface="Noto Sans CJK SC"/>
+                          <a:ea typeface="Noto Sans CJK SC"/>
+                        </a:rPr>
+                        <a:t>客服进阶</a:t>
+                      </a:r>
+                    </a:p>
+                  </a:txBody>
+                  <a:tcPr marL="91440" marR="91440" anchor="ctr">
+                    <a:solidFill>
+                      <a:srgbClr val="FFF2DE"/>
+                    </a:solidFill>
+                  </a:tcPr>
+                </a:tc>
+              </a:tr>
+            </a:tbl>
+          </a:graphicData>
+        </a:graphic>
+      </p:graphicFrame>
       <p:sp>
         <p:nvSpPr>
           <p:cNvPr id="59" name="Page number"/>
@@ -11558,7 +15610,7 @@
                 <a:latin typeface="Noto Sans CJK SC"/>
                 <a:ea typeface="Noto Sans CJK SC"/>
               </a:rPr>
-              <a:t>05 / 26</a:t>
+              <a:t>05 / 33</a:t>
             </a:r>
           </a:p>
         </p:txBody>
@@ -11571,255 +15623,6 @@
   <p:transition spd="med">
     <p:fade/>
   </p:transition>
-  <p:timing>
-    <p:tnLst>
-      <p:par>
-        <p:cTn id="1" dur="indefinite" restart="never" nodeType="tmRoot">
-          <p:childTnLst>
-            <p:seq concurrent="1" nextAc="seek">
-              <p:cTn id="2" dur="indefinite" nodeType="mainSeq">
-                <p:childTnLst>
-                  <p:par>
-                    <p:cTn id="3" fill="hold">
-                      <p:stCondLst>
-                        <p:cond delay="indefinite"/>
-                      </p:stCondLst>
-                      <p:childTnLst>
-                        <p:par>
-                          <p:cTn id="4" presetID="1" presetClass="entr" presetSubtype="0" fill="hold" grpId="0" nodeType="clickEffect">
-                            <p:stCondLst>
-                              <p:cond delay="0"/>
-                            </p:stCondLst>
-                            <p:childTnLst>
-                              <p:set>
-                                <p:cBhvr>
-                                  <p:cTn id="5" dur="1" fill="hold">
-                                    <p:stCondLst>
-                                      <p:cond delay="0"/>
-                                    </p:stCondLst>
-                                  </p:cTn>
-                                  <p:tgtEl>
-                                    <p:spTgt spid="53"/>
-                                  </p:tgtEl>
-                                  <p:attrNameLst>
-                                    <p:attrName>style.visibility</p:attrName>
-                                  </p:attrNameLst>
-                                </p:cBhvr>
-                                <p:to>
-                                  <p:strVal val="visible"/>
-                                </p:to>
-                              </p:set>
-                            </p:childTnLst>
-                          </p:cTn>
-                        </p:par>
-                      </p:childTnLst>
-                    </p:cTn>
-                  </p:par>
-                  <p:par>
-                    <p:cTn id="6" fill="hold">
-                      <p:stCondLst>
-                        <p:cond delay="indefinite"/>
-                      </p:stCondLst>
-                      <p:childTnLst>
-                        <p:par>
-                          <p:cTn id="7" presetID="1" presetClass="entr" presetSubtype="0" fill="hold" grpId="0" nodeType="clickEffect">
-                            <p:stCondLst>
-                              <p:cond delay="0"/>
-                            </p:stCondLst>
-                            <p:childTnLst>
-                              <p:set>
-                                <p:cBhvr>
-                                  <p:cTn id="8" dur="1" fill="hold">
-                                    <p:stCondLst>
-                                      <p:cond delay="0"/>
-                                    </p:stCondLst>
-                                  </p:cTn>
-                                  <p:tgtEl>
-                                    <p:spTgt spid="53"/>
-                                  </p:tgtEl>
-                                  <p:attrNameLst>
-                                    <p:attrName>style.visibility</p:attrName>
-                                  </p:attrNameLst>
-                                </p:cBhvr>
-                                <p:to>
-                                  <p:strVal val="visible"/>
-                                </p:to>
-                              </p:set>
-                            </p:childTnLst>
-                          </p:cTn>
-                        </p:par>
-                      </p:childTnLst>
-                    </p:cTn>
-                  </p:par>
-                  <p:par>
-                    <p:cTn id="9" fill="hold">
-                      <p:stCondLst>
-                        <p:cond delay="indefinite"/>
-                      </p:stCondLst>
-                      <p:childTnLst>
-                        <p:par>
-                          <p:cTn id="10" presetID="1" presetClass="entr" presetSubtype="0" fill="hold" grpId="0" nodeType="clickEffect">
-                            <p:stCondLst>
-                              <p:cond delay="0"/>
-                            </p:stCondLst>
-                            <p:childTnLst>
-                              <p:set>
-                                <p:cBhvr>
-                                  <p:cTn id="11" dur="1" fill="hold">
-                                    <p:stCondLst>
-                                      <p:cond delay="0"/>
-                                    </p:stCondLst>
-                                  </p:cTn>
-                                  <p:tgtEl>
-                                    <p:spTgt spid="53"/>
-                                  </p:tgtEl>
-                                  <p:attrNameLst>
-                                    <p:attrName>style.visibility</p:attrName>
-                                  </p:attrNameLst>
-                                </p:cBhvr>
-                                <p:to>
-                                  <p:strVal val="visible"/>
-                                </p:to>
-                              </p:set>
-                            </p:childTnLst>
-                          </p:cTn>
-                        </p:par>
-                      </p:childTnLst>
-                    </p:cTn>
-                  </p:par>
-                  <p:par>
-                    <p:cTn id="12" fill="hold">
-                      <p:stCondLst>
-                        <p:cond delay="indefinite"/>
-                      </p:stCondLst>
-                      <p:childTnLst>
-                        <p:par>
-                          <p:cTn id="13" presetID="1" presetClass="entr" presetSubtype="0" fill="hold" grpId="0" nodeType="clickEffect">
-                            <p:stCondLst>
-                              <p:cond delay="0"/>
-                            </p:stCondLst>
-                            <p:childTnLst>
-                              <p:set>
-                                <p:cBhvr>
-                                  <p:cTn id="14" dur="1" fill="hold">
-                                    <p:stCondLst>
-                                      <p:cond delay="0"/>
-                                    </p:stCondLst>
-                                  </p:cTn>
-                                  <p:tgtEl>
-                                    <p:spTgt spid="53"/>
-                                  </p:tgtEl>
-                                  <p:attrNameLst>
-                                    <p:attrName>style.visibility</p:attrName>
-                                  </p:attrNameLst>
-                                </p:cBhvr>
-                                <p:to>
-                                  <p:strVal val="visible"/>
-                                </p:to>
-                              </p:set>
-                            </p:childTnLst>
-                          </p:cTn>
-                        </p:par>
-                      </p:childTnLst>
-                    </p:cTn>
-                  </p:par>
-                  <p:par>
-                    <p:cTn id="15" fill="hold">
-                      <p:stCondLst>
-                        <p:cond delay="indefinite"/>
-                      </p:stCondLst>
-                      <p:childTnLst>
-                        <p:par>
-                          <p:cTn id="16" presetID="1" presetClass="entr" presetSubtype="0" fill="hold" grpId="0" nodeType="clickEffect">
-                            <p:stCondLst>
-                              <p:cond delay="0"/>
-                            </p:stCondLst>
-                            <p:childTnLst>
-                              <p:set>
-                                <p:cBhvr>
-                                  <p:cTn id="17" dur="1" fill="hold">
-                                    <p:stCondLst>
-                                      <p:cond delay="0"/>
-                                    </p:stCondLst>
-                                  </p:cTn>
-                                  <p:tgtEl>
-                                    <p:spTgt spid="53"/>
-                                  </p:tgtEl>
-                                  <p:attrNameLst>
-                                    <p:attrName>style.visibility</p:attrName>
-                                  </p:attrNameLst>
-                                </p:cBhvr>
-                                <p:to>
-                                  <p:strVal val="visible"/>
-                                </p:to>
-                              </p:set>
-                            </p:childTnLst>
-                          </p:cTn>
-                        </p:par>
-                      </p:childTnLst>
-                    </p:cTn>
-                  </p:par>
-                  <p:par>
-                    <p:cTn id="18" fill="hold">
-                      <p:stCondLst>
-                        <p:cond delay="indefinite"/>
-                      </p:stCondLst>
-                      <p:childTnLst>
-                        <p:par>
-                          <p:cTn id="19" presetID="1" presetClass="entr" presetSubtype="0" fill="hold" grpId="0" nodeType="clickEffect">
-                            <p:stCondLst>
-                              <p:cond delay="0"/>
-                            </p:stCondLst>
-                            <p:childTnLst>
-                              <p:set>
-                                <p:cBhvr>
-                                  <p:cTn id="20" dur="1" fill="hold">
-                                    <p:stCondLst>
-                                      <p:cond delay="0"/>
-                                    </p:stCondLst>
-                                  </p:cTn>
-                                  <p:tgtEl>
-                                    <p:spTgt spid="53"/>
-                                  </p:tgtEl>
-                                  <p:attrNameLst>
-                                    <p:attrName>style.visibility</p:attrName>
-                                  </p:attrNameLst>
-                                </p:cBhvr>
-                                <p:to>
-                                  <p:strVal val="visible"/>
-                                </p:to>
-                              </p:set>
-                            </p:childTnLst>
-                          </p:cTn>
-                        </p:par>
-                      </p:childTnLst>
-                    </p:cTn>
-                  </p:par>
-                </p:childTnLst>
-              </p:cTn>
-              <p:prevCondLst>
-                <p:cond evt="onPrev" delay="0">
-                  <p:tgtEl>
-                    <p:sldTgt/>
-                  </p:tgtEl>
-                </p:cond>
-              </p:prevCondLst>
-              <p:nextCondLst>
-                <p:cond evt="onNext" delay="0">
-                  <p:tgtEl>
-                    <p:sldTgt/>
-                  </p:tgtEl>
-                </p:cond>
-              </p:nextCondLst>
-            </p:seq>
-          </p:childTnLst>
-        </p:cTn>
-      </p:par>
-    </p:tnLst>
-    <p:bldLst>
-      <p:bldP spid="53" grpId="0"/>
-    </p:bldLst>
-  </p:timing>
 </p:sld>
 </file>
 
@@ -11882,7 +15685,7 @@
                 <a:latin typeface="Noto Sans CJK SC"/>
                 <a:ea typeface="Noto Sans CJK SC"/>
               </a:rPr>
-              <a:t>新媒体运营：账号就是简历</a:t>
+              <a:t>新媒体运营：用内容换流量</a:t>
             </a:r>
           </a:p>
         </p:txBody>
@@ -11921,7 +15724,7 @@
                 <a:latin typeface="Noto Sans CJK SC"/>
                 <a:ea typeface="Noto Sans CJK SC"/>
               </a:rPr>
-              <a:t>新媒体运营：账号就是简历</a:t>
+              <a:t>新媒体运营：用内容换流量</a:t>
             </a:r>
           </a:p>
         </p:txBody>
@@ -11964,7 +15767,7 @@
                 <a:latin typeface="Noto Sans CJK SC"/>
                 <a:ea typeface="Noto Sans CJK SC"/>
               </a:rPr>
-              <a:t>学：B站系统课+平台官方教程</a:t>
+              <a:t>定位：经营品牌的内容资产</a:t>
             </a:r>
           </a:p>
           <a:p>
@@ -11983,7 +15786,7 @@
                 <a:latin typeface="Noto Sans CJK SC"/>
                 <a:ea typeface="Noto Sans CJK SC"/>
               </a:rPr>
-              <a:t>练：自营账号跑30天真实数据</a:t>
+              <a:t>主战场：小红书、抖音、视频号</a:t>
             </a:r>
           </a:p>
           <a:p>
@@ -12002,7 +15805,7 @@
                 <a:latin typeface="Noto Sans CJK SC"/>
                 <a:ea typeface="Noto Sans CJK SC"/>
               </a:rPr>
-              <a:t>简历只写可量化的结果</a:t>
+              <a:t>每天：看数据、追热点、写文案</a:t>
             </a:r>
           </a:p>
           <a:p>
@@ -12021,7 +15824,7 @@
                 <a:latin typeface="Noto Sans CJK SC"/>
                 <a:ea typeface="Noto Sans CJK SC"/>
               </a:rPr>
-              <a:t>例：打开率3个月从2%到5%</a:t>
+              <a:t>每周：排期表、数据复盘、活动</a:t>
             </a:r>
           </a:p>
           <a:p>
@@ -12040,7 +15843,7 @@
                 <a:latin typeface="Noto Sans CJK SC"/>
                 <a:ea typeface="Noto Sans CJK SC"/>
               </a:rPr>
-              <a:t>例：500万播放，涨粉10万+</a:t>
+              <a:t>KPI：阅读、涨粉、互动、转化</a:t>
             </a:r>
           </a:p>
           <a:p>
@@ -12059,7 +15862,7 @@
                 <a:latin typeface="Noto Sans CJK SC"/>
                 <a:ea typeface="Noto Sans CJK SC"/>
               </a:rPr>
-              <a:t>一页纸排版，附作品链接</a:t>
+              <a:t>适合：有表达欲、爱研究爆款的人</a:t>
             </a:r>
           </a:p>
         </p:txBody>
@@ -12098,7 +15901,7 @@
                 <a:latin typeface="Noto Sans CJK SC"/>
                 <a:ea typeface="Noto Sans CJK SC"/>
               </a:rPr>
-              <a:t>06 / 26</a:t>
+              <a:t>06 / 33</a:t>
             </a:r>
           </a:p>
         </p:txBody>
@@ -12422,7 +16225,7 @@
                 <a:latin typeface="Noto Sans CJK SC"/>
                 <a:ea typeface="Noto Sans CJK SC"/>
               </a:rPr>
-              <a:t>电商运营：离钱最近的岗位</a:t>
+              <a:t>新媒体运营：账号就是简历</a:t>
             </a:r>
           </a:p>
         </p:txBody>
@@ -12461,7 +16264,7 @@
                 <a:latin typeface="Noto Sans CJK SC"/>
                 <a:ea typeface="Noto Sans CJK SC"/>
               </a:rPr>
-              <a:t>电商运营：离钱最近的岗位</a:t>
+              <a:t>新媒体运营：账号就是简历</a:t>
             </a:r>
           </a:p>
         </p:txBody>
@@ -12504,7 +16307,7 @@
                 <a:latin typeface="Noto Sans CJK SC"/>
                 <a:ea typeface="Noto Sans CJK SC"/>
               </a:rPr>
-              <a:t>定位：让店铺多卖货的人</a:t>
+              <a:t>学：B站系统课+平台官方教程</a:t>
             </a:r>
           </a:p>
           <a:p>
@@ -12523,7 +16326,7 @@
                 <a:latin typeface="Noto Sans CJK SC"/>
                 <a:ea typeface="Noto Sans CJK SC"/>
               </a:rPr>
-              <a:t>公式：流量乘转化率乘客单价</a:t>
+              <a:t>练：自营账号跑30天真实数据</a:t>
             </a:r>
           </a:p>
           <a:p>
@@ -12542,7 +16345,7 @@
                 <a:latin typeface="Noto Sans CJK SC"/>
                 <a:ea typeface="Noto Sans CJK SC"/>
               </a:rPr>
-              <a:t>每天：看后台、上新品、调投放</a:t>
+              <a:t>简历只写可量化的结果</a:t>
             </a:r>
           </a:p>
           <a:p>
@@ -12561,7 +16364,7 @@
                 <a:latin typeface="Noto Sans CJK SC"/>
                 <a:ea typeface="Noto Sans CJK SC"/>
               </a:rPr>
-              <a:t>大促：618双11要盯盘加班</a:t>
+              <a:t>例：打开率3个月从2%到5%</a:t>
             </a:r>
           </a:p>
           <a:p>
@@ -12580,7 +16383,7 @@
                 <a:latin typeface="Noto Sans CJK SC"/>
                 <a:ea typeface="Noto Sans CJK SC"/>
               </a:rPr>
-              <a:t>工具：生意参谋、千川、直通车</a:t>
+              <a:t>例：500万播放，涨粉10万+</a:t>
             </a:r>
           </a:p>
           <a:p>
@@ -12599,7 +16402,7 @@
                 <a:latin typeface="Noto Sans CJK SC"/>
                 <a:ea typeface="Noto Sans CJK SC"/>
               </a:rPr>
-              <a:t>竞品：每周拆解3个对标店铺</a:t>
+              <a:t>一页纸排版，附作品链接</a:t>
             </a:r>
           </a:p>
         </p:txBody>
@@ -12638,7 +16441,7 @@
                 <a:latin typeface="Noto Sans CJK SC"/>
                 <a:ea typeface="Noto Sans CJK SC"/>
               </a:rPr>
-              <a:t>07 / 26</a:t>
+              <a:t>07 / 33</a:t>
             </a:r>
           </a:p>
         </p:txBody>
@@ -12962,7 +16765,7 @@
                 <a:latin typeface="Noto Sans CJK SC"/>
                 <a:ea typeface="Noto Sans CJK SC"/>
               </a:rPr>
-              <a:t>电商运营：结果导向最好进</a:t>
+              <a:t>电商运营：离钱最近的岗位</a:t>
             </a:r>
           </a:p>
         </p:txBody>
@@ -13001,7 +16804,7 @@
                 <a:latin typeface="Noto Sans CJK SC"/>
                 <a:ea typeface="Noto Sans CJK SC"/>
               </a:rPr>
-              <a:t>电商运营：结果导向最好进</a:t>
+              <a:t>电商运营：离钱最近的岗位</a:t>
             </a:r>
           </a:p>
         </p:txBody>
@@ -13044,7 +16847,7 @@
                 <a:latin typeface="Noto Sans CJK SC"/>
                 <a:ea typeface="Noto Sans CJK SC"/>
               </a:rPr>
-              <a:t>学：B站电商课+商家后台学院</a:t>
+              <a:t>定位：让店铺多卖货的人</a:t>
             </a:r>
           </a:p>
           <a:p>
@@ -13063,7 +16866,7 @@
                 <a:latin typeface="Noto Sans CJK SC"/>
                 <a:ea typeface="Noto Sans CJK SC"/>
               </a:rPr>
-              <a:t>练：帮小店上架优化10个商品</a:t>
+              <a:t>公式：流量乘转化率乘客单价</a:t>
             </a:r>
           </a:p>
           <a:p>
@@ -13082,7 +16885,7 @@
                 <a:latin typeface="Noto Sans CJK SC"/>
                 <a:ea typeface="Noto Sans CJK SC"/>
               </a:rPr>
-              <a:t>简历关键词：GMV、ROI、转化率</a:t>
+              <a:t>每天：看后台、上新品、调投放</a:t>
             </a:r>
           </a:p>
           <a:p>
@@ -13101,7 +16904,7 @@
                 <a:latin typeface="Noto Sans CJK SC"/>
                 <a:ea typeface="Noto Sans CJK SC"/>
               </a:rPr>
-              <a:t>例：月销10万提到50万</a:t>
+              <a:t>大促：618双11要盯盘加班</a:t>
             </a:r>
           </a:p>
           <a:p>
@@ -13120,7 +16923,7 @@
                 <a:latin typeface="Noto Sans CJK SC"/>
                 <a:ea typeface="Noto Sans CJK SC"/>
               </a:rPr>
-              <a:t>例：广告ROI优化至1.8</a:t>
+              <a:t>工具：生意参谋、千川、直通车</a:t>
             </a:r>
           </a:p>
           <a:p>
@@ -13139,7 +16942,7 @@
                 <a:latin typeface="Noto Sans CJK SC"/>
                 <a:ea typeface="Noto Sans CJK SC"/>
               </a:rPr>
-              <a:t>单双休普遍，谈offer要问清</a:t>
+              <a:t>竞品：每周拆解3个对标店铺</a:t>
             </a:r>
           </a:p>
         </p:txBody>
@@ -13178,7 +16981,7 @@
                 <a:latin typeface="Noto Sans CJK SC"/>
                 <a:ea typeface="Noto Sans CJK SC"/>
               </a:rPr>
-              <a:t>08 / 26</a:t>
+              <a:t>08 / 33</a:t>
             </a:r>
           </a:p>
         </p:txBody>
@@ -13502,7 +17305,7 @@
                 <a:latin typeface="Noto Sans CJK SC"/>
                 <a:ea typeface="Noto Sans CJK SC"/>
               </a:rPr>
-              <a:t>社群运营：最快的入行跳板</a:t>
+              <a:t>电商运营：结果导向最好进</a:t>
             </a:r>
           </a:p>
         </p:txBody>
@@ -13541,7 +17344,7 @@
                 <a:latin typeface="Noto Sans CJK SC"/>
                 <a:ea typeface="Noto Sans CJK SC"/>
               </a:rPr>
-              <a:t>社群运营：最快的入行跳板</a:t>
+              <a:t>电商运营：结果导向最好进</a:t>
             </a:r>
           </a:p>
         </p:txBody>
@@ -13584,7 +17387,7 @@
                 <a:latin typeface="Noto Sans CJK SC"/>
                 <a:ea typeface="Noto Sans CJK SC"/>
               </a:rPr>
-              <a:t>定位：维护用户关系促复购</a:t>
+              <a:t>学：B站电商课+商家后台学院</a:t>
             </a:r>
           </a:p>
           <a:p>
@@ -13603,7 +17406,7 @@
                 <a:latin typeface="Noto Sans CJK SC"/>
                 <a:ea typeface="Noto Sans CJK SC"/>
               </a:rPr>
-              <a:t>每天：群内答疑、发内容、办活动</a:t>
+              <a:t>练：帮小店上架优化10个商品</a:t>
             </a:r>
           </a:p>
           <a:p>
@@ -13622,7 +17425,7 @@
                 <a:latin typeface="Noto Sans CJK SC"/>
                 <a:ea typeface="Noto Sans CJK SC"/>
               </a:rPr>
-              <a:t>核心：持续输出价值不是打杂</a:t>
+              <a:t>简历关键词：GMV、ROI、转化率</a:t>
             </a:r>
           </a:p>
           <a:p>
@@ -13641,7 +17444,7 @@
                 <a:latin typeface="Noto Sans CJK SC"/>
                 <a:ea typeface="Noto Sans CJK SC"/>
               </a:rPr>
-              <a:t>技能：话术SOP、用户分层</a:t>
+              <a:t>例：月销10万提到50万</a:t>
             </a:r>
           </a:p>
           <a:p>
@@ -13660,7 +17463,7 @@
                 <a:latin typeface="Noto Sans CJK SC"/>
                 <a:ea typeface="Noto Sans CJK SC"/>
               </a:rPr>
-              <a:t>适合：外向耐心、爱帮人解决问题</a:t>
+              <a:t>例：广告ROI优化至1.8</a:t>
             </a:r>
           </a:p>
           <a:p>
@@ -13679,7 +17482,7 @@
                 <a:latin typeface="Noto Sans CJK SC"/>
                 <a:ea typeface="Noto Sans CJK SC"/>
               </a:rPr>
-              <a:t>策略：干1年转新媒体或电商</a:t>
+              <a:t>单双休普遍，谈offer要问清</a:t>
             </a:r>
           </a:p>
         </p:txBody>
@@ -13718,7 +17521,7 @@
                 <a:latin typeface="Noto Sans CJK SC"/>
                 <a:ea typeface="Noto Sans CJK SC"/>
               </a:rPr>
-              <a:t>09 / 26</a:t>
+              <a:t>09 / 33</a:t>
             </a:r>
           </a:p>
         </p:txBody>

--- a/static/lulu/ppt/career-guide.pptx
+++ b/static/lulu/ppt/career-guide.pptx
@@ -31,13 +31,6 @@
     <p:sldId id="279" r:id="rId25"/>
     <p:sldId id="280" r:id="rId26"/>
     <p:sldId id="281" r:id="rId27"/>
-    <p:sldId id="282" r:id="rId28"/>
-    <p:sldId id="283" r:id="rId29"/>
-    <p:sldId id="284" r:id="rId30"/>
-    <p:sldId id="285" r:id="rId31"/>
-    <p:sldId id="286" r:id="rId32"/>
-    <p:sldId id="287" r:id="rId33"/>
-    <p:sldId id="288" r:id="rId34"/>
   </p:sldIdLst>
   <p:sldSz cx="12192000" cy="6858000" type="screen16x9"/>
   <p:notesSz cx="6858000" cy="9144000"/>
@@ -430,7 +423,7 @@
                 <a:latin typeface="Noto Sans CJK SC"/>
                 <a:ea typeface="Noto Sans CJK SC"/>
               </a:rPr>
-              <a:t>女生找工作十大岗位全攻略</a:t>
+              <a:t>女生找工作七大岗位全攻略</a:t>
             </a:r>
           </a:p>
         </p:txBody>
@@ -547,7 +540,7 @@
                 <a:latin typeface="Noto Sans CJK SC"/>
                 <a:ea typeface="Noto Sans CJK SC"/>
               </a:rPr>
-              <a:t>01 / 33</a:t>
+              <a:t>01 / 26</a:t>
             </a:r>
           </a:p>
         </p:txBody>
@@ -622,7 +615,7 @@
                 <a:latin typeface="Noto Sans CJK SC"/>
                 <a:ea typeface="Noto Sans CJK SC"/>
               </a:rPr>
-              <a:t>社群运营：最快的入行跳板</a:t>
+              <a:t>社群运营：三周就能上岗</a:t>
             </a:r>
           </a:p>
         </p:txBody>
@@ -661,7 +654,7 @@
                 <a:latin typeface="Noto Sans CJK SC"/>
                 <a:ea typeface="Noto Sans CJK SC"/>
               </a:rPr>
-              <a:t>社群运营：最快的入行跳板</a:t>
+              <a:t>社群运营：三周就能上岗</a:t>
             </a:r>
           </a:p>
         </p:txBody>
@@ -704,7 +697,7 @@
                 <a:latin typeface="Noto Sans CJK SC"/>
                 <a:ea typeface="Noto Sans CJK SC"/>
               </a:rPr>
-              <a:t>定位：维护用户关系促复购</a:t>
+              <a:t>学：B站入门课+拆解3个好社群</a:t>
             </a:r>
           </a:p>
           <a:p>
@@ -723,7 +716,7 @@
                 <a:latin typeface="Noto Sans CJK SC"/>
                 <a:ea typeface="Noto Sans CJK SC"/>
               </a:rPr>
-              <a:t>每天：群内答疑、发内容、办活动</a:t>
+              <a:t>练：自建30人兴趣群实操一周</a:t>
             </a:r>
           </a:p>
           <a:p>
@@ -742,7 +735,7 @@
                 <a:latin typeface="Noto Sans CJK SC"/>
                 <a:ea typeface="Noto Sans CJK SC"/>
               </a:rPr>
-              <a:t>核心：持续输出价值不是打杂</a:t>
+              <a:t>简历写：活跃、转化、裂变数据</a:t>
             </a:r>
           </a:p>
           <a:p>
@@ -761,7 +754,7 @@
                 <a:latin typeface="Noto Sans CJK SC"/>
                 <a:ea typeface="Noto Sans CJK SC"/>
               </a:rPr>
-              <a:t>技能：话术SOP、用户分层</a:t>
+              <a:t>例：社群活跃度提升35%</a:t>
             </a:r>
           </a:p>
           <a:p>
@@ -780,7 +773,7 @@
                 <a:latin typeface="Noto Sans CJK SC"/>
                 <a:ea typeface="Noto Sans CJK SC"/>
               </a:rPr>
-              <a:t>适合：外向耐心、爱帮人解决问题</a:t>
+              <a:t>例：裂变活动新增用户500+</a:t>
             </a:r>
           </a:p>
           <a:p>
@@ -799,7 +792,7 @@
                 <a:latin typeface="Noto Sans CJK SC"/>
                 <a:ea typeface="Noto Sans CJK SC"/>
               </a:rPr>
-              <a:t>策略：干1年转新媒体或电商</a:t>
+              <a:t>面试就讲你建群的真实打法</a:t>
             </a:r>
           </a:p>
         </p:txBody>
@@ -838,7 +831,7 @@
                 <a:latin typeface="Noto Sans CJK SC"/>
                 <a:ea typeface="Noto Sans CJK SC"/>
               </a:rPr>
-              <a:t>10 / 33</a:t>
+              <a:t>10 / 26</a:t>
             </a:r>
           </a:p>
         </p:txBody>
@@ -1162,7 +1155,7 @@
                 <a:latin typeface="Noto Sans CJK SC"/>
                 <a:ea typeface="Noto Sans CJK SC"/>
               </a:rPr>
-              <a:t>社群运营：三周就能上岗</a:t>
+              <a:t>软件测试：AI时代的守门员</a:t>
             </a:r>
           </a:p>
         </p:txBody>
@@ -1201,7 +1194,7 @@
                 <a:latin typeface="Noto Sans CJK SC"/>
                 <a:ea typeface="Noto Sans CJK SC"/>
               </a:rPr>
-              <a:t>社群运营：三周就能上岗</a:t>
+              <a:t>软件测试：AI时代的守门员</a:t>
             </a:r>
           </a:p>
         </p:txBody>
@@ -1244,7 +1237,7 @@
                 <a:latin typeface="Noto Sans CJK SC"/>
                 <a:ea typeface="Noto Sans CJK SC"/>
               </a:rPr>
-              <a:t>学：B站入门课+拆解3个好社群</a:t>
+              <a:t>定位：上线前最后的质量关卡</a:t>
             </a:r>
           </a:p>
           <a:p>
@@ -1263,7 +1256,7 @@
                 <a:latin typeface="Noto Sans CJK SC"/>
                 <a:ea typeface="Noto Sans CJK SC"/>
               </a:rPr>
-              <a:t>练：自建30人兴趣群实操一周</a:t>
+              <a:t>每天：写用例、执行测试、提bug</a:t>
             </a:r>
           </a:p>
           <a:p>
@@ -1282,7 +1275,7 @@
                 <a:latin typeface="Noto Sans CJK SC"/>
                 <a:ea typeface="Noto Sans CJK SC"/>
               </a:rPr>
-              <a:t>简历写：活跃、转化、裂变数据</a:t>
+              <a:t>工具：禅道、JIRA、Postman</a:t>
             </a:r>
           </a:p>
           <a:p>
@@ -1301,7 +1294,7 @@
                 <a:latin typeface="Noto Sans CJK SC"/>
                 <a:ea typeface="Noto Sans CJK SC"/>
               </a:rPr>
-              <a:t>例：社群活跃度提升35%</a:t>
+              <a:t>2025真相：纯手工岗竞争激烈</a:t>
             </a:r>
           </a:p>
           <a:p>
@@ -1320,7 +1313,7 @@
                 <a:latin typeface="Noto Sans CJK SC"/>
                 <a:ea typeface="Noto Sans CJK SC"/>
               </a:rPr>
-              <a:t>例：裂变活动新增用户500+</a:t>
+              <a:t>门槛上移：SQL加接口成标配</a:t>
             </a:r>
           </a:p>
           <a:p>
@@ -1339,7 +1332,7 @@
                 <a:latin typeface="Noto Sans CJK SC"/>
                 <a:ea typeface="Noto Sans CJK SC"/>
               </a:rPr>
-              <a:t>面试就讲你建群的真实打法</a:t>
+              <a:t>亮点方向：AI产品测试缺人</a:t>
             </a:r>
           </a:p>
         </p:txBody>
@@ -1378,7 +1371,7 @@
                 <a:latin typeface="Noto Sans CJK SC"/>
                 <a:ea typeface="Noto Sans CJK SC"/>
               </a:rPr>
-              <a:t>11 / 33</a:t>
+              <a:t>11 / 26</a:t>
             </a:r>
           </a:p>
         </p:txBody>
@@ -1702,7 +1695,7 @@
                 <a:latin typeface="Noto Sans CJK SC"/>
                 <a:ea typeface="Noto Sans CJK SC"/>
               </a:rPr>
-              <a:t>软件测试：AI时代的守门员</a:t>
+              <a:t>软件测试：三个月学习路线</a:t>
             </a:r>
           </a:p>
         </p:txBody>
@@ -1741,7 +1734,7 @@
                 <a:latin typeface="Noto Sans CJK SC"/>
                 <a:ea typeface="Noto Sans CJK SC"/>
               </a:rPr>
-              <a:t>软件测试：AI时代的守门员</a:t>
+              <a:t>软件测试：三个月学习路线</a:t>
             </a:r>
           </a:p>
         </p:txBody>
@@ -1784,7 +1777,7 @@
                 <a:latin typeface="Noto Sans CJK SC"/>
                 <a:ea typeface="Noto Sans CJK SC"/>
               </a:rPr>
-              <a:t>定位：上线前最后的质量关卡</a:t>
+              <a:t>第1月：测试理论+用例编写</a:t>
             </a:r>
           </a:p>
           <a:p>
@@ -1803,7 +1796,7 @@
                 <a:latin typeface="Noto Sans CJK SC"/>
                 <a:ea typeface="Noto Sans CJK SC"/>
               </a:rPr>
-              <a:t>每天：写用例、执行测试、提bug</a:t>
+              <a:t>第2月：SQL基础+Postman接口</a:t>
             </a:r>
           </a:p>
           <a:p>
@@ -1822,7 +1815,7 @@
                 <a:latin typeface="Noto Sans CJK SC"/>
                 <a:ea typeface="Noto Sans CJK SC"/>
               </a:rPr>
-              <a:t>工具：禅道、JIRA、Postman</a:t>
+              <a:t>第3月：Linux+Python自动化入门</a:t>
             </a:r>
           </a:p>
           <a:p>
@@ -1841,7 +1834,7 @@
                 <a:latin typeface="Noto Sans CJK SC"/>
                 <a:ea typeface="Noto Sans CJK SC"/>
               </a:rPr>
-              <a:t>2025真相：纯手工岗竞争激烈</a:t>
+              <a:t>作品：常用App测试用例10份</a:t>
             </a:r>
           </a:p>
           <a:p>
@@ -1860,7 +1853,7 @@
                 <a:latin typeface="Noto Sans CJK SC"/>
                 <a:ea typeface="Noto Sans CJK SC"/>
               </a:rPr>
-              <a:t>门槛上移：SQL加接口成标配</a:t>
+              <a:t>投递：先投中小厂攒项目经验</a:t>
             </a:r>
           </a:p>
           <a:p>
@@ -1879,7 +1872,7 @@
                 <a:latin typeface="Noto Sans CJK SC"/>
                 <a:ea typeface="Noto Sans CJK SC"/>
               </a:rPr>
-              <a:t>亮点方向：AI产品测试缺人</a:t>
+              <a:t>警告：没学完别裸投手工岗</a:t>
             </a:r>
           </a:p>
         </p:txBody>
@@ -1918,7 +1911,7 @@
                 <a:latin typeface="Noto Sans CJK SC"/>
                 <a:ea typeface="Noto Sans CJK SC"/>
               </a:rPr>
-              <a:t>12 / 33</a:t>
+              <a:t>12 / 26</a:t>
             </a:r>
           </a:p>
         </p:txBody>
@@ -2242,7 +2235,7 @@
                 <a:latin typeface="Noto Sans CJK SC"/>
                 <a:ea typeface="Noto Sans CJK SC"/>
               </a:rPr>
-              <a:t>软件测试：三个月学习路线</a:t>
+              <a:t>数据运营：最抗AI的运营岗</a:t>
             </a:r>
           </a:p>
         </p:txBody>
@@ -2281,7 +2274,7 @@
                 <a:latin typeface="Noto Sans CJK SC"/>
                 <a:ea typeface="Noto Sans CJK SC"/>
               </a:rPr>
-              <a:t>软件测试：三个月学习路线</a:t>
+              <a:t>数据运营：最抗AI的运营岗</a:t>
             </a:r>
           </a:p>
         </p:txBody>
@@ -2324,7 +2317,7 @@
                 <a:latin typeface="Noto Sans CJK SC"/>
                 <a:ea typeface="Noto Sans CJK SC"/>
               </a:rPr>
-              <a:t>第1月：测试理论+用例编写</a:t>
+              <a:t>定位：用数据驱动业务决策</a:t>
             </a:r>
           </a:p>
           <a:p>
@@ -2343,7 +2336,7 @@
                 <a:latin typeface="Noto Sans CJK SC"/>
                 <a:ea typeface="Noto Sans CJK SC"/>
               </a:rPr>
-              <a:t>第2月：SQL基础+Postman接口</a:t>
+              <a:t>每天：SQL取数、做报表、找原因</a:t>
             </a:r>
           </a:p>
           <a:p>
@@ -2362,7 +2355,7 @@
                 <a:latin typeface="Noto Sans CJK SC"/>
                 <a:ea typeface="Noto Sans CJK SC"/>
               </a:rPr>
-              <a:t>第3月：Linux+Python自动化入门</a:t>
+              <a:t>技能：SQL必备、Excel透视表</a:t>
             </a:r>
           </a:p>
           <a:p>
@@ -2381,7 +2374,7 @@
                 <a:latin typeface="Noto Sans CJK SC"/>
                 <a:ea typeface="Noto Sans CJK SC"/>
               </a:rPr>
-              <a:t>作品：常用App测试用例10份</a:t>
+              <a:t>加分：Python、BI、指标体系</a:t>
             </a:r>
           </a:p>
           <a:p>
@@ -2400,7 +2393,7 @@
                 <a:latin typeface="Noto Sans CJK SC"/>
                 <a:ea typeface="Noto Sans CJK SC"/>
               </a:rPr>
-              <a:t>投递：先投中小厂攒项目经验</a:t>
+              <a:t>趋势：业务+数据复合岗最抢手</a:t>
             </a:r>
           </a:p>
           <a:p>
@@ -2419,7 +2412,7 @@
                 <a:latin typeface="Noto Sans CJK SC"/>
                 <a:ea typeface="Noto Sans CJK SC"/>
               </a:rPr>
-              <a:t>警告：没学完别裸投手工岗</a:t>
+              <a:t>适合：逻辑好、对数字敏感的人</a:t>
             </a:r>
           </a:p>
         </p:txBody>
@@ -2458,7 +2451,7 @@
                 <a:latin typeface="Noto Sans CJK SC"/>
                 <a:ea typeface="Noto Sans CJK SC"/>
               </a:rPr>
-              <a:t>13 / 33</a:t>
+              <a:t>13 / 26</a:t>
             </a:r>
           </a:p>
         </p:txBody>
@@ -2782,7 +2775,7 @@
                 <a:latin typeface="Noto Sans CJK SC"/>
                 <a:ea typeface="Noto Sans CJK SC"/>
               </a:rPr>
-              <a:t>数据运营：最抗AI的运营岗</a:t>
+              <a:t>数据运营：三个月刷题路线</a:t>
             </a:r>
           </a:p>
         </p:txBody>
@@ -2821,7 +2814,7 @@
                 <a:latin typeface="Noto Sans CJK SC"/>
                 <a:ea typeface="Noto Sans CJK SC"/>
               </a:rPr>
-              <a:t>数据运营：最抗AI的运营岗</a:t>
+              <a:t>数据运营：三个月刷题路线</a:t>
             </a:r>
           </a:p>
         </p:txBody>
@@ -2864,7 +2857,7 @@
                 <a:latin typeface="Noto Sans CJK SC"/>
                 <a:ea typeface="Noto Sans CJK SC"/>
               </a:rPr>
-              <a:t>定位：用数据驱动业务决策</a:t>
+              <a:t>第1月：Excel透视表+SQL入门</a:t>
             </a:r>
           </a:p>
           <a:p>
@@ -2883,7 +2876,7 @@
                 <a:latin typeface="Noto Sans CJK SC"/>
                 <a:ea typeface="Noto Sans CJK SC"/>
               </a:rPr>
-              <a:t>每天：SQL取数、做报表、找原因</a:t>
+              <a:t>第2月：牛客SQL题库刷50题</a:t>
             </a:r>
           </a:p>
           <a:p>
@@ -2902,7 +2895,7 @@
                 <a:latin typeface="Noto Sans CJK SC"/>
                 <a:ea typeface="Noto Sans CJK SC"/>
               </a:rPr>
-              <a:t>技能：SQL必备、Excel透视表</a:t>
+              <a:t>第3月：公开数据做3个分析</a:t>
             </a:r>
           </a:p>
           <a:p>
@@ -2921,7 +2914,7 @@
                 <a:latin typeface="Noto Sans CJK SC"/>
                 <a:ea typeface="Noto Sans CJK SC"/>
               </a:rPr>
-              <a:t>加分：Python、BI、指标体系</a:t>
+              <a:t>作品：问题、数据、结论三段式</a:t>
             </a:r>
           </a:p>
           <a:p>
@@ -2940,7 +2933,7 @@
                 <a:latin typeface="Noto Sans CJK SC"/>
                 <a:ea typeface="Noto Sans CJK SC"/>
               </a:rPr>
-              <a:t>趋势：业务+数据复合岗最抢手</a:t>
+              <a:t>面试：SQL手写题必考提前练</a:t>
             </a:r>
           </a:p>
           <a:p>
@@ -2959,7 +2952,7 @@
                 <a:latin typeface="Noto Sans CJK SC"/>
                 <a:ea typeface="Noto Sans CJK SC"/>
               </a:rPr>
-              <a:t>适合：逻辑好、对数字敏感的人</a:t>
+              <a:t>投递：数据运营和商业分析都投</a:t>
             </a:r>
           </a:p>
         </p:txBody>
@@ -2998,7 +2991,7 @@
                 <a:latin typeface="Noto Sans CJK SC"/>
                 <a:ea typeface="Noto Sans CJK SC"/>
               </a:rPr>
-              <a:t>14 / 33</a:t>
+              <a:t>14 / 26</a:t>
             </a:r>
           </a:p>
         </p:txBody>
@@ -3322,7 +3315,7 @@
                 <a:latin typeface="Noto Sans CJK SC"/>
                 <a:ea typeface="Noto Sans CJK SC"/>
               </a:rPr>
-              <a:t>数据运营：三个月刷题路线</a:t>
+              <a:t>高校助理：有寒暑假的稳定牌</a:t>
             </a:r>
           </a:p>
         </p:txBody>
@@ -3361,7 +3354,7 @@
                 <a:latin typeface="Noto Sans CJK SC"/>
                 <a:ea typeface="Noto Sans CJK SC"/>
               </a:rPr>
-              <a:t>数据运营：三个月刷题路线</a:t>
+              <a:t>高校助理：有寒暑假的稳定牌</a:t>
             </a:r>
           </a:p>
         </p:txBody>
@@ -3404,7 +3397,7 @@
                 <a:latin typeface="Noto Sans CJK SC"/>
                 <a:ea typeface="Noto Sans CJK SC"/>
               </a:rPr>
-              <a:t>第1月：Excel透视表+SQL入门</a:t>
+              <a:t>岗位：行政、教务、学生工作</a:t>
             </a:r>
           </a:p>
           <a:p>
@@ -3423,7 +3416,7 @@
                 <a:latin typeface="Noto Sans CJK SC"/>
                 <a:ea typeface="Noto Sans CJK SC"/>
               </a:rPr>
-              <a:t>第2月：牛客SQL题库刷50题</a:t>
+              <a:t>学历：本科可投行政教辅岗</a:t>
             </a:r>
           </a:p>
           <a:p>
@@ -3442,7 +3435,7 @@
                 <a:latin typeface="Noto Sans CJK SC"/>
                 <a:ea typeface="Noto Sans CJK SC"/>
               </a:rPr>
-              <a:t>第3月：公开数据做3个分析</a:t>
+              <a:t>注意：辅导员岗多要硕士党员</a:t>
             </a:r>
           </a:p>
           <a:p>
@@ -3461,7 +3454,7 @@
                 <a:latin typeface="Noto Sans CJK SC"/>
                 <a:ea typeface="Noto Sans CJK SC"/>
               </a:rPr>
-              <a:t>作品：问题、数据、结论三段式</a:t>
+              <a:t>性质：合同制为主，求稳定合适</a:t>
             </a:r>
           </a:p>
           <a:p>
@@ -3480,7 +3473,7 @@
                 <a:latin typeface="Noto Sans CJK SC"/>
                 <a:ea typeface="Noto Sans CJK SC"/>
               </a:rPr>
-              <a:t>面试：SQL手写题必考提前练</a:t>
+              <a:t>福利：寒暑假是最大亮点</a:t>
             </a:r>
           </a:p>
           <a:p>
@@ -3499,7 +3492,7 @@
                 <a:latin typeface="Noto Sans CJK SC"/>
                 <a:ea typeface="Noto Sans CJK SC"/>
               </a:rPr>
-              <a:t>投递：数据运营和商业分析都投</a:t>
+              <a:t>渠道：高校人才网+学校官网</a:t>
             </a:r>
           </a:p>
         </p:txBody>
@@ -3538,7 +3531,7 @@
                 <a:latin typeface="Noto Sans CJK SC"/>
                 <a:ea typeface="Noto Sans CJK SC"/>
               </a:rPr>
-              <a:t>15 / 33</a:t>
+              <a:t>15 / 26</a:t>
             </a:r>
           </a:p>
         </p:txBody>
@@ -3862,7 +3855,7 @@
                 <a:latin typeface="Noto Sans CJK SC"/>
                 <a:ea typeface="Noto Sans CJK SC"/>
               </a:rPr>
-              <a:t>高校助理：有寒暑假的稳定牌</a:t>
+              <a:t>高校助理：怎么投不踩坑</a:t>
             </a:r>
           </a:p>
         </p:txBody>
@@ -3901,7 +3894,7 @@
                 <a:latin typeface="Noto Sans CJK SC"/>
                 <a:ea typeface="Noto Sans CJK SC"/>
               </a:rPr>
-              <a:t>高校助理：有寒暑假的稳定牌</a:t>
+              <a:t>高校助理：怎么投不踩坑</a:t>
             </a:r>
           </a:p>
         </p:txBody>
@@ -3944,7 +3937,7 @@
                 <a:latin typeface="Noto Sans CJK SC"/>
                 <a:ea typeface="Noto Sans CJK SC"/>
               </a:rPr>
-              <a:t>岗位：行政、教务、学生工作</a:t>
+              <a:t>区分：事业编考试与合同制直投</a:t>
             </a:r>
           </a:p>
           <a:p>
@@ -3963,7 +3956,7 @@
                 <a:latin typeface="Noto Sans CJK SC"/>
                 <a:ea typeface="Noto Sans CJK SC"/>
               </a:rPr>
-              <a:t>学历：本科可投行政教辅岗</a:t>
+              <a:t>简历：突出组织协调和公文能力</a:t>
             </a:r>
           </a:p>
           <a:p>
@@ -3982,7 +3975,7 @@
                 <a:latin typeface="Noto Sans CJK SC"/>
                 <a:ea typeface="Noto Sans CJK SC"/>
               </a:rPr>
-              <a:t>注意：辅导员岗多要硕士党员</a:t>
+              <a:t>例：处理文件300份零差错</a:t>
             </a:r>
           </a:p>
           <a:p>
@@ -4001,7 +3994,7 @@
                 <a:latin typeface="Noto Sans CJK SC"/>
                 <a:ea typeface="Noto Sans CJK SC"/>
               </a:rPr>
-              <a:t>性质：合同制为主，求稳定合适</a:t>
+              <a:t>例：活动满意度调查95%</a:t>
             </a:r>
           </a:p>
           <a:p>
@@ -4020,7 +4013,7 @@
                 <a:latin typeface="Noto Sans CJK SC"/>
                 <a:ea typeface="Noto Sans CJK SC"/>
               </a:rPr>
-              <a:t>福利：寒暑假是最大亮点</a:t>
+              <a:t>面试：稳定性和服务意识是核心</a:t>
             </a:r>
           </a:p>
           <a:p>
@@ -4039,7 +4032,7 @@
                 <a:latin typeface="Noto Sans CJK SC"/>
                 <a:ea typeface="Noto Sans CJK SC"/>
               </a:rPr>
-              <a:t>渠道：高校人才网+学校官网</a:t>
+              <a:t>当备胎投：撞上就是赚到</a:t>
             </a:r>
           </a:p>
         </p:txBody>
@@ -4078,7 +4071,7 @@
                 <a:latin typeface="Noto Sans CJK SC"/>
                 <a:ea typeface="Noto Sans CJK SC"/>
               </a:rPr>
-              <a:t>16 / 33</a:t>
+              <a:t>16 / 26</a:t>
             </a:r>
           </a:p>
         </p:txBody>
@@ -4402,7 +4395,7 @@
                 <a:latin typeface="Noto Sans CJK SC"/>
                 <a:ea typeface="Noto Sans CJK SC"/>
               </a:rPr>
-              <a:t>高校助理：怎么投不踩坑</a:t>
+              <a:t>行政专员：保底上岸牌</a:t>
             </a:r>
           </a:p>
         </p:txBody>
@@ -4441,7 +4434,7 @@
                 <a:latin typeface="Noto Sans CJK SC"/>
                 <a:ea typeface="Noto Sans CJK SC"/>
               </a:rPr>
-              <a:t>高校助理：怎么投不踩坑</a:t>
+              <a:t>行政专员：保底上岸牌</a:t>
             </a:r>
           </a:p>
         </p:txBody>
@@ -4484,7 +4477,7 @@
                 <a:latin typeface="Noto Sans CJK SC"/>
                 <a:ea typeface="Noto Sans CJK SC"/>
               </a:rPr>
-              <a:t>区分：事业编考试与合同制直投</a:t>
+              <a:t>定位：让办公室正常运转的人</a:t>
             </a:r>
           </a:p>
           <a:p>
@@ -4503,7 +4496,7 @@
                 <a:latin typeface="Noto Sans CJK SC"/>
                 <a:ea typeface="Noto Sans CJK SC"/>
               </a:rPr>
-              <a:t>简历：突出组织协调和公文能力</a:t>
+              <a:t>每天：会议、采购、报销、活动</a:t>
             </a:r>
           </a:p>
           <a:p>
@@ -4522,7 +4515,7 @@
                 <a:latin typeface="Noto Sans CJK SC"/>
                 <a:ea typeface="Noto Sans CJK SC"/>
               </a:rPr>
-              <a:t>例：处理文件300份零差错</a:t>
+              <a:t>门槛最低：两周熟悉即可上手</a:t>
             </a:r>
           </a:p>
           <a:p>
@@ -4541,7 +4534,7 @@
                 <a:latin typeface="Noto Sans CJK SC"/>
                 <a:ea typeface="Noto Sans CJK SC"/>
               </a:rPr>
-              <a:t>例：活动满意度调查95%</a:t>
+              <a:t>简历量化：省钱、零风险、提效</a:t>
             </a:r>
           </a:p>
           <a:p>
@@ -4560,7 +4553,7 @@
                 <a:latin typeface="Noto Sans CJK SC"/>
                 <a:ea typeface="Noto Sans CJK SC"/>
               </a:rPr>
-              <a:t>面试：稳定性和服务意识是核心</a:t>
+              <a:t>例：电子台账检索提速90%</a:t>
             </a:r>
           </a:p>
           <a:p>
@@ -4579,7 +4572,7 @@
                 <a:latin typeface="Noto Sans CJK SC"/>
                 <a:ea typeface="Noto Sans CJK SC"/>
               </a:rPr>
-              <a:t>当备胎投：撞上就是赚到</a:t>
+              <a:t>适合：细心靠谱、想先上岸的人</a:t>
             </a:r>
           </a:p>
         </p:txBody>
@@ -4618,7 +4611,7 @@
                 <a:latin typeface="Noto Sans CJK SC"/>
                 <a:ea typeface="Noto Sans CJK SC"/>
               </a:rPr>
-              <a:t>17 / 33</a:t>
+              <a:t>17 / 26</a:t>
             </a:r>
           </a:p>
         </p:txBody>
@@ -4942,7 +4935,7 @@
                 <a:latin typeface="Noto Sans CJK SC"/>
                 <a:ea typeface="Noto Sans CJK SC"/>
               </a:rPr>
-              <a:t>行政专员：保底上岸牌</a:t>
+              <a:t>简历通用公式：STAR加量化</a:t>
             </a:r>
           </a:p>
         </p:txBody>
@@ -4981,7 +4974,7 @@
                 <a:latin typeface="Noto Sans CJK SC"/>
                 <a:ea typeface="Noto Sans CJK SC"/>
               </a:rPr>
-              <a:t>行政专员：保底上岸牌</a:t>
+              <a:t>简历通用公式：STAR加量化</a:t>
             </a:r>
           </a:p>
         </p:txBody>
@@ -5024,7 +5017,7 @@
                 <a:latin typeface="Noto Sans CJK SC"/>
                 <a:ea typeface="Noto Sans CJK SC"/>
               </a:rPr>
-              <a:t>定位：让办公室正常运转的人</a:t>
+              <a:t>S情境：什么背景下什么问题</a:t>
             </a:r>
           </a:p>
           <a:p>
@@ -5043,7 +5036,7 @@
                 <a:latin typeface="Noto Sans CJK SC"/>
                 <a:ea typeface="Noto Sans CJK SC"/>
               </a:rPr>
-              <a:t>每天：会议、采购、报销、活动</a:t>
+              <a:t>T任务：你负责的具体目标</a:t>
             </a:r>
           </a:p>
           <a:p>
@@ -5062,7 +5055,7 @@
                 <a:latin typeface="Noto Sans CJK SC"/>
                 <a:ea typeface="Noto Sans CJK SC"/>
               </a:rPr>
-              <a:t>门槛最低：两周熟悉即可上手</a:t>
+              <a:t>A行动：用了什么方法和工具</a:t>
             </a:r>
           </a:p>
           <a:p>
@@ -5081,7 +5074,7 @@
                 <a:latin typeface="Noto Sans CJK SC"/>
                 <a:ea typeface="Noto Sans CJK SC"/>
               </a:rPr>
-              <a:t>简历量化：省钱、零风险、提效</a:t>
+              <a:t>R结果：数字说话拒绝形容词</a:t>
             </a:r>
           </a:p>
           <a:p>
@@ -5100,7 +5093,7 @@
                 <a:latin typeface="Noto Sans CJK SC"/>
                 <a:ea typeface="Noto Sans CJK SC"/>
               </a:rPr>
-              <a:t>例：电子台账检索提速90%</a:t>
+              <a:t>反例：负责公众号日常运营</a:t>
             </a:r>
           </a:p>
           <a:p>
@@ -5119,7 +5112,7 @@
                 <a:latin typeface="Noto Sans CJK SC"/>
                 <a:ea typeface="Noto Sans CJK SC"/>
               </a:rPr>
-              <a:t>适合：细心靠谱、想先上岸的人</a:t>
+              <a:t>正例：3个月打开率2%提到5%</a:t>
             </a:r>
           </a:p>
         </p:txBody>
@@ -5158,7 +5151,7 @@
                 <a:latin typeface="Noto Sans CJK SC"/>
                 <a:ea typeface="Noto Sans CJK SC"/>
               </a:rPr>
-              <a:t>18 / 33</a:t>
+              <a:t>18 / 26</a:t>
             </a:r>
           </a:p>
         </p:txBody>
@@ -5482,7 +5475,7 @@
                 <a:latin typeface="Noto Sans CJK SC"/>
                 <a:ea typeface="Noto Sans CJK SC"/>
               </a:rPr>
-              <a:t>AI 训练师：最好上手的AI岗</a:t>
+              <a:t>Gap半年话术：30秒带过</a:t>
             </a:r>
           </a:p>
         </p:txBody>
@@ -5521,7 +5514,7 @@
                 <a:latin typeface="Noto Sans CJK SC"/>
                 <a:ea typeface="Noto Sans CJK SC"/>
               </a:rPr>
-              <a:t>AI 训练师：最好上手的AI岗</a:t>
+              <a:t>Gap半年话术：30秒带过</a:t>
             </a:r>
           </a:p>
         </p:txBody>
@@ -5564,7 +5557,7 @@
                 <a:latin typeface="Noto Sans CJK SC"/>
                 <a:ea typeface="Noto Sans CJK SC"/>
               </a:rPr>
-              <a:t>定位：教AI的人（标注质检评测）</a:t>
+              <a:t>考证版：系统学习已产出成果</a:t>
             </a:r>
           </a:p>
           <a:p>
@@ -5583,7 +5576,7 @@
                 <a:latin typeface="Noto Sans CJK SC"/>
                 <a:ea typeface="Noto Sans CJK SC"/>
               </a:rPr>
-              <a:t>入门：学历门槛低本科绰绰有余</a:t>
+              <a:t>家庭版：事务办妥可随时到岗</a:t>
             </a:r>
           </a:p>
           <a:p>
@@ -5602,7 +5595,7 @@
                 <a:latin typeface="Noto Sans CJK SC"/>
                 <a:ea typeface="Noto Sans CJK SC"/>
               </a:rPr>
-              <a:t>每天：按规范标注质检打分</a:t>
+              <a:t>休整版：状态恢复并补了技能</a:t>
             </a:r>
           </a:p>
           <a:p>
@@ -5621,7 +5614,7 @@
                 <a:latin typeface="Noto Sans CJK SC"/>
                 <a:ea typeface="Noto Sans CJK SC"/>
               </a:rPr>
-              <a:t>特点：不看代码看细心和规范</a:t>
+              <a:t>原则：不撒谎、不道歉、不恋战</a:t>
             </a:r>
           </a:p>
           <a:p>
@@ -5640,7 +5633,7 @@
                 <a:latin typeface="Noto Sans CJK SC"/>
                 <a:ea typeface="Noto Sans CJK SC"/>
               </a:rPr>
-              <a:t>市场：一线岗位多，AI行业门票</a:t>
+              <a:t>落点：马上引到岗位匹配度</a:t>
             </a:r>
           </a:p>
           <a:p>
@@ -5659,7 +5652,7 @@
                 <a:latin typeface="Noto Sans CJK SC"/>
                 <a:ea typeface="Noto Sans CJK SC"/>
               </a:rPr>
-              <a:t>跳板：1年内转质检评测运营</a:t>
+              <a:t>证据：gap期做的每件事都算数</a:t>
             </a:r>
           </a:p>
         </p:txBody>
@@ -5698,7 +5691,7 @@
                 <a:latin typeface="Noto Sans CJK SC"/>
                 <a:ea typeface="Noto Sans CJK SC"/>
               </a:rPr>
-              <a:t>19 / 33</a:t>
+              <a:t>19 / 26</a:t>
             </a:r>
           </a:p>
         </p:txBody>
@@ -6104,7 +6097,7 @@
                 <a:latin typeface="Noto Sans CJK SC"/>
                 <a:ea typeface="Noto Sans CJK SC"/>
               </a:rPr>
-              <a:t>本科学历：十个岗位全部够格</a:t>
+              <a:t>本科学历：七个岗位全部够格</a:t>
             </a:r>
           </a:p>
           <a:p>
@@ -6219,7 +6212,7 @@
                 <a:latin typeface="Noto Sans CJK SC"/>
                 <a:ea typeface="Noto Sans CJK SC"/>
               </a:rPr>
-              <a:t>02 / 33</a:t>
+              <a:t>02 / 26</a:t>
             </a:r>
           </a:p>
         </p:txBody>
@@ -6507,7 +6500,7 @@
                 <a:latin typeface="Noto Sans CJK SC"/>
                 <a:ea typeface="Noto Sans CJK SC"/>
               </a:rPr>
-              <a:t>AI 训练师：怎么入行</a:t>
+              <a:t>过来人共识：一年内gap市场能接受</a:t>
             </a:r>
           </a:p>
         </p:txBody>
@@ -6546,7 +6539,7 @@
                 <a:latin typeface="Noto Sans CJK SC"/>
                 <a:ea typeface="Noto Sans CJK SC"/>
               </a:rPr>
-              <a:t>AI 训练师：怎么入行</a:t>
+              <a:t>过来人共识：一年内gap市场能接受</a:t>
             </a:r>
           </a:p>
         </p:txBody>
@@ -6589,7 +6582,7 @@
                 <a:latin typeface="Noto Sans CJK SC"/>
                 <a:ea typeface="Noto Sans CJK SC"/>
               </a:rPr>
-              <a:t>学：大模型基础+重度用AI工具</a:t>
+              <a:t>求职市场认可一年左右的gap</a:t>
             </a:r>
           </a:p>
           <a:p>
@@ -6608,7 +6601,7 @@
                 <a:latin typeface="Noto Sans CJK SC"/>
                 <a:ea typeface="Noto Sans CJK SC"/>
               </a:rPr>
-              <a:t>练：众包平台接小任务攒手感</a:t>
+              <a:t>招聘总监：离职状态到岗更快</a:t>
             </a:r>
           </a:p>
           <a:p>
@@ -6627,7 +6620,7 @@
                 <a:latin typeface="Noto Sans CJK SC"/>
                 <a:ea typeface="Noto Sans CJK SC"/>
               </a:rPr>
-              <a:t>作品：50条评分+20个badcase</a:t>
+              <a:t>HR担心的是稳定性不是空窗</a:t>
             </a:r>
           </a:p>
           <a:p>
@@ -6646,7 +6639,7 @@
                 <a:latin typeface="Noto Sans CJK SC"/>
                 <a:ea typeface="Noto Sans CJK SC"/>
               </a:rPr>
-              <a:t>投递：数据服务商+大模型公司</a:t>
+              <a:t>易接受的回答：学习调整突破</a:t>
             </a:r>
           </a:p>
           <a:p>
@@ -6665,7 +6658,7 @@
                 <a:latin typeface="Noto Sans CJK SC"/>
                 <a:ea typeface="Noto Sans CJK SC"/>
               </a:rPr>
-              <a:t>简历：突出细心规范零差错</a:t>
+              <a:t>你的gap半年在安全区内</a:t>
             </a:r>
           </a:p>
           <a:p>
@@ -6684,7 +6677,7 @@
                 <a:latin typeface="Noto Sans CJK SC"/>
                 <a:ea typeface="Noto Sans CJK SC"/>
               </a:rPr>
-              <a:t>警告：纯标注天花板低早谋转型</a:t>
+              <a:t>来源：牛客网+知乎过来人帖</a:t>
             </a:r>
           </a:p>
         </p:txBody>
@@ -6723,7 +6716,7 @@
                 <a:latin typeface="Noto Sans CJK SC"/>
                 <a:ea typeface="Noto Sans CJK SC"/>
               </a:rPr>
-              <a:t>20 / 33</a:t>
+              <a:t>20 / 26</a:t>
             </a:r>
           </a:p>
         </p:txBody>
@@ -7047,7 +7040,7 @@
                 <a:latin typeface="Noto Sans CJK SC"/>
                 <a:ea typeface="Noto Sans CJK SC"/>
               </a:rPr>
-              <a:t>AIGC 内容运营：会AI的内容人</a:t>
+              <a:t>面试三坑：过度解释最败好感</a:t>
             </a:r>
           </a:p>
         </p:txBody>
@@ -7086,7 +7079,7 @@
                 <a:latin typeface="Noto Sans CJK SC"/>
                 <a:ea typeface="Noto Sans CJK SC"/>
               </a:rPr>
-              <a:t>AIGC 内容运营：会AI的内容人</a:t>
+              <a:t>面试三坑：过度解释最败好感</a:t>
             </a:r>
           </a:p>
         </p:txBody>
@@ -7129,7 +7122,7 @@
                 <a:latin typeface="Noto Sans CJK SC"/>
                 <a:ea typeface="Noto Sans CJK SC"/>
               </a:rPr>
-              <a:t>定位：用AI批量做内容的新媒体</a:t>
+              <a:t>坑一：过度解释越说越像心虚</a:t>
             </a:r>
           </a:p>
           <a:p>
@@ -7148,7 +7141,7 @@
                 <a:latin typeface="Noto Sans CJK SC"/>
                 <a:ea typeface="Noto Sans CJK SC"/>
               </a:rPr>
-              <a:t>工作流：人选题，AI初稿，人精修</a:t>
+              <a:t>坑二：贬低前司显得难相处</a:t>
             </a:r>
           </a:p>
           <a:p>
@@ -7167,7 +7160,7 @@
                 <a:latin typeface="Noto Sans CJK SC"/>
                 <a:ea typeface="Noto Sans CJK SC"/>
               </a:rPr>
-              <a:t>工具：豆包Kimi即梦剪映AI</a:t>
+              <a:t>坑三：消极表达等于自曝状态差</a:t>
             </a:r>
           </a:p>
           <a:p>
@@ -7186,7 +7179,7 @@
                 <a:latin typeface="Noto Sans CJK SC"/>
                 <a:ea typeface="Noto Sans CJK SC"/>
               </a:rPr>
-              <a:t>优势：产能是普通运营3-5倍</a:t>
+              <a:t>正确第一句：原因一句带过</a:t>
             </a:r>
           </a:p>
           <a:p>
@@ -7205,7 +7198,7 @@
                 <a:latin typeface="Noto Sans CJK SC"/>
                 <a:ea typeface="Noto Sans CJK SC"/>
               </a:rPr>
-              <a:t>关键：内容判断力+提示词能力</a:t>
+              <a:t>第二句：讲空窗期学了做了什么</a:t>
             </a:r>
           </a:p>
           <a:p>
@@ -7224,7 +7217,7 @@
                 <a:latin typeface="Noto Sans CJK SC"/>
                 <a:ea typeface="Noto Sans CJK SC"/>
               </a:rPr>
-              <a:t>投递：以新媒体+AI技能入行</a:t>
+              <a:t>第三句：拉回当下状态好能到岗</a:t>
             </a:r>
           </a:p>
         </p:txBody>
@@ -7263,7 +7256,7 @@
                 <a:latin typeface="Noto Sans CJK SC"/>
                 <a:ea typeface="Noto Sans CJK SC"/>
               </a:rPr>
-              <a:t>21 / 33</a:t>
+              <a:t>21 / 26</a:t>
             </a:r>
           </a:p>
         </p:txBody>
@@ -7587,7 +7580,7 @@
                 <a:latin typeface="Noto Sans CJK SC"/>
                 <a:ea typeface="Noto Sans CJK SC"/>
               </a:rPr>
-              <a:t>AIGC 内容运营：学法路线</a:t>
+              <a:t>真实时间线：熬过崩溃期就上岸</a:t>
             </a:r>
           </a:p>
         </p:txBody>
@@ -7626,7 +7619,7 @@
                 <a:latin typeface="Noto Sans CJK SC"/>
                 <a:ea typeface="Noto Sans CJK SC"/>
               </a:rPr>
-              <a:t>AIGC 内容运营：学法路线</a:t>
+              <a:t>真实时间线：熬过崩溃期就上岸</a:t>
             </a:r>
           </a:p>
         </p:txBody>
@@ -7669,7 +7662,7 @@
                 <a:latin typeface="Noto Sans CJK SC"/>
                 <a:ea typeface="Noto Sans CJK SC"/>
               </a:rPr>
-              <a:t>第1-2周：深度使用3个写作AI</a:t>
+              <a:t>真实案例：gap一年五个月上岸</a:t>
             </a:r>
           </a:p>
           <a:p>
@@ -7688,7 +7681,7 @@
                 <a:latin typeface="Noto Sans CJK SC"/>
                 <a:ea typeface="Noto Sans CJK SC"/>
               </a:rPr>
-              <a:t>第3周：绘图AI出图30张</a:t>
+              <a:t>节奏：心理建设到offer五个月</a:t>
             </a:r>
           </a:p>
           <a:p>
@@ -7707,7 +7700,7 @@
                 <a:latin typeface="Noto Sans CJK SC"/>
                 <a:ea typeface="Noto Sans CJK SC"/>
               </a:rPr>
-              <a:t>第4-6周：AI辅助跑账号30天</a:t>
+              <a:t>每天专注3-4小时投20+岗位</a:t>
             </a:r>
           </a:p>
           <a:p>
@@ -7726,7 +7719,7 @@
                 <a:latin typeface="Noto Sans CJK SC"/>
                 <a:ea typeface="Noto Sans CJK SC"/>
               </a:rPr>
-              <a:t>作品：AI内容工作流SOP</a:t>
+              <a:t>转折：offer来自朋友内推</a:t>
             </a:r>
           </a:p>
           <a:p>
@@ -7745,7 +7738,7 @@
                 <a:latin typeface="Noto Sans CJK SC"/>
                 <a:ea typeface="Noto Sans CJK SC"/>
               </a:rPr>
-              <a:t>简历：AI提效要量化写出来</a:t>
+              <a:t>心态：第三个月最容易崩溃</a:t>
             </a:r>
           </a:p>
           <a:p>
@@ -7764,7 +7757,7 @@
                 <a:latin typeface="Noto Sans CJK SC"/>
                 <a:ea typeface="Noto Sans CJK SC"/>
               </a:rPr>
-              <a:t>面试：带提示词库和作品</a:t>
+              <a:t>解药：看到更长gap的成功者</a:t>
             </a:r>
           </a:p>
         </p:txBody>
@@ -7803,7 +7796,7 @@
                 <a:latin typeface="Noto Sans CJK SC"/>
                 <a:ea typeface="Noto Sans CJK SC"/>
               </a:rPr>
-              <a:t>22 / 33</a:t>
+              <a:t>22 / 26</a:t>
             </a:r>
           </a:p>
         </p:txBody>
@@ -8127,7 +8120,7 @@
                 <a:latin typeface="Noto Sans CJK SC"/>
                 <a:ea typeface="Noto Sans CJK SC"/>
               </a:rPr>
-              <a:t>智能客服运营：AI客服训练师</a:t>
+              <a:t>12周行动计划</a:t>
             </a:r>
           </a:p>
         </p:txBody>
@@ -8166,7 +8159,7 @@
                 <a:latin typeface="Noto Sans CJK SC"/>
                 <a:ea typeface="Noto Sans CJK SC"/>
               </a:rPr>
-              <a:t>智能客服运营：AI客服训练师</a:t>
+              <a:t>12周行动计划</a:t>
             </a:r>
           </a:p>
         </p:txBody>
@@ -8209,7 +8202,7 @@
                 <a:latin typeface="Noto Sans CJK SC"/>
                 <a:ea typeface="Noto Sans CJK SC"/>
               </a:rPr>
-              <a:t>定位：教AI客服干活的人</a:t>
+              <a:t>第1周：定方向+看100条JD</a:t>
             </a:r>
           </a:p>
           <a:p>
@@ -8228,7 +8221,7 @@
                 <a:latin typeface="Noto Sans CJK SC"/>
                 <a:ea typeface="Noto Sans CJK SC"/>
               </a:rPr>
-              <a:t>每天：知识库维护+badcase分析</a:t>
+              <a:t>第2到6周：每天学3-4小时</a:t>
             </a:r>
           </a:p>
           <a:p>
@@ -8247,7 +8240,7 @@
                 <a:latin typeface="Noto Sans CJK SC"/>
                 <a:ea typeface="Noto Sans CJK SC"/>
               </a:rPr>
-              <a:t>核心：业务话术拆成问答对</a:t>
+              <a:t>第5周起：改简历+小量试投</a:t>
             </a:r>
           </a:p>
           <a:p>
@@ -8266,7 +8259,7 @@
                 <a:latin typeface="Noto Sans CJK SC"/>
                 <a:ea typeface="Noto Sans CJK SC"/>
               </a:rPr>
-              <a:t>指标：解决率转人工率满意度</a:t>
+              <a:t>第6到12周：每周投10-20个</a:t>
             </a:r>
           </a:p>
           <a:p>
@@ -8285,7 +8278,7 @@
                 <a:latin typeface="Noto Sans CJK SC"/>
                 <a:ea typeface="Noto Sans CJK SC"/>
               </a:rPr>
-              <a:t>行业：电商金融教育标配岗</a:t>
+              <a:t>每场面试后：写三行复盘</a:t>
             </a:r>
           </a:p>
           <a:p>
@@ -8304,7 +8297,7 @@
                 <a:latin typeface="Noto Sans CJK SC"/>
                 <a:ea typeface="Noto Sans CJK SC"/>
               </a:rPr>
-              <a:t>适合：做过客服电商社群的人</a:t>
+              <a:t>心法：先拿2-3个offer再挑</a:t>
             </a:r>
           </a:p>
         </p:txBody>
@@ -8343,7 +8336,7 @@
                 <a:latin typeface="Noto Sans CJK SC"/>
                 <a:ea typeface="Noto Sans CJK SC"/>
               </a:rPr>
-              <a:t>23 / 33</a:t>
+              <a:t>23 / 26</a:t>
             </a:r>
           </a:p>
         </p:txBody>
@@ -8667,7 +8660,7 @@
                 <a:latin typeface="Noto Sans CJK SC"/>
                 <a:ea typeface="Noto Sans CJK SC"/>
               </a:rPr>
-              <a:t>智能客服运营：学法路线</a:t>
+              <a:t>避坑清单</a:t>
             </a:r>
           </a:p>
         </p:txBody>
@@ -8706,7 +8699,7 @@
                 <a:latin typeface="Noto Sans CJK SC"/>
                 <a:ea typeface="Noto Sans CJK SC"/>
               </a:rPr>
-              <a:t>智能客服运营：学法路线</a:t>
+              <a:t>避坑清单</a:t>
             </a:r>
           </a:p>
         </p:txBody>
@@ -8749,7 +8742,7 @@
                 <a:latin typeface="Noto Sans CJK SC"/>
                 <a:ea typeface="Noto Sans CJK SC"/>
               </a:rPr>
-              <a:t>第1周：拆解5个大厂智能客服</a:t>
+              <a:t>培训贷：包就业等于贷2-3万</a:t>
             </a:r>
           </a:p>
           <a:p>
@@ -8768,7 +8761,7 @@
                 <a:latin typeface="Noto Sans CJK SC"/>
                 <a:ea typeface="Noto Sans CJK SC"/>
               </a:rPr>
-              <a:t>第2周：学知识库结构设计</a:t>
+              <a:t>入职先交钱的岗位都是违法</a:t>
             </a:r>
           </a:p>
           <a:p>
@@ -8787,7 +8780,7 @@
                 <a:latin typeface="Noto Sans CJK SC"/>
                 <a:ea typeface="Noto Sans CJK SC"/>
               </a:rPr>
-              <a:t>第3-4周：自建50条FAQ机器人</a:t>
+              <a:t>刷单、点赞员兼职全是诈骗</a:t>
             </a:r>
           </a:p>
           <a:p>
@@ -8806,7 +8799,7 @@
                 <a:latin typeface="Noto Sans CJK SC"/>
                 <a:ea typeface="Noto Sans CJK SC"/>
               </a:rPr>
-              <a:t>作品：拆解报告+机器人demo</a:t>
+              <a:t>便宜求职课发网盘链接是套路</a:t>
             </a:r>
           </a:p>
           <a:p>
@@ -8825,7 +8818,7 @@
                 <a:latin typeface="Noto Sans CJK SC"/>
                 <a:ea typeface="Noto Sans CJK SC"/>
               </a:rPr>
-              <a:t>简历：客服经历直接强相关</a:t>
+              <a:t>无经验月入两万要高度警惕</a:t>
             </a:r>
           </a:p>
           <a:p>
@@ -8844,7 +8837,26 @@
                 <a:latin typeface="Noto Sans CJK SC"/>
                 <a:ea typeface="Noto Sans CJK SC"/>
               </a:rPr>
-              <a:t>面试：讲清一个badcase怎么修</a:t>
+              <a:t>试用期不缴社保可依法维权</a:t>
+            </a:r>
+          </a:p>
+          <a:p>
+            <a:pPr marL="285750" indent="-285750">
+              <a:spcAft>
+                <a:spcPts val="600"/>
+              </a:spcAft>
+              <a:buFont typeface="Arial" panose="020B0604020202020204"/>
+              <a:buChar char="•"/>
+            </a:pPr>
+            <a:r>
+              <a:rPr lang="zh-CN" sz="2000" b="0" dirty="0">
+                <a:solidFill>
+                  <a:srgbClr val="3B2F2A"/>
+                </a:solidFill>
+                <a:latin typeface="Noto Sans CJK SC"/>
+                <a:ea typeface="Noto Sans CJK SC"/>
+              </a:rPr>
+              <a:t>境外高薪邀约绝对不出境</a:t>
             </a:r>
           </a:p>
         </p:txBody>
@@ -8883,7 +8895,7 @@
                 <a:latin typeface="Noto Sans CJK SC"/>
                 <a:ea typeface="Noto Sans CJK SC"/>
               </a:rPr>
-              <a:t>24 / 33</a:t>
+              <a:t>24 / 26</a:t>
             </a:r>
           </a:p>
         </p:txBody>
@@ -9120,6 +9132,42 @@
                       </p:childTnLst>
                     </p:cTn>
                   </p:par>
+                  <p:par>
+                    <p:cTn id="21" fill="hold">
+                      <p:stCondLst>
+                        <p:cond delay="indefinite"/>
+                      </p:stCondLst>
+                      <p:childTnLst>
+                        <p:par>
+                          <p:cTn id="22" presetID="1" presetClass="entr" presetSubtype="0" fill="hold" grpId="0" nodeType="clickEffect">
+                            <p:stCondLst>
+                              <p:cond delay="0"/>
+                            </p:stCondLst>
+                            <p:childTnLst>
+                              <p:set>
+                                <p:cBhvr>
+                                  <p:cTn id="23" dur="1" fill="hold">
+                                    <p:stCondLst>
+                                      <p:cond delay="0"/>
+                                    </p:stCondLst>
+                                  </p:cTn>
+                                  <p:tgtEl>
+                                    <p:spTgt spid="243"/>
+                                  </p:tgtEl>
+                                  <p:attrNameLst>
+                                    <p:attrName>style.visibility</p:attrName>
+                                  </p:attrNameLst>
+                                </p:cBhvr>
+                                <p:to>
+                                  <p:strVal val="visible"/>
+                                </p:to>
+                              </p:set>
+                            </p:childTnLst>
+                          </p:cTn>
+                        </p:par>
+                      </p:childTnLst>
+                    </p:cTn>
+                  </p:par>
                 </p:childTnLst>
               </p:cTn>
               <p:prevCondLst>
@@ -9207,7 +9255,7 @@
                 <a:latin typeface="Noto Sans CJK SC"/>
                 <a:ea typeface="Noto Sans CJK SC"/>
               </a:rPr>
-              <a:t>简历通用公式：STAR加量化</a:t>
+              <a:t>今天就开始的三件事</a:t>
             </a:r>
           </a:p>
         </p:txBody>
@@ -9246,7 +9294,7 @@
                 <a:latin typeface="Noto Sans CJK SC"/>
                 <a:ea typeface="Noto Sans CJK SC"/>
               </a:rPr>
-              <a:t>简历通用公式：STAR加量化</a:t>
+              <a:t>今天就开始的三件事</a:t>
             </a:r>
           </a:p>
         </p:txBody>
@@ -9289,7 +9337,7 @@
                 <a:latin typeface="Noto Sans CJK SC"/>
                 <a:ea typeface="Noto Sans CJK SC"/>
               </a:rPr>
-              <a:t>S情境：什么背景下什么问题</a:t>
+              <a:t>今晚：下载BOSS直聘看100条JD</a:t>
             </a:r>
           </a:p>
           <a:p>
@@ -9308,7 +9356,7 @@
                 <a:latin typeface="Noto Sans CJK SC"/>
                 <a:ea typeface="Noto Sans CJK SC"/>
               </a:rPr>
-              <a:t>T任务：你负责的具体目标</a:t>
+              <a:t>周末：选出1个主攻+1个备胎</a:t>
             </a:r>
           </a:p>
           <a:p>
@@ -9327,7 +9375,7 @@
                 <a:latin typeface="Noto Sans CJK SC"/>
                 <a:ea typeface="Noto Sans CJK SC"/>
               </a:rPr>
-              <a:t>A行动：用了什么方法和工具</a:t>
+              <a:t>下周一：开始每天3小时学习</a:t>
             </a:r>
           </a:p>
           <a:p>
@@ -9346,45 +9394,7 @@
                 <a:latin typeface="Noto Sans CJK SC"/>
                 <a:ea typeface="Noto Sans CJK SC"/>
               </a:rPr>
-              <a:t>R结果：数字说话拒绝形容词</a:t>
-            </a:r>
-          </a:p>
-          <a:p>
-            <a:pPr marL="285750" indent="-285750">
-              <a:spcAft>
-                <a:spcPts val="600"/>
-              </a:spcAft>
-              <a:buFont typeface="Arial" panose="020B0604020202020204"/>
-              <a:buChar char="•"/>
-            </a:pPr>
-            <a:r>
-              <a:rPr lang="zh-CN" sz="2000" b="0" dirty="0">
-                <a:solidFill>
-                  <a:srgbClr val="3B2F2A"/>
-                </a:solidFill>
-                <a:latin typeface="Noto Sans CJK SC"/>
-                <a:ea typeface="Noto Sans CJK SC"/>
-              </a:rPr>
-              <a:t>反例：负责公众号日常运营</a:t>
-            </a:r>
-          </a:p>
-          <a:p>
-            <a:pPr marL="285750" indent="-285750">
-              <a:spcAft>
-                <a:spcPts val="600"/>
-              </a:spcAft>
-              <a:buFont typeface="Arial" panose="020B0604020202020204"/>
-              <a:buChar char="•"/>
-            </a:pPr>
-            <a:r>
-              <a:rPr lang="zh-CN" sz="2000" b="0" dirty="0">
-                <a:solidFill>
-                  <a:srgbClr val="3B2F2A"/>
-                </a:solidFill>
-                <a:latin typeface="Noto Sans CJK SC"/>
-                <a:ea typeface="Noto Sans CJK SC"/>
-              </a:rPr>
-              <a:t>正例：3个月打开率2%提到5%</a:t>
+              <a:t>记住：行动是迷茫唯一的解药</a:t>
             </a:r>
           </a:p>
         </p:txBody>
@@ -9423,7 +9433,7 @@
                 <a:latin typeface="Noto Sans CJK SC"/>
                 <a:ea typeface="Noto Sans CJK SC"/>
               </a:rPr>
-              <a:t>25 / 33</a:t>
+              <a:t>25 / 26</a:t>
             </a:r>
           </a:p>
         </p:txBody>
@@ -9588,78 +9598,6 @@
                       </p:childTnLst>
                     </p:cTn>
                   </p:par>
-                  <p:par>
-                    <p:cTn id="15" fill="hold">
-                      <p:stCondLst>
-                        <p:cond delay="indefinite"/>
-                      </p:stCondLst>
-                      <p:childTnLst>
-                        <p:par>
-                          <p:cTn id="16" presetID="1" presetClass="entr" presetSubtype="0" fill="hold" grpId="0" nodeType="clickEffect">
-                            <p:stCondLst>
-                              <p:cond delay="0"/>
-                            </p:stCondLst>
-                            <p:childTnLst>
-                              <p:set>
-                                <p:cBhvr>
-                                  <p:cTn id="17" dur="1" fill="hold">
-                                    <p:stCondLst>
-                                      <p:cond delay="0"/>
-                                    </p:stCondLst>
-                                  </p:cTn>
-                                  <p:tgtEl>
-                                    <p:spTgt spid="253"/>
-                                  </p:tgtEl>
-                                  <p:attrNameLst>
-                                    <p:attrName>style.visibility</p:attrName>
-                                  </p:attrNameLst>
-                                </p:cBhvr>
-                                <p:to>
-                                  <p:strVal val="visible"/>
-                                </p:to>
-                              </p:set>
-                            </p:childTnLst>
-                          </p:cTn>
-                        </p:par>
-                      </p:childTnLst>
-                    </p:cTn>
-                  </p:par>
-                  <p:par>
-                    <p:cTn id="18" fill="hold">
-                      <p:stCondLst>
-                        <p:cond delay="indefinite"/>
-                      </p:stCondLst>
-                      <p:childTnLst>
-                        <p:par>
-                          <p:cTn id="19" presetID="1" presetClass="entr" presetSubtype="0" fill="hold" grpId="0" nodeType="clickEffect">
-                            <p:stCondLst>
-                              <p:cond delay="0"/>
-                            </p:stCondLst>
-                            <p:childTnLst>
-                              <p:set>
-                                <p:cBhvr>
-                                  <p:cTn id="20" dur="1" fill="hold">
-                                    <p:stCondLst>
-                                      <p:cond delay="0"/>
-                                    </p:stCondLst>
-                                  </p:cTn>
-                                  <p:tgtEl>
-                                    <p:spTgt spid="253"/>
-                                  </p:tgtEl>
-                                  <p:attrNameLst>
-                                    <p:attrName>style.visibility</p:attrName>
-                                  </p:attrNameLst>
-                                </p:cBhvr>
-                                <p:to>
-                                  <p:strVal val="visible"/>
-                                </p:to>
-                              </p:set>
-                            </p:childTnLst>
-                          </p:cTn>
-                        </p:par>
-                      </p:childTnLst>
-                    </p:cTn>
-                  </p:par>
                 </p:childTnLst>
               </p:cTn>
               <p:prevCondLst>
@@ -9715,14 +9653,14 @@
       </p:grpSpPr>
       <p:sp>
         <p:nvSpPr>
-          <p:cNvPr id="261" name="Kicker"/>
+          <p:cNvPr id="261" name="Title"/>
           <p:cNvSpPr txBox="1"/>
           <p:nvPr/>
         </p:nvSpPr>
         <p:spPr>
           <a:xfrm>
-            <a:off x="900000" y="420000"/>
-            <a:ext cx="10000000" cy="420000"/>
+            <a:off x="1050000" y="2300000"/>
+            <a:ext cx="10200000" cy="1700000"/>
           </a:xfrm>
           <a:prstGeom prst="rect">
             <a:avLst/>
@@ -9736,32 +9674,32 @@
           </a:bodyPr>
           <a:lstStyle/>
           <a:p>
-            <a:pPr>
+            <a:pPr algn="ctr">
               <a:buNone/>
             </a:pPr>
             <a:r>
-              <a:rPr lang="zh-CN" sz="1400" b="1" dirty="0">
-                <a:solidFill>
-                  <a:srgbClr val="E58A2F"/>
-                </a:solidFill>
-                <a:latin typeface="Noto Sans CJK SC"/>
-                <a:ea typeface="Noto Sans CJK SC"/>
-              </a:rPr>
-              <a:t>Gap半年话术：30秒带过</a:t>
+              <a:rPr lang="zh-CN" sz="5200" b="1" dirty="0">
+                <a:solidFill>
+                  <a:srgbClr val="3B2F2A"/>
+                </a:solidFill>
+                <a:latin typeface="Noto Sans CJK SC"/>
+                <a:ea typeface="Noto Sans CJK SC"/>
+              </a:rPr>
+              <a:t>谢谢</a:t>
             </a:r>
           </a:p>
         </p:txBody>
       </p:sp>
       <p:sp>
         <p:nvSpPr>
-          <p:cNvPr id="262" name="Title"/>
+          <p:cNvPr id="262" name="Subtitle"/>
           <p:cNvSpPr txBox="1"/>
           <p:nvPr/>
         </p:nvSpPr>
         <p:spPr>
           <a:xfrm>
-            <a:off x="900000" y="920000"/>
-            <a:ext cx="10300000" cy="800000"/>
+            <a:off x="1050000" y="4200000"/>
+            <a:ext cx="10200000" cy="900000"/>
           </a:xfrm>
           <a:prstGeom prst="rect">
             <a:avLst/>
@@ -9775,156 +9713,18 @@
           </a:bodyPr>
           <a:lstStyle/>
           <a:p>
-            <a:pPr>
+            <a:pPr algn="ctr">
               <a:buNone/>
             </a:pPr>
             <a:r>
-              <a:rPr lang="zh-CN" sz="3400" b="1" dirty="0">
-                <a:solidFill>
-                  <a:srgbClr val="3B2F2A"/>
-                </a:solidFill>
-                <a:latin typeface="Noto Sans CJK SC"/>
-                <a:ea typeface="Noto Sans CJK SC"/>
-              </a:rPr>
-              <a:t>Gap半年话术：30秒带过</a:t>
-            </a:r>
-          </a:p>
-        </p:txBody>
-      </p:sp>
-      <p:sp>
-        <p:nvSpPr>
-          <p:cNvPr id="263" name="Body"/>
-          <p:cNvSpPr txBox="1"/>
-          <p:nvPr/>
-        </p:nvSpPr>
-        <p:spPr>
-          <a:xfrm>
-            <a:off x="1050000" y="1850000"/>
-            <a:ext cx="10100000" cy="4500000"/>
-          </a:xfrm>
-          <a:prstGeom prst="rect">
-            <a:avLst/>
-          </a:prstGeom>
-          <a:noFill/>
-          <a:ln/>
-        </p:spPr>
-        <p:txBody>
-          <a:bodyPr wrap="square" rtlCol="0">
-            <a:normAutofit/>
-          </a:bodyPr>
-          <a:lstStyle/>
-          <a:p>
-            <a:pPr marL="285750" indent="-285750">
-              <a:spcAft>
-                <a:spcPts val="600"/>
-              </a:spcAft>
-              <a:buFont typeface="Arial" panose="020B0604020202020204"/>
-              <a:buChar char="•"/>
-            </a:pPr>
-            <a:r>
-              <a:rPr lang="zh-CN" sz="2000" b="0" dirty="0">
-                <a:solidFill>
-                  <a:srgbClr val="3B2F2A"/>
-                </a:solidFill>
-                <a:latin typeface="Noto Sans CJK SC"/>
-                <a:ea typeface="Noto Sans CJK SC"/>
-              </a:rPr>
-              <a:t>考证版：系统学习已产出成果</a:t>
-            </a:r>
-          </a:p>
-          <a:p>
-            <a:pPr marL="285750" indent="-285750">
-              <a:spcAft>
-                <a:spcPts val="600"/>
-              </a:spcAft>
-              <a:buFont typeface="Arial" panose="020B0604020202020204"/>
-              <a:buChar char="•"/>
-            </a:pPr>
-            <a:r>
-              <a:rPr lang="zh-CN" sz="2000" b="0" dirty="0">
-                <a:solidFill>
-                  <a:srgbClr val="3B2F2A"/>
-                </a:solidFill>
-                <a:latin typeface="Noto Sans CJK SC"/>
-                <a:ea typeface="Noto Sans CJK SC"/>
-              </a:rPr>
-              <a:t>家庭版：事务办妥可随时到岗</a:t>
-            </a:r>
-          </a:p>
-          <a:p>
-            <a:pPr marL="285750" indent="-285750">
-              <a:spcAft>
-                <a:spcPts val="600"/>
-              </a:spcAft>
-              <a:buFont typeface="Arial" panose="020B0604020202020204"/>
-              <a:buChar char="•"/>
-            </a:pPr>
-            <a:r>
-              <a:rPr lang="zh-CN" sz="2000" b="0" dirty="0">
-                <a:solidFill>
-                  <a:srgbClr val="3B2F2A"/>
-                </a:solidFill>
-                <a:latin typeface="Noto Sans CJK SC"/>
-                <a:ea typeface="Noto Sans CJK SC"/>
-              </a:rPr>
-              <a:t>休整版：状态恢复并补了技能</a:t>
-            </a:r>
-          </a:p>
-          <a:p>
-            <a:pPr marL="285750" indent="-285750">
-              <a:spcAft>
-                <a:spcPts val="600"/>
-              </a:spcAft>
-              <a:buFont typeface="Arial" panose="020B0604020202020204"/>
-              <a:buChar char="•"/>
-            </a:pPr>
-            <a:r>
-              <a:rPr lang="zh-CN" sz="2000" b="0" dirty="0">
-                <a:solidFill>
-                  <a:srgbClr val="3B2F2A"/>
-                </a:solidFill>
-                <a:latin typeface="Noto Sans CJK SC"/>
-                <a:ea typeface="Noto Sans CJK SC"/>
-              </a:rPr>
-              <a:t>原则：不撒谎、不道歉、不恋战</a:t>
-            </a:r>
-          </a:p>
-          <a:p>
-            <a:pPr marL="285750" indent="-285750">
-              <a:spcAft>
-                <a:spcPts val="600"/>
-              </a:spcAft>
-              <a:buFont typeface="Arial" panose="020B0604020202020204"/>
-              <a:buChar char="•"/>
-            </a:pPr>
-            <a:r>
-              <a:rPr lang="zh-CN" sz="2000" b="0" dirty="0">
-                <a:solidFill>
-                  <a:srgbClr val="3B2F2A"/>
-                </a:solidFill>
-                <a:latin typeface="Noto Sans CJK SC"/>
-                <a:ea typeface="Noto Sans CJK SC"/>
-              </a:rPr>
-              <a:t>落点：马上引到岗位匹配度</a:t>
-            </a:r>
-          </a:p>
-          <a:p>
-            <a:pPr marL="285750" indent="-285750">
-              <a:spcAft>
-                <a:spcPts val="600"/>
-              </a:spcAft>
-              <a:buFont typeface="Arial" panose="020B0604020202020204"/>
-              <a:buChar char="•"/>
-            </a:pPr>
-            <a:r>
-              <a:rPr lang="zh-CN" sz="2000" b="0" dirty="0">
-                <a:solidFill>
-                  <a:srgbClr val="3B2F2A"/>
-                </a:solidFill>
-                <a:latin typeface="Noto Sans CJK SC"/>
-                <a:ea typeface="Noto Sans CJK SC"/>
-              </a:rPr>
-              <a:t>证据：gap期做的每件事都算数</a:t>
+              <a:rPr lang="zh-CN" sz="2000" b="1" dirty="0">
+                <a:solidFill>
+                  <a:srgbClr val="E58A2F"/>
+                </a:solidFill>
+                <a:latin typeface="Noto Sans CJK SC"/>
+                <a:ea typeface="Noto Sans CJK SC"/>
+              </a:rPr>
+              <a:t>女生找工作七大岗位全攻略</a:t>
             </a:r>
           </a:p>
         </p:txBody>
@@ -9963,7 +9763,7 @@
                 <a:latin typeface="Noto Sans CJK SC"/>
                 <a:ea typeface="Noto Sans CJK SC"/>
               </a:rPr>
-              <a:t>26 / 33</a:t>
+              <a:t>26 / 26</a:t>
             </a:r>
           </a:p>
         </p:txBody>
@@ -9976,1875 +9776,6 @@
   <p:transition spd="med">
     <p:fade/>
   </p:transition>
-  <p:timing>
-    <p:tnLst>
-      <p:par>
-        <p:cTn id="1" dur="indefinite" restart="never" nodeType="tmRoot">
-          <p:childTnLst>
-            <p:seq concurrent="1" nextAc="seek">
-              <p:cTn id="2" dur="indefinite" nodeType="mainSeq">
-                <p:childTnLst>
-                  <p:par>
-                    <p:cTn id="3" fill="hold">
-                      <p:stCondLst>
-                        <p:cond delay="indefinite"/>
-                      </p:stCondLst>
-                      <p:childTnLst>
-                        <p:par>
-                          <p:cTn id="4" presetID="1" presetClass="entr" presetSubtype="0" fill="hold" grpId="0" nodeType="clickEffect">
-                            <p:stCondLst>
-                              <p:cond delay="0"/>
-                            </p:stCondLst>
-                            <p:childTnLst>
-                              <p:set>
-                                <p:cBhvr>
-                                  <p:cTn id="5" dur="1" fill="hold">
-                                    <p:stCondLst>
-                                      <p:cond delay="0"/>
-                                    </p:stCondLst>
-                                  </p:cTn>
-                                  <p:tgtEl>
-                                    <p:spTgt spid="263"/>
-                                  </p:tgtEl>
-                                  <p:attrNameLst>
-                                    <p:attrName>style.visibility</p:attrName>
-                                  </p:attrNameLst>
-                                </p:cBhvr>
-                                <p:to>
-                                  <p:strVal val="visible"/>
-                                </p:to>
-                              </p:set>
-                            </p:childTnLst>
-                          </p:cTn>
-                        </p:par>
-                      </p:childTnLst>
-                    </p:cTn>
-                  </p:par>
-                  <p:par>
-                    <p:cTn id="6" fill="hold">
-                      <p:stCondLst>
-                        <p:cond delay="indefinite"/>
-                      </p:stCondLst>
-                      <p:childTnLst>
-                        <p:par>
-                          <p:cTn id="7" presetID="1" presetClass="entr" presetSubtype="0" fill="hold" grpId="0" nodeType="clickEffect">
-                            <p:stCondLst>
-                              <p:cond delay="0"/>
-                            </p:stCondLst>
-                            <p:childTnLst>
-                              <p:set>
-                                <p:cBhvr>
-                                  <p:cTn id="8" dur="1" fill="hold">
-                                    <p:stCondLst>
-                                      <p:cond delay="0"/>
-                                    </p:stCondLst>
-                                  </p:cTn>
-                                  <p:tgtEl>
-                                    <p:spTgt spid="263"/>
-                                  </p:tgtEl>
-                                  <p:attrNameLst>
-                                    <p:attrName>style.visibility</p:attrName>
-                                  </p:attrNameLst>
-                                </p:cBhvr>
-                                <p:to>
-                                  <p:strVal val="visible"/>
-                                </p:to>
-                              </p:set>
-                            </p:childTnLst>
-                          </p:cTn>
-                        </p:par>
-                      </p:childTnLst>
-                    </p:cTn>
-                  </p:par>
-                  <p:par>
-                    <p:cTn id="9" fill="hold">
-                      <p:stCondLst>
-                        <p:cond delay="indefinite"/>
-                      </p:stCondLst>
-                      <p:childTnLst>
-                        <p:par>
-                          <p:cTn id="10" presetID="1" presetClass="entr" presetSubtype="0" fill="hold" grpId="0" nodeType="clickEffect">
-                            <p:stCondLst>
-                              <p:cond delay="0"/>
-                            </p:stCondLst>
-                            <p:childTnLst>
-                              <p:set>
-                                <p:cBhvr>
-                                  <p:cTn id="11" dur="1" fill="hold">
-                                    <p:stCondLst>
-                                      <p:cond delay="0"/>
-                                    </p:stCondLst>
-                                  </p:cTn>
-                                  <p:tgtEl>
-                                    <p:spTgt spid="263"/>
-                                  </p:tgtEl>
-                                  <p:attrNameLst>
-                                    <p:attrName>style.visibility</p:attrName>
-                                  </p:attrNameLst>
-                                </p:cBhvr>
-                                <p:to>
-                                  <p:strVal val="visible"/>
-                                </p:to>
-                              </p:set>
-                            </p:childTnLst>
-                          </p:cTn>
-                        </p:par>
-                      </p:childTnLst>
-                    </p:cTn>
-                  </p:par>
-                  <p:par>
-                    <p:cTn id="12" fill="hold">
-                      <p:stCondLst>
-                        <p:cond delay="indefinite"/>
-                      </p:stCondLst>
-                      <p:childTnLst>
-                        <p:par>
-                          <p:cTn id="13" presetID="1" presetClass="entr" presetSubtype="0" fill="hold" grpId="0" nodeType="clickEffect">
-                            <p:stCondLst>
-                              <p:cond delay="0"/>
-                            </p:stCondLst>
-                            <p:childTnLst>
-                              <p:set>
-                                <p:cBhvr>
-                                  <p:cTn id="14" dur="1" fill="hold">
-                                    <p:stCondLst>
-                                      <p:cond delay="0"/>
-                                    </p:stCondLst>
-                                  </p:cTn>
-                                  <p:tgtEl>
-                                    <p:spTgt spid="263"/>
-                                  </p:tgtEl>
-                                  <p:attrNameLst>
-                                    <p:attrName>style.visibility</p:attrName>
-                                  </p:attrNameLst>
-                                </p:cBhvr>
-                                <p:to>
-                                  <p:strVal val="visible"/>
-                                </p:to>
-                              </p:set>
-                            </p:childTnLst>
-                          </p:cTn>
-                        </p:par>
-                      </p:childTnLst>
-                    </p:cTn>
-                  </p:par>
-                  <p:par>
-                    <p:cTn id="15" fill="hold">
-                      <p:stCondLst>
-                        <p:cond delay="indefinite"/>
-                      </p:stCondLst>
-                      <p:childTnLst>
-                        <p:par>
-                          <p:cTn id="16" presetID="1" presetClass="entr" presetSubtype="0" fill="hold" grpId="0" nodeType="clickEffect">
-                            <p:stCondLst>
-                              <p:cond delay="0"/>
-                            </p:stCondLst>
-                            <p:childTnLst>
-                              <p:set>
-                                <p:cBhvr>
-                                  <p:cTn id="17" dur="1" fill="hold">
-                                    <p:stCondLst>
-                                      <p:cond delay="0"/>
-                                    </p:stCondLst>
-                                  </p:cTn>
-                                  <p:tgtEl>
-                                    <p:spTgt spid="263"/>
-                                  </p:tgtEl>
-                                  <p:attrNameLst>
-                                    <p:attrName>style.visibility</p:attrName>
-                                  </p:attrNameLst>
-                                </p:cBhvr>
-                                <p:to>
-                                  <p:strVal val="visible"/>
-                                </p:to>
-                              </p:set>
-                            </p:childTnLst>
-                          </p:cTn>
-                        </p:par>
-                      </p:childTnLst>
-                    </p:cTn>
-                  </p:par>
-                  <p:par>
-                    <p:cTn id="18" fill="hold">
-                      <p:stCondLst>
-                        <p:cond delay="indefinite"/>
-                      </p:stCondLst>
-                      <p:childTnLst>
-                        <p:par>
-                          <p:cTn id="19" presetID="1" presetClass="entr" presetSubtype="0" fill="hold" grpId="0" nodeType="clickEffect">
-                            <p:stCondLst>
-                              <p:cond delay="0"/>
-                            </p:stCondLst>
-                            <p:childTnLst>
-                              <p:set>
-                                <p:cBhvr>
-                                  <p:cTn id="20" dur="1" fill="hold">
-                                    <p:stCondLst>
-                                      <p:cond delay="0"/>
-                                    </p:stCondLst>
-                                  </p:cTn>
-                                  <p:tgtEl>
-                                    <p:spTgt spid="263"/>
-                                  </p:tgtEl>
-                                  <p:attrNameLst>
-                                    <p:attrName>style.visibility</p:attrName>
-                                  </p:attrNameLst>
-                                </p:cBhvr>
-                                <p:to>
-                                  <p:strVal val="visible"/>
-                                </p:to>
-                              </p:set>
-                            </p:childTnLst>
-                          </p:cTn>
-                        </p:par>
-                      </p:childTnLst>
-                    </p:cTn>
-                  </p:par>
-                </p:childTnLst>
-              </p:cTn>
-              <p:prevCondLst>
-                <p:cond evt="onPrev" delay="0">
-                  <p:tgtEl>
-                    <p:sldTgt/>
-                  </p:tgtEl>
-                </p:cond>
-              </p:prevCondLst>
-              <p:nextCondLst>
-                <p:cond evt="onNext" delay="0">
-                  <p:tgtEl>
-                    <p:sldTgt/>
-                  </p:tgtEl>
-                </p:cond>
-              </p:nextCondLst>
-            </p:seq>
-          </p:childTnLst>
-        </p:cTn>
-      </p:par>
-    </p:tnLst>
-    <p:bldLst>
-      <p:bldP spid="263" grpId="0"/>
-    </p:bldLst>
-  </p:timing>
-</p:sld>
-</file>
-
-<file path=ppt/slides/slide27.xml><?xml version="1.0" encoding="utf-8"?>
-<p:sld xmlns:a="http://schemas.openxmlformats.org/drawingml/2006/main" xmlns:r="http://schemas.openxmlformats.org/officeDocument/2006/relationships" xmlns:p="http://schemas.openxmlformats.org/presentationml/2006/main">
-  <p:cSld>
-    <p:bg>
-      <p:bgPr>
-        <a:solidFill>
-          <a:srgbClr val="FFF8EC"/>
-        </a:solidFill>
-        <a:effectLst/>
-      </p:bgPr>
-    </p:bg>
-    <p:spTree>
-      <p:nvGrpSpPr>
-        <p:cNvPr id="1" name=""/>
-        <p:cNvGrpSpPr/>
-        <p:nvPr/>
-      </p:nvGrpSpPr>
-      <p:grpSpPr>
-        <a:xfrm>
-          <a:off x="0" y="0"/>
-          <a:ext cx="0" cy="0"/>
-          <a:chOff x="0" y="0"/>
-          <a:chExt cx="0" cy="0"/>
-        </a:xfrm>
-      </p:grpSpPr>
-      <p:sp>
-        <p:nvSpPr>
-          <p:cNvPr id="271" name="Kicker"/>
-          <p:cNvSpPr txBox="1"/>
-          <p:nvPr/>
-        </p:nvSpPr>
-        <p:spPr>
-          <a:xfrm>
-            <a:off x="900000" y="420000"/>
-            <a:ext cx="10000000" cy="420000"/>
-          </a:xfrm>
-          <a:prstGeom prst="rect">
-            <a:avLst/>
-          </a:prstGeom>
-          <a:noFill/>
-          <a:ln/>
-        </p:spPr>
-        <p:txBody>
-          <a:bodyPr wrap="square" rtlCol="0">
-            <a:normAutofit/>
-          </a:bodyPr>
-          <a:lstStyle/>
-          <a:p>
-            <a:pPr>
-              <a:buNone/>
-            </a:pPr>
-            <a:r>
-              <a:rPr lang="zh-CN" sz="1400" b="1" dirty="0">
-                <a:solidFill>
-                  <a:srgbClr val="E58A2F"/>
-                </a:solidFill>
-                <a:latin typeface="Noto Sans CJK SC"/>
-                <a:ea typeface="Noto Sans CJK SC"/>
-              </a:rPr>
-              <a:t>过来人共识：一年内gap市场能接受</a:t>
-            </a:r>
-          </a:p>
-        </p:txBody>
-      </p:sp>
-      <p:sp>
-        <p:nvSpPr>
-          <p:cNvPr id="272" name="Title"/>
-          <p:cNvSpPr txBox="1"/>
-          <p:nvPr/>
-        </p:nvSpPr>
-        <p:spPr>
-          <a:xfrm>
-            <a:off x="900000" y="920000"/>
-            <a:ext cx="10300000" cy="800000"/>
-          </a:xfrm>
-          <a:prstGeom prst="rect">
-            <a:avLst/>
-          </a:prstGeom>
-          <a:noFill/>
-          <a:ln/>
-        </p:spPr>
-        <p:txBody>
-          <a:bodyPr wrap="square" rtlCol="0">
-            <a:normAutofit/>
-          </a:bodyPr>
-          <a:lstStyle/>
-          <a:p>
-            <a:pPr>
-              <a:buNone/>
-            </a:pPr>
-            <a:r>
-              <a:rPr lang="zh-CN" sz="3400" b="1" dirty="0">
-                <a:solidFill>
-                  <a:srgbClr val="3B2F2A"/>
-                </a:solidFill>
-                <a:latin typeface="Noto Sans CJK SC"/>
-                <a:ea typeface="Noto Sans CJK SC"/>
-              </a:rPr>
-              <a:t>过来人共识：一年内gap市场能接受</a:t>
-            </a:r>
-          </a:p>
-        </p:txBody>
-      </p:sp>
-      <p:sp>
-        <p:nvSpPr>
-          <p:cNvPr id="273" name="Body"/>
-          <p:cNvSpPr txBox="1"/>
-          <p:nvPr/>
-        </p:nvSpPr>
-        <p:spPr>
-          <a:xfrm>
-            <a:off x="1050000" y="1850000"/>
-            <a:ext cx="10100000" cy="4500000"/>
-          </a:xfrm>
-          <a:prstGeom prst="rect">
-            <a:avLst/>
-          </a:prstGeom>
-          <a:noFill/>
-          <a:ln/>
-        </p:spPr>
-        <p:txBody>
-          <a:bodyPr wrap="square" rtlCol="0">
-            <a:normAutofit/>
-          </a:bodyPr>
-          <a:lstStyle/>
-          <a:p>
-            <a:pPr marL="285750" indent="-285750">
-              <a:spcAft>
-                <a:spcPts val="600"/>
-              </a:spcAft>
-              <a:buFont typeface="Arial" panose="020B0604020202020204"/>
-              <a:buChar char="•"/>
-            </a:pPr>
-            <a:r>
-              <a:rPr lang="zh-CN" sz="2000" b="0" dirty="0">
-                <a:solidFill>
-                  <a:srgbClr val="3B2F2A"/>
-                </a:solidFill>
-                <a:latin typeface="Noto Sans CJK SC"/>
-                <a:ea typeface="Noto Sans CJK SC"/>
-              </a:rPr>
-              <a:t>求职市场认可一年左右的gap</a:t>
-            </a:r>
-          </a:p>
-          <a:p>
-            <a:pPr marL="285750" indent="-285750">
-              <a:spcAft>
-                <a:spcPts val="600"/>
-              </a:spcAft>
-              <a:buFont typeface="Arial" panose="020B0604020202020204"/>
-              <a:buChar char="•"/>
-            </a:pPr>
-            <a:r>
-              <a:rPr lang="zh-CN" sz="2000" b="0" dirty="0">
-                <a:solidFill>
-                  <a:srgbClr val="3B2F2A"/>
-                </a:solidFill>
-                <a:latin typeface="Noto Sans CJK SC"/>
-                <a:ea typeface="Noto Sans CJK SC"/>
-              </a:rPr>
-              <a:t>招聘总监：离职状态到岗更快</a:t>
-            </a:r>
-          </a:p>
-          <a:p>
-            <a:pPr marL="285750" indent="-285750">
-              <a:spcAft>
-                <a:spcPts val="600"/>
-              </a:spcAft>
-              <a:buFont typeface="Arial" panose="020B0604020202020204"/>
-              <a:buChar char="•"/>
-            </a:pPr>
-            <a:r>
-              <a:rPr lang="zh-CN" sz="2000" b="0" dirty="0">
-                <a:solidFill>
-                  <a:srgbClr val="3B2F2A"/>
-                </a:solidFill>
-                <a:latin typeface="Noto Sans CJK SC"/>
-                <a:ea typeface="Noto Sans CJK SC"/>
-              </a:rPr>
-              <a:t>HR担心的是稳定性不是空窗</a:t>
-            </a:r>
-          </a:p>
-          <a:p>
-            <a:pPr marL="285750" indent="-285750">
-              <a:spcAft>
-                <a:spcPts val="600"/>
-              </a:spcAft>
-              <a:buFont typeface="Arial" panose="020B0604020202020204"/>
-              <a:buChar char="•"/>
-            </a:pPr>
-            <a:r>
-              <a:rPr lang="zh-CN" sz="2000" b="0" dirty="0">
-                <a:solidFill>
-                  <a:srgbClr val="3B2F2A"/>
-                </a:solidFill>
-                <a:latin typeface="Noto Sans CJK SC"/>
-                <a:ea typeface="Noto Sans CJK SC"/>
-              </a:rPr>
-              <a:t>易接受的回答：学习调整突破</a:t>
-            </a:r>
-          </a:p>
-          <a:p>
-            <a:pPr marL="285750" indent="-285750">
-              <a:spcAft>
-                <a:spcPts val="600"/>
-              </a:spcAft>
-              <a:buFont typeface="Arial" panose="020B0604020202020204"/>
-              <a:buChar char="•"/>
-            </a:pPr>
-            <a:r>
-              <a:rPr lang="zh-CN" sz="2000" b="0" dirty="0">
-                <a:solidFill>
-                  <a:srgbClr val="3B2F2A"/>
-                </a:solidFill>
-                <a:latin typeface="Noto Sans CJK SC"/>
-                <a:ea typeface="Noto Sans CJK SC"/>
-              </a:rPr>
-              <a:t>你的gap半年在安全区内</a:t>
-            </a:r>
-          </a:p>
-          <a:p>
-            <a:pPr marL="285750" indent="-285750">
-              <a:spcAft>
-                <a:spcPts val="600"/>
-              </a:spcAft>
-              <a:buFont typeface="Arial" panose="020B0604020202020204"/>
-              <a:buChar char="•"/>
-            </a:pPr>
-            <a:r>
-              <a:rPr lang="zh-CN" sz="2000" b="0" dirty="0">
-                <a:solidFill>
-                  <a:srgbClr val="3B2F2A"/>
-                </a:solidFill>
-                <a:latin typeface="Noto Sans CJK SC"/>
-                <a:ea typeface="Noto Sans CJK SC"/>
-              </a:rPr>
-              <a:t>来源：牛客网+知乎过来人帖</a:t>
-            </a:r>
-          </a:p>
-        </p:txBody>
-      </p:sp>
-      <p:sp>
-        <p:nvSpPr>
-          <p:cNvPr id="279" name="Page number"/>
-          <p:cNvSpPr txBox="1"/>
-          <p:nvPr/>
-        </p:nvSpPr>
-        <p:spPr>
-          <a:xfrm>
-            <a:off x="10600000" y="6250000"/>
-            <a:ext cx="1200000" cy="400000"/>
-          </a:xfrm>
-          <a:prstGeom prst="rect">
-            <a:avLst/>
-          </a:prstGeom>
-          <a:noFill/>
-          <a:ln/>
-        </p:spPr>
-        <p:txBody>
-          <a:bodyPr wrap="square" rtlCol="0">
-            <a:normAutofit/>
-          </a:bodyPr>
-          <a:lstStyle/>
-          <a:p>
-            <a:pPr algn="r">
-              <a:buNone/>
-            </a:pPr>
-            <a:r>
-              <a:rPr lang="zh-CN" sz="1000" b="0" dirty="0">
-                <a:solidFill>
-                  <a:srgbClr val="7E6F68"/>
-                </a:solidFill>
-                <a:latin typeface="Noto Sans CJK SC"/>
-                <a:ea typeface="Noto Sans CJK SC"/>
-              </a:rPr>
-              <a:t>27 / 33</a:t>
-            </a:r>
-          </a:p>
-        </p:txBody>
-      </p:sp>
-    </p:spTree>
-  </p:cSld>
-  <p:clrMapOvr>
-    <a:overrideClrMapping bg1="lt1" tx1="dk1" bg2="lt2" tx2="dk2" accent1="accent1" accent2="accent2" accent3="accent3" accent4="accent4" accent5="accent5" accent6="accent6" hlink="hlink" folHlink="folHlink"/>
-  </p:clrMapOvr>
-  <p:transition spd="med">
-    <p:fade/>
-  </p:transition>
-  <p:timing>
-    <p:tnLst>
-      <p:par>
-        <p:cTn id="1" dur="indefinite" restart="never" nodeType="tmRoot">
-          <p:childTnLst>
-            <p:seq concurrent="1" nextAc="seek">
-              <p:cTn id="2" dur="indefinite" nodeType="mainSeq">
-                <p:childTnLst>
-                  <p:par>
-                    <p:cTn id="3" fill="hold">
-                      <p:stCondLst>
-                        <p:cond delay="indefinite"/>
-                      </p:stCondLst>
-                      <p:childTnLst>
-                        <p:par>
-                          <p:cTn id="4" presetID="1" presetClass="entr" presetSubtype="0" fill="hold" grpId="0" nodeType="clickEffect">
-                            <p:stCondLst>
-                              <p:cond delay="0"/>
-                            </p:stCondLst>
-                            <p:childTnLst>
-                              <p:set>
-                                <p:cBhvr>
-                                  <p:cTn id="5" dur="1" fill="hold">
-                                    <p:stCondLst>
-                                      <p:cond delay="0"/>
-                                    </p:stCondLst>
-                                  </p:cTn>
-                                  <p:tgtEl>
-                                    <p:spTgt spid="273"/>
-                                  </p:tgtEl>
-                                  <p:attrNameLst>
-                                    <p:attrName>style.visibility</p:attrName>
-                                  </p:attrNameLst>
-                                </p:cBhvr>
-                                <p:to>
-                                  <p:strVal val="visible"/>
-                                </p:to>
-                              </p:set>
-                            </p:childTnLst>
-                          </p:cTn>
-                        </p:par>
-                      </p:childTnLst>
-                    </p:cTn>
-                  </p:par>
-                  <p:par>
-                    <p:cTn id="6" fill="hold">
-                      <p:stCondLst>
-                        <p:cond delay="indefinite"/>
-                      </p:stCondLst>
-                      <p:childTnLst>
-                        <p:par>
-                          <p:cTn id="7" presetID="1" presetClass="entr" presetSubtype="0" fill="hold" grpId="0" nodeType="clickEffect">
-                            <p:stCondLst>
-                              <p:cond delay="0"/>
-                            </p:stCondLst>
-                            <p:childTnLst>
-                              <p:set>
-                                <p:cBhvr>
-                                  <p:cTn id="8" dur="1" fill="hold">
-                                    <p:stCondLst>
-                                      <p:cond delay="0"/>
-                                    </p:stCondLst>
-                                  </p:cTn>
-                                  <p:tgtEl>
-                                    <p:spTgt spid="273"/>
-                                  </p:tgtEl>
-                                  <p:attrNameLst>
-                                    <p:attrName>style.visibility</p:attrName>
-                                  </p:attrNameLst>
-                                </p:cBhvr>
-                                <p:to>
-                                  <p:strVal val="visible"/>
-                                </p:to>
-                              </p:set>
-                            </p:childTnLst>
-                          </p:cTn>
-                        </p:par>
-                      </p:childTnLst>
-                    </p:cTn>
-                  </p:par>
-                  <p:par>
-                    <p:cTn id="9" fill="hold">
-                      <p:stCondLst>
-                        <p:cond delay="indefinite"/>
-                      </p:stCondLst>
-                      <p:childTnLst>
-                        <p:par>
-                          <p:cTn id="10" presetID="1" presetClass="entr" presetSubtype="0" fill="hold" grpId="0" nodeType="clickEffect">
-                            <p:stCondLst>
-                              <p:cond delay="0"/>
-                            </p:stCondLst>
-                            <p:childTnLst>
-                              <p:set>
-                                <p:cBhvr>
-                                  <p:cTn id="11" dur="1" fill="hold">
-                                    <p:stCondLst>
-                                      <p:cond delay="0"/>
-                                    </p:stCondLst>
-                                  </p:cTn>
-                                  <p:tgtEl>
-                                    <p:spTgt spid="273"/>
-                                  </p:tgtEl>
-                                  <p:attrNameLst>
-                                    <p:attrName>style.visibility</p:attrName>
-                                  </p:attrNameLst>
-                                </p:cBhvr>
-                                <p:to>
-                                  <p:strVal val="visible"/>
-                                </p:to>
-                              </p:set>
-                            </p:childTnLst>
-                          </p:cTn>
-                        </p:par>
-                      </p:childTnLst>
-                    </p:cTn>
-                  </p:par>
-                  <p:par>
-                    <p:cTn id="12" fill="hold">
-                      <p:stCondLst>
-                        <p:cond delay="indefinite"/>
-                      </p:stCondLst>
-                      <p:childTnLst>
-                        <p:par>
-                          <p:cTn id="13" presetID="1" presetClass="entr" presetSubtype="0" fill="hold" grpId="0" nodeType="clickEffect">
-                            <p:stCondLst>
-                              <p:cond delay="0"/>
-                            </p:stCondLst>
-                            <p:childTnLst>
-                              <p:set>
-                                <p:cBhvr>
-                                  <p:cTn id="14" dur="1" fill="hold">
-                                    <p:stCondLst>
-                                      <p:cond delay="0"/>
-                                    </p:stCondLst>
-                                  </p:cTn>
-                                  <p:tgtEl>
-                                    <p:spTgt spid="273"/>
-                                  </p:tgtEl>
-                                  <p:attrNameLst>
-                                    <p:attrName>style.visibility</p:attrName>
-                                  </p:attrNameLst>
-                                </p:cBhvr>
-                                <p:to>
-                                  <p:strVal val="visible"/>
-                                </p:to>
-                              </p:set>
-                            </p:childTnLst>
-                          </p:cTn>
-                        </p:par>
-                      </p:childTnLst>
-                    </p:cTn>
-                  </p:par>
-                  <p:par>
-                    <p:cTn id="15" fill="hold">
-                      <p:stCondLst>
-                        <p:cond delay="indefinite"/>
-                      </p:stCondLst>
-                      <p:childTnLst>
-                        <p:par>
-                          <p:cTn id="16" presetID="1" presetClass="entr" presetSubtype="0" fill="hold" grpId="0" nodeType="clickEffect">
-                            <p:stCondLst>
-                              <p:cond delay="0"/>
-                            </p:stCondLst>
-                            <p:childTnLst>
-                              <p:set>
-                                <p:cBhvr>
-                                  <p:cTn id="17" dur="1" fill="hold">
-                                    <p:stCondLst>
-                                      <p:cond delay="0"/>
-                                    </p:stCondLst>
-                                  </p:cTn>
-                                  <p:tgtEl>
-                                    <p:spTgt spid="273"/>
-                                  </p:tgtEl>
-                                  <p:attrNameLst>
-                                    <p:attrName>style.visibility</p:attrName>
-                                  </p:attrNameLst>
-                                </p:cBhvr>
-                                <p:to>
-                                  <p:strVal val="visible"/>
-                                </p:to>
-                              </p:set>
-                            </p:childTnLst>
-                          </p:cTn>
-                        </p:par>
-                      </p:childTnLst>
-                    </p:cTn>
-                  </p:par>
-                  <p:par>
-                    <p:cTn id="18" fill="hold">
-                      <p:stCondLst>
-                        <p:cond delay="indefinite"/>
-                      </p:stCondLst>
-                      <p:childTnLst>
-                        <p:par>
-                          <p:cTn id="19" presetID="1" presetClass="entr" presetSubtype="0" fill="hold" grpId="0" nodeType="clickEffect">
-                            <p:stCondLst>
-                              <p:cond delay="0"/>
-                            </p:stCondLst>
-                            <p:childTnLst>
-                              <p:set>
-                                <p:cBhvr>
-                                  <p:cTn id="20" dur="1" fill="hold">
-                                    <p:stCondLst>
-                                      <p:cond delay="0"/>
-                                    </p:stCondLst>
-                                  </p:cTn>
-                                  <p:tgtEl>
-                                    <p:spTgt spid="273"/>
-                                  </p:tgtEl>
-                                  <p:attrNameLst>
-                                    <p:attrName>style.visibility</p:attrName>
-                                  </p:attrNameLst>
-                                </p:cBhvr>
-                                <p:to>
-                                  <p:strVal val="visible"/>
-                                </p:to>
-                              </p:set>
-                            </p:childTnLst>
-                          </p:cTn>
-                        </p:par>
-                      </p:childTnLst>
-                    </p:cTn>
-                  </p:par>
-                </p:childTnLst>
-              </p:cTn>
-              <p:prevCondLst>
-                <p:cond evt="onPrev" delay="0">
-                  <p:tgtEl>
-                    <p:sldTgt/>
-                  </p:tgtEl>
-                </p:cond>
-              </p:prevCondLst>
-              <p:nextCondLst>
-                <p:cond evt="onNext" delay="0">
-                  <p:tgtEl>
-                    <p:sldTgt/>
-                  </p:tgtEl>
-                </p:cond>
-              </p:nextCondLst>
-            </p:seq>
-          </p:childTnLst>
-        </p:cTn>
-      </p:par>
-    </p:tnLst>
-    <p:bldLst>
-      <p:bldP spid="273" grpId="0"/>
-    </p:bldLst>
-  </p:timing>
-</p:sld>
-</file>
-
-<file path=ppt/slides/slide28.xml><?xml version="1.0" encoding="utf-8"?>
-<p:sld xmlns:a="http://schemas.openxmlformats.org/drawingml/2006/main" xmlns:r="http://schemas.openxmlformats.org/officeDocument/2006/relationships" xmlns:p="http://schemas.openxmlformats.org/presentationml/2006/main">
-  <p:cSld>
-    <p:bg>
-      <p:bgPr>
-        <a:solidFill>
-          <a:srgbClr val="FFF8EC"/>
-        </a:solidFill>
-        <a:effectLst/>
-      </p:bgPr>
-    </p:bg>
-    <p:spTree>
-      <p:nvGrpSpPr>
-        <p:cNvPr id="1" name=""/>
-        <p:cNvGrpSpPr/>
-        <p:nvPr/>
-      </p:nvGrpSpPr>
-      <p:grpSpPr>
-        <a:xfrm>
-          <a:off x="0" y="0"/>
-          <a:ext cx="0" cy="0"/>
-          <a:chOff x="0" y="0"/>
-          <a:chExt cx="0" cy="0"/>
-        </a:xfrm>
-      </p:grpSpPr>
-      <p:sp>
-        <p:nvSpPr>
-          <p:cNvPr id="281" name="Kicker"/>
-          <p:cNvSpPr txBox="1"/>
-          <p:nvPr/>
-        </p:nvSpPr>
-        <p:spPr>
-          <a:xfrm>
-            <a:off x="900000" y="420000"/>
-            <a:ext cx="10000000" cy="420000"/>
-          </a:xfrm>
-          <a:prstGeom prst="rect">
-            <a:avLst/>
-          </a:prstGeom>
-          <a:noFill/>
-          <a:ln/>
-        </p:spPr>
-        <p:txBody>
-          <a:bodyPr wrap="square" rtlCol="0">
-            <a:normAutofit/>
-          </a:bodyPr>
-          <a:lstStyle/>
-          <a:p>
-            <a:pPr>
-              <a:buNone/>
-            </a:pPr>
-            <a:r>
-              <a:rPr lang="zh-CN" sz="1400" b="1" dirty="0">
-                <a:solidFill>
-                  <a:srgbClr val="E58A2F"/>
-                </a:solidFill>
-                <a:latin typeface="Noto Sans CJK SC"/>
-                <a:ea typeface="Noto Sans CJK SC"/>
-              </a:rPr>
-              <a:t>面试三坑：过度解释最败好感</a:t>
-            </a:r>
-          </a:p>
-        </p:txBody>
-      </p:sp>
-      <p:sp>
-        <p:nvSpPr>
-          <p:cNvPr id="282" name="Title"/>
-          <p:cNvSpPr txBox="1"/>
-          <p:nvPr/>
-        </p:nvSpPr>
-        <p:spPr>
-          <a:xfrm>
-            <a:off x="900000" y="920000"/>
-            <a:ext cx="10300000" cy="800000"/>
-          </a:xfrm>
-          <a:prstGeom prst="rect">
-            <a:avLst/>
-          </a:prstGeom>
-          <a:noFill/>
-          <a:ln/>
-        </p:spPr>
-        <p:txBody>
-          <a:bodyPr wrap="square" rtlCol="0">
-            <a:normAutofit/>
-          </a:bodyPr>
-          <a:lstStyle/>
-          <a:p>
-            <a:pPr>
-              <a:buNone/>
-            </a:pPr>
-            <a:r>
-              <a:rPr lang="zh-CN" sz="3400" b="1" dirty="0">
-                <a:solidFill>
-                  <a:srgbClr val="3B2F2A"/>
-                </a:solidFill>
-                <a:latin typeface="Noto Sans CJK SC"/>
-                <a:ea typeface="Noto Sans CJK SC"/>
-              </a:rPr>
-              <a:t>面试三坑：过度解释最败好感</a:t>
-            </a:r>
-          </a:p>
-        </p:txBody>
-      </p:sp>
-      <p:sp>
-        <p:nvSpPr>
-          <p:cNvPr id="283" name="Body"/>
-          <p:cNvSpPr txBox="1"/>
-          <p:nvPr/>
-        </p:nvSpPr>
-        <p:spPr>
-          <a:xfrm>
-            <a:off x="1050000" y="1850000"/>
-            <a:ext cx="10100000" cy="4500000"/>
-          </a:xfrm>
-          <a:prstGeom prst="rect">
-            <a:avLst/>
-          </a:prstGeom>
-          <a:noFill/>
-          <a:ln/>
-        </p:spPr>
-        <p:txBody>
-          <a:bodyPr wrap="square" rtlCol="0">
-            <a:normAutofit/>
-          </a:bodyPr>
-          <a:lstStyle/>
-          <a:p>
-            <a:pPr marL="285750" indent="-285750">
-              <a:spcAft>
-                <a:spcPts val="600"/>
-              </a:spcAft>
-              <a:buFont typeface="Arial" panose="020B0604020202020204"/>
-              <a:buChar char="•"/>
-            </a:pPr>
-            <a:r>
-              <a:rPr lang="zh-CN" sz="2000" b="0" dirty="0">
-                <a:solidFill>
-                  <a:srgbClr val="3B2F2A"/>
-                </a:solidFill>
-                <a:latin typeface="Noto Sans CJK SC"/>
-                <a:ea typeface="Noto Sans CJK SC"/>
-              </a:rPr>
-              <a:t>坑一：过度解释越说越像心虚</a:t>
-            </a:r>
-          </a:p>
-          <a:p>
-            <a:pPr marL="285750" indent="-285750">
-              <a:spcAft>
-                <a:spcPts val="600"/>
-              </a:spcAft>
-              <a:buFont typeface="Arial" panose="020B0604020202020204"/>
-              <a:buChar char="•"/>
-            </a:pPr>
-            <a:r>
-              <a:rPr lang="zh-CN" sz="2000" b="0" dirty="0">
-                <a:solidFill>
-                  <a:srgbClr val="3B2F2A"/>
-                </a:solidFill>
-                <a:latin typeface="Noto Sans CJK SC"/>
-                <a:ea typeface="Noto Sans CJK SC"/>
-              </a:rPr>
-              <a:t>坑二：贬低前司显得难相处</a:t>
-            </a:r>
-          </a:p>
-          <a:p>
-            <a:pPr marL="285750" indent="-285750">
-              <a:spcAft>
-                <a:spcPts val="600"/>
-              </a:spcAft>
-              <a:buFont typeface="Arial" panose="020B0604020202020204"/>
-              <a:buChar char="•"/>
-            </a:pPr>
-            <a:r>
-              <a:rPr lang="zh-CN" sz="2000" b="0" dirty="0">
-                <a:solidFill>
-                  <a:srgbClr val="3B2F2A"/>
-                </a:solidFill>
-                <a:latin typeface="Noto Sans CJK SC"/>
-                <a:ea typeface="Noto Sans CJK SC"/>
-              </a:rPr>
-              <a:t>坑三：消极表达等于自曝状态差</a:t>
-            </a:r>
-          </a:p>
-          <a:p>
-            <a:pPr marL="285750" indent="-285750">
-              <a:spcAft>
-                <a:spcPts val="600"/>
-              </a:spcAft>
-              <a:buFont typeface="Arial" panose="020B0604020202020204"/>
-              <a:buChar char="•"/>
-            </a:pPr>
-            <a:r>
-              <a:rPr lang="zh-CN" sz="2000" b="0" dirty="0">
-                <a:solidFill>
-                  <a:srgbClr val="3B2F2A"/>
-                </a:solidFill>
-                <a:latin typeface="Noto Sans CJK SC"/>
-                <a:ea typeface="Noto Sans CJK SC"/>
-              </a:rPr>
-              <a:t>正确第一句：原因一句带过</a:t>
-            </a:r>
-          </a:p>
-          <a:p>
-            <a:pPr marL="285750" indent="-285750">
-              <a:spcAft>
-                <a:spcPts val="600"/>
-              </a:spcAft>
-              <a:buFont typeface="Arial" panose="020B0604020202020204"/>
-              <a:buChar char="•"/>
-            </a:pPr>
-            <a:r>
-              <a:rPr lang="zh-CN" sz="2000" b="0" dirty="0">
-                <a:solidFill>
-                  <a:srgbClr val="3B2F2A"/>
-                </a:solidFill>
-                <a:latin typeface="Noto Sans CJK SC"/>
-                <a:ea typeface="Noto Sans CJK SC"/>
-              </a:rPr>
-              <a:t>第二句：讲空窗期学了做了什么</a:t>
-            </a:r>
-          </a:p>
-          <a:p>
-            <a:pPr marL="285750" indent="-285750">
-              <a:spcAft>
-                <a:spcPts val="600"/>
-              </a:spcAft>
-              <a:buFont typeface="Arial" panose="020B0604020202020204"/>
-              <a:buChar char="•"/>
-            </a:pPr>
-            <a:r>
-              <a:rPr lang="zh-CN" sz="2000" b="0" dirty="0">
-                <a:solidFill>
-                  <a:srgbClr val="3B2F2A"/>
-                </a:solidFill>
-                <a:latin typeface="Noto Sans CJK SC"/>
-                <a:ea typeface="Noto Sans CJK SC"/>
-              </a:rPr>
-              <a:t>第三句：拉回当下状态好能到岗</a:t>
-            </a:r>
-          </a:p>
-        </p:txBody>
-      </p:sp>
-      <p:sp>
-        <p:nvSpPr>
-          <p:cNvPr id="289" name="Page number"/>
-          <p:cNvSpPr txBox="1"/>
-          <p:nvPr/>
-        </p:nvSpPr>
-        <p:spPr>
-          <a:xfrm>
-            <a:off x="10600000" y="6250000"/>
-            <a:ext cx="1200000" cy="400000"/>
-          </a:xfrm>
-          <a:prstGeom prst="rect">
-            <a:avLst/>
-          </a:prstGeom>
-          <a:noFill/>
-          <a:ln/>
-        </p:spPr>
-        <p:txBody>
-          <a:bodyPr wrap="square" rtlCol="0">
-            <a:normAutofit/>
-          </a:bodyPr>
-          <a:lstStyle/>
-          <a:p>
-            <a:pPr algn="r">
-              <a:buNone/>
-            </a:pPr>
-            <a:r>
-              <a:rPr lang="zh-CN" sz="1000" b="0" dirty="0">
-                <a:solidFill>
-                  <a:srgbClr val="7E6F68"/>
-                </a:solidFill>
-                <a:latin typeface="Noto Sans CJK SC"/>
-                <a:ea typeface="Noto Sans CJK SC"/>
-              </a:rPr>
-              <a:t>28 / 33</a:t>
-            </a:r>
-          </a:p>
-        </p:txBody>
-      </p:sp>
-    </p:spTree>
-  </p:cSld>
-  <p:clrMapOvr>
-    <a:overrideClrMapping bg1="lt1" tx1="dk1" bg2="lt2" tx2="dk2" accent1="accent1" accent2="accent2" accent3="accent3" accent4="accent4" accent5="accent5" accent6="accent6" hlink="hlink" folHlink="folHlink"/>
-  </p:clrMapOvr>
-  <p:transition spd="med">
-    <p:fade/>
-  </p:transition>
-  <p:timing>
-    <p:tnLst>
-      <p:par>
-        <p:cTn id="1" dur="indefinite" restart="never" nodeType="tmRoot">
-          <p:childTnLst>
-            <p:seq concurrent="1" nextAc="seek">
-              <p:cTn id="2" dur="indefinite" nodeType="mainSeq">
-                <p:childTnLst>
-                  <p:par>
-                    <p:cTn id="3" fill="hold">
-                      <p:stCondLst>
-                        <p:cond delay="indefinite"/>
-                      </p:stCondLst>
-                      <p:childTnLst>
-                        <p:par>
-                          <p:cTn id="4" presetID="1" presetClass="entr" presetSubtype="0" fill="hold" grpId="0" nodeType="clickEffect">
-                            <p:stCondLst>
-                              <p:cond delay="0"/>
-                            </p:stCondLst>
-                            <p:childTnLst>
-                              <p:set>
-                                <p:cBhvr>
-                                  <p:cTn id="5" dur="1" fill="hold">
-                                    <p:stCondLst>
-                                      <p:cond delay="0"/>
-                                    </p:stCondLst>
-                                  </p:cTn>
-                                  <p:tgtEl>
-                                    <p:spTgt spid="283"/>
-                                  </p:tgtEl>
-                                  <p:attrNameLst>
-                                    <p:attrName>style.visibility</p:attrName>
-                                  </p:attrNameLst>
-                                </p:cBhvr>
-                                <p:to>
-                                  <p:strVal val="visible"/>
-                                </p:to>
-                              </p:set>
-                            </p:childTnLst>
-                          </p:cTn>
-                        </p:par>
-                      </p:childTnLst>
-                    </p:cTn>
-                  </p:par>
-                  <p:par>
-                    <p:cTn id="6" fill="hold">
-                      <p:stCondLst>
-                        <p:cond delay="indefinite"/>
-                      </p:stCondLst>
-                      <p:childTnLst>
-                        <p:par>
-                          <p:cTn id="7" presetID="1" presetClass="entr" presetSubtype="0" fill="hold" grpId="0" nodeType="clickEffect">
-                            <p:stCondLst>
-                              <p:cond delay="0"/>
-                            </p:stCondLst>
-                            <p:childTnLst>
-                              <p:set>
-                                <p:cBhvr>
-                                  <p:cTn id="8" dur="1" fill="hold">
-                                    <p:stCondLst>
-                                      <p:cond delay="0"/>
-                                    </p:stCondLst>
-                                  </p:cTn>
-                                  <p:tgtEl>
-                                    <p:spTgt spid="283"/>
-                                  </p:tgtEl>
-                                  <p:attrNameLst>
-                                    <p:attrName>style.visibility</p:attrName>
-                                  </p:attrNameLst>
-                                </p:cBhvr>
-                                <p:to>
-                                  <p:strVal val="visible"/>
-                                </p:to>
-                              </p:set>
-                            </p:childTnLst>
-                          </p:cTn>
-                        </p:par>
-                      </p:childTnLst>
-                    </p:cTn>
-                  </p:par>
-                  <p:par>
-                    <p:cTn id="9" fill="hold">
-                      <p:stCondLst>
-                        <p:cond delay="indefinite"/>
-                      </p:stCondLst>
-                      <p:childTnLst>
-                        <p:par>
-                          <p:cTn id="10" presetID="1" presetClass="entr" presetSubtype="0" fill="hold" grpId="0" nodeType="clickEffect">
-                            <p:stCondLst>
-                              <p:cond delay="0"/>
-                            </p:stCondLst>
-                            <p:childTnLst>
-                              <p:set>
-                                <p:cBhvr>
-                                  <p:cTn id="11" dur="1" fill="hold">
-                                    <p:stCondLst>
-                                      <p:cond delay="0"/>
-                                    </p:stCondLst>
-                                  </p:cTn>
-                                  <p:tgtEl>
-                                    <p:spTgt spid="283"/>
-                                  </p:tgtEl>
-                                  <p:attrNameLst>
-                                    <p:attrName>style.visibility</p:attrName>
-                                  </p:attrNameLst>
-                                </p:cBhvr>
-                                <p:to>
-                                  <p:strVal val="visible"/>
-                                </p:to>
-                              </p:set>
-                            </p:childTnLst>
-                          </p:cTn>
-                        </p:par>
-                      </p:childTnLst>
-                    </p:cTn>
-                  </p:par>
-                  <p:par>
-                    <p:cTn id="12" fill="hold">
-                      <p:stCondLst>
-                        <p:cond delay="indefinite"/>
-                      </p:stCondLst>
-                      <p:childTnLst>
-                        <p:par>
-                          <p:cTn id="13" presetID="1" presetClass="entr" presetSubtype="0" fill="hold" grpId="0" nodeType="clickEffect">
-                            <p:stCondLst>
-                              <p:cond delay="0"/>
-                            </p:stCondLst>
-                            <p:childTnLst>
-                              <p:set>
-                                <p:cBhvr>
-                                  <p:cTn id="14" dur="1" fill="hold">
-                                    <p:stCondLst>
-                                      <p:cond delay="0"/>
-                                    </p:stCondLst>
-                                  </p:cTn>
-                                  <p:tgtEl>
-                                    <p:spTgt spid="283"/>
-                                  </p:tgtEl>
-                                  <p:attrNameLst>
-                                    <p:attrName>style.visibility</p:attrName>
-                                  </p:attrNameLst>
-                                </p:cBhvr>
-                                <p:to>
-                                  <p:strVal val="visible"/>
-                                </p:to>
-                              </p:set>
-                            </p:childTnLst>
-                          </p:cTn>
-                        </p:par>
-                      </p:childTnLst>
-                    </p:cTn>
-                  </p:par>
-                  <p:par>
-                    <p:cTn id="15" fill="hold">
-                      <p:stCondLst>
-                        <p:cond delay="indefinite"/>
-                      </p:stCondLst>
-                      <p:childTnLst>
-                        <p:par>
-                          <p:cTn id="16" presetID="1" presetClass="entr" presetSubtype="0" fill="hold" grpId="0" nodeType="clickEffect">
-                            <p:stCondLst>
-                              <p:cond delay="0"/>
-                            </p:stCondLst>
-                            <p:childTnLst>
-                              <p:set>
-                                <p:cBhvr>
-                                  <p:cTn id="17" dur="1" fill="hold">
-                                    <p:stCondLst>
-                                      <p:cond delay="0"/>
-                                    </p:stCondLst>
-                                  </p:cTn>
-                                  <p:tgtEl>
-                                    <p:spTgt spid="283"/>
-                                  </p:tgtEl>
-                                  <p:attrNameLst>
-                                    <p:attrName>style.visibility</p:attrName>
-                                  </p:attrNameLst>
-                                </p:cBhvr>
-                                <p:to>
-                                  <p:strVal val="visible"/>
-                                </p:to>
-                              </p:set>
-                            </p:childTnLst>
-                          </p:cTn>
-                        </p:par>
-                      </p:childTnLst>
-                    </p:cTn>
-                  </p:par>
-                  <p:par>
-                    <p:cTn id="18" fill="hold">
-                      <p:stCondLst>
-                        <p:cond delay="indefinite"/>
-                      </p:stCondLst>
-                      <p:childTnLst>
-                        <p:par>
-                          <p:cTn id="19" presetID="1" presetClass="entr" presetSubtype="0" fill="hold" grpId="0" nodeType="clickEffect">
-                            <p:stCondLst>
-                              <p:cond delay="0"/>
-                            </p:stCondLst>
-                            <p:childTnLst>
-                              <p:set>
-                                <p:cBhvr>
-                                  <p:cTn id="20" dur="1" fill="hold">
-                                    <p:stCondLst>
-                                      <p:cond delay="0"/>
-                                    </p:stCondLst>
-                                  </p:cTn>
-                                  <p:tgtEl>
-                                    <p:spTgt spid="283"/>
-                                  </p:tgtEl>
-                                  <p:attrNameLst>
-                                    <p:attrName>style.visibility</p:attrName>
-                                  </p:attrNameLst>
-                                </p:cBhvr>
-                                <p:to>
-                                  <p:strVal val="visible"/>
-                                </p:to>
-                              </p:set>
-                            </p:childTnLst>
-                          </p:cTn>
-                        </p:par>
-                      </p:childTnLst>
-                    </p:cTn>
-                  </p:par>
-                </p:childTnLst>
-              </p:cTn>
-              <p:prevCondLst>
-                <p:cond evt="onPrev" delay="0">
-                  <p:tgtEl>
-                    <p:sldTgt/>
-                  </p:tgtEl>
-                </p:cond>
-              </p:prevCondLst>
-              <p:nextCondLst>
-                <p:cond evt="onNext" delay="0">
-                  <p:tgtEl>
-                    <p:sldTgt/>
-                  </p:tgtEl>
-                </p:cond>
-              </p:nextCondLst>
-            </p:seq>
-          </p:childTnLst>
-        </p:cTn>
-      </p:par>
-    </p:tnLst>
-    <p:bldLst>
-      <p:bldP spid="283" grpId="0"/>
-    </p:bldLst>
-  </p:timing>
-</p:sld>
-</file>
-
-<file path=ppt/slides/slide29.xml><?xml version="1.0" encoding="utf-8"?>
-<p:sld xmlns:a="http://schemas.openxmlformats.org/drawingml/2006/main" xmlns:r="http://schemas.openxmlformats.org/officeDocument/2006/relationships" xmlns:p="http://schemas.openxmlformats.org/presentationml/2006/main">
-  <p:cSld>
-    <p:bg>
-      <p:bgPr>
-        <a:solidFill>
-          <a:srgbClr val="FFF8EC"/>
-        </a:solidFill>
-        <a:effectLst/>
-      </p:bgPr>
-    </p:bg>
-    <p:spTree>
-      <p:nvGrpSpPr>
-        <p:cNvPr id="1" name=""/>
-        <p:cNvGrpSpPr/>
-        <p:nvPr/>
-      </p:nvGrpSpPr>
-      <p:grpSpPr>
-        <a:xfrm>
-          <a:off x="0" y="0"/>
-          <a:ext cx="0" cy="0"/>
-          <a:chOff x="0" y="0"/>
-          <a:chExt cx="0" cy="0"/>
-        </a:xfrm>
-      </p:grpSpPr>
-      <p:sp>
-        <p:nvSpPr>
-          <p:cNvPr id="291" name="Kicker"/>
-          <p:cNvSpPr txBox="1"/>
-          <p:nvPr/>
-        </p:nvSpPr>
-        <p:spPr>
-          <a:xfrm>
-            <a:off x="900000" y="420000"/>
-            <a:ext cx="10000000" cy="420000"/>
-          </a:xfrm>
-          <a:prstGeom prst="rect">
-            <a:avLst/>
-          </a:prstGeom>
-          <a:noFill/>
-          <a:ln/>
-        </p:spPr>
-        <p:txBody>
-          <a:bodyPr wrap="square" rtlCol="0">
-            <a:normAutofit/>
-          </a:bodyPr>
-          <a:lstStyle/>
-          <a:p>
-            <a:pPr>
-              <a:buNone/>
-            </a:pPr>
-            <a:r>
-              <a:rPr lang="zh-CN" sz="1400" b="1" dirty="0">
-                <a:solidFill>
-                  <a:srgbClr val="E58A2F"/>
-                </a:solidFill>
-                <a:latin typeface="Noto Sans CJK SC"/>
-                <a:ea typeface="Noto Sans CJK SC"/>
-              </a:rPr>
-              <a:t>真实时间线：熬过崩溃期就上岸</a:t>
-            </a:r>
-          </a:p>
-        </p:txBody>
-      </p:sp>
-      <p:sp>
-        <p:nvSpPr>
-          <p:cNvPr id="292" name="Title"/>
-          <p:cNvSpPr txBox="1"/>
-          <p:nvPr/>
-        </p:nvSpPr>
-        <p:spPr>
-          <a:xfrm>
-            <a:off x="900000" y="920000"/>
-            <a:ext cx="10300000" cy="800000"/>
-          </a:xfrm>
-          <a:prstGeom prst="rect">
-            <a:avLst/>
-          </a:prstGeom>
-          <a:noFill/>
-          <a:ln/>
-        </p:spPr>
-        <p:txBody>
-          <a:bodyPr wrap="square" rtlCol="0">
-            <a:normAutofit/>
-          </a:bodyPr>
-          <a:lstStyle/>
-          <a:p>
-            <a:pPr>
-              <a:buNone/>
-            </a:pPr>
-            <a:r>
-              <a:rPr lang="zh-CN" sz="3400" b="1" dirty="0">
-                <a:solidFill>
-                  <a:srgbClr val="3B2F2A"/>
-                </a:solidFill>
-                <a:latin typeface="Noto Sans CJK SC"/>
-                <a:ea typeface="Noto Sans CJK SC"/>
-              </a:rPr>
-              <a:t>真实时间线：熬过崩溃期就上岸</a:t>
-            </a:r>
-          </a:p>
-        </p:txBody>
-      </p:sp>
-      <p:sp>
-        <p:nvSpPr>
-          <p:cNvPr id="293" name="Body"/>
-          <p:cNvSpPr txBox="1"/>
-          <p:nvPr/>
-        </p:nvSpPr>
-        <p:spPr>
-          <a:xfrm>
-            <a:off x="1050000" y="1850000"/>
-            <a:ext cx="10100000" cy="4500000"/>
-          </a:xfrm>
-          <a:prstGeom prst="rect">
-            <a:avLst/>
-          </a:prstGeom>
-          <a:noFill/>
-          <a:ln/>
-        </p:spPr>
-        <p:txBody>
-          <a:bodyPr wrap="square" rtlCol="0">
-            <a:normAutofit/>
-          </a:bodyPr>
-          <a:lstStyle/>
-          <a:p>
-            <a:pPr marL="285750" indent="-285750">
-              <a:spcAft>
-                <a:spcPts val="600"/>
-              </a:spcAft>
-              <a:buFont typeface="Arial" panose="020B0604020202020204"/>
-              <a:buChar char="•"/>
-            </a:pPr>
-            <a:r>
-              <a:rPr lang="zh-CN" sz="2000" b="0" dirty="0">
-                <a:solidFill>
-                  <a:srgbClr val="3B2F2A"/>
-                </a:solidFill>
-                <a:latin typeface="Noto Sans CJK SC"/>
-                <a:ea typeface="Noto Sans CJK SC"/>
-              </a:rPr>
-              <a:t>真实案例：gap一年五个月上岸</a:t>
-            </a:r>
-          </a:p>
-          <a:p>
-            <a:pPr marL="285750" indent="-285750">
-              <a:spcAft>
-                <a:spcPts val="600"/>
-              </a:spcAft>
-              <a:buFont typeface="Arial" panose="020B0604020202020204"/>
-              <a:buChar char="•"/>
-            </a:pPr>
-            <a:r>
-              <a:rPr lang="zh-CN" sz="2000" b="0" dirty="0">
-                <a:solidFill>
-                  <a:srgbClr val="3B2F2A"/>
-                </a:solidFill>
-                <a:latin typeface="Noto Sans CJK SC"/>
-                <a:ea typeface="Noto Sans CJK SC"/>
-              </a:rPr>
-              <a:t>节奏：心理建设到offer五个月</a:t>
-            </a:r>
-          </a:p>
-          <a:p>
-            <a:pPr marL="285750" indent="-285750">
-              <a:spcAft>
-                <a:spcPts val="600"/>
-              </a:spcAft>
-              <a:buFont typeface="Arial" panose="020B0604020202020204"/>
-              <a:buChar char="•"/>
-            </a:pPr>
-            <a:r>
-              <a:rPr lang="zh-CN" sz="2000" b="0" dirty="0">
-                <a:solidFill>
-                  <a:srgbClr val="3B2F2A"/>
-                </a:solidFill>
-                <a:latin typeface="Noto Sans CJK SC"/>
-                <a:ea typeface="Noto Sans CJK SC"/>
-              </a:rPr>
-              <a:t>每天专注3-4小时投20+岗位</a:t>
-            </a:r>
-          </a:p>
-          <a:p>
-            <a:pPr marL="285750" indent="-285750">
-              <a:spcAft>
-                <a:spcPts val="600"/>
-              </a:spcAft>
-              <a:buFont typeface="Arial" panose="020B0604020202020204"/>
-              <a:buChar char="•"/>
-            </a:pPr>
-            <a:r>
-              <a:rPr lang="zh-CN" sz="2000" b="0" dirty="0">
-                <a:solidFill>
-                  <a:srgbClr val="3B2F2A"/>
-                </a:solidFill>
-                <a:latin typeface="Noto Sans CJK SC"/>
-                <a:ea typeface="Noto Sans CJK SC"/>
-              </a:rPr>
-              <a:t>转折：offer来自朋友内推</a:t>
-            </a:r>
-          </a:p>
-          <a:p>
-            <a:pPr marL="285750" indent="-285750">
-              <a:spcAft>
-                <a:spcPts val="600"/>
-              </a:spcAft>
-              <a:buFont typeface="Arial" panose="020B0604020202020204"/>
-              <a:buChar char="•"/>
-            </a:pPr>
-            <a:r>
-              <a:rPr lang="zh-CN" sz="2000" b="0" dirty="0">
-                <a:solidFill>
-                  <a:srgbClr val="3B2F2A"/>
-                </a:solidFill>
-                <a:latin typeface="Noto Sans CJK SC"/>
-                <a:ea typeface="Noto Sans CJK SC"/>
-              </a:rPr>
-              <a:t>心态：第三个月最容易崩溃</a:t>
-            </a:r>
-          </a:p>
-          <a:p>
-            <a:pPr marL="285750" indent="-285750">
-              <a:spcAft>
-                <a:spcPts val="600"/>
-              </a:spcAft>
-              <a:buFont typeface="Arial" panose="020B0604020202020204"/>
-              <a:buChar char="•"/>
-            </a:pPr>
-            <a:r>
-              <a:rPr lang="zh-CN" sz="2000" b="0" dirty="0">
-                <a:solidFill>
-                  <a:srgbClr val="3B2F2A"/>
-                </a:solidFill>
-                <a:latin typeface="Noto Sans CJK SC"/>
-                <a:ea typeface="Noto Sans CJK SC"/>
-              </a:rPr>
-              <a:t>解药：看到更长gap的成功者</a:t>
-            </a:r>
-          </a:p>
-        </p:txBody>
-      </p:sp>
-      <p:sp>
-        <p:nvSpPr>
-          <p:cNvPr id="299" name="Page number"/>
-          <p:cNvSpPr txBox="1"/>
-          <p:nvPr/>
-        </p:nvSpPr>
-        <p:spPr>
-          <a:xfrm>
-            <a:off x="10600000" y="6250000"/>
-            <a:ext cx="1200000" cy="400000"/>
-          </a:xfrm>
-          <a:prstGeom prst="rect">
-            <a:avLst/>
-          </a:prstGeom>
-          <a:noFill/>
-          <a:ln/>
-        </p:spPr>
-        <p:txBody>
-          <a:bodyPr wrap="square" rtlCol="0">
-            <a:normAutofit/>
-          </a:bodyPr>
-          <a:lstStyle/>
-          <a:p>
-            <a:pPr algn="r">
-              <a:buNone/>
-            </a:pPr>
-            <a:r>
-              <a:rPr lang="zh-CN" sz="1000" b="0" dirty="0">
-                <a:solidFill>
-                  <a:srgbClr val="7E6F68"/>
-                </a:solidFill>
-                <a:latin typeface="Noto Sans CJK SC"/>
-                <a:ea typeface="Noto Sans CJK SC"/>
-              </a:rPr>
-              <a:t>29 / 33</a:t>
-            </a:r>
-          </a:p>
-        </p:txBody>
-      </p:sp>
-    </p:spTree>
-  </p:cSld>
-  <p:clrMapOvr>
-    <a:overrideClrMapping bg1="lt1" tx1="dk1" bg2="lt2" tx2="dk2" accent1="accent1" accent2="accent2" accent3="accent3" accent4="accent4" accent5="accent5" accent6="accent6" hlink="hlink" folHlink="folHlink"/>
-  </p:clrMapOvr>
-  <p:transition spd="med">
-    <p:fade/>
-  </p:transition>
-  <p:timing>
-    <p:tnLst>
-      <p:par>
-        <p:cTn id="1" dur="indefinite" restart="never" nodeType="tmRoot">
-          <p:childTnLst>
-            <p:seq concurrent="1" nextAc="seek">
-              <p:cTn id="2" dur="indefinite" nodeType="mainSeq">
-                <p:childTnLst>
-                  <p:par>
-                    <p:cTn id="3" fill="hold">
-                      <p:stCondLst>
-                        <p:cond delay="indefinite"/>
-                      </p:stCondLst>
-                      <p:childTnLst>
-                        <p:par>
-                          <p:cTn id="4" presetID="1" presetClass="entr" presetSubtype="0" fill="hold" grpId="0" nodeType="clickEffect">
-                            <p:stCondLst>
-                              <p:cond delay="0"/>
-                            </p:stCondLst>
-                            <p:childTnLst>
-                              <p:set>
-                                <p:cBhvr>
-                                  <p:cTn id="5" dur="1" fill="hold">
-                                    <p:stCondLst>
-                                      <p:cond delay="0"/>
-                                    </p:stCondLst>
-                                  </p:cTn>
-                                  <p:tgtEl>
-                                    <p:spTgt spid="293"/>
-                                  </p:tgtEl>
-                                  <p:attrNameLst>
-                                    <p:attrName>style.visibility</p:attrName>
-                                  </p:attrNameLst>
-                                </p:cBhvr>
-                                <p:to>
-                                  <p:strVal val="visible"/>
-                                </p:to>
-                              </p:set>
-                            </p:childTnLst>
-                          </p:cTn>
-                        </p:par>
-                      </p:childTnLst>
-                    </p:cTn>
-                  </p:par>
-                  <p:par>
-                    <p:cTn id="6" fill="hold">
-                      <p:stCondLst>
-                        <p:cond delay="indefinite"/>
-                      </p:stCondLst>
-                      <p:childTnLst>
-                        <p:par>
-                          <p:cTn id="7" presetID="1" presetClass="entr" presetSubtype="0" fill="hold" grpId="0" nodeType="clickEffect">
-                            <p:stCondLst>
-                              <p:cond delay="0"/>
-                            </p:stCondLst>
-                            <p:childTnLst>
-                              <p:set>
-                                <p:cBhvr>
-                                  <p:cTn id="8" dur="1" fill="hold">
-                                    <p:stCondLst>
-                                      <p:cond delay="0"/>
-                                    </p:stCondLst>
-                                  </p:cTn>
-                                  <p:tgtEl>
-                                    <p:spTgt spid="293"/>
-                                  </p:tgtEl>
-                                  <p:attrNameLst>
-                                    <p:attrName>style.visibility</p:attrName>
-                                  </p:attrNameLst>
-                                </p:cBhvr>
-                                <p:to>
-                                  <p:strVal val="visible"/>
-                                </p:to>
-                              </p:set>
-                            </p:childTnLst>
-                          </p:cTn>
-                        </p:par>
-                      </p:childTnLst>
-                    </p:cTn>
-                  </p:par>
-                  <p:par>
-                    <p:cTn id="9" fill="hold">
-                      <p:stCondLst>
-                        <p:cond delay="indefinite"/>
-                      </p:stCondLst>
-                      <p:childTnLst>
-                        <p:par>
-                          <p:cTn id="10" presetID="1" presetClass="entr" presetSubtype="0" fill="hold" grpId="0" nodeType="clickEffect">
-                            <p:stCondLst>
-                              <p:cond delay="0"/>
-                            </p:stCondLst>
-                            <p:childTnLst>
-                              <p:set>
-                                <p:cBhvr>
-                                  <p:cTn id="11" dur="1" fill="hold">
-                                    <p:stCondLst>
-                                      <p:cond delay="0"/>
-                                    </p:stCondLst>
-                                  </p:cTn>
-                                  <p:tgtEl>
-                                    <p:spTgt spid="293"/>
-                                  </p:tgtEl>
-                                  <p:attrNameLst>
-                                    <p:attrName>style.visibility</p:attrName>
-                                  </p:attrNameLst>
-                                </p:cBhvr>
-                                <p:to>
-                                  <p:strVal val="visible"/>
-                                </p:to>
-                              </p:set>
-                            </p:childTnLst>
-                          </p:cTn>
-                        </p:par>
-                      </p:childTnLst>
-                    </p:cTn>
-                  </p:par>
-                  <p:par>
-                    <p:cTn id="12" fill="hold">
-                      <p:stCondLst>
-                        <p:cond delay="indefinite"/>
-                      </p:stCondLst>
-                      <p:childTnLst>
-                        <p:par>
-                          <p:cTn id="13" presetID="1" presetClass="entr" presetSubtype="0" fill="hold" grpId="0" nodeType="clickEffect">
-                            <p:stCondLst>
-                              <p:cond delay="0"/>
-                            </p:stCondLst>
-                            <p:childTnLst>
-                              <p:set>
-                                <p:cBhvr>
-                                  <p:cTn id="14" dur="1" fill="hold">
-                                    <p:stCondLst>
-                                      <p:cond delay="0"/>
-                                    </p:stCondLst>
-                                  </p:cTn>
-                                  <p:tgtEl>
-                                    <p:spTgt spid="293"/>
-                                  </p:tgtEl>
-                                  <p:attrNameLst>
-                                    <p:attrName>style.visibility</p:attrName>
-                                  </p:attrNameLst>
-                                </p:cBhvr>
-                                <p:to>
-                                  <p:strVal val="visible"/>
-                                </p:to>
-                              </p:set>
-                            </p:childTnLst>
-                          </p:cTn>
-                        </p:par>
-                      </p:childTnLst>
-                    </p:cTn>
-                  </p:par>
-                  <p:par>
-                    <p:cTn id="15" fill="hold">
-                      <p:stCondLst>
-                        <p:cond delay="indefinite"/>
-                      </p:stCondLst>
-                      <p:childTnLst>
-                        <p:par>
-                          <p:cTn id="16" presetID="1" presetClass="entr" presetSubtype="0" fill="hold" grpId="0" nodeType="clickEffect">
-                            <p:stCondLst>
-                              <p:cond delay="0"/>
-                            </p:stCondLst>
-                            <p:childTnLst>
-                              <p:set>
-                                <p:cBhvr>
-                                  <p:cTn id="17" dur="1" fill="hold">
-                                    <p:stCondLst>
-                                      <p:cond delay="0"/>
-                                    </p:stCondLst>
-                                  </p:cTn>
-                                  <p:tgtEl>
-                                    <p:spTgt spid="293"/>
-                                  </p:tgtEl>
-                                  <p:attrNameLst>
-                                    <p:attrName>style.visibility</p:attrName>
-                                  </p:attrNameLst>
-                                </p:cBhvr>
-                                <p:to>
-                                  <p:strVal val="visible"/>
-                                </p:to>
-                              </p:set>
-                            </p:childTnLst>
-                          </p:cTn>
-                        </p:par>
-                      </p:childTnLst>
-                    </p:cTn>
-                  </p:par>
-                  <p:par>
-                    <p:cTn id="18" fill="hold">
-                      <p:stCondLst>
-                        <p:cond delay="indefinite"/>
-                      </p:stCondLst>
-                      <p:childTnLst>
-                        <p:par>
-                          <p:cTn id="19" presetID="1" presetClass="entr" presetSubtype="0" fill="hold" grpId="0" nodeType="clickEffect">
-                            <p:stCondLst>
-                              <p:cond delay="0"/>
-                            </p:stCondLst>
-                            <p:childTnLst>
-                              <p:set>
-                                <p:cBhvr>
-                                  <p:cTn id="20" dur="1" fill="hold">
-                                    <p:stCondLst>
-                                      <p:cond delay="0"/>
-                                    </p:stCondLst>
-                                  </p:cTn>
-                                  <p:tgtEl>
-                                    <p:spTgt spid="293"/>
-                                  </p:tgtEl>
-                                  <p:attrNameLst>
-                                    <p:attrName>style.visibility</p:attrName>
-                                  </p:attrNameLst>
-                                </p:cBhvr>
-                                <p:to>
-                                  <p:strVal val="visible"/>
-                                </p:to>
-                              </p:set>
-                            </p:childTnLst>
-                          </p:cTn>
-                        </p:par>
-                      </p:childTnLst>
-                    </p:cTn>
-                  </p:par>
-                </p:childTnLst>
-              </p:cTn>
-              <p:prevCondLst>
-                <p:cond evt="onPrev" delay="0">
-                  <p:tgtEl>
-                    <p:sldTgt/>
-                  </p:tgtEl>
-                </p:cond>
-              </p:prevCondLst>
-              <p:nextCondLst>
-                <p:cond evt="onNext" delay="0">
-                  <p:tgtEl>
-                    <p:sldTgt/>
-                  </p:tgtEl>
-                </p:cond>
-              </p:nextCondLst>
-            </p:seq>
-          </p:childTnLst>
-        </p:cTn>
-      </p:par>
-    </p:tnLst>
-    <p:bldLst>
-      <p:bldP spid="293" grpId="0"/>
-    </p:bldLst>
-  </p:timing>
 </p:sld>
 </file>
 
@@ -12008,7 +9939,7 @@
                 <a:latin typeface="Noto Sans CJK SC"/>
                 <a:ea typeface="Noto Sans CJK SC"/>
               </a:rPr>
-              <a:t>候选：数据/新媒体/AIGC内容运营</a:t>
+              <a:t>候选：数据运营 或 新媒体运营</a:t>
             </a:r>
           </a:p>
           <a:p>
@@ -12046,7 +9977,7 @@
                 <a:latin typeface="Noto Sans CJK SC"/>
                 <a:ea typeface="Noto Sans CJK SC"/>
               </a:rPr>
-              <a:t>候选：社群/行政/AI训练师</a:t>
+              <a:t>候选：社群运营 或 行政专员</a:t>
             </a:r>
           </a:p>
           <a:p>
@@ -12123,7 +10054,7 @@
                 <a:latin typeface="Noto Sans CJK SC"/>
                 <a:ea typeface="Noto Sans CJK SC"/>
               </a:rPr>
-              <a:t>03 / 33</a:t>
+              <a:t>03 / 26</a:t>
             </a:r>
           </a:p>
         </p:txBody>
@@ -12385,1724 +10316,6 @@
       <p:bldP spid="33" grpId="0"/>
     </p:bldLst>
   </p:timing>
-</p:sld>
-</file>
-
-<file path=ppt/slides/slide30.xml><?xml version="1.0" encoding="utf-8"?>
-<p:sld xmlns:a="http://schemas.openxmlformats.org/drawingml/2006/main" xmlns:r="http://schemas.openxmlformats.org/officeDocument/2006/relationships" xmlns:p="http://schemas.openxmlformats.org/presentationml/2006/main">
-  <p:cSld>
-    <p:bg>
-      <p:bgPr>
-        <a:solidFill>
-          <a:srgbClr val="FFF8EC"/>
-        </a:solidFill>
-        <a:effectLst/>
-      </p:bgPr>
-    </p:bg>
-    <p:spTree>
-      <p:nvGrpSpPr>
-        <p:cNvPr id="1" name=""/>
-        <p:cNvGrpSpPr/>
-        <p:nvPr/>
-      </p:nvGrpSpPr>
-      <p:grpSpPr>
-        <a:xfrm>
-          <a:off x="0" y="0"/>
-          <a:ext cx="0" cy="0"/>
-          <a:chOff x="0" y="0"/>
-          <a:chExt cx="0" cy="0"/>
-        </a:xfrm>
-      </p:grpSpPr>
-      <p:sp>
-        <p:nvSpPr>
-          <p:cNvPr id="301" name="Kicker"/>
-          <p:cNvSpPr txBox="1"/>
-          <p:nvPr/>
-        </p:nvSpPr>
-        <p:spPr>
-          <a:xfrm>
-            <a:off x="900000" y="420000"/>
-            <a:ext cx="10000000" cy="420000"/>
-          </a:xfrm>
-          <a:prstGeom prst="rect">
-            <a:avLst/>
-          </a:prstGeom>
-          <a:noFill/>
-          <a:ln/>
-        </p:spPr>
-        <p:txBody>
-          <a:bodyPr wrap="square" rtlCol="0">
-            <a:normAutofit/>
-          </a:bodyPr>
-          <a:lstStyle/>
-          <a:p>
-            <a:pPr>
-              <a:buNone/>
-            </a:pPr>
-            <a:r>
-              <a:rPr lang="zh-CN" sz="1400" b="1" dirty="0">
-                <a:solidFill>
-                  <a:srgbClr val="E58A2F"/>
-                </a:solidFill>
-                <a:latin typeface="Noto Sans CJK SC"/>
-                <a:ea typeface="Noto Sans CJK SC"/>
-              </a:rPr>
-              <a:t>12周行动计划</a:t>
-            </a:r>
-          </a:p>
-        </p:txBody>
-      </p:sp>
-      <p:sp>
-        <p:nvSpPr>
-          <p:cNvPr id="302" name="Title"/>
-          <p:cNvSpPr txBox="1"/>
-          <p:nvPr/>
-        </p:nvSpPr>
-        <p:spPr>
-          <a:xfrm>
-            <a:off x="900000" y="920000"/>
-            <a:ext cx="10300000" cy="800000"/>
-          </a:xfrm>
-          <a:prstGeom prst="rect">
-            <a:avLst/>
-          </a:prstGeom>
-          <a:noFill/>
-          <a:ln/>
-        </p:spPr>
-        <p:txBody>
-          <a:bodyPr wrap="square" rtlCol="0">
-            <a:normAutofit/>
-          </a:bodyPr>
-          <a:lstStyle/>
-          <a:p>
-            <a:pPr>
-              <a:buNone/>
-            </a:pPr>
-            <a:r>
-              <a:rPr lang="zh-CN" sz="3400" b="1" dirty="0">
-                <a:solidFill>
-                  <a:srgbClr val="3B2F2A"/>
-                </a:solidFill>
-                <a:latin typeface="Noto Sans CJK SC"/>
-                <a:ea typeface="Noto Sans CJK SC"/>
-              </a:rPr>
-              <a:t>12周行动计划</a:t>
-            </a:r>
-          </a:p>
-        </p:txBody>
-      </p:sp>
-      <p:sp>
-        <p:nvSpPr>
-          <p:cNvPr id="303" name="Body"/>
-          <p:cNvSpPr txBox="1"/>
-          <p:nvPr/>
-        </p:nvSpPr>
-        <p:spPr>
-          <a:xfrm>
-            <a:off x="1050000" y="1850000"/>
-            <a:ext cx="10100000" cy="4500000"/>
-          </a:xfrm>
-          <a:prstGeom prst="rect">
-            <a:avLst/>
-          </a:prstGeom>
-          <a:noFill/>
-          <a:ln/>
-        </p:spPr>
-        <p:txBody>
-          <a:bodyPr wrap="square" rtlCol="0">
-            <a:normAutofit/>
-          </a:bodyPr>
-          <a:lstStyle/>
-          <a:p>
-            <a:pPr marL="285750" indent="-285750">
-              <a:spcAft>
-                <a:spcPts val="600"/>
-              </a:spcAft>
-              <a:buFont typeface="Arial" panose="020B0604020202020204"/>
-              <a:buChar char="•"/>
-            </a:pPr>
-            <a:r>
-              <a:rPr lang="zh-CN" sz="2000" b="0" dirty="0">
-                <a:solidFill>
-                  <a:srgbClr val="3B2F2A"/>
-                </a:solidFill>
-                <a:latin typeface="Noto Sans CJK SC"/>
-                <a:ea typeface="Noto Sans CJK SC"/>
-              </a:rPr>
-              <a:t>第1周：定方向+看100条JD</a:t>
-            </a:r>
-          </a:p>
-          <a:p>
-            <a:pPr marL="285750" indent="-285750">
-              <a:spcAft>
-                <a:spcPts val="600"/>
-              </a:spcAft>
-              <a:buFont typeface="Arial" panose="020B0604020202020204"/>
-              <a:buChar char="•"/>
-            </a:pPr>
-            <a:r>
-              <a:rPr lang="zh-CN" sz="2000" b="0" dirty="0">
-                <a:solidFill>
-                  <a:srgbClr val="3B2F2A"/>
-                </a:solidFill>
-                <a:latin typeface="Noto Sans CJK SC"/>
-                <a:ea typeface="Noto Sans CJK SC"/>
-              </a:rPr>
-              <a:t>第2到6周：每天学3-4小时</a:t>
-            </a:r>
-          </a:p>
-          <a:p>
-            <a:pPr marL="285750" indent="-285750">
-              <a:spcAft>
-                <a:spcPts val="600"/>
-              </a:spcAft>
-              <a:buFont typeface="Arial" panose="020B0604020202020204"/>
-              <a:buChar char="•"/>
-            </a:pPr>
-            <a:r>
-              <a:rPr lang="zh-CN" sz="2000" b="0" dirty="0">
-                <a:solidFill>
-                  <a:srgbClr val="3B2F2A"/>
-                </a:solidFill>
-                <a:latin typeface="Noto Sans CJK SC"/>
-                <a:ea typeface="Noto Sans CJK SC"/>
-              </a:rPr>
-              <a:t>第5周起：改简历+小量试投</a:t>
-            </a:r>
-          </a:p>
-          <a:p>
-            <a:pPr marL="285750" indent="-285750">
-              <a:spcAft>
-                <a:spcPts val="600"/>
-              </a:spcAft>
-              <a:buFont typeface="Arial" panose="020B0604020202020204"/>
-              <a:buChar char="•"/>
-            </a:pPr>
-            <a:r>
-              <a:rPr lang="zh-CN" sz="2000" b="0" dirty="0">
-                <a:solidFill>
-                  <a:srgbClr val="3B2F2A"/>
-                </a:solidFill>
-                <a:latin typeface="Noto Sans CJK SC"/>
-                <a:ea typeface="Noto Sans CJK SC"/>
-              </a:rPr>
-              <a:t>第6到12周：每周投10-20个</a:t>
-            </a:r>
-          </a:p>
-          <a:p>
-            <a:pPr marL="285750" indent="-285750">
-              <a:spcAft>
-                <a:spcPts val="600"/>
-              </a:spcAft>
-              <a:buFont typeface="Arial" panose="020B0604020202020204"/>
-              <a:buChar char="•"/>
-            </a:pPr>
-            <a:r>
-              <a:rPr lang="zh-CN" sz="2000" b="0" dirty="0">
-                <a:solidFill>
-                  <a:srgbClr val="3B2F2A"/>
-                </a:solidFill>
-                <a:latin typeface="Noto Sans CJK SC"/>
-                <a:ea typeface="Noto Sans CJK SC"/>
-              </a:rPr>
-              <a:t>每场面试后：写三行复盘</a:t>
-            </a:r>
-          </a:p>
-          <a:p>
-            <a:pPr marL="285750" indent="-285750">
-              <a:spcAft>
-                <a:spcPts val="600"/>
-              </a:spcAft>
-              <a:buFont typeface="Arial" panose="020B0604020202020204"/>
-              <a:buChar char="•"/>
-            </a:pPr>
-            <a:r>
-              <a:rPr lang="zh-CN" sz="2000" b="0" dirty="0">
-                <a:solidFill>
-                  <a:srgbClr val="3B2F2A"/>
-                </a:solidFill>
-                <a:latin typeface="Noto Sans CJK SC"/>
-                <a:ea typeface="Noto Sans CJK SC"/>
-              </a:rPr>
-              <a:t>心法：先拿2-3个offer再挑</a:t>
-            </a:r>
-          </a:p>
-        </p:txBody>
-      </p:sp>
-      <p:sp>
-        <p:nvSpPr>
-          <p:cNvPr id="309" name="Page number"/>
-          <p:cNvSpPr txBox="1"/>
-          <p:nvPr/>
-        </p:nvSpPr>
-        <p:spPr>
-          <a:xfrm>
-            <a:off x="10600000" y="6250000"/>
-            <a:ext cx="1200000" cy="400000"/>
-          </a:xfrm>
-          <a:prstGeom prst="rect">
-            <a:avLst/>
-          </a:prstGeom>
-          <a:noFill/>
-          <a:ln/>
-        </p:spPr>
-        <p:txBody>
-          <a:bodyPr wrap="square" rtlCol="0">
-            <a:normAutofit/>
-          </a:bodyPr>
-          <a:lstStyle/>
-          <a:p>
-            <a:pPr algn="r">
-              <a:buNone/>
-            </a:pPr>
-            <a:r>
-              <a:rPr lang="zh-CN" sz="1000" b="0" dirty="0">
-                <a:solidFill>
-                  <a:srgbClr val="7E6F68"/>
-                </a:solidFill>
-                <a:latin typeface="Noto Sans CJK SC"/>
-                <a:ea typeface="Noto Sans CJK SC"/>
-              </a:rPr>
-              <a:t>30 / 33</a:t>
-            </a:r>
-          </a:p>
-        </p:txBody>
-      </p:sp>
-    </p:spTree>
-  </p:cSld>
-  <p:clrMapOvr>
-    <a:overrideClrMapping bg1="lt1" tx1="dk1" bg2="lt2" tx2="dk2" accent1="accent1" accent2="accent2" accent3="accent3" accent4="accent4" accent5="accent5" accent6="accent6" hlink="hlink" folHlink="folHlink"/>
-  </p:clrMapOvr>
-  <p:transition spd="med">
-    <p:fade/>
-  </p:transition>
-  <p:timing>
-    <p:tnLst>
-      <p:par>
-        <p:cTn id="1" dur="indefinite" restart="never" nodeType="tmRoot">
-          <p:childTnLst>
-            <p:seq concurrent="1" nextAc="seek">
-              <p:cTn id="2" dur="indefinite" nodeType="mainSeq">
-                <p:childTnLst>
-                  <p:par>
-                    <p:cTn id="3" fill="hold">
-                      <p:stCondLst>
-                        <p:cond delay="indefinite"/>
-                      </p:stCondLst>
-                      <p:childTnLst>
-                        <p:par>
-                          <p:cTn id="4" presetID="1" presetClass="entr" presetSubtype="0" fill="hold" grpId="0" nodeType="clickEffect">
-                            <p:stCondLst>
-                              <p:cond delay="0"/>
-                            </p:stCondLst>
-                            <p:childTnLst>
-                              <p:set>
-                                <p:cBhvr>
-                                  <p:cTn id="5" dur="1" fill="hold">
-                                    <p:stCondLst>
-                                      <p:cond delay="0"/>
-                                    </p:stCondLst>
-                                  </p:cTn>
-                                  <p:tgtEl>
-                                    <p:spTgt spid="303"/>
-                                  </p:tgtEl>
-                                  <p:attrNameLst>
-                                    <p:attrName>style.visibility</p:attrName>
-                                  </p:attrNameLst>
-                                </p:cBhvr>
-                                <p:to>
-                                  <p:strVal val="visible"/>
-                                </p:to>
-                              </p:set>
-                            </p:childTnLst>
-                          </p:cTn>
-                        </p:par>
-                      </p:childTnLst>
-                    </p:cTn>
-                  </p:par>
-                  <p:par>
-                    <p:cTn id="6" fill="hold">
-                      <p:stCondLst>
-                        <p:cond delay="indefinite"/>
-                      </p:stCondLst>
-                      <p:childTnLst>
-                        <p:par>
-                          <p:cTn id="7" presetID="1" presetClass="entr" presetSubtype="0" fill="hold" grpId="0" nodeType="clickEffect">
-                            <p:stCondLst>
-                              <p:cond delay="0"/>
-                            </p:stCondLst>
-                            <p:childTnLst>
-                              <p:set>
-                                <p:cBhvr>
-                                  <p:cTn id="8" dur="1" fill="hold">
-                                    <p:stCondLst>
-                                      <p:cond delay="0"/>
-                                    </p:stCondLst>
-                                  </p:cTn>
-                                  <p:tgtEl>
-                                    <p:spTgt spid="303"/>
-                                  </p:tgtEl>
-                                  <p:attrNameLst>
-                                    <p:attrName>style.visibility</p:attrName>
-                                  </p:attrNameLst>
-                                </p:cBhvr>
-                                <p:to>
-                                  <p:strVal val="visible"/>
-                                </p:to>
-                              </p:set>
-                            </p:childTnLst>
-                          </p:cTn>
-                        </p:par>
-                      </p:childTnLst>
-                    </p:cTn>
-                  </p:par>
-                  <p:par>
-                    <p:cTn id="9" fill="hold">
-                      <p:stCondLst>
-                        <p:cond delay="indefinite"/>
-                      </p:stCondLst>
-                      <p:childTnLst>
-                        <p:par>
-                          <p:cTn id="10" presetID="1" presetClass="entr" presetSubtype="0" fill="hold" grpId="0" nodeType="clickEffect">
-                            <p:stCondLst>
-                              <p:cond delay="0"/>
-                            </p:stCondLst>
-                            <p:childTnLst>
-                              <p:set>
-                                <p:cBhvr>
-                                  <p:cTn id="11" dur="1" fill="hold">
-                                    <p:stCondLst>
-                                      <p:cond delay="0"/>
-                                    </p:stCondLst>
-                                  </p:cTn>
-                                  <p:tgtEl>
-                                    <p:spTgt spid="303"/>
-                                  </p:tgtEl>
-                                  <p:attrNameLst>
-                                    <p:attrName>style.visibility</p:attrName>
-                                  </p:attrNameLst>
-                                </p:cBhvr>
-                                <p:to>
-                                  <p:strVal val="visible"/>
-                                </p:to>
-                              </p:set>
-                            </p:childTnLst>
-                          </p:cTn>
-                        </p:par>
-                      </p:childTnLst>
-                    </p:cTn>
-                  </p:par>
-                  <p:par>
-                    <p:cTn id="12" fill="hold">
-                      <p:stCondLst>
-                        <p:cond delay="indefinite"/>
-                      </p:stCondLst>
-                      <p:childTnLst>
-                        <p:par>
-                          <p:cTn id="13" presetID="1" presetClass="entr" presetSubtype="0" fill="hold" grpId="0" nodeType="clickEffect">
-                            <p:stCondLst>
-                              <p:cond delay="0"/>
-                            </p:stCondLst>
-                            <p:childTnLst>
-                              <p:set>
-                                <p:cBhvr>
-                                  <p:cTn id="14" dur="1" fill="hold">
-                                    <p:stCondLst>
-                                      <p:cond delay="0"/>
-                                    </p:stCondLst>
-                                  </p:cTn>
-                                  <p:tgtEl>
-                                    <p:spTgt spid="303"/>
-                                  </p:tgtEl>
-                                  <p:attrNameLst>
-                                    <p:attrName>style.visibility</p:attrName>
-                                  </p:attrNameLst>
-                                </p:cBhvr>
-                                <p:to>
-                                  <p:strVal val="visible"/>
-                                </p:to>
-                              </p:set>
-                            </p:childTnLst>
-                          </p:cTn>
-                        </p:par>
-                      </p:childTnLst>
-                    </p:cTn>
-                  </p:par>
-                  <p:par>
-                    <p:cTn id="15" fill="hold">
-                      <p:stCondLst>
-                        <p:cond delay="indefinite"/>
-                      </p:stCondLst>
-                      <p:childTnLst>
-                        <p:par>
-                          <p:cTn id="16" presetID="1" presetClass="entr" presetSubtype="0" fill="hold" grpId="0" nodeType="clickEffect">
-                            <p:stCondLst>
-                              <p:cond delay="0"/>
-                            </p:stCondLst>
-                            <p:childTnLst>
-                              <p:set>
-                                <p:cBhvr>
-                                  <p:cTn id="17" dur="1" fill="hold">
-                                    <p:stCondLst>
-                                      <p:cond delay="0"/>
-                                    </p:stCondLst>
-                                  </p:cTn>
-                                  <p:tgtEl>
-                                    <p:spTgt spid="303"/>
-                                  </p:tgtEl>
-                                  <p:attrNameLst>
-                                    <p:attrName>style.visibility</p:attrName>
-                                  </p:attrNameLst>
-                                </p:cBhvr>
-                                <p:to>
-                                  <p:strVal val="visible"/>
-                                </p:to>
-                              </p:set>
-                            </p:childTnLst>
-                          </p:cTn>
-                        </p:par>
-                      </p:childTnLst>
-                    </p:cTn>
-                  </p:par>
-                  <p:par>
-                    <p:cTn id="18" fill="hold">
-                      <p:stCondLst>
-                        <p:cond delay="indefinite"/>
-                      </p:stCondLst>
-                      <p:childTnLst>
-                        <p:par>
-                          <p:cTn id="19" presetID="1" presetClass="entr" presetSubtype="0" fill="hold" grpId="0" nodeType="clickEffect">
-                            <p:stCondLst>
-                              <p:cond delay="0"/>
-                            </p:stCondLst>
-                            <p:childTnLst>
-                              <p:set>
-                                <p:cBhvr>
-                                  <p:cTn id="20" dur="1" fill="hold">
-                                    <p:stCondLst>
-                                      <p:cond delay="0"/>
-                                    </p:stCondLst>
-                                  </p:cTn>
-                                  <p:tgtEl>
-                                    <p:spTgt spid="303"/>
-                                  </p:tgtEl>
-                                  <p:attrNameLst>
-                                    <p:attrName>style.visibility</p:attrName>
-                                  </p:attrNameLst>
-                                </p:cBhvr>
-                                <p:to>
-                                  <p:strVal val="visible"/>
-                                </p:to>
-                              </p:set>
-                            </p:childTnLst>
-                          </p:cTn>
-                        </p:par>
-                      </p:childTnLst>
-                    </p:cTn>
-                  </p:par>
-                </p:childTnLst>
-              </p:cTn>
-              <p:prevCondLst>
-                <p:cond evt="onPrev" delay="0">
-                  <p:tgtEl>
-                    <p:sldTgt/>
-                  </p:tgtEl>
-                </p:cond>
-              </p:prevCondLst>
-              <p:nextCondLst>
-                <p:cond evt="onNext" delay="0">
-                  <p:tgtEl>
-                    <p:sldTgt/>
-                  </p:tgtEl>
-                </p:cond>
-              </p:nextCondLst>
-            </p:seq>
-          </p:childTnLst>
-        </p:cTn>
-      </p:par>
-    </p:tnLst>
-    <p:bldLst>
-      <p:bldP spid="303" grpId="0"/>
-    </p:bldLst>
-  </p:timing>
-</p:sld>
-</file>
-
-<file path=ppt/slides/slide31.xml><?xml version="1.0" encoding="utf-8"?>
-<p:sld xmlns:a="http://schemas.openxmlformats.org/drawingml/2006/main" xmlns:r="http://schemas.openxmlformats.org/officeDocument/2006/relationships" xmlns:p="http://schemas.openxmlformats.org/presentationml/2006/main">
-  <p:cSld>
-    <p:bg>
-      <p:bgPr>
-        <a:solidFill>
-          <a:srgbClr val="FFF8EC"/>
-        </a:solidFill>
-        <a:effectLst/>
-      </p:bgPr>
-    </p:bg>
-    <p:spTree>
-      <p:nvGrpSpPr>
-        <p:cNvPr id="1" name=""/>
-        <p:cNvGrpSpPr/>
-        <p:nvPr/>
-      </p:nvGrpSpPr>
-      <p:grpSpPr>
-        <a:xfrm>
-          <a:off x="0" y="0"/>
-          <a:ext cx="0" cy="0"/>
-          <a:chOff x="0" y="0"/>
-          <a:chExt cx="0" cy="0"/>
-        </a:xfrm>
-      </p:grpSpPr>
-      <p:sp>
-        <p:nvSpPr>
-          <p:cNvPr id="311" name="Kicker"/>
-          <p:cNvSpPr txBox="1"/>
-          <p:nvPr/>
-        </p:nvSpPr>
-        <p:spPr>
-          <a:xfrm>
-            <a:off x="900000" y="420000"/>
-            <a:ext cx="10000000" cy="420000"/>
-          </a:xfrm>
-          <a:prstGeom prst="rect">
-            <a:avLst/>
-          </a:prstGeom>
-          <a:noFill/>
-          <a:ln/>
-        </p:spPr>
-        <p:txBody>
-          <a:bodyPr wrap="square" rtlCol="0">
-            <a:normAutofit/>
-          </a:bodyPr>
-          <a:lstStyle/>
-          <a:p>
-            <a:pPr>
-              <a:buNone/>
-            </a:pPr>
-            <a:r>
-              <a:rPr lang="zh-CN" sz="1400" b="1" dirty="0">
-                <a:solidFill>
-                  <a:srgbClr val="E58A2F"/>
-                </a:solidFill>
-                <a:latin typeface="Noto Sans CJK SC"/>
-                <a:ea typeface="Noto Sans CJK SC"/>
-              </a:rPr>
-              <a:t>避坑清单</a:t>
-            </a:r>
-          </a:p>
-        </p:txBody>
-      </p:sp>
-      <p:sp>
-        <p:nvSpPr>
-          <p:cNvPr id="312" name="Title"/>
-          <p:cNvSpPr txBox="1"/>
-          <p:nvPr/>
-        </p:nvSpPr>
-        <p:spPr>
-          <a:xfrm>
-            <a:off x="900000" y="920000"/>
-            <a:ext cx="10300000" cy="800000"/>
-          </a:xfrm>
-          <a:prstGeom prst="rect">
-            <a:avLst/>
-          </a:prstGeom>
-          <a:noFill/>
-          <a:ln/>
-        </p:spPr>
-        <p:txBody>
-          <a:bodyPr wrap="square" rtlCol="0">
-            <a:normAutofit/>
-          </a:bodyPr>
-          <a:lstStyle/>
-          <a:p>
-            <a:pPr>
-              <a:buNone/>
-            </a:pPr>
-            <a:r>
-              <a:rPr lang="zh-CN" sz="3400" b="1" dirty="0">
-                <a:solidFill>
-                  <a:srgbClr val="3B2F2A"/>
-                </a:solidFill>
-                <a:latin typeface="Noto Sans CJK SC"/>
-                <a:ea typeface="Noto Sans CJK SC"/>
-              </a:rPr>
-              <a:t>避坑清单</a:t>
-            </a:r>
-          </a:p>
-        </p:txBody>
-      </p:sp>
-      <p:sp>
-        <p:nvSpPr>
-          <p:cNvPr id="313" name="Body"/>
-          <p:cNvSpPr txBox="1"/>
-          <p:nvPr/>
-        </p:nvSpPr>
-        <p:spPr>
-          <a:xfrm>
-            <a:off x="1050000" y="1850000"/>
-            <a:ext cx="10100000" cy="4500000"/>
-          </a:xfrm>
-          <a:prstGeom prst="rect">
-            <a:avLst/>
-          </a:prstGeom>
-          <a:noFill/>
-          <a:ln/>
-        </p:spPr>
-        <p:txBody>
-          <a:bodyPr wrap="square" rtlCol="0">
-            <a:normAutofit/>
-          </a:bodyPr>
-          <a:lstStyle/>
-          <a:p>
-            <a:pPr marL="285750" indent="-285750">
-              <a:spcAft>
-                <a:spcPts val="600"/>
-              </a:spcAft>
-              <a:buFont typeface="Arial" panose="020B0604020202020204"/>
-              <a:buChar char="•"/>
-            </a:pPr>
-            <a:r>
-              <a:rPr lang="zh-CN" sz="2000" b="0" dirty="0">
-                <a:solidFill>
-                  <a:srgbClr val="3B2F2A"/>
-                </a:solidFill>
-                <a:latin typeface="Noto Sans CJK SC"/>
-                <a:ea typeface="Noto Sans CJK SC"/>
-              </a:rPr>
-              <a:t>培训贷：包就业等于贷2-3万</a:t>
-            </a:r>
-          </a:p>
-          <a:p>
-            <a:pPr marL="285750" indent="-285750">
-              <a:spcAft>
-                <a:spcPts val="600"/>
-              </a:spcAft>
-              <a:buFont typeface="Arial" panose="020B0604020202020204"/>
-              <a:buChar char="•"/>
-            </a:pPr>
-            <a:r>
-              <a:rPr lang="zh-CN" sz="2000" b="0" dirty="0">
-                <a:solidFill>
-                  <a:srgbClr val="3B2F2A"/>
-                </a:solidFill>
-                <a:latin typeface="Noto Sans CJK SC"/>
-                <a:ea typeface="Noto Sans CJK SC"/>
-              </a:rPr>
-              <a:t>入职先交钱的岗位都是违法</a:t>
-            </a:r>
-          </a:p>
-          <a:p>
-            <a:pPr marL="285750" indent="-285750">
-              <a:spcAft>
-                <a:spcPts val="600"/>
-              </a:spcAft>
-              <a:buFont typeface="Arial" panose="020B0604020202020204"/>
-              <a:buChar char="•"/>
-            </a:pPr>
-            <a:r>
-              <a:rPr lang="zh-CN" sz="2000" b="0" dirty="0">
-                <a:solidFill>
-                  <a:srgbClr val="3B2F2A"/>
-                </a:solidFill>
-                <a:latin typeface="Noto Sans CJK SC"/>
-                <a:ea typeface="Noto Sans CJK SC"/>
-              </a:rPr>
-              <a:t>刷单、点赞员兼职全是诈骗</a:t>
-            </a:r>
-          </a:p>
-          <a:p>
-            <a:pPr marL="285750" indent="-285750">
-              <a:spcAft>
-                <a:spcPts val="600"/>
-              </a:spcAft>
-              <a:buFont typeface="Arial" panose="020B0604020202020204"/>
-              <a:buChar char="•"/>
-            </a:pPr>
-            <a:r>
-              <a:rPr lang="zh-CN" sz="2000" b="0" dirty="0">
-                <a:solidFill>
-                  <a:srgbClr val="3B2F2A"/>
-                </a:solidFill>
-                <a:latin typeface="Noto Sans CJK SC"/>
-                <a:ea typeface="Noto Sans CJK SC"/>
-              </a:rPr>
-              <a:t>便宜求职课发网盘链接是套路</a:t>
-            </a:r>
-          </a:p>
-          <a:p>
-            <a:pPr marL="285750" indent="-285750">
-              <a:spcAft>
-                <a:spcPts val="600"/>
-              </a:spcAft>
-              <a:buFont typeface="Arial" panose="020B0604020202020204"/>
-              <a:buChar char="•"/>
-            </a:pPr>
-            <a:r>
-              <a:rPr lang="zh-CN" sz="2000" b="0" dirty="0">
-                <a:solidFill>
-                  <a:srgbClr val="3B2F2A"/>
-                </a:solidFill>
-                <a:latin typeface="Noto Sans CJK SC"/>
-                <a:ea typeface="Noto Sans CJK SC"/>
-              </a:rPr>
-              <a:t>无经验月入两万要高度警惕</a:t>
-            </a:r>
-          </a:p>
-          <a:p>
-            <a:pPr marL="285750" indent="-285750">
-              <a:spcAft>
-                <a:spcPts val="600"/>
-              </a:spcAft>
-              <a:buFont typeface="Arial" panose="020B0604020202020204"/>
-              <a:buChar char="•"/>
-            </a:pPr>
-            <a:r>
-              <a:rPr lang="zh-CN" sz="2000" b="0" dirty="0">
-                <a:solidFill>
-                  <a:srgbClr val="3B2F2A"/>
-                </a:solidFill>
-                <a:latin typeface="Noto Sans CJK SC"/>
-                <a:ea typeface="Noto Sans CJK SC"/>
-              </a:rPr>
-              <a:t>试用期不缴社保可依法维权</a:t>
-            </a:r>
-          </a:p>
-          <a:p>
-            <a:pPr marL="285750" indent="-285750">
-              <a:spcAft>
-                <a:spcPts val="600"/>
-              </a:spcAft>
-              <a:buFont typeface="Arial" panose="020B0604020202020204"/>
-              <a:buChar char="•"/>
-            </a:pPr>
-            <a:r>
-              <a:rPr lang="zh-CN" sz="2000" b="0" dirty="0">
-                <a:solidFill>
-                  <a:srgbClr val="3B2F2A"/>
-                </a:solidFill>
-                <a:latin typeface="Noto Sans CJK SC"/>
-                <a:ea typeface="Noto Sans CJK SC"/>
-              </a:rPr>
-              <a:t>境外高薪邀约绝对不出境</a:t>
-            </a:r>
-          </a:p>
-        </p:txBody>
-      </p:sp>
-      <p:sp>
-        <p:nvSpPr>
-          <p:cNvPr id="319" name="Page number"/>
-          <p:cNvSpPr txBox="1"/>
-          <p:nvPr/>
-        </p:nvSpPr>
-        <p:spPr>
-          <a:xfrm>
-            <a:off x="10600000" y="6250000"/>
-            <a:ext cx="1200000" cy="400000"/>
-          </a:xfrm>
-          <a:prstGeom prst="rect">
-            <a:avLst/>
-          </a:prstGeom>
-          <a:noFill/>
-          <a:ln/>
-        </p:spPr>
-        <p:txBody>
-          <a:bodyPr wrap="square" rtlCol="0">
-            <a:normAutofit/>
-          </a:bodyPr>
-          <a:lstStyle/>
-          <a:p>
-            <a:pPr algn="r">
-              <a:buNone/>
-            </a:pPr>
-            <a:r>
-              <a:rPr lang="zh-CN" sz="1000" b="0" dirty="0">
-                <a:solidFill>
-                  <a:srgbClr val="7E6F68"/>
-                </a:solidFill>
-                <a:latin typeface="Noto Sans CJK SC"/>
-                <a:ea typeface="Noto Sans CJK SC"/>
-              </a:rPr>
-              <a:t>31 / 33</a:t>
-            </a:r>
-          </a:p>
-        </p:txBody>
-      </p:sp>
-    </p:spTree>
-  </p:cSld>
-  <p:clrMapOvr>
-    <a:overrideClrMapping bg1="lt1" tx1="dk1" bg2="lt2" tx2="dk2" accent1="accent1" accent2="accent2" accent3="accent3" accent4="accent4" accent5="accent5" accent6="accent6" hlink="hlink" folHlink="folHlink"/>
-  </p:clrMapOvr>
-  <p:transition spd="med">
-    <p:fade/>
-  </p:transition>
-  <p:timing>
-    <p:tnLst>
-      <p:par>
-        <p:cTn id="1" dur="indefinite" restart="never" nodeType="tmRoot">
-          <p:childTnLst>
-            <p:seq concurrent="1" nextAc="seek">
-              <p:cTn id="2" dur="indefinite" nodeType="mainSeq">
-                <p:childTnLst>
-                  <p:par>
-                    <p:cTn id="3" fill="hold">
-                      <p:stCondLst>
-                        <p:cond delay="indefinite"/>
-                      </p:stCondLst>
-                      <p:childTnLst>
-                        <p:par>
-                          <p:cTn id="4" presetID="1" presetClass="entr" presetSubtype="0" fill="hold" grpId="0" nodeType="clickEffect">
-                            <p:stCondLst>
-                              <p:cond delay="0"/>
-                            </p:stCondLst>
-                            <p:childTnLst>
-                              <p:set>
-                                <p:cBhvr>
-                                  <p:cTn id="5" dur="1" fill="hold">
-                                    <p:stCondLst>
-                                      <p:cond delay="0"/>
-                                    </p:stCondLst>
-                                  </p:cTn>
-                                  <p:tgtEl>
-                                    <p:spTgt spid="313"/>
-                                  </p:tgtEl>
-                                  <p:attrNameLst>
-                                    <p:attrName>style.visibility</p:attrName>
-                                  </p:attrNameLst>
-                                </p:cBhvr>
-                                <p:to>
-                                  <p:strVal val="visible"/>
-                                </p:to>
-                              </p:set>
-                            </p:childTnLst>
-                          </p:cTn>
-                        </p:par>
-                      </p:childTnLst>
-                    </p:cTn>
-                  </p:par>
-                  <p:par>
-                    <p:cTn id="6" fill="hold">
-                      <p:stCondLst>
-                        <p:cond delay="indefinite"/>
-                      </p:stCondLst>
-                      <p:childTnLst>
-                        <p:par>
-                          <p:cTn id="7" presetID="1" presetClass="entr" presetSubtype="0" fill="hold" grpId="0" nodeType="clickEffect">
-                            <p:stCondLst>
-                              <p:cond delay="0"/>
-                            </p:stCondLst>
-                            <p:childTnLst>
-                              <p:set>
-                                <p:cBhvr>
-                                  <p:cTn id="8" dur="1" fill="hold">
-                                    <p:stCondLst>
-                                      <p:cond delay="0"/>
-                                    </p:stCondLst>
-                                  </p:cTn>
-                                  <p:tgtEl>
-                                    <p:spTgt spid="313"/>
-                                  </p:tgtEl>
-                                  <p:attrNameLst>
-                                    <p:attrName>style.visibility</p:attrName>
-                                  </p:attrNameLst>
-                                </p:cBhvr>
-                                <p:to>
-                                  <p:strVal val="visible"/>
-                                </p:to>
-                              </p:set>
-                            </p:childTnLst>
-                          </p:cTn>
-                        </p:par>
-                      </p:childTnLst>
-                    </p:cTn>
-                  </p:par>
-                  <p:par>
-                    <p:cTn id="9" fill="hold">
-                      <p:stCondLst>
-                        <p:cond delay="indefinite"/>
-                      </p:stCondLst>
-                      <p:childTnLst>
-                        <p:par>
-                          <p:cTn id="10" presetID="1" presetClass="entr" presetSubtype="0" fill="hold" grpId="0" nodeType="clickEffect">
-                            <p:stCondLst>
-                              <p:cond delay="0"/>
-                            </p:stCondLst>
-                            <p:childTnLst>
-                              <p:set>
-                                <p:cBhvr>
-                                  <p:cTn id="11" dur="1" fill="hold">
-                                    <p:stCondLst>
-                                      <p:cond delay="0"/>
-                                    </p:stCondLst>
-                                  </p:cTn>
-                                  <p:tgtEl>
-                                    <p:spTgt spid="313"/>
-                                  </p:tgtEl>
-                                  <p:attrNameLst>
-                                    <p:attrName>style.visibility</p:attrName>
-                                  </p:attrNameLst>
-                                </p:cBhvr>
-                                <p:to>
-                                  <p:strVal val="visible"/>
-                                </p:to>
-                              </p:set>
-                            </p:childTnLst>
-                          </p:cTn>
-                        </p:par>
-                      </p:childTnLst>
-                    </p:cTn>
-                  </p:par>
-                  <p:par>
-                    <p:cTn id="12" fill="hold">
-                      <p:stCondLst>
-                        <p:cond delay="indefinite"/>
-                      </p:stCondLst>
-                      <p:childTnLst>
-                        <p:par>
-                          <p:cTn id="13" presetID="1" presetClass="entr" presetSubtype="0" fill="hold" grpId="0" nodeType="clickEffect">
-                            <p:stCondLst>
-                              <p:cond delay="0"/>
-                            </p:stCondLst>
-                            <p:childTnLst>
-                              <p:set>
-                                <p:cBhvr>
-                                  <p:cTn id="14" dur="1" fill="hold">
-                                    <p:stCondLst>
-                                      <p:cond delay="0"/>
-                                    </p:stCondLst>
-                                  </p:cTn>
-                                  <p:tgtEl>
-                                    <p:spTgt spid="313"/>
-                                  </p:tgtEl>
-                                  <p:attrNameLst>
-                                    <p:attrName>style.visibility</p:attrName>
-                                  </p:attrNameLst>
-                                </p:cBhvr>
-                                <p:to>
-                                  <p:strVal val="visible"/>
-                                </p:to>
-                              </p:set>
-                            </p:childTnLst>
-                          </p:cTn>
-                        </p:par>
-                      </p:childTnLst>
-                    </p:cTn>
-                  </p:par>
-                  <p:par>
-                    <p:cTn id="15" fill="hold">
-                      <p:stCondLst>
-                        <p:cond delay="indefinite"/>
-                      </p:stCondLst>
-                      <p:childTnLst>
-                        <p:par>
-                          <p:cTn id="16" presetID="1" presetClass="entr" presetSubtype="0" fill="hold" grpId="0" nodeType="clickEffect">
-                            <p:stCondLst>
-                              <p:cond delay="0"/>
-                            </p:stCondLst>
-                            <p:childTnLst>
-                              <p:set>
-                                <p:cBhvr>
-                                  <p:cTn id="17" dur="1" fill="hold">
-                                    <p:stCondLst>
-                                      <p:cond delay="0"/>
-                                    </p:stCondLst>
-                                  </p:cTn>
-                                  <p:tgtEl>
-                                    <p:spTgt spid="313"/>
-                                  </p:tgtEl>
-                                  <p:attrNameLst>
-                                    <p:attrName>style.visibility</p:attrName>
-                                  </p:attrNameLst>
-                                </p:cBhvr>
-                                <p:to>
-                                  <p:strVal val="visible"/>
-                                </p:to>
-                              </p:set>
-                            </p:childTnLst>
-                          </p:cTn>
-                        </p:par>
-                      </p:childTnLst>
-                    </p:cTn>
-                  </p:par>
-                  <p:par>
-                    <p:cTn id="18" fill="hold">
-                      <p:stCondLst>
-                        <p:cond delay="indefinite"/>
-                      </p:stCondLst>
-                      <p:childTnLst>
-                        <p:par>
-                          <p:cTn id="19" presetID="1" presetClass="entr" presetSubtype="0" fill="hold" grpId="0" nodeType="clickEffect">
-                            <p:stCondLst>
-                              <p:cond delay="0"/>
-                            </p:stCondLst>
-                            <p:childTnLst>
-                              <p:set>
-                                <p:cBhvr>
-                                  <p:cTn id="20" dur="1" fill="hold">
-                                    <p:stCondLst>
-                                      <p:cond delay="0"/>
-                                    </p:stCondLst>
-                                  </p:cTn>
-                                  <p:tgtEl>
-                                    <p:spTgt spid="313"/>
-                                  </p:tgtEl>
-                                  <p:attrNameLst>
-                                    <p:attrName>style.visibility</p:attrName>
-                                  </p:attrNameLst>
-                                </p:cBhvr>
-                                <p:to>
-                                  <p:strVal val="visible"/>
-                                </p:to>
-                              </p:set>
-                            </p:childTnLst>
-                          </p:cTn>
-                        </p:par>
-                      </p:childTnLst>
-                    </p:cTn>
-                  </p:par>
-                  <p:par>
-                    <p:cTn id="21" fill="hold">
-                      <p:stCondLst>
-                        <p:cond delay="indefinite"/>
-                      </p:stCondLst>
-                      <p:childTnLst>
-                        <p:par>
-                          <p:cTn id="22" presetID="1" presetClass="entr" presetSubtype="0" fill="hold" grpId="0" nodeType="clickEffect">
-                            <p:stCondLst>
-                              <p:cond delay="0"/>
-                            </p:stCondLst>
-                            <p:childTnLst>
-                              <p:set>
-                                <p:cBhvr>
-                                  <p:cTn id="23" dur="1" fill="hold">
-                                    <p:stCondLst>
-                                      <p:cond delay="0"/>
-                                    </p:stCondLst>
-                                  </p:cTn>
-                                  <p:tgtEl>
-                                    <p:spTgt spid="313"/>
-                                  </p:tgtEl>
-                                  <p:attrNameLst>
-                                    <p:attrName>style.visibility</p:attrName>
-                                  </p:attrNameLst>
-                                </p:cBhvr>
-                                <p:to>
-                                  <p:strVal val="visible"/>
-                                </p:to>
-                              </p:set>
-                            </p:childTnLst>
-                          </p:cTn>
-                        </p:par>
-                      </p:childTnLst>
-                    </p:cTn>
-                  </p:par>
-                </p:childTnLst>
-              </p:cTn>
-              <p:prevCondLst>
-                <p:cond evt="onPrev" delay="0">
-                  <p:tgtEl>
-                    <p:sldTgt/>
-                  </p:tgtEl>
-                </p:cond>
-              </p:prevCondLst>
-              <p:nextCondLst>
-                <p:cond evt="onNext" delay="0">
-                  <p:tgtEl>
-                    <p:sldTgt/>
-                  </p:tgtEl>
-                </p:cond>
-              </p:nextCondLst>
-            </p:seq>
-          </p:childTnLst>
-        </p:cTn>
-      </p:par>
-    </p:tnLst>
-    <p:bldLst>
-      <p:bldP spid="313" grpId="0"/>
-    </p:bldLst>
-  </p:timing>
-</p:sld>
-</file>
-
-<file path=ppt/slides/slide32.xml><?xml version="1.0" encoding="utf-8"?>
-<p:sld xmlns:a="http://schemas.openxmlformats.org/drawingml/2006/main" xmlns:r="http://schemas.openxmlformats.org/officeDocument/2006/relationships" xmlns:p="http://schemas.openxmlformats.org/presentationml/2006/main">
-  <p:cSld>
-    <p:bg>
-      <p:bgPr>
-        <a:solidFill>
-          <a:srgbClr val="FFF8EC"/>
-        </a:solidFill>
-        <a:effectLst/>
-      </p:bgPr>
-    </p:bg>
-    <p:spTree>
-      <p:nvGrpSpPr>
-        <p:cNvPr id="1" name=""/>
-        <p:cNvGrpSpPr/>
-        <p:nvPr/>
-      </p:nvGrpSpPr>
-      <p:grpSpPr>
-        <a:xfrm>
-          <a:off x="0" y="0"/>
-          <a:ext cx="0" cy="0"/>
-          <a:chOff x="0" y="0"/>
-          <a:chExt cx="0" cy="0"/>
-        </a:xfrm>
-      </p:grpSpPr>
-      <p:sp>
-        <p:nvSpPr>
-          <p:cNvPr id="321" name="Kicker"/>
-          <p:cNvSpPr txBox="1"/>
-          <p:nvPr/>
-        </p:nvSpPr>
-        <p:spPr>
-          <a:xfrm>
-            <a:off x="900000" y="420000"/>
-            <a:ext cx="10000000" cy="420000"/>
-          </a:xfrm>
-          <a:prstGeom prst="rect">
-            <a:avLst/>
-          </a:prstGeom>
-          <a:noFill/>
-          <a:ln/>
-        </p:spPr>
-        <p:txBody>
-          <a:bodyPr wrap="square" rtlCol="0">
-            <a:normAutofit/>
-          </a:bodyPr>
-          <a:lstStyle/>
-          <a:p>
-            <a:pPr>
-              <a:buNone/>
-            </a:pPr>
-            <a:r>
-              <a:rPr lang="zh-CN" sz="1400" b="1" dirty="0">
-                <a:solidFill>
-                  <a:srgbClr val="E58A2F"/>
-                </a:solidFill>
-                <a:latin typeface="Noto Sans CJK SC"/>
-                <a:ea typeface="Noto Sans CJK SC"/>
-              </a:rPr>
-              <a:t>今天就开始的三件事</a:t>
-            </a:r>
-          </a:p>
-        </p:txBody>
-      </p:sp>
-      <p:sp>
-        <p:nvSpPr>
-          <p:cNvPr id="322" name="Title"/>
-          <p:cNvSpPr txBox="1"/>
-          <p:nvPr/>
-        </p:nvSpPr>
-        <p:spPr>
-          <a:xfrm>
-            <a:off x="900000" y="920000"/>
-            <a:ext cx="10300000" cy="800000"/>
-          </a:xfrm>
-          <a:prstGeom prst="rect">
-            <a:avLst/>
-          </a:prstGeom>
-          <a:noFill/>
-          <a:ln/>
-        </p:spPr>
-        <p:txBody>
-          <a:bodyPr wrap="square" rtlCol="0">
-            <a:normAutofit/>
-          </a:bodyPr>
-          <a:lstStyle/>
-          <a:p>
-            <a:pPr>
-              <a:buNone/>
-            </a:pPr>
-            <a:r>
-              <a:rPr lang="zh-CN" sz="3400" b="1" dirty="0">
-                <a:solidFill>
-                  <a:srgbClr val="3B2F2A"/>
-                </a:solidFill>
-                <a:latin typeface="Noto Sans CJK SC"/>
-                <a:ea typeface="Noto Sans CJK SC"/>
-              </a:rPr>
-              <a:t>今天就开始的三件事</a:t>
-            </a:r>
-          </a:p>
-        </p:txBody>
-      </p:sp>
-      <p:sp>
-        <p:nvSpPr>
-          <p:cNvPr id="323" name="Body"/>
-          <p:cNvSpPr txBox="1"/>
-          <p:nvPr/>
-        </p:nvSpPr>
-        <p:spPr>
-          <a:xfrm>
-            <a:off x="1050000" y="1850000"/>
-            <a:ext cx="10100000" cy="4500000"/>
-          </a:xfrm>
-          <a:prstGeom prst="rect">
-            <a:avLst/>
-          </a:prstGeom>
-          <a:noFill/>
-          <a:ln/>
-        </p:spPr>
-        <p:txBody>
-          <a:bodyPr wrap="square" rtlCol="0">
-            <a:normAutofit/>
-          </a:bodyPr>
-          <a:lstStyle/>
-          <a:p>
-            <a:pPr marL="285750" indent="-285750">
-              <a:spcAft>
-                <a:spcPts val="600"/>
-              </a:spcAft>
-              <a:buFont typeface="Arial" panose="020B0604020202020204"/>
-              <a:buChar char="•"/>
-            </a:pPr>
-            <a:r>
-              <a:rPr lang="zh-CN" sz="2000" b="0" dirty="0">
-                <a:solidFill>
-                  <a:srgbClr val="3B2F2A"/>
-                </a:solidFill>
-                <a:latin typeface="Noto Sans CJK SC"/>
-                <a:ea typeface="Noto Sans CJK SC"/>
-              </a:rPr>
-              <a:t>今晚：下载BOSS直聘看100条JD</a:t>
-            </a:r>
-          </a:p>
-          <a:p>
-            <a:pPr marL="285750" indent="-285750">
-              <a:spcAft>
-                <a:spcPts val="600"/>
-              </a:spcAft>
-              <a:buFont typeface="Arial" panose="020B0604020202020204"/>
-              <a:buChar char="•"/>
-            </a:pPr>
-            <a:r>
-              <a:rPr lang="zh-CN" sz="2000" b="0" dirty="0">
-                <a:solidFill>
-                  <a:srgbClr val="3B2F2A"/>
-                </a:solidFill>
-                <a:latin typeface="Noto Sans CJK SC"/>
-                <a:ea typeface="Noto Sans CJK SC"/>
-              </a:rPr>
-              <a:t>周末：选出1个主攻+1个备胎</a:t>
-            </a:r>
-          </a:p>
-          <a:p>
-            <a:pPr marL="285750" indent="-285750">
-              <a:spcAft>
-                <a:spcPts val="600"/>
-              </a:spcAft>
-              <a:buFont typeface="Arial" panose="020B0604020202020204"/>
-              <a:buChar char="•"/>
-            </a:pPr>
-            <a:r>
-              <a:rPr lang="zh-CN" sz="2000" b="0" dirty="0">
-                <a:solidFill>
-                  <a:srgbClr val="3B2F2A"/>
-                </a:solidFill>
-                <a:latin typeface="Noto Sans CJK SC"/>
-                <a:ea typeface="Noto Sans CJK SC"/>
-              </a:rPr>
-              <a:t>下周一：开始每天3小时学习</a:t>
-            </a:r>
-          </a:p>
-          <a:p>
-            <a:pPr marL="285750" indent="-285750">
-              <a:spcAft>
-                <a:spcPts val="600"/>
-              </a:spcAft>
-              <a:buFont typeface="Arial" panose="020B0604020202020204"/>
-              <a:buChar char="•"/>
-            </a:pPr>
-            <a:r>
-              <a:rPr lang="zh-CN" sz="2000" b="0" dirty="0">
-                <a:solidFill>
-                  <a:srgbClr val="3B2F2A"/>
-                </a:solidFill>
-                <a:latin typeface="Noto Sans CJK SC"/>
-                <a:ea typeface="Noto Sans CJK SC"/>
-              </a:rPr>
-              <a:t>记住：行动是迷茫唯一的解药</a:t>
-            </a:r>
-          </a:p>
-        </p:txBody>
-      </p:sp>
-      <p:sp>
-        <p:nvSpPr>
-          <p:cNvPr id="329" name="Page number"/>
-          <p:cNvSpPr txBox="1"/>
-          <p:nvPr/>
-        </p:nvSpPr>
-        <p:spPr>
-          <a:xfrm>
-            <a:off x="10600000" y="6250000"/>
-            <a:ext cx="1200000" cy="400000"/>
-          </a:xfrm>
-          <a:prstGeom prst="rect">
-            <a:avLst/>
-          </a:prstGeom>
-          <a:noFill/>
-          <a:ln/>
-        </p:spPr>
-        <p:txBody>
-          <a:bodyPr wrap="square" rtlCol="0">
-            <a:normAutofit/>
-          </a:bodyPr>
-          <a:lstStyle/>
-          <a:p>
-            <a:pPr algn="r">
-              <a:buNone/>
-            </a:pPr>
-            <a:r>
-              <a:rPr lang="zh-CN" sz="1000" b="0" dirty="0">
-                <a:solidFill>
-                  <a:srgbClr val="7E6F68"/>
-                </a:solidFill>
-                <a:latin typeface="Noto Sans CJK SC"/>
-                <a:ea typeface="Noto Sans CJK SC"/>
-              </a:rPr>
-              <a:t>32 / 33</a:t>
-            </a:r>
-          </a:p>
-        </p:txBody>
-      </p:sp>
-    </p:spTree>
-  </p:cSld>
-  <p:clrMapOvr>
-    <a:overrideClrMapping bg1="lt1" tx1="dk1" bg2="lt2" tx2="dk2" accent1="accent1" accent2="accent2" accent3="accent3" accent4="accent4" accent5="accent5" accent6="accent6" hlink="hlink" folHlink="folHlink"/>
-  </p:clrMapOvr>
-  <p:transition spd="med">
-    <p:fade/>
-  </p:transition>
-  <p:timing>
-    <p:tnLst>
-      <p:par>
-        <p:cTn id="1" dur="indefinite" restart="never" nodeType="tmRoot">
-          <p:childTnLst>
-            <p:seq concurrent="1" nextAc="seek">
-              <p:cTn id="2" dur="indefinite" nodeType="mainSeq">
-                <p:childTnLst>
-                  <p:par>
-                    <p:cTn id="3" fill="hold">
-                      <p:stCondLst>
-                        <p:cond delay="indefinite"/>
-                      </p:stCondLst>
-                      <p:childTnLst>
-                        <p:par>
-                          <p:cTn id="4" presetID="1" presetClass="entr" presetSubtype="0" fill="hold" grpId="0" nodeType="clickEffect">
-                            <p:stCondLst>
-                              <p:cond delay="0"/>
-                            </p:stCondLst>
-                            <p:childTnLst>
-                              <p:set>
-                                <p:cBhvr>
-                                  <p:cTn id="5" dur="1" fill="hold">
-                                    <p:stCondLst>
-                                      <p:cond delay="0"/>
-                                    </p:stCondLst>
-                                  </p:cTn>
-                                  <p:tgtEl>
-                                    <p:spTgt spid="323"/>
-                                  </p:tgtEl>
-                                  <p:attrNameLst>
-                                    <p:attrName>style.visibility</p:attrName>
-                                  </p:attrNameLst>
-                                </p:cBhvr>
-                                <p:to>
-                                  <p:strVal val="visible"/>
-                                </p:to>
-                              </p:set>
-                            </p:childTnLst>
-                          </p:cTn>
-                        </p:par>
-                      </p:childTnLst>
-                    </p:cTn>
-                  </p:par>
-                  <p:par>
-                    <p:cTn id="6" fill="hold">
-                      <p:stCondLst>
-                        <p:cond delay="indefinite"/>
-                      </p:stCondLst>
-                      <p:childTnLst>
-                        <p:par>
-                          <p:cTn id="7" presetID="1" presetClass="entr" presetSubtype="0" fill="hold" grpId="0" nodeType="clickEffect">
-                            <p:stCondLst>
-                              <p:cond delay="0"/>
-                            </p:stCondLst>
-                            <p:childTnLst>
-                              <p:set>
-                                <p:cBhvr>
-                                  <p:cTn id="8" dur="1" fill="hold">
-                                    <p:stCondLst>
-                                      <p:cond delay="0"/>
-                                    </p:stCondLst>
-                                  </p:cTn>
-                                  <p:tgtEl>
-                                    <p:spTgt spid="323"/>
-                                  </p:tgtEl>
-                                  <p:attrNameLst>
-                                    <p:attrName>style.visibility</p:attrName>
-                                  </p:attrNameLst>
-                                </p:cBhvr>
-                                <p:to>
-                                  <p:strVal val="visible"/>
-                                </p:to>
-                              </p:set>
-                            </p:childTnLst>
-                          </p:cTn>
-                        </p:par>
-                      </p:childTnLst>
-                    </p:cTn>
-                  </p:par>
-                  <p:par>
-                    <p:cTn id="9" fill="hold">
-                      <p:stCondLst>
-                        <p:cond delay="indefinite"/>
-                      </p:stCondLst>
-                      <p:childTnLst>
-                        <p:par>
-                          <p:cTn id="10" presetID="1" presetClass="entr" presetSubtype="0" fill="hold" grpId="0" nodeType="clickEffect">
-                            <p:stCondLst>
-                              <p:cond delay="0"/>
-                            </p:stCondLst>
-                            <p:childTnLst>
-                              <p:set>
-                                <p:cBhvr>
-                                  <p:cTn id="11" dur="1" fill="hold">
-                                    <p:stCondLst>
-                                      <p:cond delay="0"/>
-                                    </p:stCondLst>
-                                  </p:cTn>
-                                  <p:tgtEl>
-                                    <p:spTgt spid="323"/>
-                                  </p:tgtEl>
-                                  <p:attrNameLst>
-                                    <p:attrName>style.visibility</p:attrName>
-                                  </p:attrNameLst>
-                                </p:cBhvr>
-                                <p:to>
-                                  <p:strVal val="visible"/>
-                                </p:to>
-                              </p:set>
-                            </p:childTnLst>
-                          </p:cTn>
-                        </p:par>
-                      </p:childTnLst>
-                    </p:cTn>
-                  </p:par>
-                  <p:par>
-                    <p:cTn id="12" fill="hold">
-                      <p:stCondLst>
-                        <p:cond delay="indefinite"/>
-                      </p:stCondLst>
-                      <p:childTnLst>
-                        <p:par>
-                          <p:cTn id="13" presetID="1" presetClass="entr" presetSubtype="0" fill="hold" grpId="0" nodeType="clickEffect">
-                            <p:stCondLst>
-                              <p:cond delay="0"/>
-                            </p:stCondLst>
-                            <p:childTnLst>
-                              <p:set>
-                                <p:cBhvr>
-                                  <p:cTn id="14" dur="1" fill="hold">
-                                    <p:stCondLst>
-                                      <p:cond delay="0"/>
-                                    </p:stCondLst>
-                                  </p:cTn>
-                                  <p:tgtEl>
-                                    <p:spTgt spid="323"/>
-                                  </p:tgtEl>
-                                  <p:attrNameLst>
-                                    <p:attrName>style.visibility</p:attrName>
-                                  </p:attrNameLst>
-                                </p:cBhvr>
-                                <p:to>
-                                  <p:strVal val="visible"/>
-                                </p:to>
-                              </p:set>
-                            </p:childTnLst>
-                          </p:cTn>
-                        </p:par>
-                      </p:childTnLst>
-                    </p:cTn>
-                  </p:par>
-                </p:childTnLst>
-              </p:cTn>
-              <p:prevCondLst>
-                <p:cond evt="onPrev" delay="0">
-                  <p:tgtEl>
-                    <p:sldTgt/>
-                  </p:tgtEl>
-                </p:cond>
-              </p:prevCondLst>
-              <p:nextCondLst>
-                <p:cond evt="onNext" delay="0">
-                  <p:tgtEl>
-                    <p:sldTgt/>
-                  </p:tgtEl>
-                </p:cond>
-              </p:nextCondLst>
-            </p:seq>
-          </p:childTnLst>
-        </p:cTn>
-      </p:par>
-    </p:tnLst>
-    <p:bldLst>
-      <p:bldP spid="323" grpId="0"/>
-    </p:bldLst>
-  </p:timing>
-</p:sld>
-</file>
-
-<file path=ppt/slides/slide33.xml><?xml version="1.0" encoding="utf-8"?>
-<p:sld xmlns:a="http://schemas.openxmlformats.org/drawingml/2006/main" xmlns:r="http://schemas.openxmlformats.org/officeDocument/2006/relationships" xmlns:p="http://schemas.openxmlformats.org/presentationml/2006/main">
-  <p:cSld>
-    <p:bg>
-      <p:bgPr>
-        <a:solidFill>
-          <a:srgbClr val="FFF8EC"/>
-        </a:solidFill>
-        <a:effectLst/>
-      </p:bgPr>
-    </p:bg>
-    <p:spTree>
-      <p:nvGrpSpPr>
-        <p:cNvPr id="1" name=""/>
-        <p:cNvGrpSpPr/>
-        <p:nvPr/>
-      </p:nvGrpSpPr>
-      <p:grpSpPr>
-        <a:xfrm>
-          <a:off x="0" y="0"/>
-          <a:ext cx="0" cy="0"/>
-          <a:chOff x="0" y="0"/>
-          <a:chExt cx="0" cy="0"/>
-        </a:xfrm>
-      </p:grpSpPr>
-      <p:sp>
-        <p:nvSpPr>
-          <p:cNvPr id="331" name="Title"/>
-          <p:cNvSpPr txBox="1"/>
-          <p:nvPr/>
-        </p:nvSpPr>
-        <p:spPr>
-          <a:xfrm>
-            <a:off x="1050000" y="2300000"/>
-            <a:ext cx="10200000" cy="1700000"/>
-          </a:xfrm>
-          <a:prstGeom prst="rect">
-            <a:avLst/>
-          </a:prstGeom>
-          <a:noFill/>
-          <a:ln/>
-        </p:spPr>
-        <p:txBody>
-          <a:bodyPr wrap="square" rtlCol="0">
-            <a:normAutofit/>
-          </a:bodyPr>
-          <a:lstStyle/>
-          <a:p>
-            <a:pPr algn="ctr">
-              <a:buNone/>
-            </a:pPr>
-            <a:r>
-              <a:rPr lang="zh-CN" sz="5200" b="1" dirty="0">
-                <a:solidFill>
-                  <a:srgbClr val="3B2F2A"/>
-                </a:solidFill>
-                <a:latin typeface="Noto Sans CJK SC"/>
-                <a:ea typeface="Noto Sans CJK SC"/>
-              </a:rPr>
-              <a:t>谢谢</a:t>
-            </a:r>
-          </a:p>
-        </p:txBody>
-      </p:sp>
-      <p:sp>
-        <p:nvSpPr>
-          <p:cNvPr id="332" name="Subtitle"/>
-          <p:cNvSpPr txBox="1"/>
-          <p:nvPr/>
-        </p:nvSpPr>
-        <p:spPr>
-          <a:xfrm>
-            <a:off x="1050000" y="4200000"/>
-            <a:ext cx="10200000" cy="900000"/>
-          </a:xfrm>
-          <a:prstGeom prst="rect">
-            <a:avLst/>
-          </a:prstGeom>
-          <a:noFill/>
-          <a:ln/>
-        </p:spPr>
-        <p:txBody>
-          <a:bodyPr wrap="square" rtlCol="0">
-            <a:normAutofit/>
-          </a:bodyPr>
-          <a:lstStyle/>
-          <a:p>
-            <a:pPr algn="ctr">
-              <a:buNone/>
-            </a:pPr>
-            <a:r>
-              <a:rPr lang="zh-CN" sz="2000" b="1" dirty="0">
-                <a:solidFill>
-                  <a:srgbClr val="E58A2F"/>
-                </a:solidFill>
-                <a:latin typeface="Noto Sans CJK SC"/>
-                <a:ea typeface="Noto Sans CJK SC"/>
-              </a:rPr>
-              <a:t>女生找工作十大岗位全攻略</a:t>
-            </a:r>
-          </a:p>
-        </p:txBody>
-      </p:sp>
-      <p:sp>
-        <p:nvSpPr>
-          <p:cNvPr id="339" name="Page number"/>
-          <p:cNvSpPr txBox="1"/>
-          <p:nvPr/>
-        </p:nvSpPr>
-        <p:spPr>
-          <a:xfrm>
-            <a:off x="10600000" y="6250000"/>
-            <a:ext cx="1200000" cy="400000"/>
-          </a:xfrm>
-          <a:prstGeom prst="rect">
-            <a:avLst/>
-          </a:prstGeom>
-          <a:noFill/>
-          <a:ln/>
-        </p:spPr>
-        <p:txBody>
-          <a:bodyPr wrap="square" rtlCol="0">
-            <a:normAutofit/>
-          </a:bodyPr>
-          <a:lstStyle/>
-          <a:p>
-            <a:pPr algn="r">
-              <a:buNone/>
-            </a:pPr>
-            <a:r>
-              <a:rPr lang="zh-CN" sz="1000" b="0" dirty="0">
-                <a:solidFill>
-                  <a:srgbClr val="7E6F68"/>
-                </a:solidFill>
-                <a:latin typeface="Noto Sans CJK SC"/>
-                <a:ea typeface="Noto Sans CJK SC"/>
-              </a:rPr>
-              <a:t>33 / 33</a:t>
-            </a:r>
-          </a:p>
-        </p:txBody>
-      </p:sp>
-    </p:spTree>
-  </p:cSld>
-  <p:clrMapOvr>
-    <a:overrideClrMapping bg1="lt1" tx1="dk1" bg2="lt2" tx2="dk2" accent1="accent1" accent2="accent2" accent3="accent3" accent4="accent4" accent5="accent5" accent6="accent6" hlink="hlink" folHlink="folHlink"/>
-  </p:clrMapOvr>
-  <p:transition spd="med">
-    <p:fade/>
-  </p:transition>
 </p:sld>
 </file>
 
@@ -15054,7 +11267,7 @@
                 <a:latin typeface="Noto Sans CJK SC"/>
                 <a:ea typeface="Noto Sans CJK SC"/>
               </a:rPr>
-              <a:t>04 / 33</a:t>
+              <a:t>04 / 26</a:t>
             </a:r>
           </a:p>
         </p:txBody>
@@ -15097,6 +11310,45 @@
       </p:grpSpPr>
       <p:sp>
         <p:nvSpPr>
+          <p:cNvPr id="51" name="Kicker"/>
+          <p:cNvSpPr txBox="1"/>
+          <p:nvPr/>
+        </p:nvSpPr>
+        <p:spPr>
+          <a:xfrm>
+            <a:off x="900000" y="420000"/>
+            <a:ext cx="10000000" cy="420000"/>
+          </a:xfrm>
+          <a:prstGeom prst="rect">
+            <a:avLst/>
+          </a:prstGeom>
+          <a:noFill/>
+          <a:ln/>
+        </p:spPr>
+        <p:txBody>
+          <a:bodyPr wrap="square" rtlCol="0">
+            <a:normAutofit/>
+          </a:bodyPr>
+          <a:lstStyle/>
+          <a:p>
+            <a:pPr>
+              <a:buNone/>
+            </a:pPr>
+            <a:r>
+              <a:rPr lang="zh-CN" sz="1400" b="1" dirty="0">
+                <a:solidFill>
+                  <a:srgbClr val="E58A2F"/>
+                </a:solidFill>
+                <a:latin typeface="Noto Sans CJK SC"/>
+                <a:ea typeface="Noto Sans CJK SC"/>
+              </a:rPr>
+              <a:t>新媒体运营：用内容换流量</a:t>
+            </a:r>
+          </a:p>
+        </p:txBody>
+      </p:sp>
+      <p:sp>
+        <p:nvSpPr>
           <p:cNvPr id="52" name="Title"/>
           <p:cNvSpPr txBox="1"/>
           <p:nvPr/>
@@ -15129,453 +11381,149 @@
                 <a:latin typeface="Noto Sans CJK SC"/>
                 <a:ea typeface="Noto Sans CJK SC"/>
               </a:rPr>
-              <a:t>AI 三岗总览：好上手的增量机会</a:t>
+              <a:t>新媒体运营：用内容换流量</a:t>
             </a:r>
           </a:p>
         </p:txBody>
       </p:sp>
-      <p:graphicFrame>
-        <p:nvGraphicFramePr>
-          <p:cNvPr id="53" name="Table"/>
-          <p:cNvGraphicFramePr>
-            <a:graphicFrameLocks noGrp="1"/>
-          </p:cNvGraphicFramePr>
+      <p:sp>
+        <p:nvSpPr>
+          <p:cNvPr id="53" name="Body"/>
+          <p:cNvSpPr txBox="1"/>
           <p:nvPr/>
-        </p:nvGraphicFramePr>
-        <p:xfrm>
-          <a:off x="900000" y="1950000"/>
-          <a:ext cx="10300000" cy="1680000"/>
-        </p:xfrm>
-        <a:graphic>
-          <a:graphicData uri="http://schemas.openxmlformats.org/drawingml/2006/table">
-            <a:tbl>
-              <a:tblPr firstRow="1" bandRow="1"/>
-              <a:tblGrid>
-                <a:gridCol w="2575000"/>
-                <a:gridCol w="2575000"/>
-                <a:gridCol w="2575000"/>
-                <a:gridCol w="2575000"/>
-              </a:tblGrid>
-              <a:tr h="420000">
-                <a:tc>
-                  <a:txBody>
-                    <a:bodyPr anchor="ctr"/>
-                    <a:lstStyle/>
-                    <a:p>
-                      <a:pPr algn="l">
-                        <a:buNone/>
-                      </a:pPr>
-                      <a:r>
-                        <a:rPr lang="zh-CN" sz="1700" b="1" dirty="0">
-                          <a:solidFill>
-                            <a:srgbClr val="FFF8EC"/>
-                          </a:solidFill>
-                          <a:latin typeface="Noto Sans CJK SC"/>
-                          <a:ea typeface="Noto Sans CJK SC"/>
-                        </a:rPr>
-                        <a:t>岗位</a:t>
-                      </a:r>
-                    </a:p>
-                  </a:txBody>
-                  <a:tcPr marL="91440" marR="91440" anchor="ctr">
-                    <a:solidFill>
-                      <a:srgbClr val="E58A2F"/>
-                    </a:solidFill>
-                  </a:tcPr>
-                </a:tc>
-                <a:tc>
-                  <a:txBody>
-                    <a:bodyPr anchor="ctr"/>
-                    <a:lstStyle/>
-                    <a:p>
-                      <a:pPr algn="l">
-                        <a:buNone/>
-                      </a:pPr>
-                      <a:r>
-                        <a:rPr lang="zh-CN" sz="1700" b="1" dirty="0">
-                          <a:solidFill>
-                            <a:srgbClr val="FFF8EC"/>
-                          </a:solidFill>
-                          <a:latin typeface="Noto Sans CJK SC"/>
-                          <a:ea typeface="Noto Sans CJK SC"/>
-                        </a:rPr>
-                        <a:t>上手周期</a:t>
-                      </a:r>
-                    </a:p>
-                  </a:txBody>
-                  <a:tcPr marL="91440" marR="91440" anchor="ctr">
-                    <a:solidFill>
-                      <a:srgbClr val="E58A2F"/>
-                    </a:solidFill>
-                  </a:tcPr>
-                </a:tc>
-                <a:tc>
-                  <a:txBody>
-                    <a:bodyPr anchor="ctr"/>
-                    <a:lstStyle/>
-                    <a:p>
-                      <a:pPr algn="l">
-                        <a:buNone/>
-                      </a:pPr>
-                      <a:r>
-                        <a:rPr lang="zh-CN" sz="1700" b="1" dirty="0">
-                          <a:solidFill>
-                            <a:srgbClr val="FFF8EC"/>
-                          </a:solidFill>
-                          <a:latin typeface="Noto Sans CJK SC"/>
-                          <a:ea typeface="Noto Sans CJK SC"/>
-                        </a:rPr>
-                        <a:t>一句话定位</a:t>
-                      </a:r>
-                    </a:p>
-                  </a:txBody>
-                  <a:tcPr marL="91440" marR="91440" anchor="ctr">
-                    <a:solidFill>
-                      <a:srgbClr val="E58A2F"/>
-                    </a:solidFill>
-                  </a:tcPr>
-                </a:tc>
-                <a:tc>
-                  <a:txBody>
-                    <a:bodyPr anchor="ctr"/>
-                    <a:lstStyle/>
-                    <a:p>
-                      <a:pPr algn="l">
-                        <a:buNone/>
-                      </a:pPr>
-                      <a:r>
-                        <a:rPr lang="zh-CN" sz="1700" b="1" dirty="0">
-                          <a:solidFill>
-                            <a:srgbClr val="FFF8EC"/>
-                          </a:solidFill>
-                          <a:latin typeface="Noto Sans CJK SC"/>
-                          <a:ea typeface="Noto Sans CJK SC"/>
-                        </a:rPr>
-                        <a:t>特点</a:t>
-                      </a:r>
-                    </a:p>
-                  </a:txBody>
-                  <a:tcPr marL="91440" marR="91440" anchor="ctr">
-                    <a:solidFill>
-                      <a:srgbClr val="E58A2F"/>
-                    </a:solidFill>
-                  </a:tcPr>
-                </a:tc>
-              </a:tr>
-              <a:tr h="420000">
-                <a:tc>
-                  <a:txBody>
-                    <a:bodyPr anchor="ctr"/>
-                    <a:lstStyle/>
-                    <a:p>
-                      <a:pPr algn="l">
-                        <a:buNone/>
-                      </a:pPr>
-                      <a:r>
-                        <a:rPr lang="zh-CN" sz="1700" b="0" dirty="0">
-                          <a:solidFill>
-                            <a:srgbClr val="3B2F2A"/>
-                          </a:solidFill>
-                          <a:latin typeface="Noto Sans CJK SC"/>
-                          <a:ea typeface="Noto Sans CJK SC"/>
-                        </a:rPr>
-                        <a:t>AI 训练师</a:t>
-                      </a:r>
-                    </a:p>
-                  </a:txBody>
-                  <a:tcPr marL="91440" marR="91440" anchor="ctr">
-                    <a:solidFill>
-                      <a:srgbClr val="FFF2DE"/>
-                    </a:solidFill>
-                  </a:tcPr>
-                </a:tc>
-                <a:tc>
-                  <a:txBody>
-                    <a:bodyPr anchor="ctr"/>
-                    <a:lstStyle/>
-                    <a:p>
-                      <a:pPr algn="l">
-                        <a:buNone/>
-                      </a:pPr>
-                      <a:r>
-                        <a:rPr lang="zh-CN" sz="1700" b="0" dirty="0">
-                          <a:solidFill>
-                            <a:srgbClr val="3B2F2A"/>
-                          </a:solidFill>
-                          <a:latin typeface="Noto Sans CJK SC"/>
-                          <a:ea typeface="Noto Sans CJK SC"/>
-                        </a:rPr>
-                        <a:t>3-4周</a:t>
-                      </a:r>
-                    </a:p>
-                  </a:txBody>
-                  <a:tcPr marL="91440" marR="91440" anchor="ctr">
-                    <a:solidFill>
-                      <a:srgbClr val="FFF2DE"/>
-                    </a:solidFill>
-                  </a:tcPr>
-                </a:tc>
-                <a:tc>
-                  <a:txBody>
-                    <a:bodyPr anchor="ctr"/>
-                    <a:lstStyle/>
-                    <a:p>
-                      <a:pPr algn="l">
-                        <a:buNone/>
-                      </a:pPr>
-                      <a:r>
-                        <a:rPr lang="zh-CN" sz="1700" b="0" dirty="0">
-                          <a:solidFill>
-                            <a:srgbClr val="3B2F2A"/>
-                          </a:solidFill>
-                          <a:latin typeface="Noto Sans CJK SC"/>
-                          <a:ea typeface="Noto Sans CJK SC"/>
-                        </a:rPr>
-                        <a:t>给 AI 标注评测语料</a:t>
-                      </a:r>
-                    </a:p>
-                  </a:txBody>
-                  <a:tcPr marL="91440" marR="91440" anchor="ctr">
-                    <a:solidFill>
-                      <a:srgbClr val="FFF2DE"/>
-                    </a:solidFill>
-                  </a:tcPr>
-                </a:tc>
-                <a:tc>
-                  <a:txBody>
-                    <a:bodyPr anchor="ctr"/>
-                    <a:lstStyle/>
-                    <a:p>
-                      <a:pPr algn="l">
-                        <a:buNone/>
-                      </a:pPr>
-                      <a:r>
-                        <a:rPr lang="zh-CN" sz="1700" b="0" dirty="0">
-                          <a:solidFill>
-                            <a:srgbClr val="3B2F2A"/>
-                          </a:solidFill>
-                          <a:latin typeface="Noto Sans CJK SC"/>
-                          <a:ea typeface="Noto Sans CJK SC"/>
-                        </a:rPr>
-                        <a:t>AI 行业门票</a:t>
-                      </a:r>
-                    </a:p>
-                  </a:txBody>
-                  <a:tcPr marL="91440" marR="91440" anchor="ctr">
-                    <a:solidFill>
-                      <a:srgbClr val="FFF2DE"/>
-                    </a:solidFill>
-                  </a:tcPr>
-                </a:tc>
-              </a:tr>
-              <a:tr h="420000">
-                <a:tc>
-                  <a:txBody>
-                    <a:bodyPr anchor="ctr"/>
-                    <a:lstStyle/>
-                    <a:p>
-                      <a:pPr algn="l">
-                        <a:buNone/>
-                      </a:pPr>
-                      <a:r>
-                        <a:rPr lang="zh-CN" sz="1700" b="0" dirty="0">
-                          <a:solidFill>
-                            <a:srgbClr val="3B2F2A"/>
-                          </a:solidFill>
-                          <a:latin typeface="Noto Sans CJK SC"/>
-                          <a:ea typeface="Noto Sans CJK SC"/>
-                        </a:rPr>
-                        <a:t>AIGC 内容运营</a:t>
-                      </a:r>
-                    </a:p>
-                  </a:txBody>
-                  <a:tcPr marL="91440" marR="91440" anchor="ctr">
-                    <a:noFill/>
-                  </a:tcPr>
-                </a:tc>
-                <a:tc>
-                  <a:txBody>
-                    <a:bodyPr anchor="ctr"/>
-                    <a:lstStyle/>
-                    <a:p>
-                      <a:pPr algn="l">
-                        <a:buNone/>
-                      </a:pPr>
-                      <a:r>
-                        <a:rPr lang="zh-CN" sz="1700" b="0" dirty="0">
-                          <a:solidFill>
-                            <a:srgbClr val="3B2F2A"/>
-                          </a:solidFill>
-                          <a:latin typeface="Noto Sans CJK SC"/>
-                          <a:ea typeface="Noto Sans CJK SC"/>
-                        </a:rPr>
-                        <a:t>4-6周</a:t>
-                      </a:r>
-                    </a:p>
-                  </a:txBody>
-                  <a:tcPr marL="91440" marR="91440" anchor="ctr">
-                    <a:noFill/>
-                  </a:tcPr>
-                </a:tc>
-                <a:tc>
-                  <a:txBody>
-                    <a:bodyPr anchor="ctr"/>
-                    <a:lstStyle/>
-                    <a:p>
-                      <a:pPr algn="l">
-                        <a:buNone/>
-                      </a:pPr>
-                      <a:r>
-                        <a:rPr lang="zh-CN" sz="1700" b="0" dirty="0">
-                          <a:solidFill>
-                            <a:srgbClr val="3B2F2A"/>
-                          </a:solidFill>
-                          <a:latin typeface="Noto Sans CJK SC"/>
-                          <a:ea typeface="Noto Sans CJK SC"/>
-                        </a:rPr>
-                        <a:t>用 AI 批量做内容</a:t>
-                      </a:r>
-                    </a:p>
-                  </a:txBody>
-                  <a:tcPr marL="91440" marR="91440" anchor="ctr">
-                    <a:noFill/>
-                  </a:tcPr>
-                </a:tc>
-                <a:tc>
-                  <a:txBody>
-                    <a:bodyPr anchor="ctr"/>
-                    <a:lstStyle/>
-                    <a:p>
-                      <a:pPr algn="l">
-                        <a:buNone/>
-                      </a:pPr>
-                      <a:r>
-                        <a:rPr lang="zh-CN" sz="1700" b="0" dirty="0">
-                          <a:solidFill>
-                            <a:srgbClr val="3B2F2A"/>
-                          </a:solidFill>
-                          <a:latin typeface="Noto Sans CJK SC"/>
-                          <a:ea typeface="Noto Sans CJK SC"/>
-                        </a:rPr>
-                        <a:t>主攻牌方向</a:t>
-                      </a:r>
-                    </a:p>
-                  </a:txBody>
-                  <a:tcPr marL="91440" marR="91440" anchor="ctr">
-                    <a:noFill/>
-                  </a:tcPr>
-                </a:tc>
-              </a:tr>
-              <a:tr h="420000">
-                <a:tc>
-                  <a:txBody>
-                    <a:bodyPr anchor="ctr"/>
-                    <a:lstStyle/>
-                    <a:p>
-                      <a:pPr algn="l">
-                        <a:buNone/>
-                      </a:pPr>
-                      <a:r>
-                        <a:rPr lang="zh-CN" sz="1700" b="0" dirty="0">
-                          <a:solidFill>
-                            <a:srgbClr val="3B2F2A"/>
-                          </a:solidFill>
-                          <a:latin typeface="Noto Sans CJK SC"/>
-                          <a:ea typeface="Noto Sans CJK SC"/>
-                        </a:rPr>
-                        <a:t>智能客服运营</a:t>
-                      </a:r>
-                    </a:p>
-                  </a:txBody>
-                  <a:tcPr marL="91440" marR="91440" anchor="ctr">
-                    <a:solidFill>
-                      <a:srgbClr val="FFF2DE"/>
-                    </a:solidFill>
-                  </a:tcPr>
-                </a:tc>
-                <a:tc>
-                  <a:txBody>
-                    <a:bodyPr anchor="ctr"/>
-                    <a:lstStyle/>
-                    <a:p>
-                      <a:pPr algn="l">
-                        <a:buNone/>
-                      </a:pPr>
-                      <a:r>
-                        <a:rPr lang="zh-CN" sz="1700" b="0" dirty="0">
-                          <a:solidFill>
-                            <a:srgbClr val="3B2F2A"/>
-                          </a:solidFill>
-                          <a:latin typeface="Noto Sans CJK SC"/>
-                          <a:ea typeface="Noto Sans CJK SC"/>
-                        </a:rPr>
-                        <a:t>4-5周</a:t>
-                      </a:r>
-                    </a:p>
-                  </a:txBody>
-                  <a:tcPr marL="91440" marR="91440" anchor="ctr">
-                    <a:solidFill>
-                      <a:srgbClr val="FFF2DE"/>
-                    </a:solidFill>
-                  </a:tcPr>
-                </a:tc>
-                <a:tc>
-                  <a:txBody>
-                    <a:bodyPr anchor="ctr"/>
-                    <a:lstStyle/>
-                    <a:p>
-                      <a:pPr algn="l">
-                        <a:buNone/>
-                      </a:pPr>
-                      <a:r>
-                        <a:rPr lang="zh-CN" sz="1700" b="0" dirty="0">
-                          <a:solidFill>
-                            <a:srgbClr val="3B2F2A"/>
-                          </a:solidFill>
-                          <a:latin typeface="Noto Sans CJK SC"/>
-                          <a:ea typeface="Noto Sans CJK SC"/>
-                        </a:rPr>
-                        <a:t>训练 AI 客服机器人</a:t>
-                      </a:r>
-                    </a:p>
-                  </a:txBody>
-                  <a:tcPr marL="91440" marR="91440" anchor="ctr">
-                    <a:solidFill>
-                      <a:srgbClr val="FFF2DE"/>
-                    </a:solidFill>
-                  </a:tcPr>
-                </a:tc>
-                <a:tc>
-                  <a:txBody>
-                    <a:bodyPr anchor="ctr"/>
-                    <a:lstStyle/>
-                    <a:p>
-                      <a:pPr algn="l">
-                        <a:buNone/>
-                      </a:pPr>
-                      <a:r>
-                        <a:rPr lang="zh-CN" sz="1700" b="0" dirty="0">
-                          <a:solidFill>
-                            <a:srgbClr val="3B2F2A"/>
-                          </a:solidFill>
-                          <a:latin typeface="Noto Sans CJK SC"/>
-                          <a:ea typeface="Noto Sans CJK SC"/>
-                        </a:rPr>
-                        <a:t>客服进阶</a:t>
-                      </a:r>
-                    </a:p>
-                  </a:txBody>
-                  <a:tcPr marL="91440" marR="91440" anchor="ctr">
-                    <a:solidFill>
-                      <a:srgbClr val="FFF2DE"/>
-                    </a:solidFill>
-                  </a:tcPr>
-                </a:tc>
-              </a:tr>
-            </a:tbl>
-          </a:graphicData>
-        </a:graphic>
-      </p:graphicFrame>
+        </p:nvSpPr>
+        <p:spPr>
+          <a:xfrm>
+            <a:off x="1050000" y="1850000"/>
+            <a:ext cx="10100000" cy="4500000"/>
+          </a:xfrm>
+          <a:prstGeom prst="rect">
+            <a:avLst/>
+          </a:prstGeom>
+          <a:noFill/>
+          <a:ln/>
+        </p:spPr>
+        <p:txBody>
+          <a:bodyPr wrap="square" rtlCol="0">
+            <a:normAutofit/>
+          </a:bodyPr>
+          <a:lstStyle/>
+          <a:p>
+            <a:pPr marL="285750" indent="-285750">
+              <a:spcAft>
+                <a:spcPts val="600"/>
+              </a:spcAft>
+              <a:buFont typeface="Arial" panose="020B0604020202020204"/>
+              <a:buChar char="•"/>
+            </a:pPr>
+            <a:r>
+              <a:rPr lang="zh-CN" sz="2000" b="0" dirty="0">
+                <a:solidFill>
+                  <a:srgbClr val="3B2F2A"/>
+                </a:solidFill>
+                <a:latin typeface="Noto Sans CJK SC"/>
+                <a:ea typeface="Noto Sans CJK SC"/>
+              </a:rPr>
+              <a:t>定位：经营品牌的内容资产</a:t>
+            </a:r>
+          </a:p>
+          <a:p>
+            <a:pPr marL="285750" indent="-285750">
+              <a:spcAft>
+                <a:spcPts val="600"/>
+              </a:spcAft>
+              <a:buFont typeface="Arial" panose="020B0604020202020204"/>
+              <a:buChar char="•"/>
+            </a:pPr>
+            <a:r>
+              <a:rPr lang="zh-CN" sz="2000" b="0" dirty="0">
+                <a:solidFill>
+                  <a:srgbClr val="3B2F2A"/>
+                </a:solidFill>
+                <a:latin typeface="Noto Sans CJK SC"/>
+                <a:ea typeface="Noto Sans CJK SC"/>
+              </a:rPr>
+              <a:t>主战场：小红书、抖音、视频号</a:t>
+            </a:r>
+          </a:p>
+          <a:p>
+            <a:pPr marL="285750" indent="-285750">
+              <a:spcAft>
+                <a:spcPts val="600"/>
+              </a:spcAft>
+              <a:buFont typeface="Arial" panose="020B0604020202020204"/>
+              <a:buChar char="•"/>
+            </a:pPr>
+            <a:r>
+              <a:rPr lang="zh-CN" sz="2000" b="0" dirty="0">
+                <a:solidFill>
+                  <a:srgbClr val="3B2F2A"/>
+                </a:solidFill>
+                <a:latin typeface="Noto Sans CJK SC"/>
+                <a:ea typeface="Noto Sans CJK SC"/>
+              </a:rPr>
+              <a:t>每天：看数据、追热点、写文案</a:t>
+            </a:r>
+          </a:p>
+          <a:p>
+            <a:pPr marL="285750" indent="-285750">
+              <a:spcAft>
+                <a:spcPts val="600"/>
+              </a:spcAft>
+              <a:buFont typeface="Arial" panose="020B0604020202020204"/>
+              <a:buChar char="•"/>
+            </a:pPr>
+            <a:r>
+              <a:rPr lang="zh-CN" sz="2000" b="0" dirty="0">
+                <a:solidFill>
+                  <a:srgbClr val="3B2F2A"/>
+                </a:solidFill>
+                <a:latin typeface="Noto Sans CJK SC"/>
+                <a:ea typeface="Noto Sans CJK SC"/>
+              </a:rPr>
+              <a:t>每周：排期表、数据复盘、活动</a:t>
+            </a:r>
+          </a:p>
+          <a:p>
+            <a:pPr marL="285750" indent="-285750">
+              <a:spcAft>
+                <a:spcPts val="600"/>
+              </a:spcAft>
+              <a:buFont typeface="Arial" panose="020B0604020202020204"/>
+              <a:buChar char="•"/>
+            </a:pPr>
+            <a:r>
+              <a:rPr lang="zh-CN" sz="2000" b="0" dirty="0">
+                <a:solidFill>
+                  <a:srgbClr val="3B2F2A"/>
+                </a:solidFill>
+                <a:latin typeface="Noto Sans CJK SC"/>
+                <a:ea typeface="Noto Sans CJK SC"/>
+              </a:rPr>
+              <a:t>KPI：阅读、涨粉、互动、转化</a:t>
+            </a:r>
+          </a:p>
+          <a:p>
+            <a:pPr marL="285750" indent="-285750">
+              <a:spcAft>
+                <a:spcPts val="600"/>
+              </a:spcAft>
+              <a:buFont typeface="Arial" panose="020B0604020202020204"/>
+              <a:buChar char="•"/>
+            </a:pPr>
+            <a:r>
+              <a:rPr lang="zh-CN" sz="2000" b="0" dirty="0">
+                <a:solidFill>
+                  <a:srgbClr val="3B2F2A"/>
+                </a:solidFill>
+                <a:latin typeface="Noto Sans CJK SC"/>
+                <a:ea typeface="Noto Sans CJK SC"/>
+              </a:rPr>
+              <a:t>适合：有表达欲、爱研究爆款的人</a:t>
+            </a:r>
+          </a:p>
+        </p:txBody>
+      </p:sp>
       <p:sp>
         <p:nvSpPr>
           <p:cNvPr id="59" name="Page number"/>
@@ -15610,7 +11558,7 @@
                 <a:latin typeface="Noto Sans CJK SC"/>
                 <a:ea typeface="Noto Sans CJK SC"/>
               </a:rPr>
-              <a:t>05 / 33</a:t>
+              <a:t>05 / 26</a:t>
             </a:r>
           </a:p>
         </p:txBody>
@@ -15623,6 +11571,255 @@
   <p:transition spd="med">
     <p:fade/>
   </p:transition>
+  <p:timing>
+    <p:tnLst>
+      <p:par>
+        <p:cTn id="1" dur="indefinite" restart="never" nodeType="tmRoot">
+          <p:childTnLst>
+            <p:seq concurrent="1" nextAc="seek">
+              <p:cTn id="2" dur="indefinite" nodeType="mainSeq">
+                <p:childTnLst>
+                  <p:par>
+                    <p:cTn id="3" fill="hold">
+                      <p:stCondLst>
+                        <p:cond delay="indefinite"/>
+                      </p:stCondLst>
+                      <p:childTnLst>
+                        <p:par>
+                          <p:cTn id="4" presetID="1" presetClass="entr" presetSubtype="0" fill="hold" grpId="0" nodeType="clickEffect">
+                            <p:stCondLst>
+                              <p:cond delay="0"/>
+                            </p:stCondLst>
+                            <p:childTnLst>
+                              <p:set>
+                                <p:cBhvr>
+                                  <p:cTn id="5" dur="1" fill="hold">
+                                    <p:stCondLst>
+                                      <p:cond delay="0"/>
+                                    </p:stCondLst>
+                                  </p:cTn>
+                                  <p:tgtEl>
+                                    <p:spTgt spid="53"/>
+                                  </p:tgtEl>
+                                  <p:attrNameLst>
+                                    <p:attrName>style.visibility</p:attrName>
+                                  </p:attrNameLst>
+                                </p:cBhvr>
+                                <p:to>
+                                  <p:strVal val="visible"/>
+                                </p:to>
+                              </p:set>
+                            </p:childTnLst>
+                          </p:cTn>
+                        </p:par>
+                      </p:childTnLst>
+                    </p:cTn>
+                  </p:par>
+                  <p:par>
+                    <p:cTn id="6" fill="hold">
+                      <p:stCondLst>
+                        <p:cond delay="indefinite"/>
+                      </p:stCondLst>
+                      <p:childTnLst>
+                        <p:par>
+                          <p:cTn id="7" presetID="1" presetClass="entr" presetSubtype="0" fill="hold" grpId="0" nodeType="clickEffect">
+                            <p:stCondLst>
+                              <p:cond delay="0"/>
+                            </p:stCondLst>
+                            <p:childTnLst>
+                              <p:set>
+                                <p:cBhvr>
+                                  <p:cTn id="8" dur="1" fill="hold">
+                                    <p:stCondLst>
+                                      <p:cond delay="0"/>
+                                    </p:stCondLst>
+                                  </p:cTn>
+                                  <p:tgtEl>
+                                    <p:spTgt spid="53"/>
+                                  </p:tgtEl>
+                                  <p:attrNameLst>
+                                    <p:attrName>style.visibility</p:attrName>
+                                  </p:attrNameLst>
+                                </p:cBhvr>
+                                <p:to>
+                                  <p:strVal val="visible"/>
+                                </p:to>
+                              </p:set>
+                            </p:childTnLst>
+                          </p:cTn>
+                        </p:par>
+                      </p:childTnLst>
+                    </p:cTn>
+                  </p:par>
+                  <p:par>
+                    <p:cTn id="9" fill="hold">
+                      <p:stCondLst>
+                        <p:cond delay="indefinite"/>
+                      </p:stCondLst>
+                      <p:childTnLst>
+                        <p:par>
+                          <p:cTn id="10" presetID="1" presetClass="entr" presetSubtype="0" fill="hold" grpId="0" nodeType="clickEffect">
+                            <p:stCondLst>
+                              <p:cond delay="0"/>
+                            </p:stCondLst>
+                            <p:childTnLst>
+                              <p:set>
+                                <p:cBhvr>
+                                  <p:cTn id="11" dur="1" fill="hold">
+                                    <p:stCondLst>
+                                      <p:cond delay="0"/>
+                                    </p:stCondLst>
+                                  </p:cTn>
+                                  <p:tgtEl>
+                                    <p:spTgt spid="53"/>
+                                  </p:tgtEl>
+                                  <p:attrNameLst>
+                                    <p:attrName>style.visibility</p:attrName>
+                                  </p:attrNameLst>
+                                </p:cBhvr>
+                                <p:to>
+                                  <p:strVal val="visible"/>
+                                </p:to>
+                              </p:set>
+                            </p:childTnLst>
+                          </p:cTn>
+                        </p:par>
+                      </p:childTnLst>
+                    </p:cTn>
+                  </p:par>
+                  <p:par>
+                    <p:cTn id="12" fill="hold">
+                      <p:stCondLst>
+                        <p:cond delay="indefinite"/>
+                      </p:stCondLst>
+                      <p:childTnLst>
+                        <p:par>
+                          <p:cTn id="13" presetID="1" presetClass="entr" presetSubtype="0" fill="hold" grpId="0" nodeType="clickEffect">
+                            <p:stCondLst>
+                              <p:cond delay="0"/>
+                            </p:stCondLst>
+                            <p:childTnLst>
+                              <p:set>
+                                <p:cBhvr>
+                                  <p:cTn id="14" dur="1" fill="hold">
+                                    <p:stCondLst>
+                                      <p:cond delay="0"/>
+                                    </p:stCondLst>
+                                  </p:cTn>
+                                  <p:tgtEl>
+                                    <p:spTgt spid="53"/>
+                                  </p:tgtEl>
+                                  <p:attrNameLst>
+                                    <p:attrName>style.visibility</p:attrName>
+                                  </p:attrNameLst>
+                                </p:cBhvr>
+                                <p:to>
+                                  <p:strVal val="visible"/>
+                                </p:to>
+                              </p:set>
+                            </p:childTnLst>
+                          </p:cTn>
+                        </p:par>
+                      </p:childTnLst>
+                    </p:cTn>
+                  </p:par>
+                  <p:par>
+                    <p:cTn id="15" fill="hold">
+                      <p:stCondLst>
+                        <p:cond delay="indefinite"/>
+                      </p:stCondLst>
+                      <p:childTnLst>
+                        <p:par>
+                          <p:cTn id="16" presetID="1" presetClass="entr" presetSubtype="0" fill="hold" grpId="0" nodeType="clickEffect">
+                            <p:stCondLst>
+                              <p:cond delay="0"/>
+                            </p:stCondLst>
+                            <p:childTnLst>
+                              <p:set>
+                                <p:cBhvr>
+                                  <p:cTn id="17" dur="1" fill="hold">
+                                    <p:stCondLst>
+                                      <p:cond delay="0"/>
+                                    </p:stCondLst>
+                                  </p:cTn>
+                                  <p:tgtEl>
+                                    <p:spTgt spid="53"/>
+                                  </p:tgtEl>
+                                  <p:attrNameLst>
+                                    <p:attrName>style.visibility</p:attrName>
+                                  </p:attrNameLst>
+                                </p:cBhvr>
+                                <p:to>
+                                  <p:strVal val="visible"/>
+                                </p:to>
+                              </p:set>
+                            </p:childTnLst>
+                          </p:cTn>
+                        </p:par>
+                      </p:childTnLst>
+                    </p:cTn>
+                  </p:par>
+                  <p:par>
+                    <p:cTn id="18" fill="hold">
+                      <p:stCondLst>
+                        <p:cond delay="indefinite"/>
+                      </p:stCondLst>
+                      <p:childTnLst>
+                        <p:par>
+                          <p:cTn id="19" presetID="1" presetClass="entr" presetSubtype="0" fill="hold" grpId="0" nodeType="clickEffect">
+                            <p:stCondLst>
+                              <p:cond delay="0"/>
+                            </p:stCondLst>
+                            <p:childTnLst>
+                              <p:set>
+                                <p:cBhvr>
+                                  <p:cTn id="20" dur="1" fill="hold">
+                                    <p:stCondLst>
+                                      <p:cond delay="0"/>
+                                    </p:stCondLst>
+                                  </p:cTn>
+                                  <p:tgtEl>
+                                    <p:spTgt spid="53"/>
+                                  </p:tgtEl>
+                                  <p:attrNameLst>
+                                    <p:attrName>style.visibility</p:attrName>
+                                  </p:attrNameLst>
+                                </p:cBhvr>
+                                <p:to>
+                                  <p:strVal val="visible"/>
+                                </p:to>
+                              </p:set>
+                            </p:childTnLst>
+                          </p:cTn>
+                        </p:par>
+                      </p:childTnLst>
+                    </p:cTn>
+                  </p:par>
+                </p:childTnLst>
+              </p:cTn>
+              <p:prevCondLst>
+                <p:cond evt="onPrev" delay="0">
+                  <p:tgtEl>
+                    <p:sldTgt/>
+                  </p:tgtEl>
+                </p:cond>
+              </p:prevCondLst>
+              <p:nextCondLst>
+                <p:cond evt="onNext" delay="0">
+                  <p:tgtEl>
+                    <p:sldTgt/>
+                  </p:tgtEl>
+                </p:cond>
+              </p:nextCondLst>
+            </p:seq>
+          </p:childTnLst>
+        </p:cTn>
+      </p:par>
+    </p:tnLst>
+    <p:bldLst>
+      <p:bldP spid="53" grpId="0"/>
+    </p:bldLst>
+  </p:timing>
 </p:sld>
 </file>
 
@@ -15685,7 +11882,7 @@
                 <a:latin typeface="Noto Sans CJK SC"/>
                 <a:ea typeface="Noto Sans CJK SC"/>
               </a:rPr>
-              <a:t>新媒体运营：用内容换流量</a:t>
+              <a:t>新媒体运营：账号就是简历</a:t>
             </a:r>
           </a:p>
         </p:txBody>
@@ -15724,7 +11921,7 @@
                 <a:latin typeface="Noto Sans CJK SC"/>
                 <a:ea typeface="Noto Sans CJK SC"/>
               </a:rPr>
-              <a:t>新媒体运营：用内容换流量</a:t>
+              <a:t>新媒体运营：账号就是简历</a:t>
             </a:r>
           </a:p>
         </p:txBody>
@@ -15767,7 +11964,7 @@
                 <a:latin typeface="Noto Sans CJK SC"/>
                 <a:ea typeface="Noto Sans CJK SC"/>
               </a:rPr>
-              <a:t>定位：经营品牌的内容资产</a:t>
+              <a:t>学：B站系统课+平台官方教程</a:t>
             </a:r>
           </a:p>
           <a:p>
@@ -15786,7 +11983,7 @@
                 <a:latin typeface="Noto Sans CJK SC"/>
                 <a:ea typeface="Noto Sans CJK SC"/>
               </a:rPr>
-              <a:t>主战场：小红书、抖音、视频号</a:t>
+              <a:t>练：自营账号跑30天真实数据</a:t>
             </a:r>
           </a:p>
           <a:p>
@@ -15805,7 +12002,7 @@
                 <a:latin typeface="Noto Sans CJK SC"/>
                 <a:ea typeface="Noto Sans CJK SC"/>
               </a:rPr>
-              <a:t>每天：看数据、追热点、写文案</a:t>
+              <a:t>简历只写可量化的结果</a:t>
             </a:r>
           </a:p>
           <a:p>
@@ -15824,7 +12021,7 @@
                 <a:latin typeface="Noto Sans CJK SC"/>
                 <a:ea typeface="Noto Sans CJK SC"/>
               </a:rPr>
-              <a:t>每周：排期表、数据复盘、活动</a:t>
+              <a:t>例：打开率3个月从2%到5%</a:t>
             </a:r>
           </a:p>
           <a:p>
@@ -15843,7 +12040,7 @@
                 <a:latin typeface="Noto Sans CJK SC"/>
                 <a:ea typeface="Noto Sans CJK SC"/>
               </a:rPr>
-              <a:t>KPI：阅读、涨粉、互动、转化</a:t>
+              <a:t>例：500万播放，涨粉10万+</a:t>
             </a:r>
           </a:p>
           <a:p>
@@ -15862,7 +12059,7 @@
                 <a:latin typeface="Noto Sans CJK SC"/>
                 <a:ea typeface="Noto Sans CJK SC"/>
               </a:rPr>
-              <a:t>适合：有表达欲、爱研究爆款的人</a:t>
+              <a:t>一页纸排版，附作品链接</a:t>
             </a:r>
           </a:p>
         </p:txBody>
@@ -15901,7 +12098,7 @@
                 <a:latin typeface="Noto Sans CJK SC"/>
                 <a:ea typeface="Noto Sans CJK SC"/>
               </a:rPr>
-              <a:t>06 / 33</a:t>
+              <a:t>06 / 26</a:t>
             </a:r>
           </a:p>
         </p:txBody>
@@ -16225,7 +12422,7 @@
                 <a:latin typeface="Noto Sans CJK SC"/>
                 <a:ea typeface="Noto Sans CJK SC"/>
               </a:rPr>
-              <a:t>新媒体运营：账号就是简历</a:t>
+              <a:t>电商运营：离钱最近的岗位</a:t>
             </a:r>
           </a:p>
         </p:txBody>
@@ -16264,7 +12461,7 @@
                 <a:latin typeface="Noto Sans CJK SC"/>
                 <a:ea typeface="Noto Sans CJK SC"/>
               </a:rPr>
-              <a:t>新媒体运营：账号就是简历</a:t>
+              <a:t>电商运营：离钱最近的岗位</a:t>
             </a:r>
           </a:p>
         </p:txBody>
@@ -16307,7 +12504,7 @@
                 <a:latin typeface="Noto Sans CJK SC"/>
                 <a:ea typeface="Noto Sans CJK SC"/>
               </a:rPr>
-              <a:t>学：B站系统课+平台官方教程</a:t>
+              <a:t>定位：让店铺多卖货的人</a:t>
             </a:r>
           </a:p>
           <a:p>
@@ -16326,7 +12523,7 @@
                 <a:latin typeface="Noto Sans CJK SC"/>
                 <a:ea typeface="Noto Sans CJK SC"/>
               </a:rPr>
-              <a:t>练：自营账号跑30天真实数据</a:t>
+              <a:t>公式：流量乘转化率乘客单价</a:t>
             </a:r>
           </a:p>
           <a:p>
@@ -16345,7 +12542,7 @@
                 <a:latin typeface="Noto Sans CJK SC"/>
                 <a:ea typeface="Noto Sans CJK SC"/>
               </a:rPr>
-              <a:t>简历只写可量化的结果</a:t>
+              <a:t>每天：看后台、上新品、调投放</a:t>
             </a:r>
           </a:p>
           <a:p>
@@ -16364,7 +12561,7 @@
                 <a:latin typeface="Noto Sans CJK SC"/>
                 <a:ea typeface="Noto Sans CJK SC"/>
               </a:rPr>
-              <a:t>例：打开率3个月从2%到5%</a:t>
+              <a:t>大促：618双11要盯盘加班</a:t>
             </a:r>
           </a:p>
           <a:p>
@@ -16383,7 +12580,7 @@
                 <a:latin typeface="Noto Sans CJK SC"/>
                 <a:ea typeface="Noto Sans CJK SC"/>
               </a:rPr>
-              <a:t>例：500万播放，涨粉10万+</a:t>
+              <a:t>工具：生意参谋、千川、直通车</a:t>
             </a:r>
           </a:p>
           <a:p>
@@ -16402,7 +12599,7 @@
                 <a:latin typeface="Noto Sans CJK SC"/>
                 <a:ea typeface="Noto Sans CJK SC"/>
               </a:rPr>
-              <a:t>一页纸排版，附作品链接</a:t>
+              <a:t>竞品：每周拆解3个对标店铺</a:t>
             </a:r>
           </a:p>
         </p:txBody>
@@ -16441,7 +12638,7 @@
                 <a:latin typeface="Noto Sans CJK SC"/>
                 <a:ea typeface="Noto Sans CJK SC"/>
               </a:rPr>
-              <a:t>07 / 33</a:t>
+              <a:t>07 / 26</a:t>
             </a:r>
           </a:p>
         </p:txBody>
@@ -16765,7 +12962,7 @@
                 <a:latin typeface="Noto Sans CJK SC"/>
                 <a:ea typeface="Noto Sans CJK SC"/>
               </a:rPr>
-              <a:t>电商运营：离钱最近的岗位</a:t>
+              <a:t>电商运营：结果导向最好进</a:t>
             </a:r>
           </a:p>
         </p:txBody>
@@ -16804,7 +13001,7 @@
                 <a:latin typeface="Noto Sans CJK SC"/>
                 <a:ea typeface="Noto Sans CJK SC"/>
               </a:rPr>
-              <a:t>电商运营：离钱最近的岗位</a:t>
+              <a:t>电商运营：结果导向最好进</a:t>
             </a:r>
           </a:p>
         </p:txBody>
@@ -16847,7 +13044,7 @@
                 <a:latin typeface="Noto Sans CJK SC"/>
                 <a:ea typeface="Noto Sans CJK SC"/>
               </a:rPr>
-              <a:t>定位：让店铺多卖货的人</a:t>
+              <a:t>学：B站电商课+商家后台学院</a:t>
             </a:r>
           </a:p>
           <a:p>
@@ -16866,7 +13063,7 @@
                 <a:latin typeface="Noto Sans CJK SC"/>
                 <a:ea typeface="Noto Sans CJK SC"/>
               </a:rPr>
-              <a:t>公式：流量乘转化率乘客单价</a:t>
+              <a:t>练：帮小店上架优化10个商品</a:t>
             </a:r>
           </a:p>
           <a:p>
@@ -16885,7 +13082,7 @@
                 <a:latin typeface="Noto Sans CJK SC"/>
                 <a:ea typeface="Noto Sans CJK SC"/>
               </a:rPr>
-              <a:t>每天：看后台、上新品、调投放</a:t>
+              <a:t>简历关键词：GMV、ROI、转化率</a:t>
             </a:r>
           </a:p>
           <a:p>
@@ -16904,7 +13101,7 @@
                 <a:latin typeface="Noto Sans CJK SC"/>
                 <a:ea typeface="Noto Sans CJK SC"/>
               </a:rPr>
-              <a:t>大促：618双11要盯盘加班</a:t>
+              <a:t>例：月销10万提到50万</a:t>
             </a:r>
           </a:p>
           <a:p>
@@ -16923,7 +13120,7 @@
                 <a:latin typeface="Noto Sans CJK SC"/>
                 <a:ea typeface="Noto Sans CJK SC"/>
               </a:rPr>
-              <a:t>工具：生意参谋、千川、直通车</a:t>
+              <a:t>例：广告ROI优化至1.8</a:t>
             </a:r>
           </a:p>
           <a:p>
@@ -16942,7 +13139,7 @@
                 <a:latin typeface="Noto Sans CJK SC"/>
                 <a:ea typeface="Noto Sans CJK SC"/>
               </a:rPr>
-              <a:t>竞品：每周拆解3个对标店铺</a:t>
+              <a:t>单双休普遍，谈offer要问清</a:t>
             </a:r>
           </a:p>
         </p:txBody>
@@ -16981,7 +13178,7 @@
                 <a:latin typeface="Noto Sans CJK SC"/>
                 <a:ea typeface="Noto Sans CJK SC"/>
               </a:rPr>
-              <a:t>08 / 33</a:t>
+              <a:t>08 / 26</a:t>
             </a:r>
           </a:p>
         </p:txBody>
@@ -17305,7 +13502,7 @@
                 <a:latin typeface="Noto Sans CJK SC"/>
                 <a:ea typeface="Noto Sans CJK SC"/>
               </a:rPr>
-              <a:t>电商运营：结果导向最好进</a:t>
+              <a:t>社群运营：最快的入行跳板</a:t>
             </a:r>
           </a:p>
         </p:txBody>
@@ -17344,7 +13541,7 @@
                 <a:latin typeface="Noto Sans CJK SC"/>
                 <a:ea typeface="Noto Sans CJK SC"/>
               </a:rPr>
-              <a:t>电商运营：结果导向最好进</a:t>
+              <a:t>社群运营：最快的入行跳板</a:t>
             </a:r>
           </a:p>
         </p:txBody>
@@ -17387,7 +13584,7 @@
                 <a:latin typeface="Noto Sans CJK SC"/>
                 <a:ea typeface="Noto Sans CJK SC"/>
               </a:rPr>
-              <a:t>学：B站电商课+商家后台学院</a:t>
+              <a:t>定位：维护用户关系促复购</a:t>
             </a:r>
           </a:p>
           <a:p>
@@ -17406,7 +13603,7 @@
                 <a:latin typeface="Noto Sans CJK SC"/>
                 <a:ea typeface="Noto Sans CJK SC"/>
               </a:rPr>
-              <a:t>练：帮小店上架优化10个商品</a:t>
+              <a:t>每天：群内答疑、发内容、办活动</a:t>
             </a:r>
           </a:p>
           <a:p>
@@ -17425,7 +13622,7 @@
                 <a:latin typeface="Noto Sans CJK SC"/>
                 <a:ea typeface="Noto Sans CJK SC"/>
               </a:rPr>
-              <a:t>简历关键词：GMV、ROI、转化率</a:t>
+              <a:t>核心：持续输出价值不是打杂</a:t>
             </a:r>
           </a:p>
           <a:p>
@@ -17444,7 +13641,7 @@
                 <a:latin typeface="Noto Sans CJK SC"/>
                 <a:ea typeface="Noto Sans CJK SC"/>
               </a:rPr>
-              <a:t>例：月销10万提到50万</a:t>
+              <a:t>技能：话术SOP、用户分层</a:t>
             </a:r>
           </a:p>
           <a:p>
@@ -17463,7 +13660,7 @@
                 <a:latin typeface="Noto Sans CJK SC"/>
                 <a:ea typeface="Noto Sans CJK SC"/>
               </a:rPr>
-              <a:t>例：广告ROI优化至1.8</a:t>
+              <a:t>适合：外向耐心、爱帮人解决问题</a:t>
             </a:r>
           </a:p>
           <a:p>
@@ -17482,7 +13679,7 @@
                 <a:latin typeface="Noto Sans CJK SC"/>
                 <a:ea typeface="Noto Sans CJK SC"/>
               </a:rPr>
-              <a:t>单双休普遍，谈offer要问清</a:t>
+              <a:t>策略：干1年转新媒体或电商</a:t>
             </a:r>
           </a:p>
         </p:txBody>
@@ -17521,7 +13718,7 @@
                 <a:latin typeface="Noto Sans CJK SC"/>
                 <a:ea typeface="Noto Sans CJK SC"/>
               </a:rPr>
-              <a:t>09 / 33</a:t>
+              <a:t>09 / 26</a:t>
             </a:r>
           </a:p>
         </p:txBody>

--- a/static/lulu/ppt/career-guide.pptx
+++ b/static/lulu/ppt/career-guide.pptx
@@ -1275,7 +1275,7 @@
                 <a:latin typeface="Noto Sans CJK SC"/>
                 <a:ea typeface="Noto Sans CJK SC"/>
               </a:rPr>
-              <a:t>工具：禅道、JIRA、Postman</a:t>
+              <a:t>工具：禅道、JIRA、Excel</a:t>
             </a:r>
           </a:p>
           <a:p>
@@ -1294,7 +1294,7 @@
                 <a:latin typeface="Noto Sans CJK SC"/>
                 <a:ea typeface="Noto Sans CJK SC"/>
               </a:rPr>
-              <a:t>2025真相：纯手工岗竞争激烈</a:t>
+              <a:t>核心：用例质量和bug描述</a:t>
             </a:r>
           </a:p>
           <a:p>
@@ -1313,7 +1313,7 @@
                 <a:latin typeface="Noto Sans CJK SC"/>
                 <a:ea typeface="Noto Sans CJK SC"/>
               </a:rPr>
-              <a:t>门槛上移：SQL加接口成标配</a:t>
+              <a:t>行情：投的人多但会写的少</a:t>
             </a:r>
           </a:p>
           <a:p>
@@ -1332,7 +1332,7 @@
                 <a:latin typeface="Noto Sans CJK SC"/>
                 <a:ea typeface="Noto Sans CJK SC"/>
               </a:rPr>
-              <a:t>亮点方向：AI产品测试缺人</a:t>
+              <a:t>门槛：细心坐得住条理清楚</a:t>
             </a:r>
           </a:p>
         </p:txBody>
@@ -1695,7 +1695,7 @@
                 <a:latin typeface="Noto Sans CJK SC"/>
                 <a:ea typeface="Noto Sans CJK SC"/>
               </a:rPr>
-              <a:t>软件测试：三个月学习路线</a:t>
+              <a:t>软件测试：五周学习路线</a:t>
             </a:r>
           </a:p>
         </p:txBody>
@@ -1734,7 +1734,7 @@
                 <a:latin typeface="Noto Sans CJK SC"/>
                 <a:ea typeface="Noto Sans CJK SC"/>
               </a:rPr>
-              <a:t>软件测试：三个月学习路线</a:t>
+              <a:t>软件测试：五周学习路线</a:t>
             </a:r>
           </a:p>
         </p:txBody>
@@ -1777,7 +1777,7 @@
                 <a:latin typeface="Noto Sans CJK SC"/>
                 <a:ea typeface="Noto Sans CJK SC"/>
               </a:rPr>
-              <a:t>第1月：测试理论+用例编写</a:t>
+              <a:t>第1-2周：测试理论+用例方法</a:t>
             </a:r>
           </a:p>
           <a:p>
@@ -1796,7 +1796,7 @@
                 <a:latin typeface="Noto Sans CJK SC"/>
                 <a:ea typeface="Noto Sans CJK SC"/>
               </a:rPr>
-              <a:t>第2月：SQL基础+Postman接口</a:t>
+              <a:t>第3-4周：3个App用例实操</a:t>
             </a:r>
           </a:p>
           <a:p>
@@ -1815,7 +1815,7 @@
                 <a:latin typeface="Noto Sans CJK SC"/>
                 <a:ea typeface="Noto Sans CJK SC"/>
               </a:rPr>
-              <a:t>第3月：Linux+Python自动化入门</a:t>
+              <a:t>第5周：完整测一轮+出报告</a:t>
             </a:r>
           </a:p>
           <a:p>
@@ -1834,7 +1834,7 @@
                 <a:latin typeface="Noto Sans CJK SC"/>
                 <a:ea typeface="Noto Sans CJK SC"/>
               </a:rPr>
-              <a:t>作品：常用App测试用例10份</a:t>
+              <a:t>作品：用例文档+缺陷单+报告</a:t>
             </a:r>
           </a:p>
           <a:p>
@@ -1853,7 +1853,7 @@
                 <a:latin typeface="Noto Sans CJK SC"/>
                 <a:ea typeface="Noto Sans CJK SC"/>
               </a:rPr>
-              <a:t>投递：先投中小厂攒项目经验</a:t>
+              <a:t>投递：中小厂功能测试岗为主</a:t>
             </a:r>
           </a:p>
           <a:p>
@@ -1872,7 +1872,7 @@
                 <a:latin typeface="Noto Sans CJK SC"/>
                 <a:ea typeface="Noto Sans CJK SC"/>
               </a:rPr>
-              <a:t>警告：没学完别裸投手工岗</a:t>
+              <a:t>提醒：用例写好比什么都重要</a:t>
             </a:r>
           </a:p>
         </p:txBody>
@@ -10862,7 +10862,7 @@
                           <a:latin typeface="Noto Sans CJK SC"/>
                           <a:ea typeface="Noto Sans CJK SC"/>
                         </a:rPr>
-                        <a:t>2-3月</a:t>
+                        <a:t>4-5周</a:t>
                       </a:r>
                     </a:p>
                   </a:txBody>
@@ -10910,7 +10910,7 @@
                           <a:latin typeface="Noto Sans CJK SC"/>
                           <a:ea typeface="Noto Sans CJK SC"/>
                         </a:rPr>
-                        <a:t>要会SQL接口</a:t>
+                        <a:t>点点点上手快</a:t>
                       </a:r>
                     </a:p>
                   </a:txBody>

--- a/static/lulu/ppt/career-guide.pptx
+++ b/static/lulu/ppt/career-guide.pptx
@@ -29,8 +29,6 @@
     <p:sldId id="277" r:id="rId23"/>
     <p:sldId id="278" r:id="rId24"/>
     <p:sldId id="279" r:id="rId25"/>
-    <p:sldId id="280" r:id="rId26"/>
-    <p:sldId id="281" r:id="rId27"/>
   </p:sldIdLst>
   <p:sldSz cx="12192000" cy="6858000" type="screen16x9"/>
   <p:notesSz cx="6858000" cy="9144000"/>
@@ -540,7 +538,7 @@
                 <a:latin typeface="Noto Sans CJK SC"/>
                 <a:ea typeface="Noto Sans CJK SC"/>
               </a:rPr>
-              <a:t>01 / 26</a:t>
+              <a:t>01 / 24</a:t>
             </a:r>
           </a:p>
         </p:txBody>
@@ -615,7 +613,7 @@
                 <a:latin typeface="Noto Sans CJK SC"/>
                 <a:ea typeface="Noto Sans CJK SC"/>
               </a:rPr>
-              <a:t>社群运营：三周就能上岗</a:t>
+              <a:t>软件测试：AI时代的守门员</a:t>
             </a:r>
           </a:p>
         </p:txBody>
@@ -654,7 +652,7 @@
                 <a:latin typeface="Noto Sans CJK SC"/>
                 <a:ea typeface="Noto Sans CJK SC"/>
               </a:rPr>
-              <a:t>社群运营：三周就能上岗</a:t>
+              <a:t>软件测试：AI时代的守门员</a:t>
             </a:r>
           </a:p>
         </p:txBody>
@@ -697,7 +695,7 @@
                 <a:latin typeface="Noto Sans CJK SC"/>
                 <a:ea typeface="Noto Sans CJK SC"/>
               </a:rPr>
-              <a:t>学：B站入门课+拆解3个好社群</a:t>
+              <a:t>定位：上线前最后的质量关卡</a:t>
             </a:r>
           </a:p>
           <a:p>
@@ -716,7 +714,7 @@
                 <a:latin typeface="Noto Sans CJK SC"/>
                 <a:ea typeface="Noto Sans CJK SC"/>
               </a:rPr>
-              <a:t>练：自建30人兴趣群实操一周</a:t>
+              <a:t>每天：写用例、执行测试、提bug</a:t>
             </a:r>
           </a:p>
           <a:p>
@@ -735,7 +733,7 @@
                 <a:latin typeface="Noto Sans CJK SC"/>
                 <a:ea typeface="Noto Sans CJK SC"/>
               </a:rPr>
-              <a:t>简历写：活跃、转化、裂变数据</a:t>
+              <a:t>工具：禅道、JIRA、Excel</a:t>
             </a:r>
           </a:p>
           <a:p>
@@ -754,7 +752,7 @@
                 <a:latin typeface="Noto Sans CJK SC"/>
                 <a:ea typeface="Noto Sans CJK SC"/>
               </a:rPr>
-              <a:t>例：社群活跃度提升35%</a:t>
+              <a:t>核心：用例质量和bug描述</a:t>
             </a:r>
           </a:p>
           <a:p>
@@ -773,7 +771,7 @@
                 <a:latin typeface="Noto Sans CJK SC"/>
                 <a:ea typeface="Noto Sans CJK SC"/>
               </a:rPr>
-              <a:t>例：裂变活动新增用户500+</a:t>
+              <a:t>行情：投的人多但会写的少</a:t>
             </a:r>
           </a:p>
           <a:p>
@@ -792,7 +790,7 @@
                 <a:latin typeface="Noto Sans CJK SC"/>
                 <a:ea typeface="Noto Sans CJK SC"/>
               </a:rPr>
-              <a:t>面试就讲你建群的真实打法</a:t>
+              <a:t>门槛：细心坐得住条理清楚</a:t>
             </a:r>
           </a:p>
         </p:txBody>
@@ -831,7 +829,7 @@
                 <a:latin typeface="Noto Sans CJK SC"/>
                 <a:ea typeface="Noto Sans CJK SC"/>
               </a:rPr>
-              <a:t>10 / 26</a:t>
+              <a:t>10 / 24</a:t>
             </a:r>
           </a:p>
         </p:txBody>
@@ -1155,7 +1153,7 @@
                 <a:latin typeface="Noto Sans CJK SC"/>
                 <a:ea typeface="Noto Sans CJK SC"/>
               </a:rPr>
-              <a:t>软件测试：AI时代的守门员</a:t>
+              <a:t>软件测试：五周学习路线</a:t>
             </a:r>
           </a:p>
         </p:txBody>
@@ -1194,7 +1192,7 @@
                 <a:latin typeface="Noto Sans CJK SC"/>
                 <a:ea typeface="Noto Sans CJK SC"/>
               </a:rPr>
-              <a:t>软件测试：AI时代的守门员</a:t>
+              <a:t>软件测试：五周学习路线</a:t>
             </a:r>
           </a:p>
         </p:txBody>
@@ -1237,7 +1235,7 @@
                 <a:latin typeface="Noto Sans CJK SC"/>
                 <a:ea typeface="Noto Sans CJK SC"/>
               </a:rPr>
-              <a:t>定位：上线前最后的质量关卡</a:t>
+              <a:t>第1-2周：测试理论+用例方法</a:t>
             </a:r>
           </a:p>
           <a:p>
@@ -1256,7 +1254,7 @@
                 <a:latin typeface="Noto Sans CJK SC"/>
                 <a:ea typeface="Noto Sans CJK SC"/>
               </a:rPr>
-              <a:t>每天：写用例、执行测试、提bug</a:t>
+              <a:t>第3-4周：3个App用例实操</a:t>
             </a:r>
           </a:p>
           <a:p>
@@ -1275,7 +1273,7 @@
                 <a:latin typeface="Noto Sans CJK SC"/>
                 <a:ea typeface="Noto Sans CJK SC"/>
               </a:rPr>
-              <a:t>工具：禅道、JIRA、Excel</a:t>
+              <a:t>第5周：完整测一轮+出报告</a:t>
             </a:r>
           </a:p>
           <a:p>
@@ -1294,7 +1292,7 @@
                 <a:latin typeface="Noto Sans CJK SC"/>
                 <a:ea typeface="Noto Sans CJK SC"/>
               </a:rPr>
-              <a:t>核心：用例质量和bug描述</a:t>
+              <a:t>作品：用例文档+缺陷单+报告</a:t>
             </a:r>
           </a:p>
           <a:p>
@@ -1313,7 +1311,7 @@
                 <a:latin typeface="Noto Sans CJK SC"/>
                 <a:ea typeface="Noto Sans CJK SC"/>
               </a:rPr>
-              <a:t>行情：投的人多但会写的少</a:t>
+              <a:t>投递：中小厂功能测试岗为主</a:t>
             </a:r>
           </a:p>
           <a:p>
@@ -1332,7 +1330,7 @@
                 <a:latin typeface="Noto Sans CJK SC"/>
                 <a:ea typeface="Noto Sans CJK SC"/>
               </a:rPr>
-              <a:t>门槛：细心坐得住条理清楚</a:t>
+              <a:t>提醒：用例写好比什么都重要</a:t>
             </a:r>
           </a:p>
         </p:txBody>
@@ -1371,7 +1369,7 @@
                 <a:latin typeface="Noto Sans CJK SC"/>
                 <a:ea typeface="Noto Sans CJK SC"/>
               </a:rPr>
-              <a:t>11 / 26</a:t>
+              <a:t>11 / 24</a:t>
             </a:r>
           </a:p>
         </p:txBody>
@@ -1695,7 +1693,7 @@
                 <a:latin typeface="Noto Sans CJK SC"/>
                 <a:ea typeface="Noto Sans CJK SC"/>
               </a:rPr>
-              <a:t>软件测试：五周学习路线</a:t>
+              <a:t>数据运营：最抗AI的运营岗</a:t>
             </a:r>
           </a:p>
         </p:txBody>
@@ -1734,7 +1732,7 @@
                 <a:latin typeface="Noto Sans CJK SC"/>
                 <a:ea typeface="Noto Sans CJK SC"/>
               </a:rPr>
-              <a:t>软件测试：五周学习路线</a:t>
+              <a:t>数据运营：最抗AI的运营岗</a:t>
             </a:r>
           </a:p>
         </p:txBody>
@@ -1777,7 +1775,7 @@
                 <a:latin typeface="Noto Sans CJK SC"/>
                 <a:ea typeface="Noto Sans CJK SC"/>
               </a:rPr>
-              <a:t>第1-2周：测试理论+用例方法</a:t>
+              <a:t>定位：用数据驱动业务决策</a:t>
             </a:r>
           </a:p>
           <a:p>
@@ -1796,7 +1794,7 @@
                 <a:latin typeface="Noto Sans CJK SC"/>
                 <a:ea typeface="Noto Sans CJK SC"/>
               </a:rPr>
-              <a:t>第3-4周：3个App用例实操</a:t>
+              <a:t>每天：SQL取数、做报表、找原因</a:t>
             </a:r>
           </a:p>
           <a:p>
@@ -1815,7 +1813,7 @@
                 <a:latin typeface="Noto Sans CJK SC"/>
                 <a:ea typeface="Noto Sans CJK SC"/>
               </a:rPr>
-              <a:t>第5周：完整测一轮+出报告</a:t>
+              <a:t>技能：SQL必备、Excel透视表</a:t>
             </a:r>
           </a:p>
           <a:p>
@@ -1834,7 +1832,7 @@
                 <a:latin typeface="Noto Sans CJK SC"/>
                 <a:ea typeface="Noto Sans CJK SC"/>
               </a:rPr>
-              <a:t>作品：用例文档+缺陷单+报告</a:t>
+              <a:t>加分：Python、BI、指标体系</a:t>
             </a:r>
           </a:p>
           <a:p>
@@ -1853,7 +1851,7 @@
                 <a:latin typeface="Noto Sans CJK SC"/>
                 <a:ea typeface="Noto Sans CJK SC"/>
               </a:rPr>
-              <a:t>投递：中小厂功能测试岗为主</a:t>
+              <a:t>趋势：业务+数据复合岗最抢手</a:t>
             </a:r>
           </a:p>
           <a:p>
@@ -1872,7 +1870,7 @@
                 <a:latin typeface="Noto Sans CJK SC"/>
                 <a:ea typeface="Noto Sans CJK SC"/>
               </a:rPr>
-              <a:t>提醒：用例写好比什么都重要</a:t>
+              <a:t>适合：逻辑好、对数字敏感的人</a:t>
             </a:r>
           </a:p>
         </p:txBody>
@@ -1911,7 +1909,7 @@
                 <a:latin typeface="Noto Sans CJK SC"/>
                 <a:ea typeface="Noto Sans CJK SC"/>
               </a:rPr>
-              <a:t>12 / 26</a:t>
+              <a:t>12 / 24</a:t>
             </a:r>
           </a:p>
         </p:txBody>
@@ -2235,7 +2233,7 @@
                 <a:latin typeface="Noto Sans CJK SC"/>
                 <a:ea typeface="Noto Sans CJK SC"/>
               </a:rPr>
-              <a:t>数据运营：最抗AI的运营岗</a:t>
+              <a:t>数据运营：三个月刷题路线</a:t>
             </a:r>
           </a:p>
         </p:txBody>
@@ -2274,7 +2272,7 @@
                 <a:latin typeface="Noto Sans CJK SC"/>
                 <a:ea typeface="Noto Sans CJK SC"/>
               </a:rPr>
-              <a:t>数据运营：最抗AI的运营岗</a:t>
+              <a:t>数据运营：三个月刷题路线</a:t>
             </a:r>
           </a:p>
         </p:txBody>
@@ -2317,7 +2315,7 @@
                 <a:latin typeface="Noto Sans CJK SC"/>
                 <a:ea typeface="Noto Sans CJK SC"/>
               </a:rPr>
-              <a:t>定位：用数据驱动业务决策</a:t>
+              <a:t>第1月：Excel透视表+SQL入门</a:t>
             </a:r>
           </a:p>
           <a:p>
@@ -2336,7 +2334,7 @@
                 <a:latin typeface="Noto Sans CJK SC"/>
                 <a:ea typeface="Noto Sans CJK SC"/>
               </a:rPr>
-              <a:t>每天：SQL取数、做报表、找原因</a:t>
+              <a:t>第2月：牛客SQL题库刷50题</a:t>
             </a:r>
           </a:p>
           <a:p>
@@ -2355,7 +2353,7 @@
                 <a:latin typeface="Noto Sans CJK SC"/>
                 <a:ea typeface="Noto Sans CJK SC"/>
               </a:rPr>
-              <a:t>技能：SQL必备、Excel透视表</a:t>
+              <a:t>第3月：公开数据做3个分析</a:t>
             </a:r>
           </a:p>
           <a:p>
@@ -2374,7 +2372,7 @@
                 <a:latin typeface="Noto Sans CJK SC"/>
                 <a:ea typeface="Noto Sans CJK SC"/>
               </a:rPr>
-              <a:t>加分：Python、BI、指标体系</a:t>
+              <a:t>作品：问题、数据、结论三段式</a:t>
             </a:r>
           </a:p>
           <a:p>
@@ -2393,7 +2391,7 @@
                 <a:latin typeface="Noto Sans CJK SC"/>
                 <a:ea typeface="Noto Sans CJK SC"/>
               </a:rPr>
-              <a:t>趋势：业务+数据复合岗最抢手</a:t>
+              <a:t>面试：SQL手写题必考提前练</a:t>
             </a:r>
           </a:p>
           <a:p>
@@ -2412,7 +2410,7 @@
                 <a:latin typeface="Noto Sans CJK SC"/>
                 <a:ea typeface="Noto Sans CJK SC"/>
               </a:rPr>
-              <a:t>适合：逻辑好、对数字敏感的人</a:t>
+              <a:t>投递：数据运营和商业分析都投</a:t>
             </a:r>
           </a:p>
         </p:txBody>
@@ -2451,7 +2449,7 @@
                 <a:latin typeface="Noto Sans CJK SC"/>
                 <a:ea typeface="Noto Sans CJK SC"/>
               </a:rPr>
-              <a:t>13 / 26</a:t>
+              <a:t>13 / 24</a:t>
             </a:r>
           </a:p>
         </p:txBody>
@@ -2775,7 +2773,7 @@
                 <a:latin typeface="Noto Sans CJK SC"/>
                 <a:ea typeface="Noto Sans CJK SC"/>
               </a:rPr>
-              <a:t>数据运营：三个月刷题路线</a:t>
+              <a:t>高校助理：有寒暑假的稳定岗</a:t>
             </a:r>
           </a:p>
         </p:txBody>
@@ -2814,7 +2812,7 @@
                 <a:latin typeface="Noto Sans CJK SC"/>
                 <a:ea typeface="Noto Sans CJK SC"/>
               </a:rPr>
-              <a:t>数据运营：三个月刷题路线</a:t>
+              <a:t>高校助理：有寒暑假的稳定岗</a:t>
             </a:r>
           </a:p>
         </p:txBody>
@@ -2857,7 +2855,7 @@
                 <a:latin typeface="Noto Sans CJK SC"/>
                 <a:ea typeface="Noto Sans CJK SC"/>
               </a:rPr>
-              <a:t>第1月：Excel透视表+SQL入门</a:t>
+              <a:t>岗位：行政、教务、学生工作</a:t>
             </a:r>
           </a:p>
           <a:p>
@@ -2876,7 +2874,7 @@
                 <a:latin typeface="Noto Sans CJK SC"/>
                 <a:ea typeface="Noto Sans CJK SC"/>
               </a:rPr>
-              <a:t>第2月：牛客SQL题库刷50题</a:t>
+              <a:t>学历：本科可投行政教辅岗</a:t>
             </a:r>
           </a:p>
           <a:p>
@@ -2895,7 +2893,7 @@
                 <a:latin typeface="Noto Sans CJK SC"/>
                 <a:ea typeface="Noto Sans CJK SC"/>
               </a:rPr>
-              <a:t>第3月：公开数据做3个分析</a:t>
+              <a:t>注意：辅导员岗多要硕士党员</a:t>
             </a:r>
           </a:p>
           <a:p>
@@ -2914,7 +2912,7 @@
                 <a:latin typeface="Noto Sans CJK SC"/>
                 <a:ea typeface="Noto Sans CJK SC"/>
               </a:rPr>
-              <a:t>作品：问题、数据、结论三段式</a:t>
+              <a:t>性质：合同制为主，求稳定合适</a:t>
             </a:r>
           </a:p>
           <a:p>
@@ -2933,7 +2931,7 @@
                 <a:latin typeface="Noto Sans CJK SC"/>
                 <a:ea typeface="Noto Sans CJK SC"/>
               </a:rPr>
-              <a:t>面试：SQL手写题必考提前练</a:t>
+              <a:t>福利：寒暑假是最大亮点</a:t>
             </a:r>
           </a:p>
           <a:p>
@@ -2952,7 +2950,7 @@
                 <a:latin typeface="Noto Sans CJK SC"/>
                 <a:ea typeface="Noto Sans CJK SC"/>
               </a:rPr>
-              <a:t>投递：数据运营和商业分析都投</a:t>
+              <a:t>渠道：高校人才网+学校官网</a:t>
             </a:r>
           </a:p>
         </p:txBody>
@@ -2991,7 +2989,7 @@
                 <a:latin typeface="Noto Sans CJK SC"/>
                 <a:ea typeface="Noto Sans CJK SC"/>
               </a:rPr>
-              <a:t>14 / 26</a:t>
+              <a:t>14 / 24</a:t>
             </a:r>
           </a:p>
         </p:txBody>
@@ -3315,7 +3313,7 @@
                 <a:latin typeface="Noto Sans CJK SC"/>
                 <a:ea typeface="Noto Sans CJK SC"/>
               </a:rPr>
-              <a:t>高校助理：有寒暑假的稳定牌</a:t>
+              <a:t>高校助理：怎么投不踩坑</a:t>
             </a:r>
           </a:p>
         </p:txBody>
@@ -3354,7 +3352,7 @@
                 <a:latin typeface="Noto Sans CJK SC"/>
                 <a:ea typeface="Noto Sans CJK SC"/>
               </a:rPr>
-              <a:t>高校助理：有寒暑假的稳定牌</a:t>
+              <a:t>高校助理：怎么投不踩坑</a:t>
             </a:r>
           </a:p>
         </p:txBody>
@@ -3397,7 +3395,7 @@
                 <a:latin typeface="Noto Sans CJK SC"/>
                 <a:ea typeface="Noto Sans CJK SC"/>
               </a:rPr>
-              <a:t>岗位：行政、教务、学生工作</a:t>
+              <a:t>区分：事业编考试与合同制直投</a:t>
             </a:r>
           </a:p>
           <a:p>
@@ -3416,7 +3414,7 @@
                 <a:latin typeface="Noto Sans CJK SC"/>
                 <a:ea typeface="Noto Sans CJK SC"/>
               </a:rPr>
-              <a:t>学历：本科可投行政教辅岗</a:t>
+              <a:t>简历：突出组织协调和公文能力</a:t>
             </a:r>
           </a:p>
           <a:p>
@@ -3435,7 +3433,7 @@
                 <a:latin typeface="Noto Sans CJK SC"/>
                 <a:ea typeface="Noto Sans CJK SC"/>
               </a:rPr>
-              <a:t>注意：辅导员岗多要硕士党员</a:t>
+              <a:t>例：处理文件300份零差错</a:t>
             </a:r>
           </a:p>
           <a:p>
@@ -3454,7 +3452,7 @@
                 <a:latin typeface="Noto Sans CJK SC"/>
                 <a:ea typeface="Noto Sans CJK SC"/>
               </a:rPr>
-              <a:t>性质：合同制为主，求稳定合适</a:t>
+              <a:t>例：活动满意度调查95%</a:t>
             </a:r>
           </a:p>
           <a:p>
@@ -3473,7 +3471,7 @@
                 <a:latin typeface="Noto Sans CJK SC"/>
                 <a:ea typeface="Noto Sans CJK SC"/>
               </a:rPr>
-              <a:t>福利：寒暑假是最大亮点</a:t>
+              <a:t>面试：稳定性和服务意识是核心</a:t>
             </a:r>
           </a:p>
           <a:p>
@@ -3492,7 +3490,7 @@
                 <a:latin typeface="Noto Sans CJK SC"/>
                 <a:ea typeface="Noto Sans CJK SC"/>
               </a:rPr>
-              <a:t>渠道：高校人才网+学校官网</a:t>
+              <a:t>当备胎投：撞上就是赚到</a:t>
             </a:r>
           </a:p>
         </p:txBody>
@@ -3531,7 +3529,7 @@
                 <a:latin typeface="Noto Sans CJK SC"/>
                 <a:ea typeface="Noto Sans CJK SC"/>
               </a:rPr>
-              <a:t>15 / 26</a:t>
+              <a:t>15 / 24</a:t>
             </a:r>
           </a:p>
         </p:txBody>
@@ -3855,7 +3853,7 @@
                 <a:latin typeface="Noto Sans CJK SC"/>
                 <a:ea typeface="Noto Sans CJK SC"/>
               </a:rPr>
-              <a:t>高校助理：怎么投不踩坑</a:t>
+              <a:t>行政专员：保底上岸岗</a:t>
             </a:r>
           </a:p>
         </p:txBody>
@@ -3894,7 +3892,7 @@
                 <a:latin typeface="Noto Sans CJK SC"/>
                 <a:ea typeface="Noto Sans CJK SC"/>
               </a:rPr>
-              <a:t>高校助理：怎么投不踩坑</a:t>
+              <a:t>行政专员：保底上岸岗</a:t>
             </a:r>
           </a:p>
         </p:txBody>
@@ -3937,7 +3935,7 @@
                 <a:latin typeface="Noto Sans CJK SC"/>
                 <a:ea typeface="Noto Sans CJK SC"/>
               </a:rPr>
-              <a:t>区分：事业编考试与合同制直投</a:t>
+              <a:t>定位：让办公室正常运转的人</a:t>
             </a:r>
           </a:p>
           <a:p>
@@ -3956,7 +3954,7 @@
                 <a:latin typeface="Noto Sans CJK SC"/>
                 <a:ea typeface="Noto Sans CJK SC"/>
               </a:rPr>
-              <a:t>简历：突出组织协调和公文能力</a:t>
+              <a:t>每天：会议、采购、报销、活动</a:t>
             </a:r>
           </a:p>
           <a:p>
@@ -3975,7 +3973,7 @@
                 <a:latin typeface="Noto Sans CJK SC"/>
                 <a:ea typeface="Noto Sans CJK SC"/>
               </a:rPr>
-              <a:t>例：处理文件300份零差错</a:t>
+              <a:t>门槛最低：两周熟悉即可上手</a:t>
             </a:r>
           </a:p>
           <a:p>
@@ -3994,7 +3992,7 @@
                 <a:latin typeface="Noto Sans CJK SC"/>
                 <a:ea typeface="Noto Sans CJK SC"/>
               </a:rPr>
-              <a:t>例：活动满意度调查95%</a:t>
+              <a:t>简历量化：省钱、零风险、提效</a:t>
             </a:r>
           </a:p>
           <a:p>
@@ -4013,7 +4011,7 @@
                 <a:latin typeface="Noto Sans CJK SC"/>
                 <a:ea typeface="Noto Sans CJK SC"/>
               </a:rPr>
-              <a:t>面试：稳定性和服务意识是核心</a:t>
+              <a:t>例：电子台账检索提速90%</a:t>
             </a:r>
           </a:p>
           <a:p>
@@ -4032,7 +4030,7 @@
                 <a:latin typeface="Noto Sans CJK SC"/>
                 <a:ea typeface="Noto Sans CJK SC"/>
               </a:rPr>
-              <a:t>当备胎投：撞上就是赚到</a:t>
+              <a:t>适合：细心靠谱、想先上岸的人</a:t>
             </a:r>
           </a:p>
         </p:txBody>
@@ -4071,7 +4069,7 @@
                 <a:latin typeface="Noto Sans CJK SC"/>
                 <a:ea typeface="Noto Sans CJK SC"/>
               </a:rPr>
-              <a:t>16 / 26</a:t>
+              <a:t>16 / 24</a:t>
             </a:r>
           </a:p>
         </p:txBody>
@@ -4395,7 +4393,7 @@
                 <a:latin typeface="Noto Sans CJK SC"/>
                 <a:ea typeface="Noto Sans CJK SC"/>
               </a:rPr>
-              <a:t>行政专员：保底上岸牌</a:t>
+              <a:t>简历通用公式：STAR加量化</a:t>
             </a:r>
           </a:p>
         </p:txBody>
@@ -4434,7 +4432,7 @@
                 <a:latin typeface="Noto Sans CJK SC"/>
                 <a:ea typeface="Noto Sans CJK SC"/>
               </a:rPr>
-              <a:t>行政专员：保底上岸牌</a:t>
+              <a:t>简历通用公式：STAR加量化</a:t>
             </a:r>
           </a:p>
         </p:txBody>
@@ -4477,7 +4475,7 @@
                 <a:latin typeface="Noto Sans CJK SC"/>
                 <a:ea typeface="Noto Sans CJK SC"/>
               </a:rPr>
-              <a:t>定位：让办公室正常运转的人</a:t>
+              <a:t>S情境：什么背景下什么问题</a:t>
             </a:r>
           </a:p>
           <a:p>
@@ -4496,7 +4494,7 @@
                 <a:latin typeface="Noto Sans CJK SC"/>
                 <a:ea typeface="Noto Sans CJK SC"/>
               </a:rPr>
-              <a:t>每天：会议、采购、报销、活动</a:t>
+              <a:t>T任务：你负责的具体目标</a:t>
             </a:r>
           </a:p>
           <a:p>
@@ -4515,7 +4513,7 @@
                 <a:latin typeface="Noto Sans CJK SC"/>
                 <a:ea typeface="Noto Sans CJK SC"/>
               </a:rPr>
-              <a:t>门槛最低：两周熟悉即可上手</a:t>
+              <a:t>A行动：用了什么方法和工具</a:t>
             </a:r>
           </a:p>
           <a:p>
@@ -4534,7 +4532,7 @@
                 <a:latin typeface="Noto Sans CJK SC"/>
                 <a:ea typeface="Noto Sans CJK SC"/>
               </a:rPr>
-              <a:t>简历量化：省钱、零风险、提效</a:t>
+              <a:t>R结果：数字说话拒绝形容词</a:t>
             </a:r>
           </a:p>
           <a:p>
@@ -4553,7 +4551,7 @@
                 <a:latin typeface="Noto Sans CJK SC"/>
                 <a:ea typeface="Noto Sans CJK SC"/>
               </a:rPr>
-              <a:t>例：电子台账检索提速90%</a:t>
+              <a:t>反例：负责公众号日常运营</a:t>
             </a:r>
           </a:p>
           <a:p>
@@ -4572,7 +4570,7 @@
                 <a:latin typeface="Noto Sans CJK SC"/>
                 <a:ea typeface="Noto Sans CJK SC"/>
               </a:rPr>
-              <a:t>适合：细心靠谱、想先上岸的人</a:t>
+              <a:t>正例：3个月打开率2%提到5%</a:t>
             </a:r>
           </a:p>
         </p:txBody>
@@ -4611,7 +4609,7 @@
                 <a:latin typeface="Noto Sans CJK SC"/>
                 <a:ea typeface="Noto Sans CJK SC"/>
               </a:rPr>
-              <a:t>17 / 26</a:t>
+              <a:t>17 / 24</a:t>
             </a:r>
           </a:p>
         </p:txBody>
@@ -4935,7 +4933,7 @@
                 <a:latin typeface="Noto Sans CJK SC"/>
                 <a:ea typeface="Noto Sans CJK SC"/>
               </a:rPr>
-              <a:t>简历通用公式：STAR加量化</a:t>
+              <a:t>Gap半年话术：30秒带过</a:t>
             </a:r>
           </a:p>
         </p:txBody>
@@ -4974,7 +4972,7 @@
                 <a:latin typeface="Noto Sans CJK SC"/>
                 <a:ea typeface="Noto Sans CJK SC"/>
               </a:rPr>
-              <a:t>简历通用公式：STAR加量化</a:t>
+              <a:t>Gap半年话术：30秒带过</a:t>
             </a:r>
           </a:p>
         </p:txBody>
@@ -5017,7 +5015,7 @@
                 <a:latin typeface="Noto Sans CJK SC"/>
                 <a:ea typeface="Noto Sans CJK SC"/>
               </a:rPr>
-              <a:t>S情境：什么背景下什么问题</a:t>
+              <a:t>考证版：系统学习已产出成果</a:t>
             </a:r>
           </a:p>
           <a:p>
@@ -5036,7 +5034,7 @@
                 <a:latin typeface="Noto Sans CJK SC"/>
                 <a:ea typeface="Noto Sans CJK SC"/>
               </a:rPr>
-              <a:t>T任务：你负责的具体目标</a:t>
+              <a:t>家庭版：事务办妥可随时到岗</a:t>
             </a:r>
           </a:p>
           <a:p>
@@ -5055,7 +5053,7 @@
                 <a:latin typeface="Noto Sans CJK SC"/>
                 <a:ea typeface="Noto Sans CJK SC"/>
               </a:rPr>
-              <a:t>A行动：用了什么方法和工具</a:t>
+              <a:t>休整版：状态恢复并补了技能</a:t>
             </a:r>
           </a:p>
           <a:p>
@@ -5074,7 +5072,7 @@
                 <a:latin typeface="Noto Sans CJK SC"/>
                 <a:ea typeface="Noto Sans CJK SC"/>
               </a:rPr>
-              <a:t>R结果：数字说话拒绝形容词</a:t>
+              <a:t>原则：不撒谎、不道歉、不恋战</a:t>
             </a:r>
           </a:p>
           <a:p>
@@ -5093,7 +5091,7 @@
                 <a:latin typeface="Noto Sans CJK SC"/>
                 <a:ea typeface="Noto Sans CJK SC"/>
               </a:rPr>
-              <a:t>反例：负责公众号日常运营</a:t>
+              <a:t>落点：马上引到岗位匹配度</a:t>
             </a:r>
           </a:p>
           <a:p>
@@ -5112,7 +5110,7 @@
                 <a:latin typeface="Noto Sans CJK SC"/>
                 <a:ea typeface="Noto Sans CJK SC"/>
               </a:rPr>
-              <a:t>正例：3个月打开率2%提到5%</a:t>
+              <a:t>证据：gap期做的每件事都算数</a:t>
             </a:r>
           </a:p>
         </p:txBody>
@@ -5151,7 +5149,7 @@
                 <a:latin typeface="Noto Sans CJK SC"/>
                 <a:ea typeface="Noto Sans CJK SC"/>
               </a:rPr>
-              <a:t>18 / 26</a:t>
+              <a:t>18 / 24</a:t>
             </a:r>
           </a:p>
         </p:txBody>
@@ -5475,7 +5473,7 @@
                 <a:latin typeface="Noto Sans CJK SC"/>
                 <a:ea typeface="Noto Sans CJK SC"/>
               </a:rPr>
-              <a:t>Gap半年话术：30秒带过</a:t>
+              <a:t>过来人共识：一年内gap市场能接受</a:t>
             </a:r>
           </a:p>
         </p:txBody>
@@ -5514,7 +5512,7 @@
                 <a:latin typeface="Noto Sans CJK SC"/>
                 <a:ea typeface="Noto Sans CJK SC"/>
               </a:rPr>
-              <a:t>Gap半年话术：30秒带过</a:t>
+              <a:t>过来人共识：一年内gap市场能接受</a:t>
             </a:r>
           </a:p>
         </p:txBody>
@@ -5557,7 +5555,7 @@
                 <a:latin typeface="Noto Sans CJK SC"/>
                 <a:ea typeface="Noto Sans CJK SC"/>
               </a:rPr>
-              <a:t>考证版：系统学习已产出成果</a:t>
+              <a:t>求职市场认可一年左右的gap</a:t>
             </a:r>
           </a:p>
           <a:p>
@@ -5576,7 +5574,7 @@
                 <a:latin typeface="Noto Sans CJK SC"/>
                 <a:ea typeface="Noto Sans CJK SC"/>
               </a:rPr>
-              <a:t>家庭版：事务办妥可随时到岗</a:t>
+              <a:t>招聘总监：离职状态到岗更快</a:t>
             </a:r>
           </a:p>
           <a:p>
@@ -5595,7 +5593,7 @@
                 <a:latin typeface="Noto Sans CJK SC"/>
                 <a:ea typeface="Noto Sans CJK SC"/>
               </a:rPr>
-              <a:t>休整版：状态恢复并补了技能</a:t>
+              <a:t>HR担心的是稳定性不是空窗</a:t>
             </a:r>
           </a:p>
           <a:p>
@@ -5614,7 +5612,7 @@
                 <a:latin typeface="Noto Sans CJK SC"/>
                 <a:ea typeface="Noto Sans CJK SC"/>
               </a:rPr>
-              <a:t>原则：不撒谎、不道歉、不恋战</a:t>
+              <a:t>易接受的回答：学习调整突破</a:t>
             </a:r>
           </a:p>
           <a:p>
@@ -5633,7 +5631,7 @@
                 <a:latin typeface="Noto Sans CJK SC"/>
                 <a:ea typeface="Noto Sans CJK SC"/>
               </a:rPr>
-              <a:t>落点：马上引到岗位匹配度</a:t>
+              <a:t>你的gap半年在安全区内</a:t>
             </a:r>
           </a:p>
           <a:p>
@@ -5652,7 +5650,7 @@
                 <a:latin typeface="Noto Sans CJK SC"/>
                 <a:ea typeface="Noto Sans CJK SC"/>
               </a:rPr>
-              <a:t>证据：gap期做的每件事都算数</a:t>
+              <a:t>来源：牛客网+知乎过来人帖</a:t>
             </a:r>
           </a:p>
         </p:txBody>
@@ -5691,7 +5689,7 @@
                 <a:latin typeface="Noto Sans CJK SC"/>
                 <a:ea typeface="Noto Sans CJK SC"/>
               </a:rPr>
-              <a:t>19 / 26</a:t>
+              <a:t>19 / 24</a:t>
             </a:r>
           </a:p>
         </p:txBody>
@@ -6015,7 +6013,7 @@
                 <a:latin typeface="Noto Sans CJK SC"/>
                 <a:ea typeface="Noto Sans CJK SC"/>
               </a:rPr>
-              <a:t>你的牌面：gap半年不是绝症</a:t>
+              <a:t>投递策略：主攻+保底+顺手投</a:t>
             </a:r>
           </a:p>
         </p:txBody>
@@ -6054,7 +6052,7 @@
                 <a:latin typeface="Noto Sans CJK SC"/>
                 <a:ea typeface="Noto Sans CJK SC"/>
               </a:rPr>
-              <a:t>你的牌面：gap半年不是绝症</a:t>
+              <a:t>投递策略：主攻+保底+顺手投</a:t>
             </a:r>
           </a:p>
         </p:txBody>
@@ -6097,7 +6095,7 @@
                 <a:latin typeface="Noto Sans CJK SC"/>
                 <a:ea typeface="Noto Sans CJK SC"/>
               </a:rPr>
-              <a:t>本科学历：七个岗位全部够格</a:t>
+              <a:t>主攻方向：值得花2-3个月系统学</a:t>
             </a:r>
           </a:p>
           <a:p>
@@ -6116,7 +6114,7 @@
                 <a:latin typeface="Noto Sans CJK SC"/>
                 <a:ea typeface="Noto Sans CJK SC"/>
               </a:rPr>
-              <a:t>一线城市：岗位数量全国最多</a:t>
+              <a:t>候选：数据运营 或 新媒体运营</a:t>
             </a:r>
           </a:p>
           <a:p>
@@ -6135,7 +6133,7 @@
                 <a:latin typeface="Noto Sans CJK SC"/>
                 <a:ea typeface="Noto Sans CJK SC"/>
               </a:rPr>
-              <a:t>1-3年经验：软技能是可迁移资产</a:t>
+              <a:t>保底快投：2-4周拿offer止住空窗</a:t>
             </a:r>
           </a:p>
           <a:p>
@@ -6154,7 +6152,7 @@
                 <a:latin typeface="Noto Sans CJK SC"/>
                 <a:ea typeface="Noto Sans CJK SC"/>
               </a:rPr>
-              <a:t>gap半年：市场常见，叙事可重建</a:t>
+              <a:t>候选：社群运营 或 行政专员</a:t>
             </a:r>
           </a:p>
           <a:p>
@@ -6173,7 +6171,26 @@
                 <a:latin typeface="Noto Sans CJK SC"/>
                 <a:ea typeface="Noto Sans CJK SC"/>
               </a:rPr>
-              <a:t>核心任务：3个月内先落地再优化</a:t>
+              <a:t>顺手投：高校助理，投了不亏</a:t>
+            </a:r>
+          </a:p>
+          <a:p>
+            <a:pPr marL="285750" indent="-285750">
+              <a:spcAft>
+                <a:spcPts val="600"/>
+              </a:spcAft>
+              <a:buFont typeface="Arial" panose="020B0604020202020204"/>
+              <a:buChar char="•"/>
+            </a:pPr>
+            <a:r>
+              <a:rPr lang="zh-CN" sz="2000" b="0" dirty="0">
+                <a:solidFill>
+                  <a:srgbClr val="3B2F2A"/>
+                </a:solidFill>
+                <a:latin typeface="Noto Sans CJK SC"/>
+                <a:ea typeface="Noto Sans CJK SC"/>
+              </a:rPr>
+              <a:t>先上岸，再优化，不冲突</a:t>
             </a:r>
           </a:p>
         </p:txBody>
@@ -6212,7 +6229,7 @@
                 <a:latin typeface="Noto Sans CJK SC"/>
                 <a:ea typeface="Noto Sans CJK SC"/>
               </a:rPr>
-              <a:t>02 / 26</a:t>
+              <a:t>02 / 24</a:t>
             </a:r>
           </a:p>
         </p:txBody>
@@ -6413,6 +6430,42 @@
                       </p:childTnLst>
                     </p:cTn>
                   </p:par>
+                  <p:par>
+                    <p:cTn id="18" fill="hold">
+                      <p:stCondLst>
+                        <p:cond delay="indefinite"/>
+                      </p:stCondLst>
+                      <p:childTnLst>
+                        <p:par>
+                          <p:cTn id="19" presetID="1" presetClass="entr" presetSubtype="0" fill="hold" grpId="0" nodeType="clickEffect">
+                            <p:stCondLst>
+                              <p:cond delay="0"/>
+                            </p:stCondLst>
+                            <p:childTnLst>
+                              <p:set>
+                                <p:cBhvr>
+                                  <p:cTn id="20" dur="1" fill="hold">
+                                    <p:stCondLst>
+                                      <p:cond delay="0"/>
+                                    </p:stCondLst>
+                                  </p:cTn>
+                                  <p:tgtEl>
+                                    <p:spTgt spid="23"/>
+                                  </p:tgtEl>
+                                  <p:attrNameLst>
+                                    <p:attrName>style.visibility</p:attrName>
+                                  </p:attrNameLst>
+                                </p:cBhvr>
+                                <p:to>
+                                  <p:strVal val="visible"/>
+                                </p:to>
+                              </p:set>
+                            </p:childTnLst>
+                          </p:cTn>
+                        </p:par>
+                      </p:childTnLst>
+                    </p:cTn>
+                  </p:par>
                 </p:childTnLst>
               </p:cTn>
               <p:prevCondLst>
@@ -6500,7 +6553,7 @@
                 <a:latin typeface="Noto Sans CJK SC"/>
                 <a:ea typeface="Noto Sans CJK SC"/>
               </a:rPr>
-              <a:t>过来人共识：一年内gap市场能接受</a:t>
+              <a:t>面试三坑：过度解释最败好感</a:t>
             </a:r>
           </a:p>
         </p:txBody>
@@ -6539,7 +6592,7 @@
                 <a:latin typeface="Noto Sans CJK SC"/>
                 <a:ea typeface="Noto Sans CJK SC"/>
               </a:rPr>
-              <a:t>过来人共识：一年内gap市场能接受</a:t>
+              <a:t>面试三坑：过度解释最败好感</a:t>
             </a:r>
           </a:p>
         </p:txBody>
@@ -6582,7 +6635,7 @@
                 <a:latin typeface="Noto Sans CJK SC"/>
                 <a:ea typeface="Noto Sans CJK SC"/>
               </a:rPr>
-              <a:t>求职市场认可一年左右的gap</a:t>
+              <a:t>坑一：过度解释越说越像心虚</a:t>
             </a:r>
           </a:p>
           <a:p>
@@ -6601,7 +6654,7 @@
                 <a:latin typeface="Noto Sans CJK SC"/>
                 <a:ea typeface="Noto Sans CJK SC"/>
               </a:rPr>
-              <a:t>招聘总监：离职状态到岗更快</a:t>
+              <a:t>坑二：贬低前司显得难相处</a:t>
             </a:r>
           </a:p>
           <a:p>
@@ -6620,7 +6673,7 @@
                 <a:latin typeface="Noto Sans CJK SC"/>
                 <a:ea typeface="Noto Sans CJK SC"/>
               </a:rPr>
-              <a:t>HR担心的是稳定性不是空窗</a:t>
+              <a:t>坑三：消极表达等于自曝状态差</a:t>
             </a:r>
           </a:p>
           <a:p>
@@ -6639,7 +6692,7 @@
                 <a:latin typeface="Noto Sans CJK SC"/>
                 <a:ea typeface="Noto Sans CJK SC"/>
               </a:rPr>
-              <a:t>易接受的回答：学习调整突破</a:t>
+              <a:t>正确第一句：原因一句带过</a:t>
             </a:r>
           </a:p>
           <a:p>
@@ -6658,7 +6711,7 @@
                 <a:latin typeface="Noto Sans CJK SC"/>
                 <a:ea typeface="Noto Sans CJK SC"/>
               </a:rPr>
-              <a:t>你的gap半年在安全区内</a:t>
+              <a:t>第二句：讲空窗期学了做了什么</a:t>
             </a:r>
           </a:p>
           <a:p>
@@ -6677,7 +6730,7 @@
                 <a:latin typeface="Noto Sans CJK SC"/>
                 <a:ea typeface="Noto Sans CJK SC"/>
               </a:rPr>
-              <a:t>来源：牛客网+知乎过来人帖</a:t>
+              <a:t>第三句：拉回当下状态好能到岗</a:t>
             </a:r>
           </a:p>
         </p:txBody>
@@ -6716,7 +6769,7 @@
                 <a:latin typeface="Noto Sans CJK SC"/>
                 <a:ea typeface="Noto Sans CJK SC"/>
               </a:rPr>
-              <a:t>20 / 26</a:t>
+              <a:t>20 / 24</a:t>
             </a:r>
           </a:p>
         </p:txBody>
@@ -7040,7 +7093,7 @@
                 <a:latin typeface="Noto Sans CJK SC"/>
                 <a:ea typeface="Noto Sans CJK SC"/>
               </a:rPr>
-              <a:t>面试三坑：过度解释最败好感</a:t>
+              <a:t>12周行动计划</a:t>
             </a:r>
           </a:p>
         </p:txBody>
@@ -7079,7 +7132,7 @@
                 <a:latin typeface="Noto Sans CJK SC"/>
                 <a:ea typeface="Noto Sans CJK SC"/>
               </a:rPr>
-              <a:t>面试三坑：过度解释最败好感</a:t>
+              <a:t>12周行动计划</a:t>
             </a:r>
           </a:p>
         </p:txBody>
@@ -7122,7 +7175,7 @@
                 <a:latin typeface="Noto Sans CJK SC"/>
                 <a:ea typeface="Noto Sans CJK SC"/>
               </a:rPr>
-              <a:t>坑一：过度解释越说越像心虚</a:t>
+              <a:t>第1周：定方向+看100条JD</a:t>
             </a:r>
           </a:p>
           <a:p>
@@ -7141,7 +7194,7 @@
                 <a:latin typeface="Noto Sans CJK SC"/>
                 <a:ea typeface="Noto Sans CJK SC"/>
               </a:rPr>
-              <a:t>坑二：贬低前司显得难相处</a:t>
+              <a:t>第2到6周：每天学3-4小时</a:t>
             </a:r>
           </a:p>
           <a:p>
@@ -7160,7 +7213,7 @@
                 <a:latin typeface="Noto Sans CJK SC"/>
                 <a:ea typeface="Noto Sans CJK SC"/>
               </a:rPr>
-              <a:t>坑三：消极表达等于自曝状态差</a:t>
+              <a:t>第5周起：改简历+小量试投</a:t>
             </a:r>
           </a:p>
           <a:p>
@@ -7179,7 +7232,7 @@
                 <a:latin typeface="Noto Sans CJK SC"/>
                 <a:ea typeface="Noto Sans CJK SC"/>
               </a:rPr>
-              <a:t>正确第一句：原因一句带过</a:t>
+              <a:t>第6到12周：每周投10-20个</a:t>
             </a:r>
           </a:p>
           <a:p>
@@ -7198,7 +7251,7 @@
                 <a:latin typeface="Noto Sans CJK SC"/>
                 <a:ea typeface="Noto Sans CJK SC"/>
               </a:rPr>
-              <a:t>第二句：讲空窗期学了做了什么</a:t>
+              <a:t>每场面试后：写三行复盘</a:t>
             </a:r>
           </a:p>
           <a:p>
@@ -7217,7 +7270,7 @@
                 <a:latin typeface="Noto Sans CJK SC"/>
                 <a:ea typeface="Noto Sans CJK SC"/>
               </a:rPr>
-              <a:t>第三句：拉回当下状态好能到岗</a:t>
+              <a:t>心法：先拿2-3个offer再挑</a:t>
             </a:r>
           </a:p>
         </p:txBody>
@@ -7256,7 +7309,7 @@
                 <a:latin typeface="Noto Sans CJK SC"/>
                 <a:ea typeface="Noto Sans CJK SC"/>
               </a:rPr>
-              <a:t>21 / 26</a:t>
+              <a:t>21 / 24</a:t>
             </a:r>
           </a:p>
         </p:txBody>
@@ -7580,7 +7633,7 @@
                 <a:latin typeface="Noto Sans CJK SC"/>
                 <a:ea typeface="Noto Sans CJK SC"/>
               </a:rPr>
-              <a:t>真实时间线：熬过崩溃期就上岸</a:t>
+              <a:t>避坑清单</a:t>
             </a:r>
           </a:p>
         </p:txBody>
@@ -7619,7 +7672,7 @@
                 <a:latin typeface="Noto Sans CJK SC"/>
                 <a:ea typeface="Noto Sans CJK SC"/>
               </a:rPr>
-              <a:t>真实时间线：熬过崩溃期就上岸</a:t>
+              <a:t>避坑清单</a:t>
             </a:r>
           </a:p>
         </p:txBody>
@@ -7662,7 +7715,7 @@
                 <a:latin typeface="Noto Sans CJK SC"/>
                 <a:ea typeface="Noto Sans CJK SC"/>
               </a:rPr>
-              <a:t>真实案例：gap一年五个月上岸</a:t>
+              <a:t>培训贷：包就业等于贷2-3万</a:t>
             </a:r>
           </a:p>
           <a:p>
@@ -7681,7 +7734,7 @@
                 <a:latin typeface="Noto Sans CJK SC"/>
                 <a:ea typeface="Noto Sans CJK SC"/>
               </a:rPr>
-              <a:t>节奏：心理建设到offer五个月</a:t>
+              <a:t>入职先交钱的岗位都是违法</a:t>
             </a:r>
           </a:p>
           <a:p>
@@ -7700,7 +7753,7 @@
                 <a:latin typeface="Noto Sans CJK SC"/>
                 <a:ea typeface="Noto Sans CJK SC"/>
               </a:rPr>
-              <a:t>每天专注3-4小时投20+岗位</a:t>
+              <a:t>刷单、点赞员兼职全是诈骗</a:t>
             </a:r>
           </a:p>
           <a:p>
@@ -7719,7 +7772,7 @@
                 <a:latin typeface="Noto Sans CJK SC"/>
                 <a:ea typeface="Noto Sans CJK SC"/>
               </a:rPr>
-              <a:t>转折：offer来自朋友内推</a:t>
+              <a:t>便宜求职课发网盘链接是套路</a:t>
             </a:r>
           </a:p>
           <a:p>
@@ -7738,7 +7791,7 @@
                 <a:latin typeface="Noto Sans CJK SC"/>
                 <a:ea typeface="Noto Sans CJK SC"/>
               </a:rPr>
-              <a:t>心态：第三个月最容易崩溃</a:t>
+              <a:t>无经验月入两万要高度警惕</a:t>
             </a:r>
           </a:p>
           <a:p>
@@ -7757,7 +7810,26 @@
                 <a:latin typeface="Noto Sans CJK SC"/>
                 <a:ea typeface="Noto Sans CJK SC"/>
               </a:rPr>
-              <a:t>解药：看到更长gap的成功者</a:t>
+              <a:t>试用期不缴社保可依法维权</a:t>
+            </a:r>
+          </a:p>
+          <a:p>
+            <a:pPr marL="285750" indent="-285750">
+              <a:spcAft>
+                <a:spcPts val="600"/>
+              </a:spcAft>
+              <a:buFont typeface="Arial" panose="020B0604020202020204"/>
+              <a:buChar char="•"/>
+            </a:pPr>
+            <a:r>
+              <a:rPr lang="zh-CN" sz="2000" b="0" dirty="0">
+                <a:solidFill>
+                  <a:srgbClr val="3B2F2A"/>
+                </a:solidFill>
+                <a:latin typeface="Noto Sans CJK SC"/>
+                <a:ea typeface="Noto Sans CJK SC"/>
+              </a:rPr>
+              <a:t>境外高薪邀约绝对不出境</a:t>
             </a:r>
           </a:p>
         </p:txBody>
@@ -7796,7 +7868,7 @@
                 <a:latin typeface="Noto Sans CJK SC"/>
                 <a:ea typeface="Noto Sans CJK SC"/>
               </a:rPr>
-              <a:t>22 / 26</a:t>
+              <a:t>22 / 24</a:t>
             </a:r>
           </a:p>
         </p:txBody>
@@ -8033,6 +8105,42 @@
                       </p:childTnLst>
                     </p:cTn>
                   </p:par>
+                  <p:par>
+                    <p:cTn id="21" fill="hold">
+                      <p:stCondLst>
+                        <p:cond delay="indefinite"/>
+                      </p:stCondLst>
+                      <p:childTnLst>
+                        <p:par>
+                          <p:cTn id="22" presetID="1" presetClass="entr" presetSubtype="0" fill="hold" grpId="0" nodeType="clickEffect">
+                            <p:stCondLst>
+                              <p:cond delay="0"/>
+                            </p:stCondLst>
+                            <p:childTnLst>
+                              <p:set>
+                                <p:cBhvr>
+                                  <p:cTn id="23" dur="1" fill="hold">
+                                    <p:stCondLst>
+                                      <p:cond delay="0"/>
+                                    </p:stCondLst>
+                                  </p:cTn>
+                                  <p:tgtEl>
+                                    <p:spTgt spid="223"/>
+                                  </p:tgtEl>
+                                  <p:attrNameLst>
+                                    <p:attrName>style.visibility</p:attrName>
+                                  </p:attrNameLst>
+                                </p:cBhvr>
+                                <p:to>
+                                  <p:strVal val="visible"/>
+                                </p:to>
+                              </p:set>
+                            </p:childTnLst>
+                          </p:cTn>
+                        </p:par>
+                      </p:childTnLst>
+                    </p:cTn>
+                  </p:par>
                 </p:childTnLst>
               </p:cTn>
               <p:prevCondLst>
@@ -8120,7 +8228,7 @@
                 <a:latin typeface="Noto Sans CJK SC"/>
                 <a:ea typeface="Noto Sans CJK SC"/>
               </a:rPr>
-              <a:t>12周行动计划</a:t>
+              <a:t>今天就开始的三件事</a:t>
             </a:r>
           </a:p>
         </p:txBody>
@@ -8159,7 +8267,7 @@
                 <a:latin typeface="Noto Sans CJK SC"/>
                 <a:ea typeface="Noto Sans CJK SC"/>
               </a:rPr>
-              <a:t>12周行动计划</a:t>
+              <a:t>今天就开始的三件事</a:t>
             </a:r>
           </a:p>
         </p:txBody>
@@ -8202,7 +8310,7 @@
                 <a:latin typeface="Noto Sans CJK SC"/>
                 <a:ea typeface="Noto Sans CJK SC"/>
               </a:rPr>
-              <a:t>第1周：定方向+看100条JD</a:t>
+              <a:t>今晚：下载BOSS直聘看100条JD</a:t>
             </a:r>
           </a:p>
           <a:p>
@@ -8221,7 +8329,7 @@
                 <a:latin typeface="Noto Sans CJK SC"/>
                 <a:ea typeface="Noto Sans CJK SC"/>
               </a:rPr>
-              <a:t>第2到6周：每天学3-4小时</a:t>
+              <a:t>周末：选出1个主攻+1个备胎</a:t>
             </a:r>
           </a:p>
           <a:p>
@@ -8240,7 +8348,7 @@
                 <a:latin typeface="Noto Sans CJK SC"/>
                 <a:ea typeface="Noto Sans CJK SC"/>
               </a:rPr>
-              <a:t>第5周起：改简历+小量试投</a:t>
+              <a:t>下周一：开始每天3小时学习</a:t>
             </a:r>
           </a:p>
           <a:p>
@@ -8259,45 +8367,7 @@
                 <a:latin typeface="Noto Sans CJK SC"/>
                 <a:ea typeface="Noto Sans CJK SC"/>
               </a:rPr>
-              <a:t>第6到12周：每周投10-20个</a:t>
-            </a:r>
-          </a:p>
-          <a:p>
-            <a:pPr marL="285750" indent="-285750">
-              <a:spcAft>
-                <a:spcPts val="600"/>
-              </a:spcAft>
-              <a:buFont typeface="Arial" panose="020B0604020202020204"/>
-              <a:buChar char="•"/>
-            </a:pPr>
-            <a:r>
-              <a:rPr lang="zh-CN" sz="2000" b="0" dirty="0">
-                <a:solidFill>
-                  <a:srgbClr val="3B2F2A"/>
-                </a:solidFill>
-                <a:latin typeface="Noto Sans CJK SC"/>
-                <a:ea typeface="Noto Sans CJK SC"/>
-              </a:rPr>
-              <a:t>每场面试后：写三行复盘</a:t>
-            </a:r>
-          </a:p>
-          <a:p>
-            <a:pPr marL="285750" indent="-285750">
-              <a:spcAft>
-                <a:spcPts val="600"/>
-              </a:spcAft>
-              <a:buFont typeface="Arial" panose="020B0604020202020204"/>
-              <a:buChar char="•"/>
-            </a:pPr>
-            <a:r>
-              <a:rPr lang="zh-CN" sz="2000" b="0" dirty="0">
-                <a:solidFill>
-                  <a:srgbClr val="3B2F2A"/>
-                </a:solidFill>
-                <a:latin typeface="Noto Sans CJK SC"/>
-                <a:ea typeface="Noto Sans CJK SC"/>
-              </a:rPr>
-              <a:t>心法：先拿2-3个offer再挑</a:t>
+              <a:t>记住：行动是迷茫唯一的解药</a:t>
             </a:r>
           </a:p>
         </p:txBody>
@@ -8336,7 +8406,7 @@
                 <a:latin typeface="Noto Sans CJK SC"/>
                 <a:ea typeface="Noto Sans CJK SC"/>
               </a:rPr>
-              <a:t>23 / 26</a:t>
+              <a:t>23 / 24</a:t>
             </a:r>
           </a:p>
         </p:txBody>
@@ -8501,78 +8571,6 @@
                       </p:childTnLst>
                     </p:cTn>
                   </p:par>
-                  <p:par>
-                    <p:cTn id="15" fill="hold">
-                      <p:stCondLst>
-                        <p:cond delay="indefinite"/>
-                      </p:stCondLst>
-                      <p:childTnLst>
-                        <p:par>
-                          <p:cTn id="16" presetID="1" presetClass="entr" presetSubtype="0" fill="hold" grpId="0" nodeType="clickEffect">
-                            <p:stCondLst>
-                              <p:cond delay="0"/>
-                            </p:stCondLst>
-                            <p:childTnLst>
-                              <p:set>
-                                <p:cBhvr>
-                                  <p:cTn id="17" dur="1" fill="hold">
-                                    <p:stCondLst>
-                                      <p:cond delay="0"/>
-                                    </p:stCondLst>
-                                  </p:cTn>
-                                  <p:tgtEl>
-                                    <p:spTgt spid="233"/>
-                                  </p:tgtEl>
-                                  <p:attrNameLst>
-                                    <p:attrName>style.visibility</p:attrName>
-                                  </p:attrNameLst>
-                                </p:cBhvr>
-                                <p:to>
-                                  <p:strVal val="visible"/>
-                                </p:to>
-                              </p:set>
-                            </p:childTnLst>
-                          </p:cTn>
-                        </p:par>
-                      </p:childTnLst>
-                    </p:cTn>
-                  </p:par>
-                  <p:par>
-                    <p:cTn id="18" fill="hold">
-                      <p:stCondLst>
-                        <p:cond delay="indefinite"/>
-                      </p:stCondLst>
-                      <p:childTnLst>
-                        <p:par>
-                          <p:cTn id="19" presetID="1" presetClass="entr" presetSubtype="0" fill="hold" grpId="0" nodeType="clickEffect">
-                            <p:stCondLst>
-                              <p:cond delay="0"/>
-                            </p:stCondLst>
-                            <p:childTnLst>
-                              <p:set>
-                                <p:cBhvr>
-                                  <p:cTn id="20" dur="1" fill="hold">
-                                    <p:stCondLst>
-                                      <p:cond delay="0"/>
-                                    </p:stCondLst>
-                                  </p:cTn>
-                                  <p:tgtEl>
-                                    <p:spTgt spid="233"/>
-                                  </p:tgtEl>
-                                  <p:attrNameLst>
-                                    <p:attrName>style.visibility</p:attrName>
-                                  </p:attrNameLst>
-                                </p:cBhvr>
-                                <p:to>
-                                  <p:strVal val="visible"/>
-                                </p:to>
-                              </p:set>
-                            </p:childTnLst>
-                          </p:cTn>
-                        </p:par>
-                      </p:childTnLst>
-                    </p:cTn>
-                  </p:par>
                 </p:childTnLst>
               </p:cTn>
               <p:prevCondLst>
@@ -8628,14 +8626,14 @@
       </p:grpSpPr>
       <p:sp>
         <p:nvSpPr>
-          <p:cNvPr id="241" name="Kicker"/>
+          <p:cNvPr id="241" name="Title"/>
           <p:cNvSpPr txBox="1"/>
           <p:nvPr/>
         </p:nvSpPr>
         <p:spPr>
           <a:xfrm>
-            <a:off x="900000" y="420000"/>
-            <a:ext cx="10000000" cy="420000"/>
+            <a:off x="1050000" y="2300000"/>
+            <a:ext cx="10200000" cy="1700000"/>
           </a:xfrm>
           <a:prstGeom prst="rect">
             <a:avLst/>
@@ -8649,32 +8647,32 @@
           </a:bodyPr>
           <a:lstStyle/>
           <a:p>
-            <a:pPr>
+            <a:pPr algn="ctr">
               <a:buNone/>
             </a:pPr>
             <a:r>
-              <a:rPr lang="zh-CN" sz="1400" b="1" dirty="0">
-                <a:solidFill>
-                  <a:srgbClr val="E58A2F"/>
-                </a:solidFill>
-                <a:latin typeface="Noto Sans CJK SC"/>
-                <a:ea typeface="Noto Sans CJK SC"/>
-              </a:rPr>
-              <a:t>避坑清单</a:t>
+              <a:rPr lang="zh-CN" sz="5200" b="1" dirty="0">
+                <a:solidFill>
+                  <a:srgbClr val="3B2F2A"/>
+                </a:solidFill>
+                <a:latin typeface="Noto Sans CJK SC"/>
+                <a:ea typeface="Noto Sans CJK SC"/>
+              </a:rPr>
+              <a:t>谢谢</a:t>
             </a:r>
           </a:p>
         </p:txBody>
       </p:sp>
       <p:sp>
         <p:nvSpPr>
-          <p:cNvPr id="242" name="Title"/>
+          <p:cNvPr id="242" name="Subtitle"/>
           <p:cNvSpPr txBox="1"/>
           <p:nvPr/>
         </p:nvSpPr>
         <p:spPr>
           <a:xfrm>
-            <a:off x="900000" y="920000"/>
-            <a:ext cx="10300000" cy="800000"/>
+            <a:off x="1050000" y="4200000"/>
+            <a:ext cx="10200000" cy="900000"/>
           </a:xfrm>
           <a:prstGeom prst="rect">
             <a:avLst/>
@@ -8688,175 +8686,18 @@
           </a:bodyPr>
           <a:lstStyle/>
           <a:p>
-            <a:pPr>
+            <a:pPr algn="ctr">
               <a:buNone/>
             </a:pPr>
             <a:r>
-              <a:rPr lang="zh-CN" sz="3400" b="1" dirty="0">
-                <a:solidFill>
-                  <a:srgbClr val="3B2F2A"/>
-                </a:solidFill>
-                <a:latin typeface="Noto Sans CJK SC"/>
-                <a:ea typeface="Noto Sans CJK SC"/>
-              </a:rPr>
-              <a:t>避坑清单</a:t>
-            </a:r>
-          </a:p>
-        </p:txBody>
-      </p:sp>
-      <p:sp>
-        <p:nvSpPr>
-          <p:cNvPr id="243" name="Body"/>
-          <p:cNvSpPr txBox="1"/>
-          <p:nvPr/>
-        </p:nvSpPr>
-        <p:spPr>
-          <a:xfrm>
-            <a:off x="1050000" y="1850000"/>
-            <a:ext cx="10100000" cy="4500000"/>
-          </a:xfrm>
-          <a:prstGeom prst="rect">
-            <a:avLst/>
-          </a:prstGeom>
-          <a:noFill/>
-          <a:ln/>
-        </p:spPr>
-        <p:txBody>
-          <a:bodyPr wrap="square" rtlCol="0">
-            <a:normAutofit/>
-          </a:bodyPr>
-          <a:lstStyle/>
-          <a:p>
-            <a:pPr marL="285750" indent="-285750">
-              <a:spcAft>
-                <a:spcPts val="600"/>
-              </a:spcAft>
-              <a:buFont typeface="Arial" panose="020B0604020202020204"/>
-              <a:buChar char="•"/>
-            </a:pPr>
-            <a:r>
-              <a:rPr lang="zh-CN" sz="2000" b="0" dirty="0">
-                <a:solidFill>
-                  <a:srgbClr val="3B2F2A"/>
-                </a:solidFill>
-                <a:latin typeface="Noto Sans CJK SC"/>
-                <a:ea typeface="Noto Sans CJK SC"/>
-              </a:rPr>
-              <a:t>培训贷：包就业等于贷2-3万</a:t>
-            </a:r>
-          </a:p>
-          <a:p>
-            <a:pPr marL="285750" indent="-285750">
-              <a:spcAft>
-                <a:spcPts val="600"/>
-              </a:spcAft>
-              <a:buFont typeface="Arial" panose="020B0604020202020204"/>
-              <a:buChar char="•"/>
-            </a:pPr>
-            <a:r>
-              <a:rPr lang="zh-CN" sz="2000" b="0" dirty="0">
-                <a:solidFill>
-                  <a:srgbClr val="3B2F2A"/>
-                </a:solidFill>
-                <a:latin typeface="Noto Sans CJK SC"/>
-                <a:ea typeface="Noto Sans CJK SC"/>
-              </a:rPr>
-              <a:t>入职先交钱的岗位都是违法</a:t>
-            </a:r>
-          </a:p>
-          <a:p>
-            <a:pPr marL="285750" indent="-285750">
-              <a:spcAft>
-                <a:spcPts val="600"/>
-              </a:spcAft>
-              <a:buFont typeface="Arial" panose="020B0604020202020204"/>
-              <a:buChar char="•"/>
-            </a:pPr>
-            <a:r>
-              <a:rPr lang="zh-CN" sz="2000" b="0" dirty="0">
-                <a:solidFill>
-                  <a:srgbClr val="3B2F2A"/>
-                </a:solidFill>
-                <a:latin typeface="Noto Sans CJK SC"/>
-                <a:ea typeface="Noto Sans CJK SC"/>
-              </a:rPr>
-              <a:t>刷单、点赞员兼职全是诈骗</a:t>
-            </a:r>
-          </a:p>
-          <a:p>
-            <a:pPr marL="285750" indent="-285750">
-              <a:spcAft>
-                <a:spcPts val="600"/>
-              </a:spcAft>
-              <a:buFont typeface="Arial" panose="020B0604020202020204"/>
-              <a:buChar char="•"/>
-            </a:pPr>
-            <a:r>
-              <a:rPr lang="zh-CN" sz="2000" b="0" dirty="0">
-                <a:solidFill>
-                  <a:srgbClr val="3B2F2A"/>
-                </a:solidFill>
-                <a:latin typeface="Noto Sans CJK SC"/>
-                <a:ea typeface="Noto Sans CJK SC"/>
-              </a:rPr>
-              <a:t>便宜求职课发网盘链接是套路</a:t>
-            </a:r>
-          </a:p>
-          <a:p>
-            <a:pPr marL="285750" indent="-285750">
-              <a:spcAft>
-                <a:spcPts val="600"/>
-              </a:spcAft>
-              <a:buFont typeface="Arial" panose="020B0604020202020204"/>
-              <a:buChar char="•"/>
-            </a:pPr>
-            <a:r>
-              <a:rPr lang="zh-CN" sz="2000" b="0" dirty="0">
-                <a:solidFill>
-                  <a:srgbClr val="3B2F2A"/>
-                </a:solidFill>
-                <a:latin typeface="Noto Sans CJK SC"/>
-                <a:ea typeface="Noto Sans CJK SC"/>
-              </a:rPr>
-              <a:t>无经验月入两万要高度警惕</a:t>
-            </a:r>
-          </a:p>
-          <a:p>
-            <a:pPr marL="285750" indent="-285750">
-              <a:spcAft>
-                <a:spcPts val="600"/>
-              </a:spcAft>
-              <a:buFont typeface="Arial" panose="020B0604020202020204"/>
-              <a:buChar char="•"/>
-            </a:pPr>
-            <a:r>
-              <a:rPr lang="zh-CN" sz="2000" b="0" dirty="0">
-                <a:solidFill>
-                  <a:srgbClr val="3B2F2A"/>
-                </a:solidFill>
-                <a:latin typeface="Noto Sans CJK SC"/>
-                <a:ea typeface="Noto Sans CJK SC"/>
-              </a:rPr>
-              <a:t>试用期不缴社保可依法维权</a:t>
-            </a:r>
-          </a:p>
-          <a:p>
-            <a:pPr marL="285750" indent="-285750">
-              <a:spcAft>
-                <a:spcPts val="600"/>
-              </a:spcAft>
-              <a:buFont typeface="Arial" panose="020B0604020202020204"/>
-              <a:buChar char="•"/>
-            </a:pPr>
-            <a:r>
-              <a:rPr lang="zh-CN" sz="2000" b="0" dirty="0">
-                <a:solidFill>
-                  <a:srgbClr val="3B2F2A"/>
-                </a:solidFill>
-                <a:latin typeface="Noto Sans CJK SC"/>
-                <a:ea typeface="Noto Sans CJK SC"/>
-              </a:rPr>
-              <a:t>境外高薪邀约绝对不出境</a:t>
+              <a:rPr lang="zh-CN" sz="2000" b="1" dirty="0">
+                <a:solidFill>
+                  <a:srgbClr val="E58A2F"/>
+                </a:solidFill>
+                <a:latin typeface="Noto Sans CJK SC"/>
+                <a:ea typeface="Noto Sans CJK SC"/>
+              </a:rPr>
+              <a:t>女生找工作七大岗位全攻略</a:t>
             </a:r>
           </a:p>
         </p:txBody>
@@ -8895,875 +8736,7 @@
                 <a:latin typeface="Noto Sans CJK SC"/>
                 <a:ea typeface="Noto Sans CJK SC"/>
               </a:rPr>
-              <a:t>24 / 26</a:t>
-            </a:r>
-          </a:p>
-        </p:txBody>
-      </p:sp>
-    </p:spTree>
-  </p:cSld>
-  <p:clrMapOvr>
-    <a:overrideClrMapping bg1="lt1" tx1="dk1" bg2="lt2" tx2="dk2" accent1="accent1" accent2="accent2" accent3="accent3" accent4="accent4" accent5="accent5" accent6="accent6" hlink="hlink" folHlink="folHlink"/>
-  </p:clrMapOvr>
-  <p:transition spd="med">
-    <p:fade/>
-  </p:transition>
-  <p:timing>
-    <p:tnLst>
-      <p:par>
-        <p:cTn id="1" dur="indefinite" restart="never" nodeType="tmRoot">
-          <p:childTnLst>
-            <p:seq concurrent="1" nextAc="seek">
-              <p:cTn id="2" dur="indefinite" nodeType="mainSeq">
-                <p:childTnLst>
-                  <p:par>
-                    <p:cTn id="3" fill="hold">
-                      <p:stCondLst>
-                        <p:cond delay="indefinite"/>
-                      </p:stCondLst>
-                      <p:childTnLst>
-                        <p:par>
-                          <p:cTn id="4" presetID="1" presetClass="entr" presetSubtype="0" fill="hold" grpId="0" nodeType="clickEffect">
-                            <p:stCondLst>
-                              <p:cond delay="0"/>
-                            </p:stCondLst>
-                            <p:childTnLst>
-                              <p:set>
-                                <p:cBhvr>
-                                  <p:cTn id="5" dur="1" fill="hold">
-                                    <p:stCondLst>
-                                      <p:cond delay="0"/>
-                                    </p:stCondLst>
-                                  </p:cTn>
-                                  <p:tgtEl>
-                                    <p:spTgt spid="243"/>
-                                  </p:tgtEl>
-                                  <p:attrNameLst>
-                                    <p:attrName>style.visibility</p:attrName>
-                                  </p:attrNameLst>
-                                </p:cBhvr>
-                                <p:to>
-                                  <p:strVal val="visible"/>
-                                </p:to>
-                              </p:set>
-                            </p:childTnLst>
-                          </p:cTn>
-                        </p:par>
-                      </p:childTnLst>
-                    </p:cTn>
-                  </p:par>
-                  <p:par>
-                    <p:cTn id="6" fill="hold">
-                      <p:stCondLst>
-                        <p:cond delay="indefinite"/>
-                      </p:stCondLst>
-                      <p:childTnLst>
-                        <p:par>
-                          <p:cTn id="7" presetID="1" presetClass="entr" presetSubtype="0" fill="hold" grpId="0" nodeType="clickEffect">
-                            <p:stCondLst>
-                              <p:cond delay="0"/>
-                            </p:stCondLst>
-                            <p:childTnLst>
-                              <p:set>
-                                <p:cBhvr>
-                                  <p:cTn id="8" dur="1" fill="hold">
-                                    <p:stCondLst>
-                                      <p:cond delay="0"/>
-                                    </p:stCondLst>
-                                  </p:cTn>
-                                  <p:tgtEl>
-                                    <p:spTgt spid="243"/>
-                                  </p:tgtEl>
-                                  <p:attrNameLst>
-                                    <p:attrName>style.visibility</p:attrName>
-                                  </p:attrNameLst>
-                                </p:cBhvr>
-                                <p:to>
-                                  <p:strVal val="visible"/>
-                                </p:to>
-                              </p:set>
-                            </p:childTnLst>
-                          </p:cTn>
-                        </p:par>
-                      </p:childTnLst>
-                    </p:cTn>
-                  </p:par>
-                  <p:par>
-                    <p:cTn id="9" fill="hold">
-                      <p:stCondLst>
-                        <p:cond delay="indefinite"/>
-                      </p:stCondLst>
-                      <p:childTnLst>
-                        <p:par>
-                          <p:cTn id="10" presetID="1" presetClass="entr" presetSubtype="0" fill="hold" grpId="0" nodeType="clickEffect">
-                            <p:stCondLst>
-                              <p:cond delay="0"/>
-                            </p:stCondLst>
-                            <p:childTnLst>
-                              <p:set>
-                                <p:cBhvr>
-                                  <p:cTn id="11" dur="1" fill="hold">
-                                    <p:stCondLst>
-                                      <p:cond delay="0"/>
-                                    </p:stCondLst>
-                                  </p:cTn>
-                                  <p:tgtEl>
-                                    <p:spTgt spid="243"/>
-                                  </p:tgtEl>
-                                  <p:attrNameLst>
-                                    <p:attrName>style.visibility</p:attrName>
-                                  </p:attrNameLst>
-                                </p:cBhvr>
-                                <p:to>
-                                  <p:strVal val="visible"/>
-                                </p:to>
-                              </p:set>
-                            </p:childTnLst>
-                          </p:cTn>
-                        </p:par>
-                      </p:childTnLst>
-                    </p:cTn>
-                  </p:par>
-                  <p:par>
-                    <p:cTn id="12" fill="hold">
-                      <p:stCondLst>
-                        <p:cond delay="indefinite"/>
-                      </p:stCondLst>
-                      <p:childTnLst>
-                        <p:par>
-                          <p:cTn id="13" presetID="1" presetClass="entr" presetSubtype="0" fill="hold" grpId="0" nodeType="clickEffect">
-                            <p:stCondLst>
-                              <p:cond delay="0"/>
-                            </p:stCondLst>
-                            <p:childTnLst>
-                              <p:set>
-                                <p:cBhvr>
-                                  <p:cTn id="14" dur="1" fill="hold">
-                                    <p:stCondLst>
-                                      <p:cond delay="0"/>
-                                    </p:stCondLst>
-                                  </p:cTn>
-                                  <p:tgtEl>
-                                    <p:spTgt spid="243"/>
-                                  </p:tgtEl>
-                                  <p:attrNameLst>
-                                    <p:attrName>style.visibility</p:attrName>
-                                  </p:attrNameLst>
-                                </p:cBhvr>
-                                <p:to>
-                                  <p:strVal val="visible"/>
-                                </p:to>
-                              </p:set>
-                            </p:childTnLst>
-                          </p:cTn>
-                        </p:par>
-                      </p:childTnLst>
-                    </p:cTn>
-                  </p:par>
-                  <p:par>
-                    <p:cTn id="15" fill="hold">
-                      <p:stCondLst>
-                        <p:cond delay="indefinite"/>
-                      </p:stCondLst>
-                      <p:childTnLst>
-                        <p:par>
-                          <p:cTn id="16" presetID="1" presetClass="entr" presetSubtype="0" fill="hold" grpId="0" nodeType="clickEffect">
-                            <p:stCondLst>
-                              <p:cond delay="0"/>
-                            </p:stCondLst>
-                            <p:childTnLst>
-                              <p:set>
-                                <p:cBhvr>
-                                  <p:cTn id="17" dur="1" fill="hold">
-                                    <p:stCondLst>
-                                      <p:cond delay="0"/>
-                                    </p:stCondLst>
-                                  </p:cTn>
-                                  <p:tgtEl>
-                                    <p:spTgt spid="243"/>
-                                  </p:tgtEl>
-                                  <p:attrNameLst>
-                                    <p:attrName>style.visibility</p:attrName>
-                                  </p:attrNameLst>
-                                </p:cBhvr>
-                                <p:to>
-                                  <p:strVal val="visible"/>
-                                </p:to>
-                              </p:set>
-                            </p:childTnLst>
-                          </p:cTn>
-                        </p:par>
-                      </p:childTnLst>
-                    </p:cTn>
-                  </p:par>
-                  <p:par>
-                    <p:cTn id="18" fill="hold">
-                      <p:stCondLst>
-                        <p:cond delay="indefinite"/>
-                      </p:stCondLst>
-                      <p:childTnLst>
-                        <p:par>
-                          <p:cTn id="19" presetID="1" presetClass="entr" presetSubtype="0" fill="hold" grpId="0" nodeType="clickEffect">
-                            <p:stCondLst>
-                              <p:cond delay="0"/>
-                            </p:stCondLst>
-                            <p:childTnLst>
-                              <p:set>
-                                <p:cBhvr>
-                                  <p:cTn id="20" dur="1" fill="hold">
-                                    <p:stCondLst>
-                                      <p:cond delay="0"/>
-                                    </p:stCondLst>
-                                  </p:cTn>
-                                  <p:tgtEl>
-                                    <p:spTgt spid="243"/>
-                                  </p:tgtEl>
-                                  <p:attrNameLst>
-                                    <p:attrName>style.visibility</p:attrName>
-                                  </p:attrNameLst>
-                                </p:cBhvr>
-                                <p:to>
-                                  <p:strVal val="visible"/>
-                                </p:to>
-                              </p:set>
-                            </p:childTnLst>
-                          </p:cTn>
-                        </p:par>
-                      </p:childTnLst>
-                    </p:cTn>
-                  </p:par>
-                  <p:par>
-                    <p:cTn id="21" fill="hold">
-                      <p:stCondLst>
-                        <p:cond delay="indefinite"/>
-                      </p:stCondLst>
-                      <p:childTnLst>
-                        <p:par>
-                          <p:cTn id="22" presetID="1" presetClass="entr" presetSubtype="0" fill="hold" grpId="0" nodeType="clickEffect">
-                            <p:stCondLst>
-                              <p:cond delay="0"/>
-                            </p:stCondLst>
-                            <p:childTnLst>
-                              <p:set>
-                                <p:cBhvr>
-                                  <p:cTn id="23" dur="1" fill="hold">
-                                    <p:stCondLst>
-                                      <p:cond delay="0"/>
-                                    </p:stCondLst>
-                                  </p:cTn>
-                                  <p:tgtEl>
-                                    <p:spTgt spid="243"/>
-                                  </p:tgtEl>
-                                  <p:attrNameLst>
-                                    <p:attrName>style.visibility</p:attrName>
-                                  </p:attrNameLst>
-                                </p:cBhvr>
-                                <p:to>
-                                  <p:strVal val="visible"/>
-                                </p:to>
-                              </p:set>
-                            </p:childTnLst>
-                          </p:cTn>
-                        </p:par>
-                      </p:childTnLst>
-                    </p:cTn>
-                  </p:par>
-                </p:childTnLst>
-              </p:cTn>
-              <p:prevCondLst>
-                <p:cond evt="onPrev" delay="0">
-                  <p:tgtEl>
-                    <p:sldTgt/>
-                  </p:tgtEl>
-                </p:cond>
-              </p:prevCondLst>
-              <p:nextCondLst>
-                <p:cond evt="onNext" delay="0">
-                  <p:tgtEl>
-                    <p:sldTgt/>
-                  </p:tgtEl>
-                </p:cond>
-              </p:nextCondLst>
-            </p:seq>
-          </p:childTnLst>
-        </p:cTn>
-      </p:par>
-    </p:tnLst>
-    <p:bldLst>
-      <p:bldP spid="243" grpId="0"/>
-    </p:bldLst>
-  </p:timing>
-</p:sld>
-</file>
-
-<file path=ppt/slides/slide25.xml><?xml version="1.0" encoding="utf-8"?>
-<p:sld xmlns:a="http://schemas.openxmlformats.org/drawingml/2006/main" xmlns:r="http://schemas.openxmlformats.org/officeDocument/2006/relationships" xmlns:p="http://schemas.openxmlformats.org/presentationml/2006/main">
-  <p:cSld>
-    <p:bg>
-      <p:bgPr>
-        <a:solidFill>
-          <a:srgbClr val="FFF8EC"/>
-        </a:solidFill>
-        <a:effectLst/>
-      </p:bgPr>
-    </p:bg>
-    <p:spTree>
-      <p:nvGrpSpPr>
-        <p:cNvPr id="1" name=""/>
-        <p:cNvGrpSpPr/>
-        <p:nvPr/>
-      </p:nvGrpSpPr>
-      <p:grpSpPr>
-        <a:xfrm>
-          <a:off x="0" y="0"/>
-          <a:ext cx="0" cy="0"/>
-          <a:chOff x="0" y="0"/>
-          <a:chExt cx="0" cy="0"/>
-        </a:xfrm>
-      </p:grpSpPr>
-      <p:sp>
-        <p:nvSpPr>
-          <p:cNvPr id="251" name="Kicker"/>
-          <p:cNvSpPr txBox="1"/>
-          <p:nvPr/>
-        </p:nvSpPr>
-        <p:spPr>
-          <a:xfrm>
-            <a:off x="900000" y="420000"/>
-            <a:ext cx="10000000" cy="420000"/>
-          </a:xfrm>
-          <a:prstGeom prst="rect">
-            <a:avLst/>
-          </a:prstGeom>
-          <a:noFill/>
-          <a:ln/>
-        </p:spPr>
-        <p:txBody>
-          <a:bodyPr wrap="square" rtlCol="0">
-            <a:normAutofit/>
-          </a:bodyPr>
-          <a:lstStyle/>
-          <a:p>
-            <a:pPr>
-              <a:buNone/>
-            </a:pPr>
-            <a:r>
-              <a:rPr lang="zh-CN" sz="1400" b="1" dirty="0">
-                <a:solidFill>
-                  <a:srgbClr val="E58A2F"/>
-                </a:solidFill>
-                <a:latin typeface="Noto Sans CJK SC"/>
-                <a:ea typeface="Noto Sans CJK SC"/>
-              </a:rPr>
-              <a:t>今天就开始的三件事</a:t>
-            </a:r>
-          </a:p>
-        </p:txBody>
-      </p:sp>
-      <p:sp>
-        <p:nvSpPr>
-          <p:cNvPr id="252" name="Title"/>
-          <p:cNvSpPr txBox="1"/>
-          <p:nvPr/>
-        </p:nvSpPr>
-        <p:spPr>
-          <a:xfrm>
-            <a:off x="900000" y="920000"/>
-            <a:ext cx="10300000" cy="800000"/>
-          </a:xfrm>
-          <a:prstGeom prst="rect">
-            <a:avLst/>
-          </a:prstGeom>
-          <a:noFill/>
-          <a:ln/>
-        </p:spPr>
-        <p:txBody>
-          <a:bodyPr wrap="square" rtlCol="0">
-            <a:normAutofit/>
-          </a:bodyPr>
-          <a:lstStyle/>
-          <a:p>
-            <a:pPr>
-              <a:buNone/>
-            </a:pPr>
-            <a:r>
-              <a:rPr lang="zh-CN" sz="3400" b="1" dirty="0">
-                <a:solidFill>
-                  <a:srgbClr val="3B2F2A"/>
-                </a:solidFill>
-                <a:latin typeface="Noto Sans CJK SC"/>
-                <a:ea typeface="Noto Sans CJK SC"/>
-              </a:rPr>
-              <a:t>今天就开始的三件事</a:t>
-            </a:r>
-          </a:p>
-        </p:txBody>
-      </p:sp>
-      <p:sp>
-        <p:nvSpPr>
-          <p:cNvPr id="253" name="Body"/>
-          <p:cNvSpPr txBox="1"/>
-          <p:nvPr/>
-        </p:nvSpPr>
-        <p:spPr>
-          <a:xfrm>
-            <a:off x="1050000" y="1850000"/>
-            <a:ext cx="10100000" cy="4500000"/>
-          </a:xfrm>
-          <a:prstGeom prst="rect">
-            <a:avLst/>
-          </a:prstGeom>
-          <a:noFill/>
-          <a:ln/>
-        </p:spPr>
-        <p:txBody>
-          <a:bodyPr wrap="square" rtlCol="0">
-            <a:normAutofit/>
-          </a:bodyPr>
-          <a:lstStyle/>
-          <a:p>
-            <a:pPr marL="285750" indent="-285750">
-              <a:spcAft>
-                <a:spcPts val="600"/>
-              </a:spcAft>
-              <a:buFont typeface="Arial" panose="020B0604020202020204"/>
-              <a:buChar char="•"/>
-            </a:pPr>
-            <a:r>
-              <a:rPr lang="zh-CN" sz="2000" b="0" dirty="0">
-                <a:solidFill>
-                  <a:srgbClr val="3B2F2A"/>
-                </a:solidFill>
-                <a:latin typeface="Noto Sans CJK SC"/>
-                <a:ea typeface="Noto Sans CJK SC"/>
-              </a:rPr>
-              <a:t>今晚：下载BOSS直聘看100条JD</a:t>
-            </a:r>
-          </a:p>
-          <a:p>
-            <a:pPr marL="285750" indent="-285750">
-              <a:spcAft>
-                <a:spcPts val="600"/>
-              </a:spcAft>
-              <a:buFont typeface="Arial" panose="020B0604020202020204"/>
-              <a:buChar char="•"/>
-            </a:pPr>
-            <a:r>
-              <a:rPr lang="zh-CN" sz="2000" b="0" dirty="0">
-                <a:solidFill>
-                  <a:srgbClr val="3B2F2A"/>
-                </a:solidFill>
-                <a:latin typeface="Noto Sans CJK SC"/>
-                <a:ea typeface="Noto Sans CJK SC"/>
-              </a:rPr>
-              <a:t>周末：选出1个主攻+1个备胎</a:t>
-            </a:r>
-          </a:p>
-          <a:p>
-            <a:pPr marL="285750" indent="-285750">
-              <a:spcAft>
-                <a:spcPts val="600"/>
-              </a:spcAft>
-              <a:buFont typeface="Arial" panose="020B0604020202020204"/>
-              <a:buChar char="•"/>
-            </a:pPr>
-            <a:r>
-              <a:rPr lang="zh-CN" sz="2000" b="0" dirty="0">
-                <a:solidFill>
-                  <a:srgbClr val="3B2F2A"/>
-                </a:solidFill>
-                <a:latin typeface="Noto Sans CJK SC"/>
-                <a:ea typeface="Noto Sans CJK SC"/>
-              </a:rPr>
-              <a:t>下周一：开始每天3小时学习</a:t>
-            </a:r>
-          </a:p>
-          <a:p>
-            <a:pPr marL="285750" indent="-285750">
-              <a:spcAft>
-                <a:spcPts val="600"/>
-              </a:spcAft>
-              <a:buFont typeface="Arial" panose="020B0604020202020204"/>
-              <a:buChar char="•"/>
-            </a:pPr>
-            <a:r>
-              <a:rPr lang="zh-CN" sz="2000" b="0" dirty="0">
-                <a:solidFill>
-                  <a:srgbClr val="3B2F2A"/>
-                </a:solidFill>
-                <a:latin typeface="Noto Sans CJK SC"/>
-                <a:ea typeface="Noto Sans CJK SC"/>
-              </a:rPr>
-              <a:t>记住：行动是迷茫唯一的解药</a:t>
-            </a:r>
-          </a:p>
-        </p:txBody>
-      </p:sp>
-      <p:sp>
-        <p:nvSpPr>
-          <p:cNvPr id="259" name="Page number"/>
-          <p:cNvSpPr txBox="1"/>
-          <p:nvPr/>
-        </p:nvSpPr>
-        <p:spPr>
-          <a:xfrm>
-            <a:off x="10600000" y="6250000"/>
-            <a:ext cx="1200000" cy="400000"/>
-          </a:xfrm>
-          <a:prstGeom prst="rect">
-            <a:avLst/>
-          </a:prstGeom>
-          <a:noFill/>
-          <a:ln/>
-        </p:spPr>
-        <p:txBody>
-          <a:bodyPr wrap="square" rtlCol="0">
-            <a:normAutofit/>
-          </a:bodyPr>
-          <a:lstStyle/>
-          <a:p>
-            <a:pPr algn="r">
-              <a:buNone/>
-            </a:pPr>
-            <a:r>
-              <a:rPr lang="zh-CN" sz="1000" b="0" dirty="0">
-                <a:solidFill>
-                  <a:srgbClr val="7E6F68"/>
-                </a:solidFill>
-                <a:latin typeface="Noto Sans CJK SC"/>
-                <a:ea typeface="Noto Sans CJK SC"/>
-              </a:rPr>
-              <a:t>25 / 26</a:t>
-            </a:r>
-          </a:p>
-        </p:txBody>
-      </p:sp>
-    </p:spTree>
-  </p:cSld>
-  <p:clrMapOvr>
-    <a:overrideClrMapping bg1="lt1" tx1="dk1" bg2="lt2" tx2="dk2" accent1="accent1" accent2="accent2" accent3="accent3" accent4="accent4" accent5="accent5" accent6="accent6" hlink="hlink" folHlink="folHlink"/>
-  </p:clrMapOvr>
-  <p:transition spd="med">
-    <p:fade/>
-  </p:transition>
-  <p:timing>
-    <p:tnLst>
-      <p:par>
-        <p:cTn id="1" dur="indefinite" restart="never" nodeType="tmRoot">
-          <p:childTnLst>
-            <p:seq concurrent="1" nextAc="seek">
-              <p:cTn id="2" dur="indefinite" nodeType="mainSeq">
-                <p:childTnLst>
-                  <p:par>
-                    <p:cTn id="3" fill="hold">
-                      <p:stCondLst>
-                        <p:cond delay="indefinite"/>
-                      </p:stCondLst>
-                      <p:childTnLst>
-                        <p:par>
-                          <p:cTn id="4" presetID="1" presetClass="entr" presetSubtype="0" fill="hold" grpId="0" nodeType="clickEffect">
-                            <p:stCondLst>
-                              <p:cond delay="0"/>
-                            </p:stCondLst>
-                            <p:childTnLst>
-                              <p:set>
-                                <p:cBhvr>
-                                  <p:cTn id="5" dur="1" fill="hold">
-                                    <p:stCondLst>
-                                      <p:cond delay="0"/>
-                                    </p:stCondLst>
-                                  </p:cTn>
-                                  <p:tgtEl>
-                                    <p:spTgt spid="253"/>
-                                  </p:tgtEl>
-                                  <p:attrNameLst>
-                                    <p:attrName>style.visibility</p:attrName>
-                                  </p:attrNameLst>
-                                </p:cBhvr>
-                                <p:to>
-                                  <p:strVal val="visible"/>
-                                </p:to>
-                              </p:set>
-                            </p:childTnLst>
-                          </p:cTn>
-                        </p:par>
-                      </p:childTnLst>
-                    </p:cTn>
-                  </p:par>
-                  <p:par>
-                    <p:cTn id="6" fill="hold">
-                      <p:stCondLst>
-                        <p:cond delay="indefinite"/>
-                      </p:stCondLst>
-                      <p:childTnLst>
-                        <p:par>
-                          <p:cTn id="7" presetID="1" presetClass="entr" presetSubtype="0" fill="hold" grpId="0" nodeType="clickEffect">
-                            <p:stCondLst>
-                              <p:cond delay="0"/>
-                            </p:stCondLst>
-                            <p:childTnLst>
-                              <p:set>
-                                <p:cBhvr>
-                                  <p:cTn id="8" dur="1" fill="hold">
-                                    <p:stCondLst>
-                                      <p:cond delay="0"/>
-                                    </p:stCondLst>
-                                  </p:cTn>
-                                  <p:tgtEl>
-                                    <p:spTgt spid="253"/>
-                                  </p:tgtEl>
-                                  <p:attrNameLst>
-                                    <p:attrName>style.visibility</p:attrName>
-                                  </p:attrNameLst>
-                                </p:cBhvr>
-                                <p:to>
-                                  <p:strVal val="visible"/>
-                                </p:to>
-                              </p:set>
-                            </p:childTnLst>
-                          </p:cTn>
-                        </p:par>
-                      </p:childTnLst>
-                    </p:cTn>
-                  </p:par>
-                  <p:par>
-                    <p:cTn id="9" fill="hold">
-                      <p:stCondLst>
-                        <p:cond delay="indefinite"/>
-                      </p:stCondLst>
-                      <p:childTnLst>
-                        <p:par>
-                          <p:cTn id="10" presetID="1" presetClass="entr" presetSubtype="0" fill="hold" grpId="0" nodeType="clickEffect">
-                            <p:stCondLst>
-                              <p:cond delay="0"/>
-                            </p:stCondLst>
-                            <p:childTnLst>
-                              <p:set>
-                                <p:cBhvr>
-                                  <p:cTn id="11" dur="1" fill="hold">
-                                    <p:stCondLst>
-                                      <p:cond delay="0"/>
-                                    </p:stCondLst>
-                                  </p:cTn>
-                                  <p:tgtEl>
-                                    <p:spTgt spid="253"/>
-                                  </p:tgtEl>
-                                  <p:attrNameLst>
-                                    <p:attrName>style.visibility</p:attrName>
-                                  </p:attrNameLst>
-                                </p:cBhvr>
-                                <p:to>
-                                  <p:strVal val="visible"/>
-                                </p:to>
-                              </p:set>
-                            </p:childTnLst>
-                          </p:cTn>
-                        </p:par>
-                      </p:childTnLst>
-                    </p:cTn>
-                  </p:par>
-                  <p:par>
-                    <p:cTn id="12" fill="hold">
-                      <p:stCondLst>
-                        <p:cond delay="indefinite"/>
-                      </p:stCondLst>
-                      <p:childTnLst>
-                        <p:par>
-                          <p:cTn id="13" presetID="1" presetClass="entr" presetSubtype="0" fill="hold" grpId="0" nodeType="clickEffect">
-                            <p:stCondLst>
-                              <p:cond delay="0"/>
-                            </p:stCondLst>
-                            <p:childTnLst>
-                              <p:set>
-                                <p:cBhvr>
-                                  <p:cTn id="14" dur="1" fill="hold">
-                                    <p:stCondLst>
-                                      <p:cond delay="0"/>
-                                    </p:stCondLst>
-                                  </p:cTn>
-                                  <p:tgtEl>
-                                    <p:spTgt spid="253"/>
-                                  </p:tgtEl>
-                                  <p:attrNameLst>
-                                    <p:attrName>style.visibility</p:attrName>
-                                  </p:attrNameLst>
-                                </p:cBhvr>
-                                <p:to>
-                                  <p:strVal val="visible"/>
-                                </p:to>
-                              </p:set>
-                            </p:childTnLst>
-                          </p:cTn>
-                        </p:par>
-                      </p:childTnLst>
-                    </p:cTn>
-                  </p:par>
-                </p:childTnLst>
-              </p:cTn>
-              <p:prevCondLst>
-                <p:cond evt="onPrev" delay="0">
-                  <p:tgtEl>
-                    <p:sldTgt/>
-                  </p:tgtEl>
-                </p:cond>
-              </p:prevCondLst>
-              <p:nextCondLst>
-                <p:cond evt="onNext" delay="0">
-                  <p:tgtEl>
-                    <p:sldTgt/>
-                  </p:tgtEl>
-                </p:cond>
-              </p:nextCondLst>
-            </p:seq>
-          </p:childTnLst>
-        </p:cTn>
-      </p:par>
-    </p:tnLst>
-    <p:bldLst>
-      <p:bldP spid="253" grpId="0"/>
-    </p:bldLst>
-  </p:timing>
-</p:sld>
-</file>
-
-<file path=ppt/slides/slide26.xml><?xml version="1.0" encoding="utf-8"?>
-<p:sld xmlns:a="http://schemas.openxmlformats.org/drawingml/2006/main" xmlns:r="http://schemas.openxmlformats.org/officeDocument/2006/relationships" xmlns:p="http://schemas.openxmlformats.org/presentationml/2006/main">
-  <p:cSld>
-    <p:bg>
-      <p:bgPr>
-        <a:solidFill>
-          <a:srgbClr val="FFF8EC"/>
-        </a:solidFill>
-        <a:effectLst/>
-      </p:bgPr>
-    </p:bg>
-    <p:spTree>
-      <p:nvGrpSpPr>
-        <p:cNvPr id="1" name=""/>
-        <p:cNvGrpSpPr/>
-        <p:nvPr/>
-      </p:nvGrpSpPr>
-      <p:grpSpPr>
-        <a:xfrm>
-          <a:off x="0" y="0"/>
-          <a:ext cx="0" cy="0"/>
-          <a:chOff x="0" y="0"/>
-          <a:chExt cx="0" cy="0"/>
-        </a:xfrm>
-      </p:grpSpPr>
-      <p:sp>
-        <p:nvSpPr>
-          <p:cNvPr id="261" name="Title"/>
-          <p:cNvSpPr txBox="1"/>
-          <p:nvPr/>
-        </p:nvSpPr>
-        <p:spPr>
-          <a:xfrm>
-            <a:off x="1050000" y="2300000"/>
-            <a:ext cx="10200000" cy="1700000"/>
-          </a:xfrm>
-          <a:prstGeom prst="rect">
-            <a:avLst/>
-          </a:prstGeom>
-          <a:noFill/>
-          <a:ln/>
-        </p:spPr>
-        <p:txBody>
-          <a:bodyPr wrap="square" rtlCol="0">
-            <a:normAutofit/>
-          </a:bodyPr>
-          <a:lstStyle/>
-          <a:p>
-            <a:pPr algn="ctr">
-              <a:buNone/>
-            </a:pPr>
-            <a:r>
-              <a:rPr lang="zh-CN" sz="5200" b="1" dirty="0">
-                <a:solidFill>
-                  <a:srgbClr val="3B2F2A"/>
-                </a:solidFill>
-                <a:latin typeface="Noto Sans CJK SC"/>
-                <a:ea typeface="Noto Sans CJK SC"/>
-              </a:rPr>
-              <a:t>谢谢</a:t>
-            </a:r>
-          </a:p>
-        </p:txBody>
-      </p:sp>
-      <p:sp>
-        <p:nvSpPr>
-          <p:cNvPr id="262" name="Subtitle"/>
-          <p:cNvSpPr txBox="1"/>
-          <p:nvPr/>
-        </p:nvSpPr>
-        <p:spPr>
-          <a:xfrm>
-            <a:off x="1050000" y="4200000"/>
-            <a:ext cx="10200000" cy="900000"/>
-          </a:xfrm>
-          <a:prstGeom prst="rect">
-            <a:avLst/>
-          </a:prstGeom>
-          <a:noFill/>
-          <a:ln/>
-        </p:spPr>
-        <p:txBody>
-          <a:bodyPr wrap="square" rtlCol="0">
-            <a:normAutofit/>
-          </a:bodyPr>
-          <a:lstStyle/>
-          <a:p>
-            <a:pPr algn="ctr">
-              <a:buNone/>
-            </a:pPr>
-            <a:r>
-              <a:rPr lang="zh-CN" sz="2000" b="1" dirty="0">
-                <a:solidFill>
-                  <a:srgbClr val="E58A2F"/>
-                </a:solidFill>
-                <a:latin typeface="Noto Sans CJK SC"/>
-                <a:ea typeface="Noto Sans CJK SC"/>
-              </a:rPr>
-              <a:t>女生找工作七大岗位全攻略</a:t>
-            </a:r>
-          </a:p>
-        </p:txBody>
-      </p:sp>
-      <p:sp>
-        <p:nvSpPr>
-          <p:cNvPr id="269" name="Page number"/>
-          <p:cNvSpPr txBox="1"/>
-          <p:nvPr/>
-        </p:nvSpPr>
-        <p:spPr>
-          <a:xfrm>
-            <a:off x="10600000" y="6250000"/>
-            <a:ext cx="1200000" cy="400000"/>
-          </a:xfrm>
-          <a:prstGeom prst="rect">
-            <a:avLst/>
-          </a:prstGeom>
-          <a:noFill/>
-          <a:ln/>
-        </p:spPr>
-        <p:txBody>
-          <a:bodyPr wrap="square" rtlCol="0">
-            <a:normAutofit/>
-          </a:bodyPr>
-          <a:lstStyle/>
-          <a:p>
-            <a:pPr algn="r">
-              <a:buNone/>
-            </a:pPr>
-            <a:r>
-              <a:rPr lang="zh-CN" sz="1000" b="0" dirty="0">
-                <a:solidFill>
-                  <a:srgbClr val="7E6F68"/>
-                </a:solidFill>
-                <a:latin typeface="Noto Sans CJK SC"/>
-                <a:ea typeface="Noto Sans CJK SC"/>
-              </a:rPr>
-              <a:t>26 / 26</a:t>
+              <a:t>24 / 24</a:t>
             </a:r>
           </a:p>
         </p:txBody>
@@ -9806,45 +8779,6 @@
       </p:grpSpPr>
       <p:sp>
         <p:nvSpPr>
-          <p:cNvPr id="31" name="Kicker"/>
-          <p:cNvSpPr txBox="1"/>
-          <p:nvPr/>
-        </p:nvSpPr>
-        <p:spPr>
-          <a:xfrm>
-            <a:off x="900000" y="420000"/>
-            <a:ext cx="10000000" cy="420000"/>
-          </a:xfrm>
-          <a:prstGeom prst="rect">
-            <a:avLst/>
-          </a:prstGeom>
-          <a:noFill/>
-          <a:ln/>
-        </p:spPr>
-        <p:txBody>
-          <a:bodyPr wrap="square" rtlCol="0">
-            <a:normAutofit/>
-          </a:bodyPr>
-          <a:lstStyle/>
-          <a:p>
-            <a:pPr>
-              <a:buNone/>
-            </a:pPr>
-            <a:r>
-              <a:rPr lang="zh-CN" sz="1400" b="1" dirty="0">
-                <a:solidFill>
-                  <a:srgbClr val="E58A2F"/>
-                </a:solidFill>
-                <a:latin typeface="Noto Sans CJK SC"/>
-                <a:ea typeface="Noto Sans CJK SC"/>
-              </a:rPr>
-              <a:t>打牌策略：一主一快一稳</a:t>
-            </a:r>
-          </a:p>
-        </p:txBody>
-      </p:sp>
-      <p:sp>
-        <p:nvSpPr>
           <p:cNvPr id="32" name="Title"/>
           <p:cNvSpPr txBox="1"/>
           <p:nvPr/>
@@ -9877,507 +8811,6 @@
                 <a:latin typeface="Noto Sans CJK SC"/>
                 <a:ea typeface="Noto Sans CJK SC"/>
               </a:rPr>
-              <a:t>打牌策略：一主一快一稳</a:t>
-            </a:r>
-          </a:p>
-        </p:txBody>
-      </p:sp>
-      <p:sp>
-        <p:nvSpPr>
-          <p:cNvPr id="33" name="Body"/>
-          <p:cNvSpPr txBox="1"/>
-          <p:nvPr/>
-        </p:nvSpPr>
-        <p:spPr>
-          <a:xfrm>
-            <a:off x="1050000" y="1850000"/>
-            <a:ext cx="10100000" cy="4500000"/>
-          </a:xfrm>
-          <a:prstGeom prst="rect">
-            <a:avLst/>
-          </a:prstGeom>
-          <a:noFill/>
-          <a:ln/>
-        </p:spPr>
-        <p:txBody>
-          <a:bodyPr wrap="square" rtlCol="0">
-            <a:normAutofit/>
-          </a:bodyPr>
-          <a:lstStyle/>
-          <a:p>
-            <a:pPr marL="285750" indent="-285750">
-              <a:spcAft>
-                <a:spcPts val="600"/>
-              </a:spcAft>
-              <a:buFont typeface="Arial" panose="020B0604020202020204"/>
-              <a:buChar char="•"/>
-            </a:pPr>
-            <a:r>
-              <a:rPr lang="zh-CN" sz="2000" b="0" dirty="0">
-                <a:solidFill>
-                  <a:srgbClr val="3B2F2A"/>
-                </a:solidFill>
-                <a:latin typeface="Noto Sans CJK SC"/>
-                <a:ea typeface="Noto Sans CJK SC"/>
-              </a:rPr>
-              <a:t>主攻牌：值得花2-3个月系统学</a:t>
-            </a:r>
-          </a:p>
-          <a:p>
-            <a:pPr marL="285750" indent="-285750">
-              <a:spcAft>
-                <a:spcPts val="600"/>
-              </a:spcAft>
-              <a:buFont typeface="Arial" panose="020B0604020202020204"/>
-              <a:buChar char="•"/>
-            </a:pPr>
-            <a:r>
-              <a:rPr lang="zh-CN" sz="2000" b="0" dirty="0">
-                <a:solidFill>
-                  <a:srgbClr val="3B2F2A"/>
-                </a:solidFill>
-                <a:latin typeface="Noto Sans CJK SC"/>
-                <a:ea typeface="Noto Sans CJK SC"/>
-              </a:rPr>
-              <a:t>候选：数据运营 或 新媒体运营</a:t>
-            </a:r>
-          </a:p>
-          <a:p>
-            <a:pPr marL="285750" indent="-285750">
-              <a:spcAft>
-                <a:spcPts val="600"/>
-              </a:spcAft>
-              <a:buFont typeface="Arial" panose="020B0604020202020204"/>
-              <a:buChar char="•"/>
-            </a:pPr>
-            <a:r>
-              <a:rPr lang="zh-CN" sz="2000" b="0" dirty="0">
-                <a:solidFill>
-                  <a:srgbClr val="3B2F2A"/>
-                </a:solidFill>
-                <a:latin typeface="Noto Sans CJK SC"/>
-                <a:ea typeface="Noto Sans CJK SC"/>
-              </a:rPr>
-              <a:t>快速牌：2-4周拿offer止住空窗</a:t>
-            </a:r>
-          </a:p>
-          <a:p>
-            <a:pPr marL="285750" indent="-285750">
-              <a:spcAft>
-                <a:spcPts val="600"/>
-              </a:spcAft>
-              <a:buFont typeface="Arial" panose="020B0604020202020204"/>
-              <a:buChar char="•"/>
-            </a:pPr>
-            <a:r>
-              <a:rPr lang="zh-CN" sz="2000" b="0" dirty="0">
-                <a:solidFill>
-                  <a:srgbClr val="3B2F2A"/>
-                </a:solidFill>
-                <a:latin typeface="Noto Sans CJK SC"/>
-                <a:ea typeface="Noto Sans CJK SC"/>
-              </a:rPr>
-              <a:t>候选：社群运营 或 行政专员</a:t>
-            </a:r>
-          </a:p>
-          <a:p>
-            <a:pPr marL="285750" indent="-285750">
-              <a:spcAft>
-                <a:spcPts val="600"/>
-              </a:spcAft>
-              <a:buFont typeface="Arial" panose="020B0604020202020204"/>
-              <a:buChar char="•"/>
-            </a:pPr>
-            <a:r>
-              <a:rPr lang="zh-CN" sz="2000" b="0" dirty="0">
-                <a:solidFill>
-                  <a:srgbClr val="3B2F2A"/>
-                </a:solidFill>
-                <a:latin typeface="Noto Sans CJK SC"/>
-                <a:ea typeface="Noto Sans CJK SC"/>
-              </a:rPr>
-              <a:t>稳定牌：高校助理，投了不亏</a:t>
-            </a:r>
-          </a:p>
-          <a:p>
-            <a:pPr marL="285750" indent="-285750">
-              <a:spcAft>
-                <a:spcPts val="600"/>
-              </a:spcAft>
-              <a:buFont typeface="Arial" panose="020B0604020202020204"/>
-              <a:buChar char="•"/>
-            </a:pPr>
-            <a:r>
-              <a:rPr lang="zh-CN" sz="2000" b="0" dirty="0">
-                <a:solidFill>
-                  <a:srgbClr val="3B2F2A"/>
-                </a:solidFill>
-                <a:latin typeface="Noto Sans CJK SC"/>
-                <a:ea typeface="Noto Sans CJK SC"/>
-              </a:rPr>
-              <a:t>三线并行：先上岸，再谈理想</a:t>
-            </a:r>
-          </a:p>
-        </p:txBody>
-      </p:sp>
-      <p:sp>
-        <p:nvSpPr>
-          <p:cNvPr id="39" name="Page number"/>
-          <p:cNvSpPr txBox="1"/>
-          <p:nvPr/>
-        </p:nvSpPr>
-        <p:spPr>
-          <a:xfrm>
-            <a:off x="10600000" y="6250000"/>
-            <a:ext cx="1200000" cy="400000"/>
-          </a:xfrm>
-          <a:prstGeom prst="rect">
-            <a:avLst/>
-          </a:prstGeom>
-          <a:noFill/>
-          <a:ln/>
-        </p:spPr>
-        <p:txBody>
-          <a:bodyPr wrap="square" rtlCol="0">
-            <a:normAutofit/>
-          </a:bodyPr>
-          <a:lstStyle/>
-          <a:p>
-            <a:pPr algn="r">
-              <a:buNone/>
-            </a:pPr>
-            <a:r>
-              <a:rPr lang="zh-CN" sz="1000" b="0" dirty="0">
-                <a:solidFill>
-                  <a:srgbClr val="7E6F68"/>
-                </a:solidFill>
-                <a:latin typeface="Noto Sans CJK SC"/>
-                <a:ea typeface="Noto Sans CJK SC"/>
-              </a:rPr>
-              <a:t>03 / 26</a:t>
-            </a:r>
-          </a:p>
-        </p:txBody>
-      </p:sp>
-    </p:spTree>
-  </p:cSld>
-  <p:clrMapOvr>
-    <a:overrideClrMapping bg1="lt1" tx1="dk1" bg2="lt2" tx2="dk2" accent1="accent1" accent2="accent2" accent3="accent3" accent4="accent4" accent5="accent5" accent6="accent6" hlink="hlink" folHlink="folHlink"/>
-  </p:clrMapOvr>
-  <p:transition spd="med">
-    <p:fade/>
-  </p:transition>
-  <p:timing>
-    <p:tnLst>
-      <p:par>
-        <p:cTn id="1" dur="indefinite" restart="never" nodeType="tmRoot">
-          <p:childTnLst>
-            <p:seq concurrent="1" nextAc="seek">
-              <p:cTn id="2" dur="indefinite" nodeType="mainSeq">
-                <p:childTnLst>
-                  <p:par>
-                    <p:cTn id="3" fill="hold">
-                      <p:stCondLst>
-                        <p:cond delay="indefinite"/>
-                      </p:stCondLst>
-                      <p:childTnLst>
-                        <p:par>
-                          <p:cTn id="4" presetID="1" presetClass="entr" presetSubtype="0" fill="hold" grpId="0" nodeType="clickEffect">
-                            <p:stCondLst>
-                              <p:cond delay="0"/>
-                            </p:stCondLst>
-                            <p:childTnLst>
-                              <p:set>
-                                <p:cBhvr>
-                                  <p:cTn id="5" dur="1" fill="hold">
-                                    <p:stCondLst>
-                                      <p:cond delay="0"/>
-                                    </p:stCondLst>
-                                  </p:cTn>
-                                  <p:tgtEl>
-                                    <p:spTgt spid="33"/>
-                                  </p:tgtEl>
-                                  <p:attrNameLst>
-                                    <p:attrName>style.visibility</p:attrName>
-                                  </p:attrNameLst>
-                                </p:cBhvr>
-                                <p:to>
-                                  <p:strVal val="visible"/>
-                                </p:to>
-                              </p:set>
-                            </p:childTnLst>
-                          </p:cTn>
-                        </p:par>
-                      </p:childTnLst>
-                    </p:cTn>
-                  </p:par>
-                  <p:par>
-                    <p:cTn id="6" fill="hold">
-                      <p:stCondLst>
-                        <p:cond delay="indefinite"/>
-                      </p:stCondLst>
-                      <p:childTnLst>
-                        <p:par>
-                          <p:cTn id="7" presetID="1" presetClass="entr" presetSubtype="0" fill="hold" grpId="0" nodeType="clickEffect">
-                            <p:stCondLst>
-                              <p:cond delay="0"/>
-                            </p:stCondLst>
-                            <p:childTnLst>
-                              <p:set>
-                                <p:cBhvr>
-                                  <p:cTn id="8" dur="1" fill="hold">
-                                    <p:stCondLst>
-                                      <p:cond delay="0"/>
-                                    </p:stCondLst>
-                                  </p:cTn>
-                                  <p:tgtEl>
-                                    <p:spTgt spid="33"/>
-                                  </p:tgtEl>
-                                  <p:attrNameLst>
-                                    <p:attrName>style.visibility</p:attrName>
-                                  </p:attrNameLst>
-                                </p:cBhvr>
-                                <p:to>
-                                  <p:strVal val="visible"/>
-                                </p:to>
-                              </p:set>
-                            </p:childTnLst>
-                          </p:cTn>
-                        </p:par>
-                      </p:childTnLst>
-                    </p:cTn>
-                  </p:par>
-                  <p:par>
-                    <p:cTn id="9" fill="hold">
-                      <p:stCondLst>
-                        <p:cond delay="indefinite"/>
-                      </p:stCondLst>
-                      <p:childTnLst>
-                        <p:par>
-                          <p:cTn id="10" presetID="1" presetClass="entr" presetSubtype="0" fill="hold" grpId="0" nodeType="clickEffect">
-                            <p:stCondLst>
-                              <p:cond delay="0"/>
-                            </p:stCondLst>
-                            <p:childTnLst>
-                              <p:set>
-                                <p:cBhvr>
-                                  <p:cTn id="11" dur="1" fill="hold">
-                                    <p:stCondLst>
-                                      <p:cond delay="0"/>
-                                    </p:stCondLst>
-                                  </p:cTn>
-                                  <p:tgtEl>
-                                    <p:spTgt spid="33"/>
-                                  </p:tgtEl>
-                                  <p:attrNameLst>
-                                    <p:attrName>style.visibility</p:attrName>
-                                  </p:attrNameLst>
-                                </p:cBhvr>
-                                <p:to>
-                                  <p:strVal val="visible"/>
-                                </p:to>
-                              </p:set>
-                            </p:childTnLst>
-                          </p:cTn>
-                        </p:par>
-                      </p:childTnLst>
-                    </p:cTn>
-                  </p:par>
-                  <p:par>
-                    <p:cTn id="12" fill="hold">
-                      <p:stCondLst>
-                        <p:cond delay="indefinite"/>
-                      </p:stCondLst>
-                      <p:childTnLst>
-                        <p:par>
-                          <p:cTn id="13" presetID="1" presetClass="entr" presetSubtype="0" fill="hold" grpId="0" nodeType="clickEffect">
-                            <p:stCondLst>
-                              <p:cond delay="0"/>
-                            </p:stCondLst>
-                            <p:childTnLst>
-                              <p:set>
-                                <p:cBhvr>
-                                  <p:cTn id="14" dur="1" fill="hold">
-                                    <p:stCondLst>
-                                      <p:cond delay="0"/>
-                                    </p:stCondLst>
-                                  </p:cTn>
-                                  <p:tgtEl>
-                                    <p:spTgt spid="33"/>
-                                  </p:tgtEl>
-                                  <p:attrNameLst>
-                                    <p:attrName>style.visibility</p:attrName>
-                                  </p:attrNameLst>
-                                </p:cBhvr>
-                                <p:to>
-                                  <p:strVal val="visible"/>
-                                </p:to>
-                              </p:set>
-                            </p:childTnLst>
-                          </p:cTn>
-                        </p:par>
-                      </p:childTnLst>
-                    </p:cTn>
-                  </p:par>
-                  <p:par>
-                    <p:cTn id="15" fill="hold">
-                      <p:stCondLst>
-                        <p:cond delay="indefinite"/>
-                      </p:stCondLst>
-                      <p:childTnLst>
-                        <p:par>
-                          <p:cTn id="16" presetID="1" presetClass="entr" presetSubtype="0" fill="hold" grpId="0" nodeType="clickEffect">
-                            <p:stCondLst>
-                              <p:cond delay="0"/>
-                            </p:stCondLst>
-                            <p:childTnLst>
-                              <p:set>
-                                <p:cBhvr>
-                                  <p:cTn id="17" dur="1" fill="hold">
-                                    <p:stCondLst>
-                                      <p:cond delay="0"/>
-                                    </p:stCondLst>
-                                  </p:cTn>
-                                  <p:tgtEl>
-                                    <p:spTgt spid="33"/>
-                                  </p:tgtEl>
-                                  <p:attrNameLst>
-                                    <p:attrName>style.visibility</p:attrName>
-                                  </p:attrNameLst>
-                                </p:cBhvr>
-                                <p:to>
-                                  <p:strVal val="visible"/>
-                                </p:to>
-                              </p:set>
-                            </p:childTnLst>
-                          </p:cTn>
-                        </p:par>
-                      </p:childTnLst>
-                    </p:cTn>
-                  </p:par>
-                  <p:par>
-                    <p:cTn id="18" fill="hold">
-                      <p:stCondLst>
-                        <p:cond delay="indefinite"/>
-                      </p:stCondLst>
-                      <p:childTnLst>
-                        <p:par>
-                          <p:cTn id="19" presetID="1" presetClass="entr" presetSubtype="0" fill="hold" grpId="0" nodeType="clickEffect">
-                            <p:stCondLst>
-                              <p:cond delay="0"/>
-                            </p:stCondLst>
-                            <p:childTnLst>
-                              <p:set>
-                                <p:cBhvr>
-                                  <p:cTn id="20" dur="1" fill="hold">
-                                    <p:stCondLst>
-                                      <p:cond delay="0"/>
-                                    </p:stCondLst>
-                                  </p:cTn>
-                                  <p:tgtEl>
-                                    <p:spTgt spid="33"/>
-                                  </p:tgtEl>
-                                  <p:attrNameLst>
-                                    <p:attrName>style.visibility</p:attrName>
-                                  </p:attrNameLst>
-                                </p:cBhvr>
-                                <p:to>
-                                  <p:strVal val="visible"/>
-                                </p:to>
-                              </p:set>
-                            </p:childTnLst>
-                          </p:cTn>
-                        </p:par>
-                      </p:childTnLst>
-                    </p:cTn>
-                  </p:par>
-                </p:childTnLst>
-              </p:cTn>
-              <p:prevCondLst>
-                <p:cond evt="onPrev" delay="0">
-                  <p:tgtEl>
-                    <p:sldTgt/>
-                  </p:tgtEl>
-                </p:cond>
-              </p:prevCondLst>
-              <p:nextCondLst>
-                <p:cond evt="onNext" delay="0">
-                  <p:tgtEl>
-                    <p:sldTgt/>
-                  </p:tgtEl>
-                </p:cond>
-              </p:nextCondLst>
-            </p:seq>
-          </p:childTnLst>
-        </p:cTn>
-      </p:par>
-    </p:tnLst>
-    <p:bldLst>
-      <p:bldP spid="33" grpId="0"/>
-    </p:bldLst>
-  </p:timing>
-</p:sld>
-</file>
-
-<file path=ppt/slides/slide4.xml><?xml version="1.0" encoding="utf-8"?>
-<p:sld xmlns:a="http://schemas.openxmlformats.org/drawingml/2006/main" xmlns:r="http://schemas.openxmlformats.org/officeDocument/2006/relationships" xmlns:p="http://schemas.openxmlformats.org/presentationml/2006/main">
-  <p:cSld>
-    <p:bg>
-      <p:bgPr>
-        <a:solidFill>
-          <a:srgbClr val="FFF8EC"/>
-        </a:solidFill>
-        <a:effectLst/>
-      </p:bgPr>
-    </p:bg>
-    <p:spTree>
-      <p:nvGrpSpPr>
-        <p:cNvPr id="1" name=""/>
-        <p:cNvGrpSpPr/>
-        <p:nvPr/>
-      </p:nvGrpSpPr>
-      <p:grpSpPr>
-        <a:xfrm>
-          <a:off x="0" y="0"/>
-          <a:ext cx="0" cy="0"/>
-          <a:chOff x="0" y="0"/>
-          <a:chExt cx="0" cy="0"/>
-        </a:xfrm>
-      </p:grpSpPr>
-      <p:sp>
-        <p:nvSpPr>
-          <p:cNvPr id="42" name="Title"/>
-          <p:cNvSpPr txBox="1"/>
-          <p:nvPr/>
-        </p:nvSpPr>
-        <p:spPr>
-          <a:xfrm>
-            <a:off x="900000" y="920000"/>
-            <a:ext cx="10300000" cy="800000"/>
-          </a:xfrm>
-          <a:prstGeom prst="rect">
-            <a:avLst/>
-          </a:prstGeom>
-          <a:noFill/>
-          <a:ln/>
-        </p:spPr>
-        <p:txBody>
-          <a:bodyPr wrap="square" rtlCol="0">
-            <a:normAutofit/>
-          </a:bodyPr>
-          <a:lstStyle/>
-          <a:p>
-            <a:pPr>
-              <a:buNone/>
-            </a:pPr>
-            <a:r>
-              <a:rPr lang="zh-CN" sz="3400" b="1" dirty="0">
-                <a:solidFill>
-                  <a:srgbClr val="3B2F2A"/>
-                </a:solidFill>
-                <a:latin typeface="Noto Sans CJK SC"/>
-                <a:ea typeface="Noto Sans CJK SC"/>
-              </a:rPr>
               <a:t>七岗总览：先定位再选择</a:t>
             </a:r>
           </a:p>
@@ -10385,7 +8818,7 @@
       </p:sp>
       <p:graphicFrame>
         <p:nvGraphicFramePr>
-          <p:cNvPr id="43" name="Table"/>
+          <p:cNvPr id="33" name="Table"/>
           <p:cNvGraphicFramePr>
             <a:graphicFrameLocks noGrp="1"/>
           </p:cNvGraphicFramePr>
@@ -11235,6 +9668,297 @@
       </p:graphicFrame>
       <p:sp>
         <p:nvSpPr>
+          <p:cNvPr id="39" name="Page number"/>
+          <p:cNvSpPr txBox="1"/>
+          <p:nvPr/>
+        </p:nvSpPr>
+        <p:spPr>
+          <a:xfrm>
+            <a:off x="10600000" y="6250000"/>
+            <a:ext cx="1200000" cy="400000"/>
+          </a:xfrm>
+          <a:prstGeom prst="rect">
+            <a:avLst/>
+          </a:prstGeom>
+          <a:noFill/>
+          <a:ln/>
+        </p:spPr>
+        <p:txBody>
+          <a:bodyPr wrap="square" rtlCol="0">
+            <a:normAutofit/>
+          </a:bodyPr>
+          <a:lstStyle/>
+          <a:p>
+            <a:pPr algn="r">
+              <a:buNone/>
+            </a:pPr>
+            <a:r>
+              <a:rPr lang="zh-CN" sz="1000" b="0" dirty="0">
+                <a:solidFill>
+                  <a:srgbClr val="7E6F68"/>
+                </a:solidFill>
+                <a:latin typeface="Noto Sans CJK SC"/>
+                <a:ea typeface="Noto Sans CJK SC"/>
+              </a:rPr>
+              <a:t>03 / 24</a:t>
+            </a:r>
+          </a:p>
+        </p:txBody>
+      </p:sp>
+    </p:spTree>
+  </p:cSld>
+  <p:clrMapOvr>
+    <a:overrideClrMapping bg1="lt1" tx1="dk1" bg2="lt2" tx2="dk2" accent1="accent1" accent2="accent2" accent3="accent3" accent4="accent4" accent5="accent5" accent6="accent6" hlink="hlink" folHlink="folHlink"/>
+  </p:clrMapOvr>
+  <p:transition spd="med">
+    <p:fade/>
+  </p:transition>
+</p:sld>
+</file>
+
+<file path=ppt/slides/slide4.xml><?xml version="1.0" encoding="utf-8"?>
+<p:sld xmlns:a="http://schemas.openxmlformats.org/drawingml/2006/main" xmlns:r="http://schemas.openxmlformats.org/officeDocument/2006/relationships" xmlns:p="http://schemas.openxmlformats.org/presentationml/2006/main">
+  <p:cSld>
+    <p:bg>
+      <p:bgPr>
+        <a:solidFill>
+          <a:srgbClr val="FFF8EC"/>
+        </a:solidFill>
+        <a:effectLst/>
+      </p:bgPr>
+    </p:bg>
+    <p:spTree>
+      <p:nvGrpSpPr>
+        <p:cNvPr id="1" name=""/>
+        <p:cNvGrpSpPr/>
+        <p:nvPr/>
+      </p:nvGrpSpPr>
+      <p:grpSpPr>
+        <a:xfrm>
+          <a:off x="0" y="0"/>
+          <a:ext cx="0" cy="0"/>
+          <a:chOff x="0" y="0"/>
+          <a:chExt cx="0" cy="0"/>
+        </a:xfrm>
+      </p:grpSpPr>
+      <p:sp>
+        <p:nvSpPr>
+          <p:cNvPr id="41" name="Kicker"/>
+          <p:cNvSpPr txBox="1"/>
+          <p:nvPr/>
+        </p:nvSpPr>
+        <p:spPr>
+          <a:xfrm>
+            <a:off x="900000" y="420000"/>
+            <a:ext cx="10000000" cy="420000"/>
+          </a:xfrm>
+          <a:prstGeom prst="rect">
+            <a:avLst/>
+          </a:prstGeom>
+          <a:noFill/>
+          <a:ln/>
+        </p:spPr>
+        <p:txBody>
+          <a:bodyPr wrap="square" rtlCol="0">
+            <a:normAutofit/>
+          </a:bodyPr>
+          <a:lstStyle/>
+          <a:p>
+            <a:pPr>
+              <a:buNone/>
+            </a:pPr>
+            <a:r>
+              <a:rPr lang="zh-CN" sz="1400" b="1" dirty="0">
+                <a:solidFill>
+                  <a:srgbClr val="E58A2F"/>
+                </a:solidFill>
+                <a:latin typeface="Noto Sans CJK SC"/>
+                <a:ea typeface="Noto Sans CJK SC"/>
+              </a:rPr>
+              <a:t>新媒体运营：用内容换流量</a:t>
+            </a:r>
+          </a:p>
+        </p:txBody>
+      </p:sp>
+      <p:sp>
+        <p:nvSpPr>
+          <p:cNvPr id="42" name="Title"/>
+          <p:cNvSpPr txBox="1"/>
+          <p:nvPr/>
+        </p:nvSpPr>
+        <p:spPr>
+          <a:xfrm>
+            <a:off x="900000" y="920000"/>
+            <a:ext cx="10300000" cy="800000"/>
+          </a:xfrm>
+          <a:prstGeom prst="rect">
+            <a:avLst/>
+          </a:prstGeom>
+          <a:noFill/>
+          <a:ln/>
+        </p:spPr>
+        <p:txBody>
+          <a:bodyPr wrap="square" rtlCol="0">
+            <a:normAutofit/>
+          </a:bodyPr>
+          <a:lstStyle/>
+          <a:p>
+            <a:pPr>
+              <a:buNone/>
+            </a:pPr>
+            <a:r>
+              <a:rPr lang="zh-CN" sz="3400" b="1" dirty="0">
+                <a:solidFill>
+                  <a:srgbClr val="3B2F2A"/>
+                </a:solidFill>
+                <a:latin typeface="Noto Sans CJK SC"/>
+                <a:ea typeface="Noto Sans CJK SC"/>
+              </a:rPr>
+              <a:t>新媒体运营：用内容换流量</a:t>
+            </a:r>
+          </a:p>
+        </p:txBody>
+      </p:sp>
+      <p:sp>
+        <p:nvSpPr>
+          <p:cNvPr id="43" name="Body"/>
+          <p:cNvSpPr txBox="1"/>
+          <p:nvPr/>
+        </p:nvSpPr>
+        <p:spPr>
+          <a:xfrm>
+            <a:off x="1050000" y="1850000"/>
+            <a:ext cx="10100000" cy="4500000"/>
+          </a:xfrm>
+          <a:prstGeom prst="rect">
+            <a:avLst/>
+          </a:prstGeom>
+          <a:noFill/>
+          <a:ln/>
+        </p:spPr>
+        <p:txBody>
+          <a:bodyPr wrap="square" rtlCol="0">
+            <a:normAutofit/>
+          </a:bodyPr>
+          <a:lstStyle/>
+          <a:p>
+            <a:pPr marL="285750" indent="-285750">
+              <a:spcAft>
+                <a:spcPts val="600"/>
+              </a:spcAft>
+              <a:buFont typeface="Arial" panose="020B0604020202020204"/>
+              <a:buChar char="•"/>
+            </a:pPr>
+            <a:r>
+              <a:rPr lang="zh-CN" sz="2000" b="0" dirty="0">
+                <a:solidFill>
+                  <a:srgbClr val="3B2F2A"/>
+                </a:solidFill>
+                <a:latin typeface="Noto Sans CJK SC"/>
+                <a:ea typeface="Noto Sans CJK SC"/>
+              </a:rPr>
+              <a:t>定位：经营品牌的内容资产</a:t>
+            </a:r>
+          </a:p>
+          <a:p>
+            <a:pPr marL="285750" indent="-285750">
+              <a:spcAft>
+                <a:spcPts val="600"/>
+              </a:spcAft>
+              <a:buFont typeface="Arial" panose="020B0604020202020204"/>
+              <a:buChar char="•"/>
+            </a:pPr>
+            <a:r>
+              <a:rPr lang="zh-CN" sz="2000" b="0" dirty="0">
+                <a:solidFill>
+                  <a:srgbClr val="3B2F2A"/>
+                </a:solidFill>
+                <a:latin typeface="Noto Sans CJK SC"/>
+                <a:ea typeface="Noto Sans CJK SC"/>
+              </a:rPr>
+              <a:t>主战场：小红书、抖音、视频号</a:t>
+            </a:r>
+          </a:p>
+          <a:p>
+            <a:pPr marL="285750" indent="-285750">
+              <a:spcAft>
+                <a:spcPts val="600"/>
+              </a:spcAft>
+              <a:buFont typeface="Arial" panose="020B0604020202020204"/>
+              <a:buChar char="•"/>
+            </a:pPr>
+            <a:r>
+              <a:rPr lang="zh-CN" sz="2000" b="0" dirty="0">
+                <a:solidFill>
+                  <a:srgbClr val="3B2F2A"/>
+                </a:solidFill>
+                <a:latin typeface="Noto Sans CJK SC"/>
+                <a:ea typeface="Noto Sans CJK SC"/>
+              </a:rPr>
+              <a:t>每天：看数据、追热点、写文案</a:t>
+            </a:r>
+          </a:p>
+          <a:p>
+            <a:pPr marL="285750" indent="-285750">
+              <a:spcAft>
+                <a:spcPts val="600"/>
+              </a:spcAft>
+              <a:buFont typeface="Arial" panose="020B0604020202020204"/>
+              <a:buChar char="•"/>
+            </a:pPr>
+            <a:r>
+              <a:rPr lang="zh-CN" sz="2000" b="0" dirty="0">
+                <a:solidFill>
+                  <a:srgbClr val="3B2F2A"/>
+                </a:solidFill>
+                <a:latin typeface="Noto Sans CJK SC"/>
+                <a:ea typeface="Noto Sans CJK SC"/>
+              </a:rPr>
+              <a:t>每周：排期表、数据复盘、活动</a:t>
+            </a:r>
+          </a:p>
+          <a:p>
+            <a:pPr marL="285750" indent="-285750">
+              <a:spcAft>
+                <a:spcPts val="600"/>
+              </a:spcAft>
+              <a:buFont typeface="Arial" panose="020B0604020202020204"/>
+              <a:buChar char="•"/>
+            </a:pPr>
+            <a:r>
+              <a:rPr lang="zh-CN" sz="2000" b="0" dirty="0">
+                <a:solidFill>
+                  <a:srgbClr val="3B2F2A"/>
+                </a:solidFill>
+                <a:latin typeface="Noto Sans CJK SC"/>
+                <a:ea typeface="Noto Sans CJK SC"/>
+              </a:rPr>
+              <a:t>KPI：阅读、涨粉、互动、转化</a:t>
+            </a:r>
+          </a:p>
+          <a:p>
+            <a:pPr marL="285750" indent="-285750">
+              <a:spcAft>
+                <a:spcPts val="600"/>
+              </a:spcAft>
+              <a:buFont typeface="Arial" panose="020B0604020202020204"/>
+              <a:buChar char="•"/>
+            </a:pPr>
+            <a:r>
+              <a:rPr lang="zh-CN" sz="2000" b="0" dirty="0">
+                <a:solidFill>
+                  <a:srgbClr val="3B2F2A"/>
+                </a:solidFill>
+                <a:latin typeface="Noto Sans CJK SC"/>
+                <a:ea typeface="Noto Sans CJK SC"/>
+              </a:rPr>
+              <a:t>适合：有表达欲、爱研究爆款的人</a:t>
+            </a:r>
+          </a:p>
+        </p:txBody>
+      </p:sp>
+      <p:sp>
+        <p:nvSpPr>
           <p:cNvPr id="49" name="Page number"/>
           <p:cNvSpPr txBox="1"/>
           <p:nvPr/>
@@ -11267,7 +9991,7 @@
                 <a:latin typeface="Noto Sans CJK SC"/>
                 <a:ea typeface="Noto Sans CJK SC"/>
               </a:rPr>
-              <a:t>04 / 26</a:t>
+              <a:t>04 / 24</a:t>
             </a:r>
           </a:p>
         </p:txBody>
@@ -11280,6 +10004,255 @@
   <p:transition spd="med">
     <p:fade/>
   </p:transition>
+  <p:timing>
+    <p:tnLst>
+      <p:par>
+        <p:cTn id="1" dur="indefinite" restart="never" nodeType="tmRoot">
+          <p:childTnLst>
+            <p:seq concurrent="1" nextAc="seek">
+              <p:cTn id="2" dur="indefinite" nodeType="mainSeq">
+                <p:childTnLst>
+                  <p:par>
+                    <p:cTn id="3" fill="hold">
+                      <p:stCondLst>
+                        <p:cond delay="indefinite"/>
+                      </p:stCondLst>
+                      <p:childTnLst>
+                        <p:par>
+                          <p:cTn id="4" presetID="1" presetClass="entr" presetSubtype="0" fill="hold" grpId="0" nodeType="clickEffect">
+                            <p:stCondLst>
+                              <p:cond delay="0"/>
+                            </p:stCondLst>
+                            <p:childTnLst>
+                              <p:set>
+                                <p:cBhvr>
+                                  <p:cTn id="5" dur="1" fill="hold">
+                                    <p:stCondLst>
+                                      <p:cond delay="0"/>
+                                    </p:stCondLst>
+                                  </p:cTn>
+                                  <p:tgtEl>
+                                    <p:spTgt spid="43"/>
+                                  </p:tgtEl>
+                                  <p:attrNameLst>
+                                    <p:attrName>style.visibility</p:attrName>
+                                  </p:attrNameLst>
+                                </p:cBhvr>
+                                <p:to>
+                                  <p:strVal val="visible"/>
+                                </p:to>
+                              </p:set>
+                            </p:childTnLst>
+                          </p:cTn>
+                        </p:par>
+                      </p:childTnLst>
+                    </p:cTn>
+                  </p:par>
+                  <p:par>
+                    <p:cTn id="6" fill="hold">
+                      <p:stCondLst>
+                        <p:cond delay="indefinite"/>
+                      </p:stCondLst>
+                      <p:childTnLst>
+                        <p:par>
+                          <p:cTn id="7" presetID="1" presetClass="entr" presetSubtype="0" fill="hold" grpId="0" nodeType="clickEffect">
+                            <p:stCondLst>
+                              <p:cond delay="0"/>
+                            </p:stCondLst>
+                            <p:childTnLst>
+                              <p:set>
+                                <p:cBhvr>
+                                  <p:cTn id="8" dur="1" fill="hold">
+                                    <p:stCondLst>
+                                      <p:cond delay="0"/>
+                                    </p:stCondLst>
+                                  </p:cTn>
+                                  <p:tgtEl>
+                                    <p:spTgt spid="43"/>
+                                  </p:tgtEl>
+                                  <p:attrNameLst>
+                                    <p:attrName>style.visibility</p:attrName>
+                                  </p:attrNameLst>
+                                </p:cBhvr>
+                                <p:to>
+                                  <p:strVal val="visible"/>
+                                </p:to>
+                              </p:set>
+                            </p:childTnLst>
+                          </p:cTn>
+                        </p:par>
+                      </p:childTnLst>
+                    </p:cTn>
+                  </p:par>
+                  <p:par>
+                    <p:cTn id="9" fill="hold">
+                      <p:stCondLst>
+                        <p:cond delay="indefinite"/>
+                      </p:stCondLst>
+                      <p:childTnLst>
+                        <p:par>
+                          <p:cTn id="10" presetID="1" presetClass="entr" presetSubtype="0" fill="hold" grpId="0" nodeType="clickEffect">
+                            <p:stCondLst>
+                              <p:cond delay="0"/>
+                            </p:stCondLst>
+                            <p:childTnLst>
+                              <p:set>
+                                <p:cBhvr>
+                                  <p:cTn id="11" dur="1" fill="hold">
+                                    <p:stCondLst>
+                                      <p:cond delay="0"/>
+                                    </p:stCondLst>
+                                  </p:cTn>
+                                  <p:tgtEl>
+                                    <p:spTgt spid="43"/>
+                                  </p:tgtEl>
+                                  <p:attrNameLst>
+                                    <p:attrName>style.visibility</p:attrName>
+                                  </p:attrNameLst>
+                                </p:cBhvr>
+                                <p:to>
+                                  <p:strVal val="visible"/>
+                                </p:to>
+                              </p:set>
+                            </p:childTnLst>
+                          </p:cTn>
+                        </p:par>
+                      </p:childTnLst>
+                    </p:cTn>
+                  </p:par>
+                  <p:par>
+                    <p:cTn id="12" fill="hold">
+                      <p:stCondLst>
+                        <p:cond delay="indefinite"/>
+                      </p:stCondLst>
+                      <p:childTnLst>
+                        <p:par>
+                          <p:cTn id="13" presetID="1" presetClass="entr" presetSubtype="0" fill="hold" grpId="0" nodeType="clickEffect">
+                            <p:stCondLst>
+                              <p:cond delay="0"/>
+                            </p:stCondLst>
+                            <p:childTnLst>
+                              <p:set>
+                                <p:cBhvr>
+                                  <p:cTn id="14" dur="1" fill="hold">
+                                    <p:stCondLst>
+                                      <p:cond delay="0"/>
+                                    </p:stCondLst>
+                                  </p:cTn>
+                                  <p:tgtEl>
+                                    <p:spTgt spid="43"/>
+                                  </p:tgtEl>
+                                  <p:attrNameLst>
+                                    <p:attrName>style.visibility</p:attrName>
+                                  </p:attrNameLst>
+                                </p:cBhvr>
+                                <p:to>
+                                  <p:strVal val="visible"/>
+                                </p:to>
+                              </p:set>
+                            </p:childTnLst>
+                          </p:cTn>
+                        </p:par>
+                      </p:childTnLst>
+                    </p:cTn>
+                  </p:par>
+                  <p:par>
+                    <p:cTn id="15" fill="hold">
+                      <p:stCondLst>
+                        <p:cond delay="indefinite"/>
+                      </p:stCondLst>
+                      <p:childTnLst>
+                        <p:par>
+                          <p:cTn id="16" presetID="1" presetClass="entr" presetSubtype="0" fill="hold" grpId="0" nodeType="clickEffect">
+                            <p:stCondLst>
+                              <p:cond delay="0"/>
+                            </p:stCondLst>
+                            <p:childTnLst>
+                              <p:set>
+                                <p:cBhvr>
+                                  <p:cTn id="17" dur="1" fill="hold">
+                                    <p:stCondLst>
+                                      <p:cond delay="0"/>
+                                    </p:stCondLst>
+                                  </p:cTn>
+                                  <p:tgtEl>
+                                    <p:spTgt spid="43"/>
+                                  </p:tgtEl>
+                                  <p:attrNameLst>
+                                    <p:attrName>style.visibility</p:attrName>
+                                  </p:attrNameLst>
+                                </p:cBhvr>
+                                <p:to>
+                                  <p:strVal val="visible"/>
+                                </p:to>
+                              </p:set>
+                            </p:childTnLst>
+                          </p:cTn>
+                        </p:par>
+                      </p:childTnLst>
+                    </p:cTn>
+                  </p:par>
+                  <p:par>
+                    <p:cTn id="18" fill="hold">
+                      <p:stCondLst>
+                        <p:cond delay="indefinite"/>
+                      </p:stCondLst>
+                      <p:childTnLst>
+                        <p:par>
+                          <p:cTn id="19" presetID="1" presetClass="entr" presetSubtype="0" fill="hold" grpId="0" nodeType="clickEffect">
+                            <p:stCondLst>
+                              <p:cond delay="0"/>
+                            </p:stCondLst>
+                            <p:childTnLst>
+                              <p:set>
+                                <p:cBhvr>
+                                  <p:cTn id="20" dur="1" fill="hold">
+                                    <p:stCondLst>
+                                      <p:cond delay="0"/>
+                                    </p:stCondLst>
+                                  </p:cTn>
+                                  <p:tgtEl>
+                                    <p:spTgt spid="43"/>
+                                  </p:tgtEl>
+                                  <p:attrNameLst>
+                                    <p:attrName>style.visibility</p:attrName>
+                                  </p:attrNameLst>
+                                </p:cBhvr>
+                                <p:to>
+                                  <p:strVal val="visible"/>
+                                </p:to>
+                              </p:set>
+                            </p:childTnLst>
+                          </p:cTn>
+                        </p:par>
+                      </p:childTnLst>
+                    </p:cTn>
+                  </p:par>
+                </p:childTnLst>
+              </p:cTn>
+              <p:prevCondLst>
+                <p:cond evt="onPrev" delay="0">
+                  <p:tgtEl>
+                    <p:sldTgt/>
+                  </p:tgtEl>
+                </p:cond>
+              </p:prevCondLst>
+              <p:nextCondLst>
+                <p:cond evt="onNext" delay="0">
+                  <p:tgtEl>
+                    <p:sldTgt/>
+                  </p:tgtEl>
+                </p:cond>
+              </p:nextCondLst>
+            </p:seq>
+          </p:childTnLst>
+        </p:cTn>
+      </p:par>
+    </p:tnLst>
+    <p:bldLst>
+      <p:bldP spid="43" grpId="0"/>
+    </p:bldLst>
+  </p:timing>
 </p:sld>
 </file>
 
@@ -11342,7 +10315,7 @@
                 <a:latin typeface="Noto Sans CJK SC"/>
                 <a:ea typeface="Noto Sans CJK SC"/>
               </a:rPr>
-              <a:t>新媒体运营：用内容换流量</a:t>
+              <a:t>新媒体运营：账号就是简历</a:t>
             </a:r>
           </a:p>
         </p:txBody>
@@ -11381,7 +10354,7 @@
                 <a:latin typeface="Noto Sans CJK SC"/>
                 <a:ea typeface="Noto Sans CJK SC"/>
               </a:rPr>
-              <a:t>新媒体运营：用内容换流量</a:t>
+              <a:t>新媒体运营：账号就是简历</a:t>
             </a:r>
           </a:p>
         </p:txBody>
@@ -11424,7 +10397,7 @@
                 <a:latin typeface="Noto Sans CJK SC"/>
                 <a:ea typeface="Noto Sans CJK SC"/>
               </a:rPr>
-              <a:t>定位：经营品牌的内容资产</a:t>
+              <a:t>学：B站系统课+平台官方教程</a:t>
             </a:r>
           </a:p>
           <a:p>
@@ -11443,7 +10416,7 @@
                 <a:latin typeface="Noto Sans CJK SC"/>
                 <a:ea typeface="Noto Sans CJK SC"/>
               </a:rPr>
-              <a:t>主战场：小红书、抖音、视频号</a:t>
+              <a:t>练：自营账号跑30天真实数据</a:t>
             </a:r>
           </a:p>
           <a:p>
@@ -11462,7 +10435,7 @@
                 <a:latin typeface="Noto Sans CJK SC"/>
                 <a:ea typeface="Noto Sans CJK SC"/>
               </a:rPr>
-              <a:t>每天：看数据、追热点、写文案</a:t>
+              <a:t>简历只写可量化的结果</a:t>
             </a:r>
           </a:p>
           <a:p>
@@ -11481,7 +10454,7 @@
                 <a:latin typeface="Noto Sans CJK SC"/>
                 <a:ea typeface="Noto Sans CJK SC"/>
               </a:rPr>
-              <a:t>每周：排期表、数据复盘、活动</a:t>
+              <a:t>例：打开率3个月从2%到5%</a:t>
             </a:r>
           </a:p>
           <a:p>
@@ -11500,7 +10473,7 @@
                 <a:latin typeface="Noto Sans CJK SC"/>
                 <a:ea typeface="Noto Sans CJK SC"/>
               </a:rPr>
-              <a:t>KPI：阅读、涨粉、互动、转化</a:t>
+              <a:t>例：500万播放，涨粉10万+</a:t>
             </a:r>
           </a:p>
           <a:p>
@@ -11519,7 +10492,7 @@
                 <a:latin typeface="Noto Sans CJK SC"/>
                 <a:ea typeface="Noto Sans CJK SC"/>
               </a:rPr>
-              <a:t>适合：有表达欲、爱研究爆款的人</a:t>
+              <a:t>一页纸排版，附作品链接</a:t>
             </a:r>
           </a:p>
         </p:txBody>
@@ -11558,7 +10531,7 @@
                 <a:latin typeface="Noto Sans CJK SC"/>
                 <a:ea typeface="Noto Sans CJK SC"/>
               </a:rPr>
-              <a:t>05 / 26</a:t>
+              <a:t>05 / 24</a:t>
             </a:r>
           </a:p>
         </p:txBody>
@@ -11882,7 +10855,7 @@
                 <a:latin typeface="Noto Sans CJK SC"/>
                 <a:ea typeface="Noto Sans CJK SC"/>
               </a:rPr>
-              <a:t>新媒体运营：账号就是简历</a:t>
+              <a:t>电商运营：离钱最近的岗位</a:t>
             </a:r>
           </a:p>
         </p:txBody>
@@ -11921,7 +10894,7 @@
                 <a:latin typeface="Noto Sans CJK SC"/>
                 <a:ea typeface="Noto Sans CJK SC"/>
               </a:rPr>
-              <a:t>新媒体运营：账号就是简历</a:t>
+              <a:t>电商运营：离钱最近的岗位</a:t>
             </a:r>
           </a:p>
         </p:txBody>
@@ -11964,7 +10937,7 @@
                 <a:latin typeface="Noto Sans CJK SC"/>
                 <a:ea typeface="Noto Sans CJK SC"/>
               </a:rPr>
-              <a:t>学：B站系统课+平台官方教程</a:t>
+              <a:t>定位：让店铺多卖货的人</a:t>
             </a:r>
           </a:p>
           <a:p>
@@ -11983,7 +10956,7 @@
                 <a:latin typeface="Noto Sans CJK SC"/>
                 <a:ea typeface="Noto Sans CJK SC"/>
               </a:rPr>
-              <a:t>练：自营账号跑30天真实数据</a:t>
+              <a:t>公式：流量乘转化率乘客单价</a:t>
             </a:r>
           </a:p>
           <a:p>
@@ -12002,7 +10975,7 @@
                 <a:latin typeface="Noto Sans CJK SC"/>
                 <a:ea typeface="Noto Sans CJK SC"/>
               </a:rPr>
-              <a:t>简历只写可量化的结果</a:t>
+              <a:t>每天：看后台、上新品、调投放</a:t>
             </a:r>
           </a:p>
           <a:p>
@@ -12021,7 +10994,7 @@
                 <a:latin typeface="Noto Sans CJK SC"/>
                 <a:ea typeface="Noto Sans CJK SC"/>
               </a:rPr>
-              <a:t>例：打开率3个月从2%到5%</a:t>
+              <a:t>大促：618双11要盯盘加班</a:t>
             </a:r>
           </a:p>
           <a:p>
@@ -12040,7 +11013,7 @@
                 <a:latin typeface="Noto Sans CJK SC"/>
                 <a:ea typeface="Noto Sans CJK SC"/>
               </a:rPr>
-              <a:t>例：500万播放，涨粉10万+</a:t>
+              <a:t>工具：生意参谋、千川、直通车</a:t>
             </a:r>
           </a:p>
           <a:p>
@@ -12059,7 +11032,7 @@
                 <a:latin typeface="Noto Sans CJK SC"/>
                 <a:ea typeface="Noto Sans CJK SC"/>
               </a:rPr>
-              <a:t>一页纸排版，附作品链接</a:t>
+              <a:t>竞品：每周拆解3个对标店铺</a:t>
             </a:r>
           </a:p>
         </p:txBody>
@@ -12098,7 +11071,7 @@
                 <a:latin typeface="Noto Sans CJK SC"/>
                 <a:ea typeface="Noto Sans CJK SC"/>
               </a:rPr>
-              <a:t>06 / 26</a:t>
+              <a:t>06 / 24</a:t>
             </a:r>
           </a:p>
         </p:txBody>
@@ -12422,7 +11395,7 @@
                 <a:latin typeface="Noto Sans CJK SC"/>
                 <a:ea typeface="Noto Sans CJK SC"/>
               </a:rPr>
-              <a:t>电商运营：离钱最近的岗位</a:t>
+              <a:t>电商运营：结果导向最好进</a:t>
             </a:r>
           </a:p>
         </p:txBody>
@@ -12461,7 +11434,7 @@
                 <a:latin typeface="Noto Sans CJK SC"/>
                 <a:ea typeface="Noto Sans CJK SC"/>
               </a:rPr>
-              <a:t>电商运营：离钱最近的岗位</a:t>
+              <a:t>电商运营：结果导向最好进</a:t>
             </a:r>
           </a:p>
         </p:txBody>
@@ -12504,7 +11477,7 @@
                 <a:latin typeface="Noto Sans CJK SC"/>
                 <a:ea typeface="Noto Sans CJK SC"/>
               </a:rPr>
-              <a:t>定位：让店铺多卖货的人</a:t>
+              <a:t>学：B站电商课+商家后台学院</a:t>
             </a:r>
           </a:p>
           <a:p>
@@ -12523,7 +11496,7 @@
                 <a:latin typeface="Noto Sans CJK SC"/>
                 <a:ea typeface="Noto Sans CJK SC"/>
               </a:rPr>
-              <a:t>公式：流量乘转化率乘客单价</a:t>
+              <a:t>练：帮小店上架优化10个商品</a:t>
             </a:r>
           </a:p>
           <a:p>
@@ -12542,7 +11515,7 @@
                 <a:latin typeface="Noto Sans CJK SC"/>
                 <a:ea typeface="Noto Sans CJK SC"/>
               </a:rPr>
-              <a:t>每天：看后台、上新品、调投放</a:t>
+              <a:t>简历关键词：GMV、ROI、转化率</a:t>
             </a:r>
           </a:p>
           <a:p>
@@ -12561,7 +11534,7 @@
                 <a:latin typeface="Noto Sans CJK SC"/>
                 <a:ea typeface="Noto Sans CJK SC"/>
               </a:rPr>
-              <a:t>大促：618双11要盯盘加班</a:t>
+              <a:t>例：月销10万提到50万</a:t>
             </a:r>
           </a:p>
           <a:p>
@@ -12580,7 +11553,7 @@
                 <a:latin typeface="Noto Sans CJK SC"/>
                 <a:ea typeface="Noto Sans CJK SC"/>
               </a:rPr>
-              <a:t>工具：生意参谋、千川、直通车</a:t>
+              <a:t>例：广告ROI优化至1.8</a:t>
             </a:r>
           </a:p>
           <a:p>
@@ -12599,7 +11572,7 @@
                 <a:latin typeface="Noto Sans CJK SC"/>
                 <a:ea typeface="Noto Sans CJK SC"/>
               </a:rPr>
-              <a:t>竞品：每周拆解3个对标店铺</a:t>
+              <a:t>单双休普遍，谈offer要问清</a:t>
             </a:r>
           </a:p>
         </p:txBody>
@@ -12638,7 +11611,7 @@
                 <a:latin typeface="Noto Sans CJK SC"/>
                 <a:ea typeface="Noto Sans CJK SC"/>
               </a:rPr>
-              <a:t>07 / 26</a:t>
+              <a:t>07 / 24</a:t>
             </a:r>
           </a:p>
         </p:txBody>
@@ -12962,7 +11935,7 @@
                 <a:latin typeface="Noto Sans CJK SC"/>
                 <a:ea typeface="Noto Sans CJK SC"/>
               </a:rPr>
-              <a:t>电商运营：结果导向最好进</a:t>
+              <a:t>社群运营：最快的入行跳板</a:t>
             </a:r>
           </a:p>
         </p:txBody>
@@ -13001,7 +11974,7 @@
                 <a:latin typeface="Noto Sans CJK SC"/>
                 <a:ea typeface="Noto Sans CJK SC"/>
               </a:rPr>
-              <a:t>电商运营：结果导向最好进</a:t>
+              <a:t>社群运营：最快的入行跳板</a:t>
             </a:r>
           </a:p>
         </p:txBody>
@@ -13044,7 +12017,7 @@
                 <a:latin typeface="Noto Sans CJK SC"/>
                 <a:ea typeface="Noto Sans CJK SC"/>
               </a:rPr>
-              <a:t>学：B站电商课+商家后台学院</a:t>
+              <a:t>定位：维护用户关系促复购</a:t>
             </a:r>
           </a:p>
           <a:p>
@@ -13063,7 +12036,7 @@
                 <a:latin typeface="Noto Sans CJK SC"/>
                 <a:ea typeface="Noto Sans CJK SC"/>
               </a:rPr>
-              <a:t>练：帮小店上架优化10个商品</a:t>
+              <a:t>每天：群内答疑、发内容、办活动</a:t>
             </a:r>
           </a:p>
           <a:p>
@@ -13082,7 +12055,7 @@
                 <a:latin typeface="Noto Sans CJK SC"/>
                 <a:ea typeface="Noto Sans CJK SC"/>
               </a:rPr>
-              <a:t>简历关键词：GMV、ROI、转化率</a:t>
+              <a:t>核心：持续输出价值不是打杂</a:t>
             </a:r>
           </a:p>
           <a:p>
@@ -13101,7 +12074,7 @@
                 <a:latin typeface="Noto Sans CJK SC"/>
                 <a:ea typeface="Noto Sans CJK SC"/>
               </a:rPr>
-              <a:t>例：月销10万提到50万</a:t>
+              <a:t>技能：话术SOP、用户分层</a:t>
             </a:r>
           </a:p>
           <a:p>
@@ -13120,7 +12093,7 @@
                 <a:latin typeface="Noto Sans CJK SC"/>
                 <a:ea typeface="Noto Sans CJK SC"/>
               </a:rPr>
-              <a:t>例：广告ROI优化至1.8</a:t>
+              <a:t>适合：外向耐心、爱帮人解决问题</a:t>
             </a:r>
           </a:p>
           <a:p>
@@ -13139,7 +12112,7 @@
                 <a:latin typeface="Noto Sans CJK SC"/>
                 <a:ea typeface="Noto Sans CJK SC"/>
               </a:rPr>
-              <a:t>单双休普遍，谈offer要问清</a:t>
+              <a:t>策略：干1年转新媒体或电商</a:t>
             </a:r>
           </a:p>
         </p:txBody>
@@ -13178,7 +12151,7 @@
                 <a:latin typeface="Noto Sans CJK SC"/>
                 <a:ea typeface="Noto Sans CJK SC"/>
               </a:rPr>
-              <a:t>08 / 26</a:t>
+              <a:t>08 / 24</a:t>
             </a:r>
           </a:p>
         </p:txBody>
@@ -13502,7 +12475,7 @@
                 <a:latin typeface="Noto Sans CJK SC"/>
                 <a:ea typeface="Noto Sans CJK SC"/>
               </a:rPr>
-              <a:t>社群运营：最快的入行跳板</a:t>
+              <a:t>社群运营：三周就能上岗</a:t>
             </a:r>
           </a:p>
         </p:txBody>
@@ -13541,7 +12514,7 @@
                 <a:latin typeface="Noto Sans CJK SC"/>
                 <a:ea typeface="Noto Sans CJK SC"/>
               </a:rPr>
-              <a:t>社群运营：最快的入行跳板</a:t>
+              <a:t>社群运营：三周就能上岗</a:t>
             </a:r>
           </a:p>
         </p:txBody>
@@ -13584,7 +12557,7 @@
                 <a:latin typeface="Noto Sans CJK SC"/>
                 <a:ea typeface="Noto Sans CJK SC"/>
               </a:rPr>
-              <a:t>定位：维护用户关系促复购</a:t>
+              <a:t>学：B站入门课+拆解3个好社群</a:t>
             </a:r>
           </a:p>
           <a:p>
@@ -13603,7 +12576,7 @@
                 <a:latin typeface="Noto Sans CJK SC"/>
                 <a:ea typeface="Noto Sans CJK SC"/>
               </a:rPr>
-              <a:t>每天：群内答疑、发内容、办活动</a:t>
+              <a:t>练：自建30人兴趣群实操一周</a:t>
             </a:r>
           </a:p>
           <a:p>
@@ -13622,7 +12595,7 @@
                 <a:latin typeface="Noto Sans CJK SC"/>
                 <a:ea typeface="Noto Sans CJK SC"/>
               </a:rPr>
-              <a:t>核心：持续输出价值不是打杂</a:t>
+              <a:t>简历写：活跃、转化、裂变数据</a:t>
             </a:r>
           </a:p>
           <a:p>
@@ -13641,7 +12614,7 @@
                 <a:latin typeface="Noto Sans CJK SC"/>
                 <a:ea typeface="Noto Sans CJK SC"/>
               </a:rPr>
-              <a:t>技能：话术SOP、用户分层</a:t>
+              <a:t>例：社群活跃度提升35%</a:t>
             </a:r>
           </a:p>
           <a:p>
@@ -13660,7 +12633,7 @@
                 <a:latin typeface="Noto Sans CJK SC"/>
                 <a:ea typeface="Noto Sans CJK SC"/>
               </a:rPr>
-              <a:t>适合：外向耐心、爱帮人解决问题</a:t>
+              <a:t>例：裂变活动新增用户500+</a:t>
             </a:r>
           </a:p>
           <a:p>
@@ -13679,7 +12652,7 @@
                 <a:latin typeface="Noto Sans CJK SC"/>
                 <a:ea typeface="Noto Sans CJK SC"/>
               </a:rPr>
-              <a:t>策略：干1年转新媒体或电商</a:t>
+              <a:t>面试就讲你建群的真实打法</a:t>
             </a:r>
           </a:p>
         </p:txBody>
@@ -13718,7 +12691,7 @@
                 <a:latin typeface="Noto Sans CJK SC"/>
                 <a:ea typeface="Noto Sans CJK SC"/>
               </a:rPr>
-              <a:t>09 / 26</a:t>
+              <a:t>09 / 24</a:t>
             </a:r>
           </a:p>
         </p:txBody>
